--- a/docs/Woven-Hackathon-Pitch.pptx
+++ b/docs/Woven-Hackathon-Pitch.pptx
@@ -2,21 +2,21 @@
 <file path=ppt/presentation.xml><?xml version="1.0" encoding="utf-8"?>
 <p:presentation xmlns:p="http://schemas.openxmlformats.org/presentationml/2006/main">
   <p:sldMasterIdLst>
-    <p:sldMasterId xmlns:r="http://schemas.openxmlformats.org/officeDocument/2006/relationships" id="2147483648" r:id="Rb82f4fb37656493c"/>
+    <p:sldMasterId xmlns:r="http://schemas.openxmlformats.org/officeDocument/2006/relationships" id="2147483648" r:id="Rc93c364e42da464f"/>
   </p:sldMasterIdLst>
   <p:notesMasterIdLst>
-    <p:notesMasterId xmlns:r="http://schemas.openxmlformats.org/officeDocument/2006/relationships" r:id="Reaf217983c29466d"/>
+    <p:notesMasterId xmlns:r="http://schemas.openxmlformats.org/officeDocument/2006/relationships" r:id="Rfd85ba31c960496f"/>
   </p:notesMasterIdLst>
   <p:sldIdLst>
-    <p:sldId xmlns:r="http://schemas.openxmlformats.org/officeDocument/2006/relationships" id="256" r:id="R4f18ace45bbc4689"/>
-    <p:sldId xmlns:r="http://schemas.openxmlformats.org/officeDocument/2006/relationships" id="257" r:id="R2625f8c7e4f24e34"/>
-    <p:sldId xmlns:r="http://schemas.openxmlformats.org/officeDocument/2006/relationships" id="258" r:id="R8a24fbdd071e4538"/>
-    <p:sldId xmlns:r="http://schemas.openxmlformats.org/officeDocument/2006/relationships" id="259" r:id="R908bb7450eac4bba"/>
-    <p:sldId xmlns:r="http://schemas.openxmlformats.org/officeDocument/2006/relationships" id="260" r:id="R70abc0f91dd84462"/>
-    <p:sldId xmlns:r="http://schemas.openxmlformats.org/officeDocument/2006/relationships" id="261" r:id="R31ae825fc2ee4f35"/>
-    <p:sldId xmlns:r="http://schemas.openxmlformats.org/officeDocument/2006/relationships" id="262" r:id="R437c1b49705848ae"/>
-    <p:sldId xmlns:r="http://schemas.openxmlformats.org/officeDocument/2006/relationships" id="263" r:id="R8e187a183b1c4026"/>
-    <p:sldId xmlns:r="http://schemas.openxmlformats.org/officeDocument/2006/relationships" id="264" r:id="R40a1cb49afe94302"/>
+    <p:sldId xmlns:r="http://schemas.openxmlformats.org/officeDocument/2006/relationships" id="256" r:id="R8d254256f3bb4b72"/>
+    <p:sldId xmlns:r="http://schemas.openxmlformats.org/officeDocument/2006/relationships" id="257" r:id="R66c4ab50d04b4f23"/>
+    <p:sldId xmlns:r="http://schemas.openxmlformats.org/officeDocument/2006/relationships" id="258" r:id="Rfd11a6a7866746ae"/>
+    <p:sldId xmlns:r="http://schemas.openxmlformats.org/officeDocument/2006/relationships" id="259" r:id="R44109ed6262749a4"/>
+    <p:sldId xmlns:r="http://schemas.openxmlformats.org/officeDocument/2006/relationships" id="260" r:id="Re696fabd930c450c"/>
+    <p:sldId xmlns:r="http://schemas.openxmlformats.org/officeDocument/2006/relationships" id="261" r:id="R434d400806714b70"/>
+    <p:sldId xmlns:r="http://schemas.openxmlformats.org/officeDocument/2006/relationships" id="262" r:id="R121481306528463c"/>
+    <p:sldId xmlns:r="http://schemas.openxmlformats.org/officeDocument/2006/relationships" id="263" r:id="R134a87dca8a1473c"/>
+    <p:sldId xmlns:r="http://schemas.openxmlformats.org/officeDocument/2006/relationships" id="264" r:id="R6bc8eef9e20b4f03"/>
   </p:sldIdLst>
   <p:sldSz cx="15240000" cy="8572500"/>
   <p:notesSz cx="6858000" cy="9144000"/>
@@ -1293,7 +1293,7 @@
   </p:cSld>
   <p:clrMap bg1="lt1" tx1="dk1" bg2="lt2" tx2="dk2" accent1="accent1" accent2="accent2" accent3="accent3" accent4="accent4" accent5="accent5" accent6="accent6" hlink="hlink" folHlink="folHlink"/>
   <p:sldLayoutIdLst>
-    <p:sldLayoutId xmlns:r="http://schemas.openxmlformats.org/officeDocument/2006/relationships" id="2147483649" r:id="R9440987ace004395"/>
+    <p:sldLayoutId xmlns:r="http://schemas.openxmlformats.org/officeDocument/2006/relationships" id="2147483649" r:id="R63ea19c7d0164621"/>
   </p:sldLayoutIdLst>
   <p:txStyles>
     <p:titleStyle>
@@ -1841,7 +1841,7 @@
           <p:nvPr/>
         </p:nvPicPr>
         <p:blipFill>
-          <a:blip xmlns:r="http://schemas.openxmlformats.org/officeDocument/2006/relationships" xmlns:a="http://schemas.openxmlformats.org/drawingml/2006/main" r:embed="Rb8e4f870dca14ec2"/>
+          <a:blip xmlns:r="http://schemas.openxmlformats.org/officeDocument/2006/relationships" xmlns:a="http://schemas.openxmlformats.org/drawingml/2006/main" r:embed="R518f8e1e769543be"/>
           <a:srcRect xmlns:a="http://schemas.openxmlformats.org/drawingml/2006/main" l="0" t="0" r="0" b="0"/>
           <a:stretch xmlns:a="http://schemas.openxmlformats.org/drawingml/2006/main">
             <a:fillRect l="0" t="0" r="0" b="0"/>
@@ -1873,7 +1873,7 @@
     <p:bg>
       <p:bgPr>
         <a:solidFill xmlns:a="http://schemas.openxmlformats.org/drawingml/2006/main">
-          <a:srgbClr val="F0EADF"/>
+          <a:srgbClr val="F4EEE4"/>
         </a:solidFill>
       </p:bgPr>
     </p:bg>
@@ -1924,7 +1924,7 @@
               <a:buNone/>
               <a:defRPr sz="1350" b="1">
                 <a:solidFill>
-                  <a:srgbClr val="6F746F"/>
+                  <a:srgbClr val="6D7974"/>
                 </a:solidFill>
                 <a:latin typeface="Menlo"/>
                 <a:ea typeface="Menlo"/>
@@ -1934,7 +1934,7 @@
             <a:r>
               <a:rPr sz="1350" b="1">
                 <a:solidFill>
-                  <a:srgbClr val="6F746F"/>
+                  <a:srgbClr val="6D7974"/>
                 </a:solidFill>
                 <a:latin typeface="Menlo"/>
                 <a:ea typeface="Menlo"/>
@@ -1986,7 +1986,7 @@
               <a:buNone/>
               <a:defRPr sz="4650" b="1">
                 <a:solidFill>
-                  <a:srgbClr val="17231F"/>
+                  <a:srgbClr val="0E4B3B"/>
                 </a:solidFill>
                 <a:latin typeface="Georgia"/>
                 <a:ea typeface="Georgia"/>
@@ -1996,7 +1996,7 @@
             <a:r>
               <a:rPr sz="4650" b="1">
                 <a:solidFill>
-                  <a:srgbClr val="17231F"/>
+                  <a:srgbClr val="0E4B3B"/>
                 </a:solidFill>
                 <a:latin typeface="Georgia"/>
                 <a:ea typeface="Georgia"/>
@@ -2094,7 +2094,7 @@
           <a:noFill xmlns:a="http://schemas.openxmlformats.org/drawingml/2006/main"/>
           <a:ln xmlns:a="http://schemas.openxmlformats.org/drawingml/2006/main" w="47625">
             <a:solidFill>
-              <a:srgbClr val="FF6B45"/>
+              <a:srgbClr val="B7F522"/>
             </a:solidFill>
             <a:prstDash val="solid"/>
           </a:ln>
@@ -2138,7 +2138,7 @@
               <a:buNone/>
               <a:defRPr sz="1650" b="1">
                 <a:solidFill>
-                  <a:srgbClr val="6F746F"/>
+                  <a:srgbClr val="6D7974"/>
                 </a:solidFill>
                 <a:latin typeface="Menlo"/>
                 <a:ea typeface="Menlo"/>
@@ -2148,7 +2148,7 @@
             <a:r>
               <a:rPr sz="1650" b="1">
                 <a:solidFill>
-                  <a:srgbClr val="6F746F"/>
+                  <a:srgbClr val="6D7974"/>
                 </a:solidFill>
                 <a:latin typeface="Menlo"/>
                 <a:ea typeface="Menlo"/>
@@ -2197,7 +2197,7 @@
               <a:buNone/>
               <a:defRPr sz="2250" b="1">
                 <a:solidFill>
-                  <a:srgbClr val="17231F"/>
+                  <a:srgbClr val="0E4B3B"/>
                 </a:solidFill>
                 <a:latin typeface="Avenir Next"/>
                 <a:ea typeface="Avenir Next"/>
@@ -2207,7 +2207,7 @@
             <a:r>
               <a:rPr sz="2250" b="1">
                 <a:solidFill>
-                  <a:srgbClr val="17231F"/>
+                  <a:srgbClr val="0E4B3B"/>
                 </a:solidFill>
                 <a:latin typeface="Avenir Next"/>
                 <a:ea typeface="Avenir Next"/>
@@ -2259,7 +2259,7 @@
               <a:buNone/>
               <a:defRPr sz="1800">
                 <a:solidFill>
-                  <a:srgbClr val="6F746F"/>
+                  <a:srgbClr val="6D7974"/>
                 </a:solidFill>
                 <a:latin typeface="Avenir Next"/>
                 <a:ea typeface="Avenir Next"/>
@@ -2269,7 +2269,7 @@
             <a:r>
               <a:rPr sz="1800">
                 <a:solidFill>
-                  <a:srgbClr val="6F746F"/>
+                  <a:srgbClr val="6D7974"/>
                 </a:solidFill>
                 <a:latin typeface="Avenir Next"/>
                 <a:ea typeface="Avenir Next"/>
@@ -2349,7 +2349,7 @@
               <a:buNone/>
               <a:defRPr sz="1650" b="1">
                 <a:solidFill>
-                  <a:srgbClr val="6F746F"/>
+                  <a:srgbClr val="6D7974"/>
                 </a:solidFill>
                 <a:latin typeface="Menlo"/>
                 <a:ea typeface="Menlo"/>
@@ -2359,7 +2359,7 @@
             <a:r>
               <a:rPr sz="1650" b="1">
                 <a:solidFill>
-                  <a:srgbClr val="6F746F"/>
+                  <a:srgbClr val="6D7974"/>
                 </a:solidFill>
                 <a:latin typeface="Menlo"/>
                 <a:ea typeface="Menlo"/>
@@ -2408,7 +2408,7 @@
               <a:buNone/>
               <a:defRPr sz="2250" b="1">
                 <a:solidFill>
-                  <a:srgbClr val="17231F"/>
+                  <a:srgbClr val="0E4B3B"/>
                 </a:solidFill>
                 <a:latin typeface="Avenir Next"/>
                 <a:ea typeface="Avenir Next"/>
@@ -2418,7 +2418,7 @@
             <a:r>
               <a:rPr sz="2250" b="1">
                 <a:solidFill>
-                  <a:srgbClr val="17231F"/>
+                  <a:srgbClr val="0E4B3B"/>
                 </a:solidFill>
                 <a:latin typeface="Avenir Next"/>
                 <a:ea typeface="Avenir Next"/>
@@ -2470,7 +2470,7 @@
               <a:buNone/>
               <a:defRPr sz="1800">
                 <a:solidFill>
-                  <a:srgbClr val="6F746F"/>
+                  <a:srgbClr val="6D7974"/>
                 </a:solidFill>
                 <a:latin typeface="Avenir Next"/>
                 <a:ea typeface="Avenir Next"/>
@@ -2480,7 +2480,7 @@
             <a:r>
               <a:rPr sz="1800">
                 <a:solidFill>
-                  <a:srgbClr val="6F746F"/>
+                  <a:srgbClr val="6D7974"/>
                 </a:solidFill>
                 <a:latin typeface="Avenir Next"/>
                 <a:ea typeface="Avenir Next"/>
@@ -2560,7 +2560,7 @@
               <a:buNone/>
               <a:defRPr sz="1650" b="1">
                 <a:solidFill>
-                  <a:srgbClr val="6F746F"/>
+                  <a:srgbClr val="6D7974"/>
                 </a:solidFill>
                 <a:latin typeface="Menlo"/>
                 <a:ea typeface="Menlo"/>
@@ -2570,7 +2570,7 @@
             <a:r>
               <a:rPr sz="1650" b="1">
                 <a:solidFill>
-                  <a:srgbClr val="6F746F"/>
+                  <a:srgbClr val="6D7974"/>
                 </a:solidFill>
                 <a:latin typeface="Menlo"/>
                 <a:ea typeface="Menlo"/>
@@ -2619,7 +2619,7 @@
               <a:buNone/>
               <a:defRPr sz="2250" b="1">
                 <a:solidFill>
-                  <a:srgbClr val="17231F"/>
+                  <a:srgbClr val="0E4B3B"/>
                 </a:solidFill>
                 <a:latin typeface="Avenir Next"/>
                 <a:ea typeface="Avenir Next"/>
@@ -2629,7 +2629,7 @@
             <a:r>
               <a:rPr sz="2250" b="1">
                 <a:solidFill>
-                  <a:srgbClr val="17231F"/>
+                  <a:srgbClr val="0E4B3B"/>
                 </a:solidFill>
                 <a:latin typeface="Avenir Next"/>
                 <a:ea typeface="Avenir Next"/>
@@ -2681,7 +2681,7 @@
               <a:buNone/>
               <a:defRPr sz="1800">
                 <a:solidFill>
-                  <a:srgbClr val="6F746F"/>
+                  <a:srgbClr val="6D7974"/>
                 </a:solidFill>
                 <a:latin typeface="Avenir Next"/>
                 <a:ea typeface="Avenir Next"/>
@@ -2691,7 +2691,7 @@
             <a:r>
               <a:rPr sz="1800">
                 <a:solidFill>
-                  <a:srgbClr val="6F746F"/>
+                  <a:srgbClr val="6D7974"/>
                 </a:solidFill>
                 <a:latin typeface="Avenir Next"/>
                 <a:ea typeface="Avenir Next"/>
@@ -2740,7 +2740,7 @@
               <a:buNone/>
               <a:defRPr sz="1200" b="1">
                 <a:solidFill>
-                  <a:srgbClr val="6F746F"/>
+                  <a:srgbClr val="6D7974"/>
                 </a:solidFill>
                 <a:latin typeface="Menlo"/>
                 <a:ea typeface="Menlo"/>
@@ -2750,7 +2750,7 @@
             <a:r>
               <a:rPr sz="1200" b="1">
                 <a:solidFill>
-                  <a:srgbClr val="6F746F"/>
+                  <a:srgbClr val="6D7974"/>
                 </a:solidFill>
                 <a:latin typeface="Menlo"/>
                 <a:ea typeface="Menlo"/>
@@ -2799,7 +2799,7 @@
               <a:buNone/>
               <a:defRPr sz="1350" b="1">
                 <a:solidFill>
-                  <a:srgbClr val="6F746F"/>
+                  <a:srgbClr val="6D7974"/>
                 </a:solidFill>
                 <a:latin typeface="Menlo"/>
                 <a:ea typeface="Menlo"/>
@@ -2809,7 +2809,7 @@
             <a:r>
               <a:rPr sz="1350" b="1">
                 <a:solidFill>
-                  <a:srgbClr val="6F746F"/>
+                  <a:srgbClr val="6D7974"/>
                 </a:solidFill>
                 <a:latin typeface="Menlo"/>
                 <a:ea typeface="Menlo"/>
@@ -2836,7 +2836,7 @@
     <p:bg>
       <p:bgPr>
         <a:solidFill xmlns:a="http://schemas.openxmlformats.org/drawingml/2006/main">
-          <a:srgbClr val="17231F"/>
+          <a:srgbClr val="0E4B3B"/>
         </a:solidFill>
       </p:bgPr>
     </p:bg>
@@ -2887,7 +2887,7 @@
               <a:buNone/>
               <a:defRPr sz="1350" b="1">
                 <a:solidFill>
-                  <a:srgbClr val="FF6B45"/>
+                  <a:srgbClr val="B7F522"/>
                 </a:solidFill>
                 <a:latin typeface="Menlo"/>
                 <a:ea typeface="Menlo"/>
@@ -2897,7 +2897,7 @@
             <a:r>
               <a:rPr sz="1350" b="1">
                 <a:solidFill>
-                  <a:srgbClr val="FF6B45"/>
+                  <a:srgbClr val="B7F522"/>
                 </a:solidFill>
                 <a:latin typeface="Menlo"/>
                 <a:ea typeface="Menlo"/>
@@ -3077,7 +3077,7 @@
             <a:avLst/>
           </a:prstGeom>
           <a:solidFill xmlns:a="http://schemas.openxmlformats.org/drawingml/2006/main">
-            <a:srgbClr val="FF6B45"/>
+            <a:srgbClr val="B7F522"/>
           </a:solidFill>
           <a:ln xmlns:a="http://schemas.openxmlformats.org/drawingml/2006/main" w="0">
             <a:noFill/>
@@ -3123,7 +3123,7 @@
               <a:buNone/>
               <a:defRPr sz="1125" b="1">
                 <a:solidFill>
-                  <a:srgbClr val="A4B5AE"/>
+                  <a:srgbClr val="DCECE5"/>
                 </a:solidFill>
                 <a:latin typeface="Menlo"/>
                 <a:ea typeface="Menlo"/>
@@ -3133,7 +3133,7 @@
             <a:r>
               <a:rPr sz="1125" b="1">
                 <a:solidFill>
-                  <a:srgbClr val="A4B5AE"/>
+                  <a:srgbClr val="DCECE5"/>
                 </a:solidFill>
                 <a:latin typeface="Menlo"/>
                 <a:ea typeface="Menlo"/>
@@ -3241,7 +3241,7 @@
               <a:buNone/>
               <a:defRPr sz="1125" b="1">
                 <a:solidFill>
-                  <a:srgbClr val="A4B5AE"/>
+                  <a:srgbClr val="DCECE5"/>
                 </a:solidFill>
                 <a:latin typeface="Menlo"/>
                 <a:ea typeface="Menlo"/>
@@ -3251,7 +3251,7 @@
             <a:r>
               <a:rPr sz="1125" b="1">
                 <a:solidFill>
-                  <a:srgbClr val="A4B5AE"/>
+                  <a:srgbClr val="DCECE5"/>
                 </a:solidFill>
                 <a:latin typeface="Menlo"/>
                 <a:ea typeface="Menlo"/>
@@ -3359,7 +3359,7 @@
               <a:buNone/>
               <a:defRPr sz="1125" b="1">
                 <a:solidFill>
-                  <a:srgbClr val="A4B5AE"/>
+                  <a:srgbClr val="DCECE5"/>
                 </a:solidFill>
                 <a:latin typeface="Menlo"/>
                 <a:ea typeface="Menlo"/>
@@ -3369,7 +3369,7 @@
             <a:r>
               <a:rPr sz="1125" b="1">
                 <a:solidFill>
-                  <a:srgbClr val="A4B5AE"/>
+                  <a:srgbClr val="DCECE5"/>
                 </a:solidFill>
                 <a:latin typeface="Menlo"/>
                 <a:ea typeface="Menlo"/>
@@ -3477,7 +3477,7 @@
               <a:buNone/>
               <a:defRPr sz="1125" b="1">
                 <a:solidFill>
-                  <a:srgbClr val="A4B5AE"/>
+                  <a:srgbClr val="DCECE5"/>
                 </a:solidFill>
                 <a:latin typeface="Menlo"/>
                 <a:ea typeface="Menlo"/>
@@ -3487,7 +3487,7 @@
             <a:r>
               <a:rPr sz="1125" b="1">
                 <a:solidFill>
-                  <a:srgbClr val="A4B5AE"/>
+                  <a:srgbClr val="DCECE5"/>
                 </a:solidFill>
                 <a:latin typeface="Menlo"/>
                 <a:ea typeface="Menlo"/>
@@ -3595,7 +3595,7 @@
               <a:buNone/>
               <a:defRPr sz="2100" b="1">
                 <a:solidFill>
-                  <a:srgbClr val="FF6B45"/>
+                  <a:srgbClr val="B7F522"/>
                 </a:solidFill>
                 <a:latin typeface="Menlo"/>
                 <a:ea typeface="Menlo"/>
@@ -3605,7 +3605,7 @@
             <a:r>
               <a:rPr sz="2100" b="1">
                 <a:solidFill>
-                  <a:srgbClr val="FF6B45"/>
+                  <a:srgbClr val="B7F522"/>
                 </a:solidFill>
                 <a:latin typeface="Menlo"/>
                 <a:ea typeface="Menlo"/>
@@ -3654,7 +3654,7 @@
               <a:buNone/>
               <a:defRPr sz="1200" b="1">
                 <a:solidFill>
-                  <a:srgbClr val="A4B5AE"/>
+                  <a:srgbClr val="DCECE5"/>
                 </a:solidFill>
                 <a:latin typeface="Menlo"/>
                 <a:ea typeface="Menlo"/>
@@ -3664,7 +3664,7 @@
             <a:r>
               <a:rPr sz="1200" b="1">
                 <a:solidFill>
-                  <a:srgbClr val="A4B5AE"/>
+                  <a:srgbClr val="DCECE5"/>
                 </a:solidFill>
                 <a:latin typeface="Menlo"/>
                 <a:ea typeface="Menlo"/>
@@ -3713,7 +3713,7 @@
               <a:buNone/>
               <a:defRPr sz="1350" b="1">
                 <a:solidFill>
-                  <a:srgbClr val="A4B5AE"/>
+                  <a:srgbClr val="DCECE5"/>
                 </a:solidFill>
                 <a:latin typeface="Menlo"/>
                 <a:ea typeface="Menlo"/>
@@ -3723,7 +3723,7 @@
             <a:r>
               <a:rPr sz="1350" b="1">
                 <a:solidFill>
-                  <a:srgbClr val="A4B5AE"/>
+                  <a:srgbClr val="DCECE5"/>
                 </a:solidFill>
                 <a:latin typeface="Menlo"/>
                 <a:ea typeface="Menlo"/>
@@ -3750,7 +3750,7 @@
     <p:bg>
       <p:bgPr>
         <a:solidFill xmlns:a="http://schemas.openxmlformats.org/drawingml/2006/main">
-          <a:srgbClr val="F0EADF"/>
+          <a:srgbClr val="F4EEE4"/>
         </a:solidFill>
       </p:bgPr>
     </p:bg>
@@ -3801,7 +3801,7 @@
               <a:buNone/>
               <a:defRPr sz="1350" b="1">
                 <a:solidFill>
-                  <a:srgbClr val="6F746F"/>
+                  <a:srgbClr val="6D7974"/>
                 </a:solidFill>
                 <a:latin typeface="Menlo"/>
                 <a:ea typeface="Menlo"/>
@@ -3811,7 +3811,7 @@
             <a:r>
               <a:rPr sz="1350" b="1">
                 <a:solidFill>
-                  <a:srgbClr val="6F746F"/>
+                  <a:srgbClr val="6D7974"/>
                 </a:solidFill>
                 <a:latin typeface="Menlo"/>
                 <a:ea typeface="Menlo"/>
@@ -3863,7 +3863,7 @@
               <a:buNone/>
               <a:defRPr sz="4650" b="1">
                 <a:solidFill>
-                  <a:srgbClr val="17231F"/>
+                  <a:srgbClr val="0E4B3B"/>
                 </a:solidFill>
                 <a:latin typeface="Georgia"/>
                 <a:ea typeface="Georgia"/>
@@ -3873,7 +3873,7 @@
             <a:r>
               <a:rPr sz="4650" b="1">
                 <a:solidFill>
-                  <a:srgbClr val="17231F"/>
+                  <a:srgbClr val="0E4B3B"/>
                 </a:solidFill>
                 <a:latin typeface="Georgia"/>
                 <a:ea typeface="Georgia"/>
@@ -3922,7 +3922,7 @@
               <a:buNone/>
               <a:defRPr sz="4350" b="1">
                 <a:solidFill>
-                  <a:srgbClr val="17231F"/>
+                  <a:srgbClr val="0E4B3B"/>
                 </a:solidFill>
                 <a:latin typeface="Georgia"/>
                 <a:ea typeface="Georgia"/>
@@ -3932,7 +3932,7 @@
             <a:r>
               <a:rPr sz="4350" b="1">
                 <a:solidFill>
-                  <a:srgbClr val="17231F"/>
+                  <a:srgbClr val="0E4B3B"/>
                 </a:solidFill>
                 <a:latin typeface="Georgia"/>
                 <a:ea typeface="Georgia"/>
@@ -3981,7 +3981,7 @@
               <a:buNone/>
               <a:defRPr sz="1800">
                 <a:solidFill>
-                  <a:srgbClr val="6F746F"/>
+                  <a:srgbClr val="6D7974"/>
                 </a:solidFill>
                 <a:latin typeface="Avenir Next"/>
                 <a:ea typeface="Avenir Next"/>
@@ -3991,7 +3991,7 @@
             <a:r>
               <a:rPr sz="1800">
                 <a:solidFill>
-                  <a:srgbClr val="6F746F"/>
+                  <a:srgbClr val="6D7974"/>
                 </a:solidFill>
                 <a:latin typeface="Avenir Next"/>
                 <a:ea typeface="Avenir Next"/>
@@ -4040,7 +4040,7 @@
               <a:buNone/>
               <a:defRPr sz="4350" b="1">
                 <a:solidFill>
-                  <a:srgbClr val="17231F"/>
+                  <a:srgbClr val="0E4B3B"/>
                 </a:solidFill>
                 <a:latin typeface="Georgia"/>
                 <a:ea typeface="Georgia"/>
@@ -4050,7 +4050,7 @@
             <a:r>
               <a:rPr sz="4350" b="1">
                 <a:solidFill>
-                  <a:srgbClr val="17231F"/>
+                  <a:srgbClr val="0E4B3B"/>
                 </a:solidFill>
                 <a:latin typeface="Georgia"/>
                 <a:ea typeface="Georgia"/>
@@ -4099,7 +4099,7 @@
               <a:buNone/>
               <a:defRPr sz="1800">
                 <a:solidFill>
-                  <a:srgbClr val="6F746F"/>
+                  <a:srgbClr val="6D7974"/>
                 </a:solidFill>
                 <a:latin typeface="Avenir Next"/>
                 <a:ea typeface="Avenir Next"/>
@@ -4109,7 +4109,7 @@
             <a:r>
               <a:rPr sz="1800">
                 <a:solidFill>
-                  <a:srgbClr val="6F746F"/>
+                  <a:srgbClr val="6D7974"/>
                 </a:solidFill>
                 <a:latin typeface="Avenir Next"/>
                 <a:ea typeface="Avenir Next"/>
@@ -4217,7 +4217,7 @@
               <a:buNone/>
               <a:defRPr sz="1800">
                 <a:solidFill>
-                  <a:srgbClr val="6F746F"/>
+                  <a:srgbClr val="6D7974"/>
                 </a:solidFill>
                 <a:latin typeface="Avenir Next"/>
                 <a:ea typeface="Avenir Next"/>
@@ -4227,7 +4227,7 @@
             <a:r>
               <a:rPr sz="1800">
                 <a:solidFill>
-                  <a:srgbClr val="6F746F"/>
+                  <a:srgbClr val="6D7974"/>
                 </a:solidFill>
                 <a:latin typeface="Avenir Next"/>
                 <a:ea typeface="Avenir Next"/>
@@ -4286,7 +4286,7 @@
           <p:nvPr/>
         </p:nvPicPr>
         <p:blipFill>
-          <a:blip xmlns:r="http://schemas.openxmlformats.org/officeDocument/2006/relationships" xmlns:a="http://schemas.openxmlformats.org/drawingml/2006/main" r:embed="R6c44a7b0ae5b4b19"/>
+          <a:blip xmlns:r="http://schemas.openxmlformats.org/officeDocument/2006/relationships" xmlns:a="http://schemas.openxmlformats.org/drawingml/2006/main" r:embed="R3a3f835612ee409b"/>
           <a:stretch xmlns:a="http://schemas.openxmlformats.org/drawingml/2006/main"/>
         </p:blipFill>
         <p:spPr>
@@ -4337,7 +4337,7 @@
               <a:buNone/>
               <a:defRPr sz="1200" b="1">
                 <a:solidFill>
-                  <a:srgbClr val="6F746F"/>
+                  <a:srgbClr val="6D7974"/>
                 </a:solidFill>
                 <a:latin typeface="Menlo"/>
                 <a:ea typeface="Menlo"/>
@@ -4347,7 +4347,7 @@
             <a:r>
               <a:rPr sz="1200" b="1">
                 <a:solidFill>
-                  <a:srgbClr val="6F746F"/>
+                  <a:srgbClr val="6D7974"/>
                 </a:solidFill>
                 <a:latin typeface="Menlo"/>
                 <a:ea typeface="Menlo"/>
@@ -4396,7 +4396,7 @@
               <a:buNone/>
               <a:defRPr sz="1350" b="1">
                 <a:solidFill>
-                  <a:srgbClr val="6F746F"/>
+                  <a:srgbClr val="6D7974"/>
                 </a:solidFill>
                 <a:latin typeface="Menlo"/>
                 <a:ea typeface="Menlo"/>
@@ -4406,7 +4406,7 @@
             <a:r>
               <a:rPr sz="1350" b="1">
                 <a:solidFill>
-                  <a:srgbClr val="6F746F"/>
+                  <a:srgbClr val="6D7974"/>
                 </a:solidFill>
                 <a:latin typeface="Menlo"/>
                 <a:ea typeface="Menlo"/>
@@ -4448,7 +4448,7 @@
           <p:nvPr/>
         </p:nvPicPr>
         <p:blipFill>
-          <a:blip xmlns:r="http://schemas.openxmlformats.org/officeDocument/2006/relationships" xmlns:a="http://schemas.openxmlformats.org/drawingml/2006/main" r:embed="R237701425c0e481e"/>
+          <a:blip xmlns:r="http://schemas.openxmlformats.org/officeDocument/2006/relationships" xmlns:a="http://schemas.openxmlformats.org/drawingml/2006/main" r:embed="Raa545504ff6c40b8"/>
           <a:srcRect xmlns:a="http://schemas.openxmlformats.org/drawingml/2006/main" l="0" t="0" r="0" b="0"/>
           <a:stretch xmlns:a="http://schemas.openxmlformats.org/drawingml/2006/main">
             <a:fillRect l="0" t="0" r="0" b="0"/>
@@ -4480,7 +4480,7 @@
     <p:bg>
       <p:bgPr>
         <a:solidFill xmlns:a="http://schemas.openxmlformats.org/drawingml/2006/main">
-          <a:srgbClr val="F0EADF"/>
+          <a:srgbClr val="F4EEE4"/>
         </a:solidFill>
       </p:bgPr>
     </p:bg>
@@ -4531,7 +4531,7 @@
               <a:buNone/>
               <a:defRPr sz="1350" b="1">
                 <a:solidFill>
-                  <a:srgbClr val="6F746F"/>
+                  <a:srgbClr val="6D7974"/>
                 </a:solidFill>
                 <a:latin typeface="Menlo"/>
                 <a:ea typeface="Menlo"/>
@@ -4541,7 +4541,7 @@
             <a:r>
               <a:rPr sz="1350" b="1">
                 <a:solidFill>
-                  <a:srgbClr val="6F746F"/>
+                  <a:srgbClr val="6D7974"/>
                 </a:solidFill>
                 <a:latin typeface="Menlo"/>
                 <a:ea typeface="Menlo"/>
@@ -4593,7 +4593,7 @@
               <a:buNone/>
               <a:defRPr sz="4650" b="1">
                 <a:solidFill>
-                  <a:srgbClr val="17231F"/>
+                  <a:srgbClr val="0E4B3B"/>
                 </a:solidFill>
                 <a:latin typeface="Georgia"/>
                 <a:ea typeface="Georgia"/>
@@ -4603,7 +4603,7 @@
             <a:r>
               <a:rPr sz="4650" b="1">
                 <a:solidFill>
-                  <a:srgbClr val="17231F"/>
+                  <a:srgbClr val="0E4B3B"/>
                 </a:solidFill>
                 <a:latin typeface="Georgia"/>
                 <a:ea typeface="Georgia"/>
@@ -4655,7 +4655,7 @@
               <a:buNone/>
               <a:defRPr sz="3150" b="1">
                 <a:solidFill>
-                  <a:srgbClr val="17231F"/>
+                  <a:srgbClr val="0E4B3B"/>
                 </a:solidFill>
                 <a:latin typeface="Georgia"/>
                 <a:ea typeface="Georgia"/>
@@ -4665,7 +4665,7 @@
             <a:r>
               <a:rPr sz="3150" b="1">
                 <a:solidFill>
-                  <a:srgbClr val="17231F"/>
+                  <a:srgbClr val="0E4B3B"/>
                 </a:solidFill>
                 <a:latin typeface="Georgia"/>
                 <a:ea typeface="Georgia"/>
@@ -4682,7 +4682,7 @@
               <a:buNone/>
               <a:defRPr sz="3150" b="1">
                 <a:solidFill>
-                  <a:srgbClr val="17231F"/>
+                  <a:srgbClr val="0E4B3B"/>
                 </a:solidFill>
                 <a:latin typeface="Georgia"/>
                 <a:ea typeface="Georgia"/>
@@ -4692,7 +4692,7 @@
             <a:r>
               <a:rPr sz="3150" b="1">
                 <a:solidFill>
-                  <a:srgbClr val="17231F"/>
+                  <a:srgbClr val="0E4B3B"/>
                 </a:solidFill>
                 <a:latin typeface="Georgia"/>
                 <a:ea typeface="Georgia"/>
@@ -4728,7 +4728,7 @@
             </a:avLst>
           </a:prstGeom>
           <a:solidFill xmlns:a="http://schemas.openxmlformats.org/drawingml/2006/main">
-            <a:srgbClr val="1434CB"/>
+            <a:srgbClr val="1545E8"/>
           </a:solidFill>
           <a:ln xmlns:a="http://schemas.openxmlformats.org/drawingml/2006/main" w="0">
             <a:noFill/>
@@ -4836,7 +4836,7 @@
               <a:buNone/>
               <a:defRPr sz="1800">
                 <a:solidFill>
-                  <a:srgbClr val="6F746F"/>
+                  <a:srgbClr val="6D7974"/>
                 </a:solidFill>
                 <a:latin typeface="Avenir Next"/>
                 <a:ea typeface="Avenir Next"/>
@@ -4846,7 +4846,7 @@
             <a:r>
               <a:rPr sz="1800">
                 <a:solidFill>
-                  <a:srgbClr val="6F746F"/>
+                  <a:srgbClr val="6D7974"/>
                 </a:solidFill>
                 <a:latin typeface="Avenir Next"/>
                 <a:ea typeface="Avenir Next"/>
@@ -4905,7 +4905,7 @@
           <p:nvPr/>
         </p:nvPicPr>
         <p:blipFill>
-          <a:blip xmlns:r="http://schemas.openxmlformats.org/officeDocument/2006/relationships" xmlns:a="http://schemas.openxmlformats.org/drawingml/2006/main" r:embed="R7f0414c3ab474154"/>
+          <a:blip xmlns:r="http://schemas.openxmlformats.org/officeDocument/2006/relationships" xmlns:a="http://schemas.openxmlformats.org/drawingml/2006/main" r:embed="R13b74459dc7b44eb"/>
           <a:stretch xmlns:a="http://schemas.openxmlformats.org/drawingml/2006/main"/>
         </p:blipFill>
         <p:spPr>
@@ -4956,7 +4956,7 @@
               <a:buNone/>
               <a:defRPr sz="1200" b="1">
                 <a:solidFill>
-                  <a:srgbClr val="6F746F"/>
+                  <a:srgbClr val="6D7974"/>
                 </a:solidFill>
                 <a:latin typeface="Menlo"/>
                 <a:ea typeface="Menlo"/>
@@ -4966,7 +4966,7 @@
             <a:r>
               <a:rPr sz="1200" b="1">
                 <a:solidFill>
-                  <a:srgbClr val="6F746F"/>
+                  <a:srgbClr val="6D7974"/>
                 </a:solidFill>
                 <a:latin typeface="Menlo"/>
                 <a:ea typeface="Menlo"/>
@@ -5015,7 +5015,7 @@
               <a:buNone/>
               <a:defRPr sz="1350" b="1">
                 <a:solidFill>
-                  <a:srgbClr val="6F746F"/>
+                  <a:srgbClr val="6D7974"/>
                 </a:solidFill>
                 <a:latin typeface="Menlo"/>
                 <a:ea typeface="Menlo"/>
@@ -5025,7 +5025,7 @@
             <a:r>
               <a:rPr sz="1350" b="1">
                 <a:solidFill>
-                  <a:srgbClr val="6F746F"/>
+                  <a:srgbClr val="6D7974"/>
                 </a:solidFill>
                 <a:latin typeface="Menlo"/>
                 <a:ea typeface="Menlo"/>
@@ -5052,7 +5052,7 @@
     <p:bg>
       <p:bgPr>
         <a:solidFill xmlns:a="http://schemas.openxmlformats.org/drawingml/2006/main">
-          <a:srgbClr val="17231F"/>
+          <a:srgbClr val="0E4B3B"/>
         </a:solidFill>
       </p:bgPr>
     </p:bg>
@@ -5103,7 +5103,7 @@
               <a:buNone/>
               <a:defRPr sz="1350" b="1">
                 <a:solidFill>
-                  <a:srgbClr val="FF6B45"/>
+                  <a:srgbClr val="B7F522"/>
                 </a:solidFill>
                 <a:latin typeface="Menlo"/>
                 <a:ea typeface="Menlo"/>
@@ -5113,7 +5113,7 @@
             <a:r>
               <a:rPr sz="1350" b="1">
                 <a:solidFill>
-                  <a:srgbClr val="FF6B45"/>
+                  <a:srgbClr val="B7F522"/>
                 </a:solidFill>
                 <a:latin typeface="Menlo"/>
                 <a:ea typeface="Menlo"/>
@@ -5224,7 +5224,7 @@
               <a:buNone/>
               <a:defRPr sz="1125" b="1">
                 <a:solidFill>
-                  <a:srgbClr val="FF6B45"/>
+                  <a:srgbClr val="B7F522"/>
                 </a:solidFill>
                 <a:latin typeface="Menlo"/>
                 <a:ea typeface="Menlo"/>
@@ -5234,7 +5234,7 @@
             <a:r>
               <a:rPr sz="1125" b="1">
                 <a:solidFill>
-                  <a:srgbClr val="FF6B45"/>
+                  <a:srgbClr val="B7F522"/>
                 </a:solidFill>
                 <a:latin typeface="Menlo"/>
                 <a:ea typeface="Menlo"/>
@@ -5342,7 +5342,7 @@
               <a:buNone/>
               <a:defRPr sz="1125" b="1">
                 <a:solidFill>
-                  <a:srgbClr val="FF6B45"/>
+                  <a:srgbClr val="B7F522"/>
                 </a:solidFill>
                 <a:latin typeface="Menlo"/>
                 <a:ea typeface="Menlo"/>
@@ -5352,7 +5352,7 @@
             <a:r>
               <a:rPr sz="1125" b="1">
                 <a:solidFill>
-                  <a:srgbClr val="FF6B45"/>
+                  <a:srgbClr val="B7F522"/>
                 </a:solidFill>
                 <a:latin typeface="Menlo"/>
                 <a:ea typeface="Menlo"/>
@@ -5460,7 +5460,7 @@
               <a:buNone/>
               <a:defRPr sz="1125" b="1">
                 <a:solidFill>
-                  <a:srgbClr val="FF6B45"/>
+                  <a:srgbClr val="B7F522"/>
                 </a:solidFill>
                 <a:latin typeface="Menlo"/>
                 <a:ea typeface="Menlo"/>
@@ -5470,7 +5470,7 @@
             <a:r>
               <a:rPr sz="1125" b="1">
                 <a:solidFill>
-                  <a:srgbClr val="FF6B45"/>
+                  <a:srgbClr val="B7F522"/>
                 </a:solidFill>
                 <a:latin typeface="Menlo"/>
                 <a:ea typeface="Menlo"/>
@@ -5578,7 +5578,7 @@
               <a:buNone/>
               <a:defRPr sz="1125" b="1">
                 <a:solidFill>
-                  <a:srgbClr val="FF6B45"/>
+                  <a:srgbClr val="B7F522"/>
                 </a:solidFill>
                 <a:latin typeface="Menlo"/>
                 <a:ea typeface="Menlo"/>
@@ -5588,7 +5588,7 @@
             <a:r>
               <a:rPr sz="1125" b="1">
                 <a:solidFill>
-                  <a:srgbClr val="FF6B45"/>
+                  <a:srgbClr val="B7F522"/>
                 </a:solidFill>
                 <a:latin typeface="Menlo"/>
                 <a:ea typeface="Menlo"/>
@@ -5706,7 +5706,7 @@
           <p:nvPr/>
         </p:nvPicPr>
         <p:blipFill>
-          <a:blip xmlns:r="http://schemas.openxmlformats.org/officeDocument/2006/relationships" xmlns:a="http://schemas.openxmlformats.org/drawingml/2006/main" r:embed="R0dc64458363143f5"/>
+          <a:blip xmlns:r="http://schemas.openxmlformats.org/officeDocument/2006/relationships" xmlns:a="http://schemas.openxmlformats.org/drawingml/2006/main" r:embed="R2fa4a6fe333c46ff"/>
           <a:stretch xmlns:a="http://schemas.openxmlformats.org/drawingml/2006/main"/>
         </p:blipFill>
         <p:spPr>
@@ -5760,7 +5760,7 @@
               <a:buNone/>
               <a:defRPr sz="1050" b="1">
                 <a:solidFill>
-                  <a:srgbClr val="A4B5AE"/>
+                  <a:srgbClr val="DCECE5"/>
                 </a:solidFill>
                 <a:latin typeface="Menlo"/>
                 <a:ea typeface="Menlo"/>
@@ -5770,7 +5770,7 @@
             <a:r>
               <a:rPr sz="1050" b="1">
                 <a:solidFill>
-                  <a:srgbClr val="A4B5AE"/>
+                  <a:srgbClr val="DCECE5"/>
                 </a:solidFill>
                 <a:latin typeface="Menlo"/>
                 <a:ea typeface="Menlo"/>
@@ -5787,7 +5787,7 @@
               <a:buNone/>
               <a:defRPr sz="1050" b="1">
                 <a:solidFill>
-                  <a:srgbClr val="A4B5AE"/>
+                  <a:srgbClr val="DCECE5"/>
                 </a:solidFill>
                 <a:latin typeface="Menlo"/>
                 <a:ea typeface="Menlo"/>
@@ -5797,7 +5797,7 @@
             <a:r>
               <a:rPr sz="1050" b="1">
                 <a:solidFill>
-                  <a:srgbClr val="A4B5AE"/>
+                  <a:srgbClr val="DCECE5"/>
                 </a:solidFill>
                 <a:latin typeface="Menlo"/>
                 <a:ea typeface="Menlo"/>
@@ -5846,7 +5846,7 @@
               <a:buNone/>
               <a:defRPr sz="1200" b="1">
                 <a:solidFill>
-                  <a:srgbClr val="A4B5AE"/>
+                  <a:srgbClr val="DCECE5"/>
                 </a:solidFill>
                 <a:latin typeface="Menlo"/>
                 <a:ea typeface="Menlo"/>
@@ -5856,7 +5856,7 @@
             <a:r>
               <a:rPr sz="1200" b="1">
                 <a:solidFill>
-                  <a:srgbClr val="A4B5AE"/>
+                  <a:srgbClr val="DCECE5"/>
                 </a:solidFill>
                 <a:latin typeface="Menlo"/>
                 <a:ea typeface="Menlo"/>
@@ -5905,7 +5905,7 @@
               <a:buNone/>
               <a:defRPr sz="1350" b="1">
                 <a:solidFill>
-                  <a:srgbClr val="A4B5AE"/>
+                  <a:srgbClr val="DCECE5"/>
                 </a:solidFill>
                 <a:latin typeface="Menlo"/>
                 <a:ea typeface="Menlo"/>
@@ -5915,7 +5915,7 @@
             <a:r>
               <a:rPr sz="1350" b="1">
                 <a:solidFill>
-                  <a:srgbClr val="A4B5AE"/>
+                  <a:srgbClr val="DCECE5"/>
                 </a:solidFill>
                 <a:latin typeface="Menlo"/>
                 <a:ea typeface="Menlo"/>
@@ -5942,7 +5942,7 @@
     <p:bg>
       <p:bgPr>
         <a:solidFill xmlns:a="http://schemas.openxmlformats.org/drawingml/2006/main">
-          <a:srgbClr val="F0EADF"/>
+          <a:srgbClr val="F4EEE4"/>
         </a:solidFill>
       </p:bgPr>
     </p:bg>
@@ -5993,7 +5993,7 @@
               <a:buNone/>
               <a:defRPr sz="1350" b="1">
                 <a:solidFill>
-                  <a:srgbClr val="6F746F"/>
+                  <a:srgbClr val="6D7974"/>
                 </a:solidFill>
                 <a:latin typeface="Menlo"/>
                 <a:ea typeface="Menlo"/>
@@ -6003,7 +6003,7 @@
             <a:r>
               <a:rPr sz="1350" b="1">
                 <a:solidFill>
-                  <a:srgbClr val="6F746F"/>
+                  <a:srgbClr val="6D7974"/>
                 </a:solidFill>
                 <a:latin typeface="Menlo"/>
                 <a:ea typeface="Menlo"/>
@@ -6055,7 +6055,7 @@
               <a:buNone/>
               <a:defRPr sz="4650" b="1">
                 <a:solidFill>
-                  <a:srgbClr val="17231F"/>
+                  <a:srgbClr val="0E4B3B"/>
                 </a:solidFill>
                 <a:latin typeface="Georgia"/>
                 <a:ea typeface="Georgia"/>
@@ -6065,7 +6065,7 @@
             <a:r>
               <a:rPr sz="4650" b="1">
                 <a:solidFill>
-                  <a:srgbClr val="17231F"/>
+                  <a:srgbClr val="0E4B3B"/>
                 </a:solidFill>
                 <a:latin typeface="Georgia"/>
                 <a:ea typeface="Georgia"/>
@@ -6114,7 +6114,7 @@
               <a:buNone/>
               <a:defRPr sz="1800" b="1">
                 <a:solidFill>
-                  <a:srgbClr val="6F746F"/>
+                  <a:srgbClr val="6D7974"/>
                 </a:solidFill>
                 <a:latin typeface="Menlo"/>
                 <a:ea typeface="Menlo"/>
@@ -6124,7 +6124,7 @@
             <a:r>
               <a:rPr sz="1800" b="1">
                 <a:solidFill>
-                  <a:srgbClr val="6F746F"/>
+                  <a:srgbClr val="6D7974"/>
                 </a:solidFill>
                 <a:latin typeface="Menlo"/>
                 <a:ea typeface="Menlo"/>
@@ -6160,7 +6160,7 @@
           <a:noFill xmlns:a="http://schemas.openxmlformats.org/drawingml/2006/main"/>
           <a:ln xmlns:a="http://schemas.openxmlformats.org/drawingml/2006/main" w="57150">
             <a:solidFill>
-              <a:srgbClr val="FF6B45"/>
+              <a:srgbClr val="B7F522"/>
             </a:solidFill>
             <a:prstDash val="solid"/>
           </a:ln>
@@ -6207,7 +6207,7 @@
               <a:buNone/>
               <a:defRPr sz="2550" b="1">
                 <a:solidFill>
-                  <a:srgbClr val="17231F"/>
+                  <a:srgbClr val="0E4B3B"/>
                 </a:solidFill>
                 <a:latin typeface="Georgia"/>
                 <a:ea typeface="Georgia"/>
@@ -6217,7 +6217,7 @@
             <a:r>
               <a:rPr sz="2550" b="1">
                 <a:solidFill>
-                  <a:srgbClr val="17231F"/>
+                  <a:srgbClr val="0E4B3B"/>
                 </a:solidFill>
                 <a:latin typeface="Georgia"/>
                 <a:ea typeface="Georgia"/>
@@ -6269,7 +6269,7 @@
               <a:buNone/>
               <a:defRPr sz="1800">
                 <a:solidFill>
-                  <a:srgbClr val="6F746F"/>
+                  <a:srgbClr val="6D7974"/>
                 </a:solidFill>
                 <a:latin typeface="Avenir Next"/>
                 <a:ea typeface="Avenir Next"/>
@@ -6279,7 +6279,7 @@
             <a:r>
               <a:rPr sz="1800">
                 <a:solidFill>
-                  <a:srgbClr val="6F746F"/>
+                  <a:srgbClr val="6D7974"/>
                 </a:solidFill>
                 <a:latin typeface="Avenir Next"/>
                 <a:ea typeface="Avenir Next"/>
@@ -6328,7 +6328,7 @@
               <a:buNone/>
               <a:defRPr sz="1800" b="1">
                 <a:solidFill>
-                  <a:srgbClr val="6F746F"/>
+                  <a:srgbClr val="6D7974"/>
                 </a:solidFill>
                 <a:latin typeface="Menlo"/>
                 <a:ea typeface="Menlo"/>
@@ -6338,7 +6338,7 @@
             <a:r>
               <a:rPr sz="1800" b="1">
                 <a:solidFill>
-                  <a:srgbClr val="6F746F"/>
+                  <a:srgbClr val="6D7974"/>
                 </a:solidFill>
                 <a:latin typeface="Menlo"/>
                 <a:ea typeface="Menlo"/>
@@ -6421,7 +6421,7 @@
               <a:buNone/>
               <a:defRPr sz="2550" b="1">
                 <a:solidFill>
-                  <a:srgbClr val="17231F"/>
+                  <a:srgbClr val="0E4B3B"/>
                 </a:solidFill>
                 <a:latin typeface="Georgia"/>
                 <a:ea typeface="Georgia"/>
@@ -6431,7 +6431,7 @@
             <a:r>
               <a:rPr sz="2550" b="1">
                 <a:solidFill>
-                  <a:srgbClr val="17231F"/>
+                  <a:srgbClr val="0E4B3B"/>
                 </a:solidFill>
                 <a:latin typeface="Georgia"/>
                 <a:ea typeface="Georgia"/>
@@ -6483,7 +6483,7 @@
               <a:buNone/>
               <a:defRPr sz="1800">
                 <a:solidFill>
-                  <a:srgbClr val="6F746F"/>
+                  <a:srgbClr val="6D7974"/>
                 </a:solidFill>
                 <a:latin typeface="Avenir Next"/>
                 <a:ea typeface="Avenir Next"/>
@@ -6493,7 +6493,7 @@
             <a:r>
               <a:rPr sz="1800">
                 <a:solidFill>
-                  <a:srgbClr val="6F746F"/>
+                  <a:srgbClr val="6D7974"/>
                 </a:solidFill>
                 <a:latin typeface="Avenir Next"/>
                 <a:ea typeface="Avenir Next"/>
@@ -6542,7 +6542,7 @@
               <a:buNone/>
               <a:defRPr sz="1800" b="1">
                 <a:solidFill>
-                  <a:srgbClr val="FF6B45"/>
+                  <a:srgbClr val="B7F522"/>
                 </a:solidFill>
                 <a:latin typeface="Menlo"/>
                 <a:ea typeface="Menlo"/>
@@ -6552,7 +6552,7 @@
             <a:r>
               <a:rPr sz="1800" b="1">
                 <a:solidFill>
-                  <a:srgbClr val="FF6B45"/>
+                  <a:srgbClr val="B7F522"/>
                 </a:solidFill>
                 <a:latin typeface="Menlo"/>
                 <a:ea typeface="Menlo"/>
@@ -6635,7 +6635,7 @@
               <a:buNone/>
               <a:defRPr sz="2550" b="1">
                 <a:solidFill>
-                  <a:srgbClr val="17231F"/>
+                  <a:srgbClr val="0E4B3B"/>
                 </a:solidFill>
                 <a:latin typeface="Georgia"/>
                 <a:ea typeface="Georgia"/>
@@ -6645,7 +6645,7 @@
             <a:r>
               <a:rPr sz="2550" b="1">
                 <a:solidFill>
-                  <a:srgbClr val="17231F"/>
+                  <a:srgbClr val="0E4B3B"/>
                 </a:solidFill>
                 <a:latin typeface="Georgia"/>
                 <a:ea typeface="Georgia"/>
@@ -6697,7 +6697,7 @@
               <a:buNone/>
               <a:defRPr sz="1800">
                 <a:solidFill>
-                  <a:srgbClr val="6F746F"/>
+                  <a:srgbClr val="6D7974"/>
                 </a:solidFill>
                 <a:latin typeface="Avenir Next"/>
                 <a:ea typeface="Avenir Next"/>
@@ -6707,7 +6707,7 @@
             <a:r>
               <a:rPr sz="1800">
                 <a:solidFill>
-                  <a:srgbClr val="6F746F"/>
+                  <a:srgbClr val="6D7974"/>
                 </a:solidFill>
                 <a:latin typeface="Avenir Next"/>
                 <a:ea typeface="Avenir Next"/>
@@ -6789,7 +6789,7 @@
               <a:buNone/>
               <a:defRPr sz="1950" b="1">
                 <a:solidFill>
-                  <a:srgbClr val="17231F"/>
+                  <a:srgbClr val="0E4B3B"/>
                 </a:solidFill>
                 <a:latin typeface="Avenir Next"/>
                 <a:ea typeface="Avenir Next"/>
@@ -6799,7 +6799,7 @@
             <a:r>
               <a:rPr sz="1950" b="1">
                 <a:solidFill>
-                  <a:srgbClr val="17231F"/>
+                  <a:srgbClr val="0E4B3B"/>
                 </a:solidFill>
                 <a:latin typeface="Avenir Next"/>
                 <a:ea typeface="Avenir Next"/>
@@ -6848,7 +6848,7 @@
               <a:buNone/>
               <a:defRPr sz="1200" b="1">
                 <a:solidFill>
-                  <a:srgbClr val="6F746F"/>
+                  <a:srgbClr val="6D7974"/>
                 </a:solidFill>
                 <a:latin typeface="Menlo"/>
                 <a:ea typeface="Menlo"/>
@@ -6858,7 +6858,7 @@
             <a:r>
               <a:rPr sz="1200" b="1">
                 <a:solidFill>
-                  <a:srgbClr val="6F746F"/>
+                  <a:srgbClr val="6D7974"/>
                 </a:solidFill>
                 <a:latin typeface="Menlo"/>
                 <a:ea typeface="Menlo"/>
@@ -6907,7 +6907,7 @@
               <a:buNone/>
               <a:defRPr sz="1350" b="1">
                 <a:solidFill>
-                  <a:srgbClr val="6F746F"/>
+                  <a:srgbClr val="6D7974"/>
                 </a:solidFill>
                 <a:latin typeface="Menlo"/>
                 <a:ea typeface="Menlo"/>
@@ -6917,7 +6917,7 @@
             <a:r>
               <a:rPr sz="1350" b="1">
                 <a:solidFill>
-                  <a:srgbClr val="6F746F"/>
+                  <a:srgbClr val="6D7974"/>
                 </a:solidFill>
                 <a:latin typeface="Menlo"/>
                 <a:ea typeface="Menlo"/>
@@ -6944,7 +6944,7 @@
     <p:bg>
       <p:bgPr>
         <a:solidFill xmlns:a="http://schemas.openxmlformats.org/drawingml/2006/main">
-          <a:srgbClr val="17231F"/>
+          <a:srgbClr val="0E4B3B"/>
         </a:solidFill>
       </p:bgPr>
     </p:bg>
@@ -6995,7 +6995,7 @@
               <a:buNone/>
               <a:defRPr sz="1350" b="1">
                 <a:solidFill>
-                  <a:srgbClr val="FF6B45"/>
+                  <a:srgbClr val="B7F522"/>
                 </a:solidFill>
                 <a:latin typeface="Menlo"/>
                 <a:ea typeface="Menlo"/>
@@ -7005,7 +7005,7 @@
             <a:r>
               <a:rPr sz="1350" b="1">
                 <a:solidFill>
-                  <a:srgbClr val="FF6B45"/>
+                  <a:srgbClr val="B7F522"/>
                 </a:solidFill>
                 <a:latin typeface="Menlo"/>
                 <a:ea typeface="Menlo"/>
@@ -7173,7 +7173,7 @@
               <a:buNone/>
               <a:defRPr sz="2100" b="1">
                 <a:solidFill>
-                  <a:srgbClr val="FF6B45"/>
+                  <a:srgbClr val="B7F522"/>
                 </a:solidFill>
                 <a:latin typeface="Avenir Next"/>
                 <a:ea typeface="Avenir Next"/>
@@ -7183,7 +7183,7 @@
             <a:r>
               <a:rPr sz="2100" b="1">
                 <a:solidFill>
-                  <a:srgbClr val="FF6B45"/>
+                  <a:srgbClr val="B7F522"/>
                 </a:solidFill>
                 <a:latin typeface="Avenir Next"/>
                 <a:ea typeface="Avenir Next"/>
@@ -7235,7 +7235,7 @@
               <a:buNone/>
               <a:defRPr sz="2025" b="1">
                 <a:solidFill>
-                  <a:srgbClr val="D8D0C4"/>
+                  <a:srgbClr val="DCECE5"/>
                 </a:solidFill>
                 <a:latin typeface="Menlo"/>
                 <a:ea typeface="Menlo"/>
@@ -7245,7 +7245,7 @@
             <a:r>
               <a:rPr sz="2025" b="1">
                 <a:solidFill>
-                  <a:srgbClr val="D8D0C4"/>
+                  <a:srgbClr val="DCECE5"/>
                 </a:solidFill>
                 <a:latin typeface="Menlo"/>
                 <a:ea typeface="Menlo"/>
@@ -7262,7 +7262,7 @@
               <a:buNone/>
               <a:defRPr sz="2025" b="1">
                 <a:solidFill>
-                  <a:srgbClr val="D8D0C4"/>
+                  <a:srgbClr val="DCECE5"/>
                 </a:solidFill>
                 <a:latin typeface="Menlo"/>
                 <a:ea typeface="Menlo"/>
@@ -7272,7 +7272,7 @@
             <a:r>
               <a:rPr sz="2025" b="1">
                 <a:solidFill>
-                  <a:srgbClr val="D8D0C4"/>
+                  <a:srgbClr val="DCECE5"/>
                 </a:solidFill>
                 <a:latin typeface="Menlo"/>
                 <a:ea typeface="Menlo"/>
@@ -7289,7 +7289,7 @@
               <a:buNone/>
               <a:defRPr sz="2025" b="1">
                 <a:solidFill>
-                  <a:srgbClr val="D8D0C4"/>
+                  <a:srgbClr val="DCECE5"/>
                 </a:solidFill>
                 <a:latin typeface="Menlo"/>
                 <a:ea typeface="Menlo"/>
@@ -7299,7 +7299,7 @@
             <a:r>
               <a:rPr sz="2025" b="1">
                 <a:solidFill>
-                  <a:srgbClr val="D8D0C4"/>
+                  <a:srgbClr val="DCECE5"/>
                 </a:solidFill>
                 <a:latin typeface="Menlo"/>
                 <a:ea typeface="Menlo"/>
@@ -7358,7 +7358,7 @@
           <p:nvPr/>
         </p:nvPicPr>
         <p:blipFill>
-          <a:blip xmlns:r="http://schemas.openxmlformats.org/officeDocument/2006/relationships" xmlns:a="http://schemas.openxmlformats.org/drawingml/2006/main" r:embed="Rc064fc1f5f3c430c"/>
+          <a:blip xmlns:r="http://schemas.openxmlformats.org/officeDocument/2006/relationships" xmlns:a="http://schemas.openxmlformats.org/drawingml/2006/main" r:embed="Rc63ab80ad15a43e0"/>
           <a:stretch xmlns:a="http://schemas.openxmlformats.org/drawingml/2006/main"/>
         </p:blipFill>
         <p:spPr>
@@ -7409,7 +7409,7 @@
               <a:buNone/>
               <a:defRPr sz="1200" b="1">
                 <a:solidFill>
-                  <a:srgbClr val="FF6B45"/>
+                  <a:srgbClr val="B7F522"/>
                 </a:solidFill>
                 <a:latin typeface="Menlo"/>
                 <a:ea typeface="Menlo"/>
@@ -7419,7 +7419,7 @@
             <a:r>
               <a:rPr sz="1200" b="1">
                 <a:solidFill>
-                  <a:srgbClr val="FF6B45"/>
+                  <a:srgbClr val="B7F522"/>
                 </a:solidFill>
                 <a:latin typeface="Menlo"/>
                 <a:ea typeface="Menlo"/>
@@ -7468,7 +7468,7 @@
               <a:buNone/>
               <a:defRPr sz="1200" b="1">
                 <a:solidFill>
-                  <a:srgbClr val="A4B5AE"/>
+                  <a:srgbClr val="DCECE5"/>
                 </a:solidFill>
                 <a:latin typeface="Menlo"/>
                 <a:ea typeface="Menlo"/>
@@ -7478,7 +7478,7 @@
             <a:r>
               <a:rPr sz="1200" b="1">
                 <a:solidFill>
-                  <a:srgbClr val="A4B5AE"/>
+                  <a:srgbClr val="DCECE5"/>
                 </a:solidFill>
                 <a:latin typeface="Menlo"/>
                 <a:ea typeface="Menlo"/>
@@ -7527,7 +7527,7 @@
               <a:buNone/>
               <a:defRPr sz="1350" b="1">
                 <a:solidFill>
-                  <a:srgbClr val="A4B5AE"/>
+                  <a:srgbClr val="DCECE5"/>
                 </a:solidFill>
                 <a:latin typeface="Menlo"/>
                 <a:ea typeface="Menlo"/>
@@ -7537,7 +7537,7 @@
             <a:r>
               <a:rPr sz="1350" b="1">
                 <a:solidFill>
-                  <a:srgbClr val="A4B5AE"/>
+                  <a:srgbClr val="DCECE5"/>
                 </a:solidFill>
                 <a:latin typeface="Menlo"/>
                 <a:ea typeface="Menlo"/>

--- a/docs/Woven-Hackathon-Pitch.pptx
+++ b/docs/Woven-Hackathon-Pitch.pptx
@@ -2,21 +2,23 @@
 <file path=ppt/presentation.xml><?xml version="1.0" encoding="utf-8"?>
 <p:presentation xmlns:p="http://schemas.openxmlformats.org/presentationml/2006/main">
   <p:sldMasterIdLst>
-    <p:sldMasterId xmlns:r="http://schemas.openxmlformats.org/officeDocument/2006/relationships" id="2147483648" r:id="Rc93c364e42da464f"/>
+    <p:sldMasterId xmlns:r="http://schemas.openxmlformats.org/officeDocument/2006/relationships" id="2147483648" r:id="Rfdd70b2d0eb640ea"/>
   </p:sldMasterIdLst>
   <p:notesMasterIdLst>
-    <p:notesMasterId xmlns:r="http://schemas.openxmlformats.org/officeDocument/2006/relationships" r:id="Rfd85ba31c960496f"/>
+    <p:notesMasterId xmlns:r="http://schemas.openxmlformats.org/officeDocument/2006/relationships" r:id="Rd94d24f1179f4038"/>
   </p:notesMasterIdLst>
   <p:sldIdLst>
-    <p:sldId xmlns:r="http://schemas.openxmlformats.org/officeDocument/2006/relationships" id="256" r:id="R8d254256f3bb4b72"/>
-    <p:sldId xmlns:r="http://schemas.openxmlformats.org/officeDocument/2006/relationships" id="257" r:id="R66c4ab50d04b4f23"/>
-    <p:sldId xmlns:r="http://schemas.openxmlformats.org/officeDocument/2006/relationships" id="258" r:id="Rfd11a6a7866746ae"/>
-    <p:sldId xmlns:r="http://schemas.openxmlformats.org/officeDocument/2006/relationships" id="259" r:id="R44109ed6262749a4"/>
-    <p:sldId xmlns:r="http://schemas.openxmlformats.org/officeDocument/2006/relationships" id="260" r:id="Re696fabd930c450c"/>
-    <p:sldId xmlns:r="http://schemas.openxmlformats.org/officeDocument/2006/relationships" id="261" r:id="R434d400806714b70"/>
-    <p:sldId xmlns:r="http://schemas.openxmlformats.org/officeDocument/2006/relationships" id="262" r:id="R121481306528463c"/>
-    <p:sldId xmlns:r="http://schemas.openxmlformats.org/officeDocument/2006/relationships" id="263" r:id="R134a87dca8a1473c"/>
-    <p:sldId xmlns:r="http://schemas.openxmlformats.org/officeDocument/2006/relationships" id="264" r:id="R6bc8eef9e20b4f03"/>
+    <p:sldId xmlns:r="http://schemas.openxmlformats.org/officeDocument/2006/relationships" id="256" r:id="R2bfccfe80b304a7c"/>
+    <p:sldId xmlns:r="http://schemas.openxmlformats.org/officeDocument/2006/relationships" id="257" r:id="R178dfa31bb7d4269"/>
+    <p:sldId xmlns:r="http://schemas.openxmlformats.org/officeDocument/2006/relationships" id="258" r:id="R56812137f54c4342"/>
+    <p:sldId xmlns:r="http://schemas.openxmlformats.org/officeDocument/2006/relationships" id="259" r:id="Rcce94e1e0fab4348"/>
+    <p:sldId xmlns:r="http://schemas.openxmlformats.org/officeDocument/2006/relationships" id="260" r:id="Rb77869934b2b4de1"/>
+    <p:sldId xmlns:r="http://schemas.openxmlformats.org/officeDocument/2006/relationships" id="261" r:id="R6ae9a51c77174f8f"/>
+    <p:sldId xmlns:r="http://schemas.openxmlformats.org/officeDocument/2006/relationships" id="262" r:id="R3f718b01b8784c59"/>
+    <p:sldId xmlns:r="http://schemas.openxmlformats.org/officeDocument/2006/relationships" id="263" r:id="R7ae926f952e241a5"/>
+    <p:sldId xmlns:r="http://schemas.openxmlformats.org/officeDocument/2006/relationships" id="264" r:id="Rb1696b5a38e04c10"/>
+    <p:sldId xmlns:r="http://schemas.openxmlformats.org/officeDocument/2006/relationships" id="265" r:id="Rf1ffd916467540e4"/>
+    <p:sldId xmlns:r="http://schemas.openxmlformats.org/officeDocument/2006/relationships" id="266" r:id="Rc7301704a3aa4726"/>
   </p:sldIdLst>
   <p:sldSz cx="15240000" cy="8572500"/>
   <p:notesSz cx="6858000" cy="9144000"/>
@@ -450,7 +452,7 @@
           <a:lstStyle xmlns:a="http://schemas.openxmlformats.org/drawingml/2006/main"/>
           <a:p xmlns:a="http://schemas.openxmlformats.org/drawingml/2006/main">
             <a:r>
-              <a:t>Someone flying tonight does not want forty adapter links. They want to know they are ready. Woven turns that mission into one complete cart and one exact confirmation.</a:t>
+              <a:t>Open with the core idea: shopping should start and finish in the conversation where the need was expressed. Woven turns one request into a complete cart, then keeps the final purchase visibly human.</a:t>
             </a:r>
           </a:p>
           <a:p xmlns:a="http://schemas.openxmlformats.org/drawingml/2006/main">
@@ -465,17 +467,202 @@
           </a:p>
           <a:p xmlns:a="http://schemas.openxmlformats.org/drawingml/2006/main">
             <a:r>
-              <a:t>- docs/assets/devpost/cover.png</a:t>
-            </a:r>
-          </a:p>
-          <a:p xmlns:a="http://schemas.openxmlformats.org/drawingml/2006/main">
-            <a:r>
-              <a:t>- docs/BRAND_GUIDE.md</a:t>
-            </a:r>
-          </a:p>
-          <a:p xmlns:a="http://schemas.openxmlformats.org/drawingml/2006/main">
-            <a:r>
-              <a:t>- docs/DEVPOST_SUBMISSION.md — 30-second pitch</a:t>
+              <a:t>- SCRIPT.md — Opening</a:t>
+            </a:r>
+          </a:p>
+          <a:p xmlns:a="http://schemas.openxmlformats.org/drawingml/2006/main">
+            <a:r>
+              <a:t>- docs/assets/screenshots/buyer-overview.png</a:t>
+            </a:r>
+          </a:p>
+          <a:p xmlns:a="http://schemas.openxmlformats.org/drawingml/2006/main">
+            <a:r>
+              <a:t>- docs/BRAND_GUIDE.md — Product voice and visual system</a:t>
+            </a:r>
+          </a:p>
+        </p:txBody>
+      </p:sp>
+      <p:sp>
+        <p:nvSpPr>
+          <p:cNvPr id="4" name="Slide Number Placeholder 3"/>
+          <p:cNvSpPr>
+            <a:spLocks xmlns:a="http://schemas.openxmlformats.org/drawingml/2006/main" noGrp="1"/>
+          </p:cNvSpPr>
+          <p:nvPr>
+            <p:ph type="sldNum" idx="5"/>
+          </p:nvPr>
+        </p:nvSpPr>
+        <p:spPr/>
+        <p:txBody>
+          <a:bodyPr xmlns:a="http://schemas.openxmlformats.org/drawingml/2006/main"/>
+          <a:lstStyle xmlns:a="http://schemas.openxmlformats.org/drawingml/2006/main"/>
+          <a:p xmlns:a="http://schemas.openxmlformats.org/drawingml/2006/main"/>
+        </p:txBody>
+      </p:sp>
+    </p:spTree>
+  </p:cSld>
+  <p:clrMapOvr>
+    <a:masterClrMapping xmlns:a="http://schemas.openxmlformats.org/drawingml/2006/main"/>
+  </p:clrMapOvr>
+</p:notes>
+</file>
+
+<file path=ppt/notesSlides/notesSlide10.xml><?xml version="1.0" encoding="utf-8"?>
+<p:notes xmlns:p="http://schemas.openxmlformats.org/presentationml/2006/main">
+  <p:cSld>
+    <p:spTree>
+      <p:nvGrpSpPr>
+        <p:cNvPr id="1" name=""/>
+        <p:cNvGrpSpPr/>
+        <p:nvPr/>
+      </p:nvGrpSpPr>
+      <p:grpSpPr>
+        <a:xfrm xmlns:a="http://schemas.openxmlformats.org/drawingml/2006/main"/>
+      </p:grpSpPr>
+      <p:sp>
+        <p:nvSpPr>
+          <p:cNvPr id="2" name="Slide Image Placeholder 1"/>
+          <p:cNvSpPr>
+            <a:spLocks xmlns:a="http://schemas.openxmlformats.org/drawingml/2006/main" noGrp="1"/>
+          </p:cNvSpPr>
+          <p:nvPr>
+            <p:ph type="sldImg" idx="0"/>
+          </p:nvPr>
+        </p:nvSpPr>
+        <p:spPr/>
+      </p:sp>
+      <p:sp>
+        <p:nvSpPr>
+          <p:cNvPr id="3" name="Notes Placeholder 2"/>
+          <p:cNvSpPr>
+            <a:spLocks xmlns:a="http://schemas.openxmlformats.org/drawingml/2006/main" noGrp="1"/>
+          </p:cNvSpPr>
+          <p:nvPr>
+            <p:ph type="body" idx="1"/>
+          </p:nvPr>
+        </p:nvSpPr>
+        <p:spPr/>
+        <p:txBody>
+          <a:bodyPr xmlns:a="http://schemas.openxmlformats.org/drawingml/2006/main"/>
+          <a:lstStyle xmlns:a="http://schemas.openxmlformats.org/drawingml/2006/main"/>
+          <a:p xmlns:a="http://schemas.openxmlformats.org/drawingml/2006/main">
+            <a:r>
+              <a:t>Use this in technical Q&amp;A. The ChatGPT or Codex host invokes Woven's MCP tools. The one-service backend owns cart construction, mandate binding, confirmation, order state and the simulated authorization adapter. The browser demo is a second transport over the same backend.</a:t>
+            </a:r>
+          </a:p>
+          <a:p xmlns:a="http://schemas.openxmlformats.org/drawingml/2006/main">
+            <a:r>
+              <a:t/>
+            </a:r>
+          </a:p>
+          <a:p xmlns:a="http://schemas.openxmlformats.org/drawingml/2006/main">
+            <a:r>
+              <a:t>[Sources]</a:t>
+            </a:r>
+          </a:p>
+          <a:p xmlns:a="http://schemas.openxmlformats.org/drawingml/2006/main">
+            <a:r>
+              <a:t>- docs/assets/devpost/woven-architecture.png</a:t>
+            </a:r>
+          </a:p>
+          <a:p xmlns:a="http://schemas.openxmlformats.org/drawingml/2006/main">
+            <a:r>
+              <a:t>- docs/architecture.md — System architecture and trust boundaries</a:t>
+            </a:r>
+          </a:p>
+        </p:txBody>
+      </p:sp>
+      <p:sp>
+        <p:nvSpPr>
+          <p:cNvPr id="4" name="Slide Number Placeholder 3"/>
+          <p:cNvSpPr>
+            <a:spLocks xmlns:a="http://schemas.openxmlformats.org/drawingml/2006/main" noGrp="1"/>
+          </p:cNvSpPr>
+          <p:nvPr>
+            <p:ph type="sldNum" idx="5"/>
+          </p:nvPr>
+        </p:nvSpPr>
+        <p:spPr/>
+        <p:txBody>
+          <a:bodyPr xmlns:a="http://schemas.openxmlformats.org/drawingml/2006/main"/>
+          <a:lstStyle xmlns:a="http://schemas.openxmlformats.org/drawingml/2006/main"/>
+          <a:p xmlns:a="http://schemas.openxmlformats.org/drawingml/2006/main"/>
+        </p:txBody>
+      </p:sp>
+    </p:spTree>
+  </p:cSld>
+  <p:clrMapOvr>
+    <a:masterClrMapping xmlns:a="http://schemas.openxmlformats.org/drawingml/2006/main"/>
+  </p:clrMapOvr>
+</p:notes>
+</file>
+
+<file path=ppt/notesSlides/notesSlide11.xml><?xml version="1.0" encoding="utf-8"?>
+<p:notes xmlns:p="http://schemas.openxmlformats.org/presentationml/2006/main">
+  <p:cSld>
+    <p:spTree>
+      <p:nvGrpSpPr>
+        <p:cNvPr id="1" name=""/>
+        <p:cNvGrpSpPr/>
+        <p:nvPr/>
+      </p:nvGrpSpPr>
+      <p:grpSpPr>
+        <a:xfrm xmlns:a="http://schemas.openxmlformats.org/drawingml/2006/main"/>
+      </p:grpSpPr>
+      <p:sp>
+        <p:nvSpPr>
+          <p:cNvPr id="2" name="Slide Image Placeholder 1"/>
+          <p:cNvSpPr>
+            <a:spLocks xmlns:a="http://schemas.openxmlformats.org/drawingml/2006/main" noGrp="1"/>
+          </p:cNvSpPr>
+          <p:nvPr>
+            <p:ph type="sldImg" idx="0"/>
+          </p:nvPr>
+        </p:nvSpPr>
+        <p:spPr/>
+      </p:sp>
+      <p:sp>
+        <p:nvSpPr>
+          <p:cNvPr id="3" name="Notes Placeholder 2"/>
+          <p:cNvSpPr>
+            <a:spLocks xmlns:a="http://schemas.openxmlformats.org/drawingml/2006/main" noGrp="1"/>
+          </p:cNvSpPr>
+          <p:nvPr>
+            <p:ph type="body" idx="1"/>
+          </p:nvPr>
+        </p:nvSpPr>
+        <p:spPr/>
+        <p:txBody>
+          <a:bodyPr xmlns:a="http://schemas.openxmlformats.org/drawingml/2006/main"/>
+          <a:lstStyle xmlns:a="http://schemas.openxmlformats.org/drawingml/2006/main"/>
+          <a:p xmlns:a="http://schemas.openxmlformats.org/drawingml/2006/main">
+            <a:r>
+              <a:t>Use this in trust and safety Q&amp;A. Current controls bind merchant, cart version, amount, expiry, nonce and idempotency key; recheck price and stock; keep the confirmation nonce outside model-visible tool arguments; and simulate reversals on downstream order failure. Identity is a planned pre-checkout control and is not implemented.</a:t>
+            </a:r>
+          </a:p>
+          <a:p xmlns:a="http://schemas.openxmlformats.org/drawingml/2006/main">
+            <a:r>
+              <a:t/>
+            </a:r>
+          </a:p>
+          <a:p xmlns:a="http://schemas.openxmlformats.org/drawingml/2006/main">
+            <a:r>
+              <a:t>[Sources]</a:t>
+            </a:r>
+          </a:p>
+          <a:p xmlns:a="http://schemas.openxmlformats.org/drawingml/2006/main">
+            <a:r>
+              <a:t>- docs/assets/devpost/woven-trust-boundary.png</a:t>
+            </a:r>
+          </a:p>
+          <a:p xmlns:a="http://schemas.openxmlformats.org/drawingml/2006/main">
+            <a:r>
+              <a:t>- docs/architecture.md — Mandate, confirmation and failure state machine</a:t>
+            </a:r>
+          </a:p>
+          <a:p xmlns:a="http://schemas.openxmlformats.org/drawingml/2006/main">
+            <a:r>
+              <a:t>- docs/PRD.md — Trust requirements</a:t>
             </a:r>
           </a:p>
         </p:txBody>
@@ -545,7 +732,7 @@
           <a:lstStyle xmlns:a="http://schemas.openxmlformats.org/drawingml/2006/main"/>
           <a:p xmlns:a="http://schemas.openxmlformats.org/drawingml/2006/main">
             <a:r>
-              <a:t>This is not simply a discovery problem. It is a mission-completion problem: one incompatible, unavailable or over-budget item makes every individually good recommendation useless.</a:t>
+              <a:t>Search can discover products, but the buyer still has to compare tabs, verify compatibility, reconstruct a single-store cart, and re-enter the decision at checkout. The friction is not finding an item; it is completing the mission.</a:t>
             </a:r>
           </a:p>
           <a:p xmlns:a="http://schemas.openxmlformats.org/drawingml/2006/main">
@@ -560,12 +747,12 @@
           </a:p>
           <a:p xmlns:a="http://schemas.openxmlformats.org/drawingml/2006/main">
             <a:r>
-              <a:t>- docs/PRD.md — Primary persona and functional requirements</a:t>
-            </a:r>
-          </a:p>
-          <a:p xmlns:a="http://schemas.openxmlformats.org/drawingml/2006/main">
-            <a:r>
-              <a:t>- docs/DEVPOST_SUBMISSION.md — Inspiration</a:t>
+              <a:t>- SCRIPT.md — The problem</a:t>
+            </a:r>
+          </a:p>
+          <a:p xmlns:a="http://schemas.openxmlformats.org/drawingml/2006/main">
+            <a:r>
+              <a:t>- docs/PRD.md — Primary persona and canonical mission</a:t>
             </a:r>
           </a:p>
         </p:txBody>
@@ -635,7 +822,7 @@
           <a:lstStyle xmlns:a="http://schemas.openxmlformats.org/drawingml/2006/main"/>
           <a:p xmlns:a="http://schemas.openxmlformats.org/drawingml/2006/main">
             <a:r>
-              <a:t>This request is difficult to express through search filters, but completely natural in ChatGPT or Codex. The conversation already contains the destination, devices, budget and deadline Woven needs.</a:t>
+              <a:t>The result is deliberately cart-level: one merchant and pickup point, four compatible components, S$133 total, and pickup today. Every item works with the others; the buyer does not have to rebuild the answer.</a:t>
             </a:r>
           </a:p>
           <a:p xmlns:a="http://schemas.openxmlformats.org/drawingml/2006/main">
@@ -650,12 +837,17 @@
           </a:p>
           <a:p xmlns:a="http://schemas.openxmlformats.org/drawingml/2006/main">
             <a:r>
-              <a:t>- docs/PRD.md — Canonical story</a:t>
-            </a:r>
-          </a:p>
-          <a:p xmlns:a="http://schemas.openxmlformats.org/drawingml/2006/main">
-            <a:r>
-              <a:t>- docs/HANDOVER.md — Canonical demo story</a:t>
+              <a:t>- SCRIPT.md — Product reveal</a:t>
+            </a:r>
+          </a:p>
+          <a:p xmlns:a="http://schemas.openxmlformats.org/drawingml/2006/main">
+            <a:r>
+              <a:t>- docs/assets/screenshots/buyer-overview.png</a:t>
+            </a:r>
+          </a:p>
+          <a:p xmlns:a="http://schemas.openxmlformats.org/drawingml/2006/main">
+            <a:r>
+              <a:t>- docs/PRD.md — Cart requirements</a:t>
             </a:r>
           </a:p>
         </p:txBody>
@@ -725,7 +917,7 @@
           <a:lstStyle xmlns:a="http://schemas.openxmlformats.org/drawingml/2006/main"/>
           <a:p xmlns:a="http://schemas.openxmlformats.org/drawingml/2006/main">
             <a:r>
-              <a:t>Woven does not rank loose products. It rejects incomplete or incompatible combinations, stays under the hard budget and returns one pickup location per cart with an explanation for every component.</a:t>
+              <a:t>Switch to the working app now. Use the canonical Tokyo request. Show the three complete carts, then open ByteRoute and point out the charger, cables, destination adapter, one pickup location, seeded demo stock, and S$133 total. Do not explain the ranking algorithm unless asked.</a:t>
             </a:r>
           </a:p>
           <a:p xmlns:a="http://schemas.openxmlformats.org/drawingml/2006/main">
@@ -740,17 +932,17 @@
           </a:p>
           <a:p xmlns:a="http://schemas.openxmlformats.org/drawingml/2006/main">
             <a:r>
-              <a:t>- docs/assets/screenshots/buyer-overview.png</a:t>
-            </a:r>
-          </a:p>
-          <a:p xmlns:a="http://schemas.openxmlformats.org/drawingml/2006/main">
-            <a:r>
-              <a:t>- docs/PRD.md — Functional requirements</a:t>
-            </a:r>
-          </a:p>
-          <a:p xmlns:a="http://schemas.openxmlformats.org/drawingml/2006/main">
-            <a:r>
-              <a:t>- docs/architecture.md — Cart algorithm</a:t>
+              <a:t>- SCRIPT.md — Live demo, working checkout block</a:t>
+            </a:r>
+          </a:p>
+          <a:p xmlns:a="http://schemas.openxmlformats.org/drawingml/2006/main">
+            <a:r>
+              <a:t>- docs/HANDOVER.md — Canonical demo path</a:t>
+            </a:r>
+          </a:p>
+          <a:p xmlns:a="http://schemas.openxmlformats.org/drawingml/2006/main">
+            <a:r>
+              <a:t>- docs/PRD.md — Canonical story</a:t>
             </a:r>
           </a:p>
         </p:txBody>
@@ -820,7 +1012,7 @@
           <a:lstStyle xmlns:a="http://schemas.openxmlformats.org/drawingml/2006/main"/>
           <a:p xmlns:a="http://schemas.openxmlformats.org/drawingml/2006/main">
             <a:r>
-              <a:t>ChatGPT or Codex understands the intent. Woven supplies deterministic commerce tools and the embedded interface. The user—not the model—confirms the exact terms. The current Visa boundary is a simulator only.</a:t>
+              <a:t>Demo the working checkout path only: preview the exact terms, show merchant, items, pickup, total and expiry, then use one direct human confirmation. The returned authorization is simulated. Identity verification is the next server-enforced integration and is not present in the live build. Never present a static identity screen as a working check.</a:t>
             </a:r>
           </a:p>
           <a:p xmlns:a="http://schemas.openxmlformats.org/drawingml/2006/main">
@@ -835,17 +1027,17 @@
           </a:p>
           <a:p xmlns:a="http://schemas.openxmlformats.org/drawingml/2006/main">
             <a:r>
-              <a:t>- docs/assets/devpost/architecture.png</a:t>
-            </a:r>
-          </a:p>
-          <a:p xmlns:a="http://schemas.openxmlformats.org/drawingml/2006/main">
-            <a:r>
-              <a:t>- docs/architecture.md</a:t>
-            </a:r>
-          </a:p>
-          <a:p xmlns:a="http://schemas.openxmlformats.org/drawingml/2006/main">
-            <a:r>
-              <a:t>- docs/BRAND_GUIDE.md — Prototype language</a:t>
+              <a:t>- SCRIPT.md — Working checkout block and target identity block</a:t>
+            </a:r>
+          </a:p>
+          <a:p xmlns:a="http://schemas.openxmlformats.org/drawingml/2006/main">
+            <a:r>
+              <a:t>- docs/architecture.md — Confirmation boundary and mandate binding</a:t>
+            </a:r>
+          </a:p>
+          <a:p xmlns:a="http://schemas.openxmlformats.org/drawingml/2006/main">
+            <a:r>
+              <a:t>- docs/PRD.md — Truth and safety constraints</a:t>
             </a:r>
           </a:p>
         </p:txBody>
@@ -915,7 +1107,7 @@
           <a:lstStyle xmlns:a="http://schemas.openxmlformats.org/drawingml/2006/main"/>
           <a:p xmlns:a="http://schemas.openxmlformats.org/drawingml/2006/main">
             <a:r>
-              <a:t>At checkout, Woven rechecks price and stock, binds the exact merchant, cart version and amount, and creates a ten-minute mandate. The model never receives the private confirmation nonce; the user must click Confirm.</a:t>
+              <a:t>Switch to the merchant desk. Show inventory and price edits, confirmed orders, the audit trail, and the decline and reversal demo scenarios. Clarify that inventory is seeded and authorization is simulated.</a:t>
             </a:r>
           </a:p>
           <a:p xmlns:a="http://schemas.openxmlformats.org/drawingml/2006/main">
@@ -930,17 +1122,17 @@
           </a:p>
           <a:p xmlns:a="http://schemas.openxmlformats.org/drawingml/2006/main">
             <a:r>
-              <a:t>- docs/assets/screenshots/checkout-confirmation.png</a:t>
-            </a:r>
-          </a:p>
-          <a:p xmlns:a="http://schemas.openxmlformats.org/drawingml/2006/main">
-            <a:r>
-              <a:t>- docs/architecture.md — Tool contract and confirmation state machine</a:t>
-            </a:r>
-          </a:p>
-          <a:p xmlns:a="http://schemas.openxmlformats.org/drawingml/2006/main">
-            <a:r>
-              <a:t>- docs/PRD.md — Acceptance criteria</a:t>
+              <a:t>- SCRIPT.md — Merchant operations</a:t>
+            </a:r>
+          </a:p>
+          <a:p xmlns:a="http://schemas.openxmlformats.org/drawingml/2006/main">
+            <a:r>
+              <a:t>- docs/assets/screenshots/merchant-dashboard.png</a:t>
+            </a:r>
+          </a:p>
+          <a:p xmlns:a="http://schemas.openxmlformats.org/drawingml/2006/main">
+            <a:r>
+              <a:t>- docs/architecture.md — Merchant state and failure paths</a:t>
             </a:r>
           </a:p>
         </p:txBody>
@@ -1010,7 +1202,7 @@
           <a:lstStyle xmlns:a="http://schemas.openxmlformats.org/drawingml/2006/main"/>
           <a:p xmlns:a="http://schemas.openxmlformats.org/drawingml/2006/main">
             <a:r>
-              <a:t>The merchant desk lets judges change inventory or prices and trigger decline or reversal paths live. Every path keeps recommendation separate from authorization, accepts no payment credentials and records the outcome.</a:t>
+              <a:t>Close on the product thesis: the checkout belongs where the request begins. ChatGPT understands the mission, Woven builds the complete cart, and the user controls authorization. Ask once. Review once. Confirm once.</a:t>
             </a:r>
           </a:p>
           <a:p xmlns:a="http://schemas.openxmlformats.org/drawingml/2006/main">
@@ -1025,17 +1217,17 @@
           </a:p>
           <a:p xmlns:a="http://schemas.openxmlformats.org/drawingml/2006/main">
             <a:r>
-              <a:t>- docs/assets/screenshots/merchant-dashboard.png</a:t>
-            </a:r>
-          </a:p>
-          <a:p xmlns:a="http://schemas.openxmlformats.org/drawingml/2006/main">
-            <a:r>
-              <a:t>- docs/PRD.md — Functional requirements</a:t>
-            </a:r>
-          </a:p>
-          <a:p xmlns:a="http://schemas.openxmlformats.org/drawingml/2006/main">
-            <a:r>
-              <a:t>- docs/architecture.md — Trust boundaries</a:t>
+              <a:t>- SCRIPT.md — Closing</a:t>
+            </a:r>
+          </a:p>
+          <a:p xmlns:a="http://schemas.openxmlformats.org/drawingml/2006/main">
+            <a:r>
+              <a:t>- docs/assets/screenshots/order-success.png</a:t>
+            </a:r>
+          </a:p>
+          <a:p xmlns:a="http://schemas.openxmlformats.org/drawingml/2006/main">
+            <a:r>
+              <a:t>- docs/DEVPOST_SUBMISSION.md — Pitch</a:t>
             </a:r>
           </a:p>
         </p:txBody>
@@ -1105,7 +1297,7 @@
           <a:lstStyle xmlns:a="http://schemas.openxmlformats.org/drawingml/2006/main"/>
           <a:p xmlns:a="http://schemas.openxmlformats.org/drawingml/2006/main">
             <a:r>
-              <a:t>The prototype deliberately starts with one demanding electronics mission and a validated CSV contract. The path to scale is to connect real catalogue, stock and fulfilment APIs while preserving the same exact confirmation boundary.</a:t>
+              <a:t>Use this only in Q&amp;A. The working prototype includes cart construction, MCP tools and UI, exact expiring checkout terms, direct confirmation, idempotency, merchant operations, failure scenarios, and an audit trail.</a:t>
             </a:r>
           </a:p>
           <a:p xmlns:a="http://schemas.openxmlformats.org/drawingml/2006/main">
@@ -1120,17 +1312,17 @@
           </a:p>
           <a:p xmlns:a="http://schemas.openxmlformats.org/drawingml/2006/main">
             <a:r>
-              <a:t>- docs/PRD.md — Non-goals</a:t>
-            </a:r>
-          </a:p>
-          <a:p xmlns:a="http://schemas.openxmlformats.org/drawingml/2006/main">
-            <a:r>
-              <a:t>- docs/DEVPOST_SUBMISSION.md — What's next</a:t>
-            </a:r>
-          </a:p>
-          <a:p xmlns:a="http://schemas.openxmlformats.org/drawingml/2006/main">
-            <a:r>
-              <a:t>- docs/HANDOVER.md — Highest-value next work</a:t>
+              <a:t>- README.md — What is implemented</a:t>
+            </a:r>
+          </a:p>
+          <a:p xmlns:a="http://schemas.openxmlformats.org/drawingml/2006/main">
+            <a:r>
+              <a:t>- docs/PRD.md — Acceptance criteria</a:t>
+            </a:r>
+          </a:p>
+          <a:p xmlns:a="http://schemas.openxmlformats.org/drawingml/2006/main">
+            <a:r>
+              <a:t>- docs/architecture.md — State machine and controls</a:t>
             </a:r>
           </a:p>
         </p:txBody>
@@ -1200,7 +1392,7 @@
           <a:lstStyle xmlns:a="http://schemas.openxmlformats.org/drawingml/2006/main"/>
           <a:p xmlns:a="http://schemas.openxmlformats.org/drawingml/2006/main">
             <a:r>
-              <a:t>We are not building another online store. We are making the existing AI conversation capable of completing a real mission—while keeping the exact commercial decision visibly human.</a:t>
+              <a:t>Use this when judges ask what is simulated. Inventory and pickup are seeded. Identity is a product direction, not a live feature. Visa approval, decline and reversal are simulated. The prototype accepts no card data and makes no Visa partnership claim.</a:t>
             </a:r>
           </a:p>
           <a:p xmlns:a="http://schemas.openxmlformats.org/drawingml/2006/main">
@@ -1215,17 +1407,17 @@
           </a:p>
           <a:p xmlns:a="http://schemas.openxmlformats.org/drawingml/2006/main">
             <a:r>
-              <a:t>- docs/assets/screenshots/order-success.png</a:t>
-            </a:r>
-          </a:p>
-          <a:p xmlns:a="http://schemas.openxmlformats.org/drawingml/2006/main">
-            <a:r>
-              <a:t>- docs/BRAND_GUIDE.md — Core line and prototype boundary</a:t>
-            </a:r>
-          </a:p>
-          <a:p xmlns:a="http://schemas.openxmlformats.org/drawingml/2006/main">
-            <a:r>
-              <a:t>- docs/DEVPOST_SUBMISSION.md — 30-second pitch</a:t>
+              <a:t>- README.md — Prototype boundary</a:t>
+            </a:r>
+          </a:p>
+          <a:p xmlns:a="http://schemas.openxmlformats.org/drawingml/2006/main">
+            <a:r>
+              <a:t>- SCRIPT.md — Truth guardrails</a:t>
+            </a:r>
+          </a:p>
+          <a:p xmlns:a="http://schemas.openxmlformats.org/drawingml/2006/main">
+            <a:r>
+              <a:t>- docs/PRD.md — Non-goals</a:t>
             </a:r>
           </a:p>
         </p:txBody>
@@ -1293,7 +1485,7 @@
   </p:cSld>
   <p:clrMap bg1="lt1" tx1="dk1" bg2="lt2" tx2="dk2" accent1="accent1" accent2="accent2" accent3="accent3" accent4="accent4" accent5="accent5" accent6="accent6" hlink="hlink" folHlink="folHlink"/>
   <p:sldLayoutIdLst>
-    <p:sldLayoutId xmlns:r="http://schemas.openxmlformats.org/officeDocument/2006/relationships" id="2147483649" r:id="R63ea19c7d0164621"/>
+    <p:sldLayoutId xmlns:r="http://schemas.openxmlformats.org/officeDocument/2006/relationships" id="2147483649" r:id="R521b3641302342b1"/>
   </p:sldLayoutIdLst>
   <p:txStyles>
     <p:titleStyle>
@@ -1823,6 +2015,626 @@
 <file path=ppt/slides/slide1.xml><?xml version="1.0" encoding="utf-8"?>
 <p:sld xmlns:p="http://schemas.openxmlformats.org/presentationml/2006/main">
   <p:cSld>
+    <p:bg>
+      <p:bgPr>
+        <a:solidFill xmlns:a="http://schemas.openxmlformats.org/drawingml/2006/main">
+          <a:srgbClr val="0E4B3B"/>
+        </a:solidFill>
+      </p:bgPr>
+    </p:bg>
+    <p:spTree>
+      <p:nvGrpSpPr>
+        <p:cNvPr id="1" name=""/>
+        <p:cNvGrpSpPr/>
+        <p:nvPr/>
+      </p:nvGrpSpPr>
+      <p:grpSpPr>
+        <a:xfrm xmlns:a="http://schemas.openxmlformats.org/drawingml/2006/main"/>
+      </p:grpSpPr>
+      <p:sp>
+        <p:nvSpPr>
+          <p:cNvPr id="10" name="eyebrow-The takeaway">
+            <a:extLst xmlns:a="http://schemas.openxmlformats.org/drawingml/2006/main">
+              <a:ext uri="{FF2B5EF4-FFF2-40B4-BE49-F238E27FC236}">
+                <a16:creationId xmlns:a16="http://schemas.microsoft.com/office/drawing/2014/main" id="{127A4371-AA64-41B4-BB82-2074B9A226A8}"/>
+              </a:ext>
+            </a:extLst>
+          </p:cNvPr>
+          <p:cNvSpPr>
+            <a:spLocks xmlns:a="http://schemas.openxmlformats.org/drawingml/2006/main" noGrp="1"/>
+          </p:cNvSpPr>
+          <p:nvPr/>
+        </p:nvSpPr>
+        <p:spPr>
+          <a:xfrm xmlns:a="http://schemas.openxmlformats.org/drawingml/2006/main">
+            <a:off x="838200" y="590550"/>
+            <a:ext cx="8572500" cy="247650"/>
+          </a:xfrm>
+          <a:prstGeom xmlns:a="http://schemas.openxmlformats.org/drawingml/2006/main" prst="rect">
+            <a:avLst/>
+          </a:prstGeom>
+          <a:noFill xmlns:a="http://schemas.openxmlformats.org/drawingml/2006/main"/>
+          <a:ln xmlns:a="http://schemas.openxmlformats.org/drawingml/2006/main" w="0">
+            <a:noFill/>
+            <a:prstDash val="solid"/>
+          </a:ln>
+        </p:spPr>
+        <p:txBody>
+          <a:bodyPr xmlns:a="http://schemas.openxmlformats.org/drawingml/2006/main" wrap="square" lIns="0" tIns="0" rIns="0" bIns="0">
+            <a:noAutofit/>
+          </a:bodyPr>
+          <a:lstStyle xmlns:a="http://schemas.openxmlformats.org/drawingml/2006/main"/>
+          <a:p xmlns:a="http://schemas.openxmlformats.org/drawingml/2006/main">
+            <a:pPr>
+              <a:buNone/>
+              <a:defRPr sz="1350" b="1">
+                <a:solidFill>
+                  <a:srgbClr val="B7F522"/>
+                </a:solidFill>
+                <a:latin typeface="Menlo"/>
+                <a:ea typeface="Menlo"/>
+                <a:cs typeface="Menlo"/>
+              </a:defRPr>
+            </a:pPr>
+            <a:r>
+              <a:rPr sz="1350" b="1">
+                <a:solidFill>
+                  <a:srgbClr val="B7F522"/>
+                </a:solidFill>
+                <a:latin typeface="Menlo"/>
+                <a:ea typeface="Menlo"/>
+                <a:cs typeface="Menlo"/>
+              </a:rPr>
+              <a:t>WOVEN / CHATGPT SHOPPING APP</a:t>
+            </a:r>
+          </a:p>
+        </p:txBody>
+      </p:sp>
+      <p:sp>
+        <p:nvSpPr>
+          <p:cNvPr id="2" name="closing-title">
+            <a:extLst xmlns:a="http://schemas.openxmlformats.org/drawingml/2006/main">
+              <a:ext uri="{FF2B5EF4-FFF2-40B4-BE49-F238E27FC236}">
+                <a16:creationId xmlns:a16="http://schemas.microsoft.com/office/drawing/2014/main" id="{96611E61-644B-4FDB-B197-448F38D56EC2}"/>
+              </a:ext>
+            </a:extLst>
+          </p:cNvPr>
+          <p:cNvSpPr>
+            <a:spLocks xmlns:a="http://schemas.openxmlformats.org/drawingml/2006/main" noGrp="1"/>
+          </p:cNvSpPr>
+          <p:nvPr/>
+        </p:nvSpPr>
+        <p:spPr>
+          <a:xfrm xmlns:a="http://schemas.openxmlformats.org/drawingml/2006/main">
+            <a:off x="838200" y="1314450"/>
+            <a:ext cx="6572250" cy="2533650"/>
+          </a:xfrm>
+          <a:prstGeom xmlns:a="http://schemas.openxmlformats.org/drawingml/2006/main" prst="rect">
+            <a:avLst/>
+          </a:prstGeom>
+          <a:noFill xmlns:a="http://schemas.openxmlformats.org/drawingml/2006/main"/>
+          <a:ln xmlns:a="http://schemas.openxmlformats.org/drawingml/2006/main" w="0">
+            <a:noFill/>
+            <a:prstDash val="solid"/>
+          </a:ln>
+        </p:spPr>
+        <p:txBody>
+          <a:bodyPr xmlns:a="http://schemas.openxmlformats.org/drawingml/2006/main" wrap="square" lIns="0" tIns="0" rIns="0" bIns="0">
+            <a:noAutofit/>
+          </a:bodyPr>
+          <a:lstStyle xmlns:a="http://schemas.openxmlformats.org/drawingml/2006/main"/>
+          <a:p xmlns:a="http://schemas.openxmlformats.org/drawingml/2006/main">
+            <a:pPr>
+              <a:lnSpc>
+                <a:spcPct val="94000"/>
+              </a:lnSpc>
+              <a:buNone/>
+              <a:defRPr sz="4200" b="1">
+                <a:solidFill>
+                  <a:srgbClr val="FFFFFF"/>
+                </a:solidFill>
+                <a:latin typeface="Georgia"/>
+                <a:ea typeface="Georgia"/>
+                <a:cs typeface="Georgia"/>
+              </a:defRPr>
+            </a:pPr>
+            <a:r>
+              <a:rPr sz="4200" b="1">
+                <a:solidFill>
+                  <a:srgbClr val="FFFFFF"/>
+                </a:solidFill>
+                <a:latin typeface="Georgia"/>
+                <a:ea typeface="Georgia"/>
+                <a:cs typeface="Georgia"/>
+              </a:rPr>
+              <a:t>Shopping should start</a:t>
+            </a:r>
+          </a:p>
+          <a:p xmlns:a="http://schemas.openxmlformats.org/drawingml/2006/main">
+            <a:pPr>
+              <a:lnSpc>
+                <a:spcPct val="94000"/>
+              </a:lnSpc>
+              <a:buNone/>
+              <a:defRPr sz="4200" b="1">
+                <a:solidFill>
+                  <a:srgbClr val="FFFFFF"/>
+                </a:solidFill>
+                <a:latin typeface="Georgia"/>
+                <a:ea typeface="Georgia"/>
+                <a:cs typeface="Georgia"/>
+              </a:defRPr>
+            </a:pPr>
+            <a:r>
+              <a:rPr sz="4200" b="1">
+                <a:solidFill>
+                  <a:srgbClr val="FFFFFF"/>
+                </a:solidFill>
+                <a:latin typeface="Georgia"/>
+                <a:ea typeface="Georgia"/>
+                <a:cs typeface="Georgia"/>
+              </a:rPr>
+              <a:t>and finish with</a:t>
+            </a:r>
+          </a:p>
+          <a:p xmlns:a="http://schemas.openxmlformats.org/drawingml/2006/main">
+            <a:pPr>
+              <a:lnSpc>
+                <a:spcPct val="94000"/>
+              </a:lnSpc>
+              <a:buNone/>
+              <a:defRPr sz="4200" b="1">
+                <a:solidFill>
+                  <a:srgbClr val="FFFFFF"/>
+                </a:solidFill>
+                <a:latin typeface="Georgia"/>
+                <a:ea typeface="Georgia"/>
+                <a:cs typeface="Georgia"/>
+              </a:defRPr>
+            </a:pPr>
+            <a:r>
+              <a:rPr sz="4200" b="1">
+                <a:solidFill>
+                  <a:srgbClr val="FFFFFF"/>
+                </a:solidFill>
+                <a:latin typeface="Georgia"/>
+                <a:ea typeface="Georgia"/>
+                <a:cs typeface="Georgia"/>
+              </a:rPr>
+              <a:t>one request.</a:t>
+            </a:r>
+          </a:p>
+        </p:txBody>
+      </p:sp>
+      <p:sp>
+        <p:nvSpPr>
+          <p:cNvPr id="3" name="closing-tagline">
+            <a:extLst xmlns:a="http://schemas.openxmlformats.org/drawingml/2006/main">
+              <a:ext uri="{FF2B5EF4-FFF2-40B4-BE49-F238E27FC236}">
+                <a16:creationId xmlns:a16="http://schemas.microsoft.com/office/drawing/2014/main" id="{6EC2DC6F-0A7B-4F6E-BD30-C7C0CF8409EC}"/>
+              </a:ext>
+            </a:extLst>
+          </p:cNvPr>
+          <p:cNvSpPr>
+            <a:spLocks xmlns:a="http://schemas.openxmlformats.org/drawingml/2006/main" noGrp="1"/>
+          </p:cNvSpPr>
+          <p:nvPr/>
+        </p:nvSpPr>
+        <p:spPr>
+          <a:xfrm xmlns:a="http://schemas.openxmlformats.org/drawingml/2006/main">
+            <a:off x="838200" y="4438650"/>
+            <a:ext cx="6572250" cy="876300"/>
+          </a:xfrm>
+          <a:prstGeom xmlns:a="http://schemas.openxmlformats.org/drawingml/2006/main" prst="rect">
+            <a:avLst/>
+          </a:prstGeom>
+          <a:noFill xmlns:a="http://schemas.openxmlformats.org/drawingml/2006/main"/>
+          <a:ln xmlns:a="http://schemas.openxmlformats.org/drawingml/2006/main" w="0">
+            <a:noFill/>
+            <a:prstDash val="solid"/>
+          </a:ln>
+        </p:spPr>
+        <p:txBody>
+          <a:bodyPr xmlns:a="http://schemas.openxmlformats.org/drawingml/2006/main" wrap="square" lIns="0" tIns="0" rIns="0" bIns="0">
+            <a:noAutofit/>
+          </a:bodyPr>
+          <a:lstStyle xmlns:a="http://schemas.openxmlformats.org/drawingml/2006/main"/>
+          <a:p xmlns:a="http://schemas.openxmlformats.org/drawingml/2006/main">
+            <a:pPr>
+              <a:lnSpc>
+                <a:spcPct val="108000"/>
+              </a:lnSpc>
+              <a:buNone/>
+              <a:defRPr sz="2100" b="1">
+                <a:solidFill>
+                  <a:srgbClr val="B7F522"/>
+                </a:solidFill>
+                <a:latin typeface="Avenir Next"/>
+                <a:ea typeface="Avenir Next"/>
+                <a:cs typeface="Avenir Next"/>
+              </a:defRPr>
+            </a:pPr>
+            <a:r>
+              <a:rPr sz="2100" b="1">
+                <a:solidFill>
+                  <a:srgbClr val="B7F522"/>
+                </a:solidFill>
+                <a:latin typeface="Avenir Next"/>
+                <a:ea typeface="Avenir Next"/>
+                <a:cs typeface="Avenir Next"/>
+              </a:rPr>
+              <a:t>Everything works together.</a:t>
+            </a:r>
+          </a:p>
+        </p:txBody>
+      </p:sp>
+      <p:sp>
+        <p:nvSpPr>
+          <p:cNvPr id="4" name="closing-triad">
+            <a:extLst xmlns:a="http://schemas.openxmlformats.org/drawingml/2006/main">
+              <a:ext uri="{FF2B5EF4-FFF2-40B4-BE49-F238E27FC236}">
+                <a16:creationId xmlns:a16="http://schemas.microsoft.com/office/drawing/2014/main" id="{72F89658-D2BF-4658-B511-4AA10AF9E935}"/>
+              </a:ext>
+            </a:extLst>
+          </p:cNvPr>
+          <p:cNvSpPr>
+            <a:spLocks xmlns:a="http://schemas.openxmlformats.org/drawingml/2006/main" noGrp="1"/>
+          </p:cNvSpPr>
+          <p:nvPr/>
+        </p:nvSpPr>
+        <p:spPr>
+          <a:xfrm xmlns:a="http://schemas.openxmlformats.org/drawingml/2006/main">
+            <a:off x="838200" y="5810250"/>
+            <a:ext cx="5334000" cy="1238250"/>
+          </a:xfrm>
+          <a:prstGeom xmlns:a="http://schemas.openxmlformats.org/drawingml/2006/main" prst="rect">
+            <a:avLst/>
+          </a:prstGeom>
+          <a:noFill xmlns:a="http://schemas.openxmlformats.org/drawingml/2006/main"/>
+          <a:ln xmlns:a="http://schemas.openxmlformats.org/drawingml/2006/main" w="0">
+            <a:noFill/>
+            <a:prstDash val="solid"/>
+          </a:ln>
+        </p:spPr>
+        <p:txBody>
+          <a:bodyPr xmlns:a="http://schemas.openxmlformats.org/drawingml/2006/main" wrap="square" lIns="0" tIns="0" rIns="0" bIns="0">
+            <a:noAutofit/>
+          </a:bodyPr>
+          <a:lstStyle xmlns:a="http://schemas.openxmlformats.org/drawingml/2006/main"/>
+          <a:p xmlns:a="http://schemas.openxmlformats.org/drawingml/2006/main">
+            <a:pPr>
+              <a:lnSpc>
+                <a:spcPct val="118000"/>
+              </a:lnSpc>
+              <a:buNone/>
+              <a:defRPr sz="2025" b="1">
+                <a:solidFill>
+                  <a:srgbClr val="DCECE5"/>
+                </a:solidFill>
+                <a:latin typeface="Menlo"/>
+                <a:ea typeface="Menlo"/>
+                <a:cs typeface="Menlo"/>
+              </a:defRPr>
+            </a:pPr>
+            <a:r>
+              <a:rPr sz="2025" b="1">
+                <a:solidFill>
+                  <a:srgbClr val="DCECE5"/>
+                </a:solidFill>
+                <a:latin typeface="Menlo"/>
+                <a:ea typeface="Menlo"/>
+                <a:cs typeface="Menlo"/>
+              </a:rPr>
+              <a:t>Ask once.</a:t>
+            </a:r>
+          </a:p>
+          <a:p xmlns:a="http://schemas.openxmlformats.org/drawingml/2006/main">
+            <a:pPr>
+              <a:lnSpc>
+                <a:spcPct val="118000"/>
+              </a:lnSpc>
+              <a:buNone/>
+              <a:defRPr sz="2025" b="1">
+                <a:solidFill>
+                  <a:srgbClr val="DCECE5"/>
+                </a:solidFill>
+                <a:latin typeface="Menlo"/>
+                <a:ea typeface="Menlo"/>
+                <a:cs typeface="Menlo"/>
+              </a:defRPr>
+            </a:pPr>
+            <a:r>
+              <a:rPr sz="2025" b="1">
+                <a:solidFill>
+                  <a:srgbClr val="DCECE5"/>
+                </a:solidFill>
+                <a:latin typeface="Menlo"/>
+                <a:ea typeface="Menlo"/>
+                <a:cs typeface="Menlo"/>
+              </a:rPr>
+              <a:t>Review once.</a:t>
+            </a:r>
+          </a:p>
+          <a:p xmlns:a="http://schemas.openxmlformats.org/drawingml/2006/main">
+            <a:pPr>
+              <a:lnSpc>
+                <a:spcPct val="118000"/>
+              </a:lnSpc>
+              <a:buNone/>
+              <a:defRPr sz="2025" b="1">
+                <a:solidFill>
+                  <a:srgbClr val="DCECE5"/>
+                </a:solidFill>
+                <a:latin typeface="Menlo"/>
+                <a:ea typeface="Menlo"/>
+                <a:cs typeface="Menlo"/>
+              </a:defRPr>
+            </a:pPr>
+            <a:r>
+              <a:rPr sz="2025" b="1">
+                <a:solidFill>
+                  <a:srgbClr val="DCECE5"/>
+                </a:solidFill>
+                <a:latin typeface="Menlo"/>
+                <a:ea typeface="Menlo"/>
+                <a:cs typeface="Menlo"/>
+              </a:rPr>
+              <a:t>Confirm once.</a:t>
+            </a:r>
+          </a:p>
+        </p:txBody>
+      </p:sp>
+      <p:sp>
+        <p:nvSpPr>
+          <p:cNvPr id="5" name="Woven simulated authorization result and pickup receipt-backplate">
+            <a:extLst xmlns:a="http://schemas.openxmlformats.org/drawingml/2006/main">
+              <a:ext uri="{FF2B5EF4-FFF2-40B4-BE49-F238E27FC236}">
+                <a16:creationId xmlns:a16="http://schemas.microsoft.com/office/drawing/2014/main" id="{6657EEA8-CC04-4F82-BABF-52A8AB7EB24E}"/>
+              </a:ext>
+            </a:extLst>
+          </p:cNvPr>
+          <p:cNvSpPr>
+            <a:spLocks xmlns:a="http://schemas.openxmlformats.org/drawingml/2006/main" noGrp="1"/>
+          </p:cNvSpPr>
+          <p:nvPr/>
+        </p:nvSpPr>
+        <p:spPr>
+          <a:xfrm xmlns:a="http://schemas.openxmlformats.org/drawingml/2006/main">
+            <a:off x="7620000" y="2381250"/>
+            <a:ext cx="6858000" cy="3943350"/>
+          </a:xfrm>
+          <a:prstGeom xmlns:a="http://schemas.openxmlformats.org/drawingml/2006/main" prst="roundRect">
+            <a:avLst>
+              <a:gd name="adj" fmla="val 5797"/>
+            </a:avLst>
+          </a:prstGeom>
+          <a:solidFill xmlns:a="http://schemas.openxmlformats.org/drawingml/2006/main">
+            <a:srgbClr val="FFFFFF"/>
+          </a:solidFill>
+          <a:ln xmlns:a="http://schemas.openxmlformats.org/drawingml/2006/main" w="0">
+            <a:noFill/>
+            <a:prstDash val="solid"/>
+          </a:ln>
+        </p:spPr>
+        <p:style>
+          <a:lnRef xmlns:a="http://schemas.openxmlformats.org/drawingml/2006/main" idx="0"/>
+          <a:fillRef xmlns:a="http://schemas.openxmlformats.org/drawingml/2006/main" idx="0"/>
+          <a:effectRef xmlns:a="http://schemas.openxmlformats.org/drawingml/2006/main" idx="7"/>
+          <a:fontRef xmlns:a="http://schemas.openxmlformats.org/drawingml/2006/main" idx="major"/>
+        </p:style>
+      </p:sp>
+      <p:pic>
+        <p:nvPicPr>
+          <p:cNvPr id="17" name=""/>
+          <p:cNvPicPr>
+            <a:picLocks xmlns:a="http://schemas.openxmlformats.org/drawingml/2006/main" noChangeAspect="1"/>
+          </p:cNvPicPr>
+          <p:nvPr/>
+        </p:nvPicPr>
+        <p:blipFill>
+          <a:blip xmlns:r="http://schemas.openxmlformats.org/officeDocument/2006/relationships" xmlns:a="http://schemas.openxmlformats.org/drawingml/2006/main" r:embed="R982966bbc874459b"/>
+          <a:stretch xmlns:a="http://schemas.openxmlformats.org/drawingml/2006/main"/>
+        </p:blipFill>
+        <p:spPr>
+          <a:xfrm xmlns:a="http://schemas.openxmlformats.org/drawingml/2006/main" flipH="0" flipV="0">
+            <a:off x="7715250" y="2477691"/>
+            <a:ext cx="6667500" cy="3750469"/>
+          </a:xfrm>
+          <a:prstGeom xmlns:a="http://schemas.openxmlformats.org/drawingml/2006/main" prst="roundRect">
+            <a:avLst/>
+          </a:prstGeom>
+        </p:spPr>
+      </p:pic>
+      <p:sp>
+        <p:nvSpPr>
+          <p:cNvPr id="7" name="closing-boundary">
+            <a:extLst xmlns:a="http://schemas.openxmlformats.org/drawingml/2006/main">
+              <a:ext uri="{FF2B5EF4-FFF2-40B4-BE49-F238E27FC236}">
+                <a16:creationId xmlns:a16="http://schemas.microsoft.com/office/drawing/2014/main" id="{F366E3E1-58EC-4B9E-85AC-84B9FDF83536}"/>
+              </a:ext>
+            </a:extLst>
+          </p:cNvPr>
+          <p:cNvSpPr>
+            <a:spLocks xmlns:a="http://schemas.openxmlformats.org/drawingml/2006/main" noGrp="1"/>
+          </p:cNvSpPr>
+          <p:nvPr/>
+        </p:nvSpPr>
+        <p:spPr>
+          <a:xfrm xmlns:a="http://schemas.openxmlformats.org/drawingml/2006/main">
+            <a:off x="8401050" y="6572250"/>
+            <a:ext cx="5334000" cy="247650"/>
+          </a:xfrm>
+          <a:prstGeom xmlns:a="http://schemas.openxmlformats.org/drawingml/2006/main" prst="rect">
+            <a:avLst/>
+          </a:prstGeom>
+          <a:noFill xmlns:a="http://schemas.openxmlformats.org/drawingml/2006/main"/>
+          <a:ln xmlns:a="http://schemas.openxmlformats.org/drawingml/2006/main" w="0">
+            <a:noFill/>
+            <a:prstDash val="solid"/>
+          </a:ln>
+        </p:spPr>
+        <p:txBody>
+          <a:bodyPr xmlns:a="http://schemas.openxmlformats.org/drawingml/2006/main" wrap="square" lIns="0" tIns="0" rIns="0" bIns="0">
+            <a:noAutofit/>
+          </a:bodyPr>
+          <a:lstStyle xmlns:a="http://schemas.openxmlformats.org/drawingml/2006/main"/>
+          <a:p xmlns:a="http://schemas.openxmlformats.org/drawingml/2006/main">
+            <a:pPr algn="ctr">
+              <a:buNone/>
+              <a:defRPr sz="1200" b="1">
+                <a:solidFill>
+                  <a:srgbClr val="B7F522"/>
+                </a:solidFill>
+                <a:latin typeface="Menlo"/>
+                <a:ea typeface="Menlo"/>
+                <a:cs typeface="Menlo"/>
+              </a:defRPr>
+            </a:pPr>
+            <a:r>
+              <a:rPr sz="1200" b="1">
+                <a:solidFill>
+                  <a:srgbClr val="B7F522"/>
+                </a:solidFill>
+                <a:latin typeface="Menlo"/>
+                <a:ea typeface="Menlo"/>
+                <a:cs typeface="Menlo"/>
+              </a:rPr>
+              <a:t>WORKING MCP APP · SEEDED DEMO DATA</a:t>
+            </a:r>
+          </a:p>
+        </p:txBody>
+      </p:sp>
+      <p:sp>
+        <p:nvSpPr>
+          <p:cNvPr id="8" name="footer-label-9">
+            <a:extLst xmlns:a="http://schemas.openxmlformats.org/drawingml/2006/main">
+              <a:ext uri="{FF2B5EF4-FFF2-40B4-BE49-F238E27FC236}">
+                <a16:creationId xmlns:a16="http://schemas.microsoft.com/office/drawing/2014/main" id="{D2647B79-80DB-4F8E-8A2F-05922DDDED74}"/>
+              </a:ext>
+            </a:extLst>
+          </p:cNvPr>
+          <p:cNvSpPr>
+            <a:spLocks xmlns:a="http://schemas.openxmlformats.org/drawingml/2006/main" noGrp="1"/>
+          </p:cNvSpPr>
+          <p:nvPr/>
+        </p:nvSpPr>
+        <p:spPr>
+          <a:xfrm xmlns:a="http://schemas.openxmlformats.org/drawingml/2006/main">
+            <a:off x="838200" y="8020050"/>
+            <a:ext cx="5334000" cy="228600"/>
+          </a:xfrm>
+          <a:prstGeom xmlns:a="http://schemas.openxmlformats.org/drawingml/2006/main" prst="rect">
+            <a:avLst/>
+          </a:prstGeom>
+          <a:noFill xmlns:a="http://schemas.openxmlformats.org/drawingml/2006/main"/>
+          <a:ln xmlns:a="http://schemas.openxmlformats.org/drawingml/2006/main" w="0">
+            <a:noFill/>
+            <a:prstDash val="solid"/>
+          </a:ln>
+        </p:spPr>
+        <p:txBody>
+          <a:bodyPr xmlns:a="http://schemas.openxmlformats.org/drawingml/2006/main" wrap="square" lIns="0" tIns="0" rIns="0" bIns="0">
+            <a:noAutofit/>
+          </a:bodyPr>
+          <a:lstStyle xmlns:a="http://schemas.openxmlformats.org/drawingml/2006/main"/>
+          <a:p xmlns:a="http://schemas.openxmlformats.org/drawingml/2006/main">
+            <a:pPr>
+              <a:buNone/>
+              <a:defRPr sz="1200" b="1">
+                <a:solidFill>
+                  <a:srgbClr val="DCECE5"/>
+                </a:solidFill>
+                <a:latin typeface="Menlo"/>
+                <a:ea typeface="Menlo"/>
+                <a:cs typeface="Menlo"/>
+              </a:defRPr>
+            </a:pPr>
+            <a:r>
+              <a:rPr sz="1200" b="1">
+                <a:solidFill>
+                  <a:srgbClr val="DCECE5"/>
+                </a:solidFill>
+                <a:latin typeface="Menlo"/>
+                <a:ea typeface="Menlo"/>
+                <a:cs typeface="Menlo"/>
+              </a:rPr>
+              <a:t>WOVEN  /  LIFEHACK 2026</a:t>
+            </a:r>
+          </a:p>
+        </p:txBody>
+      </p:sp>
+      <p:sp>
+        <p:nvSpPr>
+          <p:cNvPr id="9" name="footer-number-9">
+            <a:extLst xmlns:a="http://schemas.openxmlformats.org/drawingml/2006/main">
+              <a:ext uri="{FF2B5EF4-FFF2-40B4-BE49-F238E27FC236}">
+                <a16:creationId xmlns:a16="http://schemas.microsoft.com/office/drawing/2014/main" id="{62445167-1406-4B61-A1CF-80F49583F03F}"/>
+              </a:ext>
+            </a:extLst>
+          </p:cNvPr>
+          <p:cNvSpPr>
+            <a:spLocks xmlns:a="http://schemas.openxmlformats.org/drawingml/2006/main" noGrp="1"/>
+          </p:cNvSpPr>
+          <p:nvPr/>
+        </p:nvSpPr>
+        <p:spPr>
+          <a:xfrm xmlns:a="http://schemas.openxmlformats.org/drawingml/2006/main">
+            <a:off x="13620750" y="8001000"/>
+            <a:ext cx="762000" cy="247650"/>
+          </a:xfrm>
+          <a:prstGeom xmlns:a="http://schemas.openxmlformats.org/drawingml/2006/main" prst="rect">
+            <a:avLst/>
+          </a:prstGeom>
+          <a:noFill xmlns:a="http://schemas.openxmlformats.org/drawingml/2006/main"/>
+          <a:ln xmlns:a="http://schemas.openxmlformats.org/drawingml/2006/main" w="0">
+            <a:noFill/>
+            <a:prstDash val="solid"/>
+          </a:ln>
+        </p:spPr>
+        <p:txBody>
+          <a:bodyPr xmlns:a="http://schemas.openxmlformats.org/drawingml/2006/main" wrap="square" lIns="0" tIns="0" rIns="0" bIns="0">
+            <a:noAutofit/>
+          </a:bodyPr>
+          <a:lstStyle xmlns:a="http://schemas.openxmlformats.org/drawingml/2006/main"/>
+          <a:p xmlns:a="http://schemas.openxmlformats.org/drawingml/2006/main">
+            <a:pPr algn="r">
+              <a:buNone/>
+              <a:defRPr sz="1350" b="1">
+                <a:solidFill>
+                  <a:srgbClr val="DCECE5"/>
+                </a:solidFill>
+                <a:latin typeface="Menlo"/>
+                <a:ea typeface="Menlo"/>
+                <a:cs typeface="Menlo"/>
+              </a:defRPr>
+            </a:pPr>
+            <a:r>
+              <a:rPr sz="1350" b="1">
+                <a:solidFill>
+                  <a:srgbClr val="DCECE5"/>
+                </a:solidFill>
+                <a:latin typeface="Menlo"/>
+                <a:ea typeface="Menlo"/>
+                <a:cs typeface="Menlo"/>
+              </a:rPr>
+              <a:t>01</a:t>
+            </a:r>
+          </a:p>
+        </p:txBody>
+      </p:sp>
+    </p:spTree>
+    <p:extLst>
+      <p:ext uri="{BB962C8B-B14F-4D97-AF65-F5344CB8AC3E}">
+        <p14:creationId xmlns:p14="http://schemas.microsoft.com/office/powerpoint/2010/main" val="1060689594"/>
+      </p:ext>
+    </p:extLst>
+  </p:cSld>
+</p:sld>
+</file>
+
+<file path=ppt/slides/slide10.xml><?xml version="1.0" encoding="utf-8"?>
+<p:sld xmlns:p="http://schemas.openxmlformats.org/presentationml/2006/main">
+  <p:cSld>
     <p:spTree>
       <p:nvGrpSpPr>
         <p:cNvPr id="1" name=""/>
@@ -1841,7 +2653,7 @@
           <p:nvPr/>
         </p:nvPicPr>
         <p:blipFill>
-          <a:blip xmlns:r="http://schemas.openxmlformats.org/officeDocument/2006/relationships" xmlns:a="http://schemas.openxmlformats.org/drawingml/2006/main" r:embed="R518f8e1e769543be"/>
+          <a:blip xmlns:r="http://schemas.openxmlformats.org/officeDocument/2006/relationships" xmlns:a="http://schemas.openxmlformats.org/drawingml/2006/main" r:embed="Raca72cacdcfe4a26"/>
           <a:srcRect xmlns:a="http://schemas.openxmlformats.org/drawingml/2006/main" l="0" t="0" r="0" b="0"/>
           <a:stretch xmlns:a="http://schemas.openxmlformats.org/drawingml/2006/main">
             <a:fillRect l="0" t="0" r="0" b="0"/>
@@ -1860,7 +2672,580 @@
     </p:spTree>
     <p:extLst>
       <p:ext uri="{BB962C8B-B14F-4D97-AF65-F5344CB8AC3E}">
-        <p14:creationId xmlns:p14="http://schemas.microsoft.com/office/powerpoint/2010/main" val="1406175347"/>
+        <p14:creationId xmlns:p14="http://schemas.microsoft.com/office/powerpoint/2010/main" val="614777387"/>
+      </p:ext>
+    </p:extLst>
+  </p:cSld>
+</p:sld>
+</file>
+
+<file path=ppt/slides/slide11.xml><?xml version="1.0" encoding="utf-8"?>
+<p:sld xmlns:p="http://schemas.openxmlformats.org/presentationml/2006/main">
+  <p:cSld>
+    <p:bg>
+      <p:bgPr>
+        <a:solidFill xmlns:a="http://schemas.openxmlformats.org/drawingml/2006/main">
+          <a:srgbClr val="F4EEE4"/>
+        </a:solidFill>
+      </p:bgPr>
+    </p:bg>
+    <p:spTree>
+      <p:nvGrpSpPr>
+        <p:cNvPr id="1" name=""/>
+        <p:cNvGrpSpPr/>
+        <p:nvPr/>
+      </p:nvGrpSpPr>
+      <p:grpSpPr>
+        <a:xfrm xmlns:a="http://schemas.openxmlformats.org/drawingml/2006/main"/>
+      </p:grpSpPr>
+      <p:sp>
+        <p:nvSpPr>
+          <p:cNvPr id="11" name="eyebrow-The live demo">
+            <a:extLst xmlns:a="http://schemas.openxmlformats.org/drawingml/2006/main">
+              <a:ext uri="{FF2B5EF4-FFF2-40B4-BE49-F238E27FC236}">
+                <a16:creationId xmlns:a16="http://schemas.microsoft.com/office/drawing/2014/main" id="{46635EF8-3618-4994-81BA-2542F409376A}"/>
+              </a:ext>
+            </a:extLst>
+          </p:cNvPr>
+          <p:cNvSpPr>
+            <a:spLocks xmlns:a="http://schemas.openxmlformats.org/drawingml/2006/main" noGrp="1"/>
+          </p:cNvSpPr>
+          <p:nvPr/>
+        </p:nvSpPr>
+        <p:spPr>
+          <a:xfrm xmlns:a="http://schemas.openxmlformats.org/drawingml/2006/main">
+            <a:off x="838200" y="590550"/>
+            <a:ext cx="8572500" cy="247650"/>
+          </a:xfrm>
+          <a:prstGeom xmlns:a="http://schemas.openxmlformats.org/drawingml/2006/main" prst="rect">
+            <a:avLst/>
+          </a:prstGeom>
+          <a:noFill xmlns:a="http://schemas.openxmlformats.org/drawingml/2006/main"/>
+          <a:ln xmlns:a="http://schemas.openxmlformats.org/drawingml/2006/main" w="0">
+            <a:noFill/>
+            <a:prstDash val="solid"/>
+          </a:ln>
+        </p:spPr>
+        <p:txBody>
+          <a:bodyPr xmlns:a="http://schemas.openxmlformats.org/drawingml/2006/main" wrap="square" lIns="0" tIns="0" rIns="0" bIns="0">
+            <a:noAutofit/>
+          </a:bodyPr>
+          <a:lstStyle xmlns:a="http://schemas.openxmlformats.org/drawingml/2006/main"/>
+          <a:p xmlns:a="http://schemas.openxmlformats.org/drawingml/2006/main">
+            <a:pPr>
+              <a:buNone/>
+              <a:defRPr sz="1350" b="1">
+                <a:solidFill>
+                  <a:srgbClr val="6D7974"/>
+                </a:solidFill>
+                <a:latin typeface="Menlo"/>
+                <a:ea typeface="Menlo"/>
+                <a:cs typeface="Menlo"/>
+              </a:defRPr>
+            </a:pPr>
+            <a:r>
+              <a:rPr sz="1350" b="1">
+                <a:solidFill>
+                  <a:srgbClr val="6D7974"/>
+                </a:solidFill>
+                <a:latin typeface="Menlo"/>
+                <a:ea typeface="Menlo"/>
+                <a:cs typeface="Menlo"/>
+              </a:rPr>
+              <a:t>BACKUP · TRUST CONTROLS</a:t>
+            </a:r>
+          </a:p>
+        </p:txBody>
+      </p:sp>
+      <p:sp>
+        <p:nvSpPr>
+          <p:cNvPr id="2" name="title-The AI recommends. The user confirms the exact terms.">
+            <a:extLst xmlns:a="http://schemas.openxmlformats.org/drawingml/2006/main">
+              <a:ext uri="{FF2B5EF4-FFF2-40B4-BE49-F238E27FC236}">
+                <a16:creationId xmlns:a16="http://schemas.microsoft.com/office/drawing/2014/main" id="{E6C7E214-CE49-432D-A6ED-84FB60003964}"/>
+              </a:ext>
+            </a:extLst>
+          </p:cNvPr>
+          <p:cNvSpPr>
+            <a:spLocks xmlns:a="http://schemas.openxmlformats.org/drawingml/2006/main" noGrp="1"/>
+          </p:cNvSpPr>
+          <p:nvPr/>
+        </p:nvSpPr>
+        <p:spPr>
+          <a:xfrm xmlns:a="http://schemas.openxmlformats.org/drawingml/2006/main">
+            <a:off x="838200" y="990600"/>
+            <a:ext cx="13525500" cy="1028700"/>
+          </a:xfrm>
+          <a:prstGeom xmlns:a="http://schemas.openxmlformats.org/drawingml/2006/main" prst="rect">
+            <a:avLst/>
+          </a:prstGeom>
+          <a:noFill xmlns:a="http://schemas.openxmlformats.org/drawingml/2006/main"/>
+          <a:ln xmlns:a="http://schemas.openxmlformats.org/drawingml/2006/main" w="0">
+            <a:noFill/>
+            <a:prstDash val="solid"/>
+          </a:ln>
+        </p:spPr>
+        <p:txBody>
+          <a:bodyPr xmlns:a="http://schemas.openxmlformats.org/drawingml/2006/main" wrap="square" lIns="0" tIns="0" rIns="0" bIns="0">
+            <a:noAutofit/>
+          </a:bodyPr>
+          <a:lstStyle xmlns:a="http://schemas.openxmlformats.org/drawingml/2006/main"/>
+          <a:p xmlns:a="http://schemas.openxmlformats.org/drawingml/2006/main">
+            <a:pPr>
+              <a:lnSpc>
+                <a:spcPct val="95000"/>
+              </a:lnSpc>
+              <a:buNone/>
+              <a:defRPr sz="4650" b="1">
+                <a:solidFill>
+                  <a:srgbClr val="0E4B3B"/>
+                </a:solidFill>
+                <a:latin typeface="Georgia"/>
+                <a:ea typeface="Georgia"/>
+                <a:cs typeface="Georgia"/>
+              </a:defRPr>
+            </a:pPr>
+            <a:r>
+              <a:rPr sz="4650" b="1">
+                <a:solidFill>
+                  <a:srgbClr val="0E4B3B"/>
+                </a:solidFill>
+                <a:latin typeface="Georgia"/>
+                <a:ea typeface="Georgia"/>
+                <a:cs typeface="Georgia"/>
+              </a:rPr>
+              <a:t>Trust is enforced at the purchase boundary.</a:t>
+            </a:r>
+          </a:p>
+        </p:txBody>
+      </p:sp>
+      <p:sp>
+        <p:nvSpPr>
+          <p:cNvPr id="3" name="boundary-statement">
+            <a:extLst xmlns:a="http://schemas.openxmlformats.org/drawingml/2006/main">
+              <a:ext uri="{FF2B5EF4-FFF2-40B4-BE49-F238E27FC236}">
+                <a16:creationId xmlns:a16="http://schemas.microsoft.com/office/drawing/2014/main" id="{64039A6F-00FA-4C7A-8407-F1FA78BFDFA5}"/>
+              </a:ext>
+            </a:extLst>
+          </p:cNvPr>
+          <p:cNvSpPr>
+            <a:spLocks xmlns:a="http://schemas.openxmlformats.org/drawingml/2006/main" noGrp="1"/>
+          </p:cNvSpPr>
+          <p:nvPr/>
+        </p:nvSpPr>
+        <p:spPr>
+          <a:xfrm xmlns:a="http://schemas.openxmlformats.org/drawingml/2006/main">
+            <a:off x="838200" y="2895600"/>
+            <a:ext cx="4191000" cy="1371600"/>
+          </a:xfrm>
+          <a:prstGeom xmlns:a="http://schemas.openxmlformats.org/drawingml/2006/main" prst="rect">
+            <a:avLst/>
+          </a:prstGeom>
+          <a:noFill xmlns:a="http://schemas.openxmlformats.org/drawingml/2006/main"/>
+          <a:ln xmlns:a="http://schemas.openxmlformats.org/drawingml/2006/main" w="0">
+            <a:noFill/>
+            <a:prstDash val="solid"/>
+          </a:ln>
+        </p:spPr>
+        <p:txBody>
+          <a:bodyPr xmlns:a="http://schemas.openxmlformats.org/drawingml/2006/main" wrap="square" lIns="0" tIns="0" rIns="0" bIns="0">
+            <a:noAutofit/>
+          </a:bodyPr>
+          <a:lstStyle xmlns:a="http://schemas.openxmlformats.org/drawingml/2006/main"/>
+          <a:p xmlns:a="http://schemas.openxmlformats.org/drawingml/2006/main">
+            <a:pPr>
+              <a:lnSpc>
+                <a:spcPct val="95000"/>
+              </a:lnSpc>
+              <a:buNone/>
+              <a:defRPr sz="3150" b="1">
+                <a:solidFill>
+                  <a:srgbClr val="0E4B3B"/>
+                </a:solidFill>
+                <a:latin typeface="Georgia"/>
+                <a:ea typeface="Georgia"/>
+                <a:cs typeface="Georgia"/>
+              </a:defRPr>
+            </a:pPr>
+            <a:r>
+              <a:rPr sz="3150" b="1">
+                <a:solidFill>
+                  <a:srgbClr val="0E4B3B"/>
+                </a:solidFill>
+                <a:latin typeface="Georgia"/>
+                <a:ea typeface="Georgia"/>
+                <a:cs typeface="Georgia"/>
+              </a:rPr>
+              <a:t>Exact terms are bound.</a:t>
+            </a:r>
+          </a:p>
+          <a:p xmlns:a="http://schemas.openxmlformats.org/drawingml/2006/main">
+            <a:pPr>
+              <a:lnSpc>
+                <a:spcPct val="95000"/>
+              </a:lnSpc>
+              <a:buNone/>
+              <a:defRPr sz="3150" b="1">
+                <a:solidFill>
+                  <a:srgbClr val="0E4B3B"/>
+                </a:solidFill>
+                <a:latin typeface="Georgia"/>
+                <a:ea typeface="Georgia"/>
+                <a:cs typeface="Georgia"/>
+              </a:defRPr>
+            </a:pPr>
+            <a:r>
+              <a:rPr sz="3150" b="1">
+                <a:solidFill>
+                  <a:srgbClr val="0E4B3B"/>
+                </a:solidFill>
+                <a:latin typeface="Georgia"/>
+                <a:ea typeface="Georgia"/>
+                <a:cs typeface="Georgia"/>
+              </a:rPr>
+              <a:t>Only the user confirms.</a:t>
+            </a:r>
+          </a:p>
+        </p:txBody>
+      </p:sp>
+      <p:sp>
+        <p:nvSpPr>
+          <p:cNvPr id="4" name="simulated-label">
+            <a:extLst xmlns:a="http://schemas.openxmlformats.org/drawingml/2006/main">
+              <a:ext uri="{FF2B5EF4-FFF2-40B4-BE49-F238E27FC236}">
+                <a16:creationId xmlns:a16="http://schemas.microsoft.com/office/drawing/2014/main" id="{906B7775-6C73-4936-919D-C949C0ED9DEE}"/>
+              </a:ext>
+            </a:extLst>
+          </p:cNvPr>
+          <p:cNvSpPr>
+            <a:spLocks xmlns:a="http://schemas.openxmlformats.org/drawingml/2006/main" noGrp="1"/>
+          </p:cNvSpPr>
+          <p:nvPr/>
+        </p:nvSpPr>
+        <p:spPr>
+          <a:xfrm xmlns:a="http://schemas.openxmlformats.org/drawingml/2006/main">
+            <a:off x="838200" y="4724400"/>
+            <a:ext cx="3143250" cy="514350"/>
+          </a:xfrm>
+          <a:prstGeom xmlns:a="http://schemas.openxmlformats.org/drawingml/2006/main" prst="roundRect">
+            <a:avLst>
+              <a:gd name="adj" fmla="val 50000"/>
+            </a:avLst>
+          </a:prstGeom>
+          <a:solidFill xmlns:a="http://schemas.openxmlformats.org/drawingml/2006/main">
+            <a:srgbClr val="1545E8"/>
+          </a:solidFill>
+          <a:ln xmlns:a="http://schemas.openxmlformats.org/drawingml/2006/main" w="0">
+            <a:noFill/>
+            <a:prstDash val="solid"/>
+          </a:ln>
+        </p:spPr>
+      </p:sp>
+      <p:sp>
+        <p:nvSpPr>
+          <p:cNvPr id="5" name="simulated-label-text">
+            <a:extLst xmlns:a="http://schemas.openxmlformats.org/drawingml/2006/main">
+              <a:ext uri="{FF2B5EF4-FFF2-40B4-BE49-F238E27FC236}">
+                <a16:creationId xmlns:a16="http://schemas.microsoft.com/office/drawing/2014/main" id="{0DCF3A62-833F-4EDD-B0B4-4EEFB00BFC41}"/>
+              </a:ext>
+            </a:extLst>
+          </p:cNvPr>
+          <p:cNvSpPr>
+            <a:spLocks xmlns:a="http://schemas.openxmlformats.org/drawingml/2006/main" noGrp="1"/>
+          </p:cNvSpPr>
+          <p:nvPr/>
+        </p:nvSpPr>
+        <p:spPr>
+          <a:xfrm xmlns:a="http://schemas.openxmlformats.org/drawingml/2006/main">
+            <a:off x="1028700" y="4876800"/>
+            <a:ext cx="2762250" cy="228600"/>
+          </a:xfrm>
+          <a:prstGeom xmlns:a="http://schemas.openxmlformats.org/drawingml/2006/main" prst="rect">
+            <a:avLst/>
+          </a:prstGeom>
+          <a:noFill xmlns:a="http://schemas.openxmlformats.org/drawingml/2006/main"/>
+          <a:ln xmlns:a="http://schemas.openxmlformats.org/drawingml/2006/main" w="0">
+            <a:noFill/>
+            <a:prstDash val="solid"/>
+          </a:ln>
+        </p:spPr>
+        <p:txBody>
+          <a:bodyPr xmlns:a="http://schemas.openxmlformats.org/drawingml/2006/main" wrap="square" lIns="0" tIns="0" rIns="0" bIns="0">
+            <a:noAutofit/>
+          </a:bodyPr>
+          <a:lstStyle xmlns:a="http://schemas.openxmlformats.org/drawingml/2006/main"/>
+          <a:p xmlns:a="http://schemas.openxmlformats.org/drawingml/2006/main">
+            <a:pPr algn="ctr">
+              <a:buNone/>
+              <a:defRPr sz="1275" b="1">
+                <a:solidFill>
+                  <a:srgbClr val="FFFFFF"/>
+                </a:solidFill>
+                <a:latin typeface="Menlo"/>
+                <a:ea typeface="Menlo"/>
+                <a:cs typeface="Menlo"/>
+              </a:defRPr>
+            </a:pPr>
+            <a:r>
+              <a:rPr sz="1275" b="1">
+                <a:solidFill>
+                  <a:srgbClr val="FFFFFF"/>
+                </a:solidFill>
+                <a:latin typeface="Menlo"/>
+                <a:ea typeface="Menlo"/>
+                <a:cs typeface="Menlo"/>
+              </a:rPr>
+              <a:t>IDENTITY · PLANNED / NOT LIVE</a:t>
+            </a:r>
+          </a:p>
+        </p:txBody>
+      </p:sp>
+      <p:sp>
+        <p:nvSpPr>
+          <p:cNvPr id="6" name="exact-terms">
+            <a:extLst xmlns:a="http://schemas.openxmlformats.org/drawingml/2006/main">
+              <a:ext uri="{FF2B5EF4-FFF2-40B4-BE49-F238E27FC236}">
+                <a16:creationId xmlns:a16="http://schemas.microsoft.com/office/drawing/2014/main" id="{24D4E798-F7E3-4205-9A3C-908586EEA799}"/>
+              </a:ext>
+            </a:extLst>
+          </p:cNvPr>
+          <p:cNvSpPr>
+            <a:spLocks xmlns:a="http://schemas.openxmlformats.org/drawingml/2006/main" noGrp="1"/>
+          </p:cNvSpPr>
+          <p:nvPr/>
+        </p:nvSpPr>
+        <p:spPr>
+          <a:xfrm xmlns:a="http://schemas.openxmlformats.org/drawingml/2006/main">
+            <a:off x="838200" y="5638800"/>
+            <a:ext cx="3810000" cy="1104900"/>
+          </a:xfrm>
+          <a:prstGeom xmlns:a="http://schemas.openxmlformats.org/drawingml/2006/main" prst="rect">
+            <a:avLst/>
+          </a:prstGeom>
+          <a:noFill xmlns:a="http://schemas.openxmlformats.org/drawingml/2006/main"/>
+          <a:ln xmlns:a="http://schemas.openxmlformats.org/drawingml/2006/main" w="0">
+            <a:noFill/>
+            <a:prstDash val="solid"/>
+          </a:ln>
+        </p:spPr>
+        <p:txBody>
+          <a:bodyPr xmlns:a="http://schemas.openxmlformats.org/drawingml/2006/main" wrap="square" lIns="0" tIns="0" rIns="0" bIns="0">
+            <a:noAutofit/>
+          </a:bodyPr>
+          <a:lstStyle xmlns:a="http://schemas.openxmlformats.org/drawingml/2006/main"/>
+          <a:p xmlns:a="http://schemas.openxmlformats.org/drawingml/2006/main">
+            <a:pPr>
+              <a:lnSpc>
+                <a:spcPct val="118000"/>
+              </a:lnSpc>
+              <a:buNone/>
+              <a:defRPr sz="1800">
+                <a:solidFill>
+                  <a:srgbClr val="6D7974"/>
+                </a:solidFill>
+                <a:latin typeface="Avenir Next"/>
+                <a:ea typeface="Avenir Next"/>
+                <a:cs typeface="Avenir Next"/>
+              </a:defRPr>
+            </a:pPr>
+            <a:r>
+              <a:rPr sz="1800">
+                <a:solidFill>
+                  <a:srgbClr val="6D7974"/>
+                </a:solidFill>
+                <a:latin typeface="Avenir Next"/>
+                <a:ea typeface="Avenir Next"/>
+                <a:cs typeface="Avenir Next"/>
+              </a:rPr>
+              <a:t>Price + stock rechecked · mandate expires · private nonce
+Idempotent order · simulated reversal</a:t>
+            </a:r>
+          </a:p>
+        </p:txBody>
+      </p:sp>
+      <p:sp>
+        <p:nvSpPr>
+          <p:cNvPr id="7" name="Woven checkout mandate showing exact terms and explicit confirmation-backplate">
+            <a:extLst xmlns:a="http://schemas.openxmlformats.org/drawingml/2006/main">
+              <a:ext uri="{FF2B5EF4-FFF2-40B4-BE49-F238E27FC236}">
+                <a16:creationId xmlns:a16="http://schemas.microsoft.com/office/drawing/2014/main" id="{8ADD3CA5-C1ED-4601-B88F-C6932A9AEDCB}"/>
+              </a:ext>
+            </a:extLst>
+          </p:cNvPr>
+          <p:cNvSpPr>
+            <a:spLocks xmlns:a="http://schemas.openxmlformats.org/drawingml/2006/main" noGrp="1"/>
+          </p:cNvSpPr>
+          <p:nvPr/>
+        </p:nvSpPr>
+        <p:spPr>
+          <a:xfrm xmlns:a="http://schemas.openxmlformats.org/drawingml/2006/main">
+            <a:off x="5095875" y="2362200"/>
+            <a:ext cx="9191625" cy="5257800"/>
+          </a:xfrm>
+          <a:prstGeom xmlns:a="http://schemas.openxmlformats.org/drawingml/2006/main" prst="roundRect">
+            <a:avLst>
+              <a:gd name="adj" fmla="val 4348"/>
+            </a:avLst>
+          </a:prstGeom>
+          <a:solidFill xmlns:a="http://schemas.openxmlformats.org/drawingml/2006/main">
+            <a:srgbClr val="FFFFFF"/>
+          </a:solidFill>
+          <a:ln xmlns:a="http://schemas.openxmlformats.org/drawingml/2006/main" w="0">
+            <a:noFill/>
+            <a:prstDash val="solid"/>
+          </a:ln>
+        </p:spPr>
+        <p:style>
+          <a:lnRef xmlns:a="http://schemas.openxmlformats.org/drawingml/2006/main" idx="0"/>
+          <a:fillRef xmlns:a="http://schemas.openxmlformats.org/drawingml/2006/main" idx="0"/>
+          <a:effectRef xmlns:a="http://schemas.openxmlformats.org/drawingml/2006/main" idx="7"/>
+          <a:fontRef xmlns:a="http://schemas.openxmlformats.org/drawingml/2006/main" idx="major"/>
+        </p:style>
+      </p:sp>
+      <p:pic>
+        <p:nvPicPr>
+          <p:cNvPr id="20" name=""/>
+          <p:cNvPicPr>
+            <a:picLocks xmlns:a="http://schemas.openxmlformats.org/drawingml/2006/main" noChangeAspect="1"/>
+          </p:cNvPicPr>
+          <p:nvPr/>
+        </p:nvPicPr>
+        <p:blipFill>
+          <a:blip xmlns:r="http://schemas.openxmlformats.org/officeDocument/2006/relationships" xmlns:a="http://schemas.openxmlformats.org/drawingml/2006/main" r:embed="R6ca6cfb145b04e6c"/>
+          <a:stretch xmlns:a="http://schemas.openxmlformats.org/drawingml/2006/main"/>
+        </p:blipFill>
+        <p:spPr>
+          <a:xfrm xmlns:a="http://schemas.openxmlformats.org/drawingml/2006/main" flipH="0" flipV="0">
+            <a:off x="5191125" y="2459534"/>
+            <a:ext cx="9001125" cy="5063133"/>
+          </a:xfrm>
+          <a:prstGeom xmlns:a="http://schemas.openxmlformats.org/drawingml/2006/main" prst="roundRect">
+            <a:avLst/>
+          </a:prstGeom>
+        </p:spPr>
+      </p:pic>
+      <p:sp>
+        <p:nvSpPr>
+          <p:cNvPr id="9" name="footer-label-6">
+            <a:extLst xmlns:a="http://schemas.openxmlformats.org/drawingml/2006/main">
+              <a:ext uri="{FF2B5EF4-FFF2-40B4-BE49-F238E27FC236}">
+                <a16:creationId xmlns:a16="http://schemas.microsoft.com/office/drawing/2014/main" id="{180E82C5-4959-4CB6-9B7C-CA48FE5A4C58}"/>
+              </a:ext>
+            </a:extLst>
+          </p:cNvPr>
+          <p:cNvSpPr>
+            <a:spLocks xmlns:a="http://schemas.openxmlformats.org/drawingml/2006/main" noGrp="1"/>
+          </p:cNvSpPr>
+          <p:nvPr/>
+        </p:nvSpPr>
+        <p:spPr>
+          <a:xfrm xmlns:a="http://schemas.openxmlformats.org/drawingml/2006/main">
+            <a:off x="838200" y="8020050"/>
+            <a:ext cx="5334000" cy="228600"/>
+          </a:xfrm>
+          <a:prstGeom xmlns:a="http://schemas.openxmlformats.org/drawingml/2006/main" prst="rect">
+            <a:avLst/>
+          </a:prstGeom>
+          <a:noFill xmlns:a="http://schemas.openxmlformats.org/drawingml/2006/main"/>
+          <a:ln xmlns:a="http://schemas.openxmlformats.org/drawingml/2006/main" w="0">
+            <a:noFill/>
+            <a:prstDash val="solid"/>
+          </a:ln>
+        </p:spPr>
+        <p:txBody>
+          <a:bodyPr xmlns:a="http://schemas.openxmlformats.org/drawingml/2006/main" wrap="square" lIns="0" tIns="0" rIns="0" bIns="0">
+            <a:noAutofit/>
+          </a:bodyPr>
+          <a:lstStyle xmlns:a="http://schemas.openxmlformats.org/drawingml/2006/main"/>
+          <a:p xmlns:a="http://schemas.openxmlformats.org/drawingml/2006/main">
+            <a:pPr>
+              <a:buNone/>
+              <a:defRPr sz="1200" b="1">
+                <a:solidFill>
+                  <a:srgbClr val="6D7974"/>
+                </a:solidFill>
+                <a:latin typeface="Menlo"/>
+                <a:ea typeface="Menlo"/>
+                <a:cs typeface="Menlo"/>
+              </a:defRPr>
+            </a:pPr>
+            <a:r>
+              <a:rPr sz="1200" b="1">
+                <a:solidFill>
+                  <a:srgbClr val="6D7974"/>
+                </a:solidFill>
+                <a:latin typeface="Menlo"/>
+                <a:ea typeface="Menlo"/>
+                <a:cs typeface="Menlo"/>
+              </a:rPr>
+              <a:t>WOVEN  /  LIFEHACK 2026</a:t>
+            </a:r>
+          </a:p>
+        </p:txBody>
+      </p:sp>
+      <p:sp>
+        <p:nvSpPr>
+          <p:cNvPr id="10" name="footer-number-6">
+            <a:extLst xmlns:a="http://schemas.openxmlformats.org/drawingml/2006/main">
+              <a:ext uri="{FF2B5EF4-FFF2-40B4-BE49-F238E27FC236}">
+                <a16:creationId xmlns:a16="http://schemas.microsoft.com/office/drawing/2014/main" id="{573541B3-83F3-4ADA-A401-90AC23E83D47}"/>
+              </a:ext>
+            </a:extLst>
+          </p:cNvPr>
+          <p:cNvSpPr>
+            <a:spLocks xmlns:a="http://schemas.openxmlformats.org/drawingml/2006/main" noGrp="1"/>
+          </p:cNvSpPr>
+          <p:nvPr/>
+        </p:nvSpPr>
+        <p:spPr>
+          <a:xfrm xmlns:a="http://schemas.openxmlformats.org/drawingml/2006/main">
+            <a:off x="13620750" y="8001000"/>
+            <a:ext cx="762000" cy="247650"/>
+          </a:xfrm>
+          <a:prstGeom xmlns:a="http://schemas.openxmlformats.org/drawingml/2006/main" prst="rect">
+            <a:avLst/>
+          </a:prstGeom>
+          <a:noFill xmlns:a="http://schemas.openxmlformats.org/drawingml/2006/main"/>
+          <a:ln xmlns:a="http://schemas.openxmlformats.org/drawingml/2006/main" w="0">
+            <a:noFill/>
+            <a:prstDash val="solid"/>
+          </a:ln>
+        </p:spPr>
+        <p:txBody>
+          <a:bodyPr xmlns:a="http://schemas.openxmlformats.org/drawingml/2006/main" wrap="square" lIns="0" tIns="0" rIns="0" bIns="0">
+            <a:noAutofit/>
+          </a:bodyPr>
+          <a:lstStyle xmlns:a="http://schemas.openxmlformats.org/drawingml/2006/main"/>
+          <a:p xmlns:a="http://schemas.openxmlformats.org/drawingml/2006/main">
+            <a:pPr algn="r">
+              <a:buNone/>
+              <a:defRPr sz="1350" b="1">
+                <a:solidFill>
+                  <a:srgbClr val="6D7974"/>
+                </a:solidFill>
+                <a:latin typeface="Menlo"/>
+                <a:ea typeface="Menlo"/>
+                <a:cs typeface="Menlo"/>
+              </a:defRPr>
+            </a:pPr>
+            <a:r>
+              <a:rPr sz="1350" b="1">
+                <a:solidFill>
+                  <a:srgbClr val="6D7974"/>
+                </a:solidFill>
+                <a:latin typeface="Menlo"/>
+                <a:ea typeface="Menlo"/>
+                <a:cs typeface="Menlo"/>
+              </a:rPr>
+              <a:t>11</a:t>
+            </a:r>
+          </a:p>
+        </p:txBody>
+      </p:sp>
+    </p:spTree>
+    <p:extLst>
+      <p:ext uri="{BB962C8B-B14F-4D97-AF65-F5344CB8AC3E}">
+        <p14:creationId xmlns:p14="http://schemas.microsoft.com/office/powerpoint/2010/main" val="2091917452"/>
       </p:ext>
     </p:extLst>
   </p:cSld>
@@ -1940,7 +3325,7 @@
                 <a:ea typeface="Menlo"/>
                 <a:cs typeface="Menlo"/>
               </a:rPr>
-              <a:t>THE PROBLEM</a:t>
+              <a:t>THE FRICTION</a:t>
             </a:r>
           </a:p>
         </p:txBody>
@@ -2002,7 +3387,7 @@
                 <a:ea typeface="Georgia"/>
                 <a:cs typeface="Georgia"/>
               </a:rPr>
-              <a:t>Search finds products. People need complete outcomes.</a:t>
+              <a:t>Search gives you links. Buying still takes work.</a:t>
             </a:r>
           </a:p>
         </p:txBody>
@@ -2064,7 +3449,8 @@
                 <a:ea typeface="Georgia"/>
                 <a:cs typeface="Georgia"/>
               </a:rPr>
-              <a:t>One wrong item breaks the whole mission.</a:t>
+              <a:t>Rebuild the cart
+at checkout.</a:t>
             </a:r>
           </a:p>
         </p:txBody>
@@ -2213,7 +3599,7 @@
                 <a:ea typeface="Avenir Next"/>
                 <a:cs typeface="Avenir Next"/>
               </a:rPr>
-              <a:t>Compatibility</a:t>
+              <a:t>Compare products</a:t>
             </a:r>
           </a:p>
         </p:txBody>
@@ -2275,7 +3661,7 @@
                 <a:ea typeface="Avenir Next"/>
                 <a:cs typeface="Avenir Next"/>
               </a:rPr>
-              <a:t>The charger, cables and destination adapter must work as one system.</a:t>
+              <a:t>You still open tabs and evaluate individual options.</a:t>
             </a:r>
           </a:p>
         </p:txBody>
@@ -2424,7 +3810,7 @@
                 <a:ea typeface="Avenir Next"/>
                 <a:cs typeface="Avenir Next"/>
               </a:rPr>
-              <a:t>Availability</a:t>
+              <a:t>Check compatibility</a:t>
             </a:r>
           </a:p>
         </p:txBody>
@@ -2486,7 +3872,7 @@
                 <a:ea typeface="Avenir Next"/>
                 <a:cs typeface="Avenir Next"/>
               </a:rPr>
-              <a:t>Every item must be in stock at the same pickup location today.</a:t>
+              <a:t>One wrong cable or adapter breaks the whole kit.</a:t>
             </a:r>
           </a:p>
         </p:txBody>
@@ -2635,7 +4021,7 @@
                 <a:ea typeface="Avenir Next"/>
                 <a:cs typeface="Avenir Next"/>
               </a:rPr>
-              <a:t>Commercial terms</a:t>
+              <a:t>Find one store</a:t>
             </a:r>
           </a:p>
         </p:txBody>
@@ -2697,7 +4083,7 @@
                 <a:ea typeface="Avenir Next"/>
                 <a:cs typeface="Avenir Next"/>
               </a:rPr>
-              <a:t>The finished kit must remain under budget when the user confirms.</a:t>
+              <a:t>Everything must be available today at one pickup location.</a:t>
             </a:r>
           </a:p>
         </p:txBody>
@@ -2831,6 +4217,689 @@
 </file>
 
 <file path=ppt/slides/slide3.xml><?xml version="1.0" encoding="utf-8"?>
+<p:sld xmlns:p="http://schemas.openxmlformats.org/presentationml/2006/main">
+  <p:cSld>
+    <p:bg>
+      <p:bgPr>
+        <a:solidFill xmlns:a="http://schemas.openxmlformats.org/drawingml/2006/main">
+          <a:srgbClr val="F4EEE4"/>
+        </a:solidFill>
+      </p:bgPr>
+    </p:bg>
+    <p:spTree>
+      <p:nvGrpSpPr>
+        <p:cNvPr id="1" name=""/>
+        <p:cNvGrpSpPr/>
+        <p:nvPr/>
+      </p:nvGrpSpPr>
+      <p:grpSpPr>
+        <a:xfrm xmlns:a="http://schemas.openxmlformats.org/drawingml/2006/main"/>
+      </p:grpSpPr>
+      <p:sp>
+        <p:nvSpPr>
+          <p:cNvPr id="13" name="eyebrow-The product">
+            <a:extLst xmlns:a="http://schemas.openxmlformats.org/drawingml/2006/main">
+              <a:ext uri="{FF2B5EF4-FFF2-40B4-BE49-F238E27FC236}">
+                <a16:creationId xmlns:a16="http://schemas.microsoft.com/office/drawing/2014/main" id="{07A88F95-BFF8-48C4-862D-F9984BCFD9CA}"/>
+              </a:ext>
+            </a:extLst>
+          </p:cNvPr>
+          <p:cNvSpPr>
+            <a:spLocks xmlns:a="http://schemas.openxmlformats.org/drawingml/2006/main" noGrp="1"/>
+          </p:cNvSpPr>
+          <p:nvPr/>
+        </p:nvSpPr>
+        <p:spPr>
+          <a:xfrm xmlns:a="http://schemas.openxmlformats.org/drawingml/2006/main">
+            <a:off x="838200" y="590550"/>
+            <a:ext cx="8572500" cy="247650"/>
+          </a:xfrm>
+          <a:prstGeom xmlns:a="http://schemas.openxmlformats.org/drawingml/2006/main" prst="rect">
+            <a:avLst/>
+          </a:prstGeom>
+          <a:noFill xmlns:a="http://schemas.openxmlformats.org/drawingml/2006/main"/>
+          <a:ln xmlns:a="http://schemas.openxmlformats.org/drawingml/2006/main" w="0">
+            <a:noFill/>
+            <a:prstDash val="solid"/>
+          </a:ln>
+        </p:spPr>
+        <p:txBody>
+          <a:bodyPr xmlns:a="http://schemas.openxmlformats.org/drawingml/2006/main" wrap="square" lIns="0" tIns="0" rIns="0" bIns="0">
+            <a:noAutofit/>
+          </a:bodyPr>
+          <a:lstStyle xmlns:a="http://schemas.openxmlformats.org/drawingml/2006/main"/>
+          <a:p xmlns:a="http://schemas.openxmlformats.org/drawingml/2006/main">
+            <a:pPr>
+              <a:buNone/>
+              <a:defRPr sz="1350" b="1">
+                <a:solidFill>
+                  <a:srgbClr val="6D7974"/>
+                </a:solidFill>
+                <a:latin typeface="Menlo"/>
+                <a:ea typeface="Menlo"/>
+                <a:cs typeface="Menlo"/>
+              </a:defRPr>
+            </a:pPr>
+            <a:r>
+              <a:rPr sz="1350" b="1">
+                <a:solidFill>
+                  <a:srgbClr val="6D7974"/>
+                </a:solidFill>
+                <a:latin typeface="Menlo"/>
+                <a:ea typeface="Menlo"/>
+                <a:cs typeface="Menlo"/>
+              </a:rPr>
+              <a:t>THE COMPLETE CART</a:t>
+            </a:r>
+          </a:p>
+        </p:txBody>
+      </p:sp>
+      <p:sp>
+        <p:nvSpPr>
+          <p:cNvPr id="2" name="title-Woven turns intent into a complete cart.">
+            <a:extLst xmlns:a="http://schemas.openxmlformats.org/drawingml/2006/main">
+              <a:ext uri="{FF2B5EF4-FFF2-40B4-BE49-F238E27FC236}">
+                <a16:creationId xmlns:a16="http://schemas.microsoft.com/office/drawing/2014/main" id="{044C183A-E528-4271-8878-340DBD49AD32}"/>
+              </a:ext>
+            </a:extLst>
+          </p:cNvPr>
+          <p:cNvSpPr>
+            <a:spLocks xmlns:a="http://schemas.openxmlformats.org/drawingml/2006/main" noGrp="1"/>
+          </p:cNvSpPr>
+          <p:nvPr/>
+        </p:nvSpPr>
+        <p:spPr>
+          <a:xfrm xmlns:a="http://schemas.openxmlformats.org/drawingml/2006/main">
+            <a:off x="838200" y="990600"/>
+            <a:ext cx="13239750" cy="1028700"/>
+          </a:xfrm>
+          <a:prstGeom xmlns:a="http://schemas.openxmlformats.org/drawingml/2006/main" prst="rect">
+            <a:avLst/>
+          </a:prstGeom>
+          <a:noFill xmlns:a="http://schemas.openxmlformats.org/drawingml/2006/main"/>
+          <a:ln xmlns:a="http://schemas.openxmlformats.org/drawingml/2006/main" w="0">
+            <a:noFill/>
+            <a:prstDash val="solid"/>
+          </a:ln>
+        </p:spPr>
+        <p:txBody>
+          <a:bodyPr xmlns:a="http://schemas.openxmlformats.org/drawingml/2006/main" wrap="square" lIns="0" tIns="0" rIns="0" bIns="0">
+            <a:noAutofit/>
+          </a:bodyPr>
+          <a:lstStyle xmlns:a="http://schemas.openxmlformats.org/drawingml/2006/main"/>
+          <a:p xmlns:a="http://schemas.openxmlformats.org/drawingml/2006/main">
+            <a:pPr>
+              <a:lnSpc>
+                <a:spcPct val="95000"/>
+              </a:lnSpc>
+              <a:buNone/>
+              <a:defRPr sz="4650" b="1">
+                <a:solidFill>
+                  <a:srgbClr val="0E4B3B"/>
+                </a:solidFill>
+                <a:latin typeface="Georgia"/>
+                <a:ea typeface="Georgia"/>
+                <a:cs typeface="Georgia"/>
+              </a:defRPr>
+            </a:pPr>
+            <a:r>
+              <a:rPr sz="4650" b="1">
+                <a:solidFill>
+                  <a:srgbClr val="0E4B3B"/>
+                </a:solidFill>
+                <a:latin typeface="Georgia"/>
+                <a:ea typeface="Georgia"/>
+                <a:cs typeface="Georgia"/>
+              </a:rPr>
+              <a:t>Woven returns a complete cart—not another list.</a:t>
+            </a:r>
+          </a:p>
+        </p:txBody>
+      </p:sp>
+      <p:sp>
+        <p:nvSpPr>
+          <p:cNvPr id="3" name="metric-value-0">
+            <a:extLst xmlns:a="http://schemas.openxmlformats.org/drawingml/2006/main">
+              <a:ext uri="{FF2B5EF4-FFF2-40B4-BE49-F238E27FC236}">
+                <a16:creationId xmlns:a16="http://schemas.microsoft.com/office/drawing/2014/main" id="{E720D8B4-0DC5-4C28-87E9-44D51229EF85}"/>
+              </a:ext>
+            </a:extLst>
+          </p:cNvPr>
+          <p:cNvSpPr>
+            <a:spLocks xmlns:a="http://schemas.openxmlformats.org/drawingml/2006/main" noGrp="1"/>
+          </p:cNvSpPr>
+          <p:nvPr/>
+        </p:nvSpPr>
+        <p:spPr>
+          <a:xfrm xmlns:a="http://schemas.openxmlformats.org/drawingml/2006/main">
+            <a:off x="838200" y="2781300"/>
+            <a:ext cx="2857500" cy="704850"/>
+          </a:xfrm>
+          <a:prstGeom xmlns:a="http://schemas.openxmlformats.org/drawingml/2006/main" prst="rect">
+            <a:avLst/>
+          </a:prstGeom>
+          <a:noFill xmlns:a="http://schemas.openxmlformats.org/drawingml/2006/main"/>
+          <a:ln xmlns:a="http://schemas.openxmlformats.org/drawingml/2006/main" w="0">
+            <a:noFill/>
+            <a:prstDash val="solid"/>
+          </a:ln>
+        </p:spPr>
+        <p:txBody>
+          <a:bodyPr xmlns:a="http://schemas.openxmlformats.org/drawingml/2006/main" wrap="square" lIns="0" tIns="0" rIns="0" bIns="0">
+            <a:noAutofit/>
+          </a:bodyPr>
+          <a:lstStyle xmlns:a="http://schemas.openxmlformats.org/drawingml/2006/main"/>
+          <a:p xmlns:a="http://schemas.openxmlformats.org/drawingml/2006/main">
+            <a:pPr>
+              <a:buNone/>
+              <a:defRPr sz="4350" b="1">
+                <a:solidFill>
+                  <a:srgbClr val="0E4B3B"/>
+                </a:solidFill>
+                <a:latin typeface="Georgia"/>
+                <a:ea typeface="Georgia"/>
+                <a:cs typeface="Georgia"/>
+              </a:defRPr>
+            </a:pPr>
+            <a:r>
+              <a:rPr sz="4350" b="1">
+                <a:solidFill>
+                  <a:srgbClr val="0E4B3B"/>
+                </a:solidFill>
+                <a:latin typeface="Georgia"/>
+                <a:ea typeface="Georgia"/>
+                <a:cs typeface="Georgia"/>
+              </a:rPr>
+              <a:t>1</a:t>
+            </a:r>
+          </a:p>
+        </p:txBody>
+      </p:sp>
+      <p:sp>
+        <p:nvSpPr>
+          <p:cNvPr id="4" name="metric-label-0">
+            <a:extLst xmlns:a="http://schemas.openxmlformats.org/drawingml/2006/main">
+              <a:ext uri="{FF2B5EF4-FFF2-40B4-BE49-F238E27FC236}">
+                <a16:creationId xmlns:a16="http://schemas.microsoft.com/office/drawing/2014/main" id="{94B9C37E-E44A-4911-823F-0818603B6764}"/>
+              </a:ext>
+            </a:extLst>
+          </p:cNvPr>
+          <p:cNvSpPr>
+            <a:spLocks xmlns:a="http://schemas.openxmlformats.org/drawingml/2006/main" noGrp="1"/>
+          </p:cNvSpPr>
+          <p:nvPr/>
+        </p:nvSpPr>
+        <p:spPr>
+          <a:xfrm xmlns:a="http://schemas.openxmlformats.org/drawingml/2006/main">
+            <a:off x="838200" y="3467100"/>
+            <a:ext cx="3476625" cy="523875"/>
+          </a:xfrm>
+          <a:prstGeom xmlns:a="http://schemas.openxmlformats.org/drawingml/2006/main" prst="rect">
+            <a:avLst/>
+          </a:prstGeom>
+          <a:noFill xmlns:a="http://schemas.openxmlformats.org/drawingml/2006/main"/>
+          <a:ln xmlns:a="http://schemas.openxmlformats.org/drawingml/2006/main" w="0">
+            <a:noFill/>
+            <a:prstDash val="solid"/>
+          </a:ln>
+        </p:spPr>
+        <p:txBody>
+          <a:bodyPr xmlns:a="http://schemas.openxmlformats.org/drawingml/2006/main" wrap="square" lIns="0" tIns="0" rIns="0" bIns="0">
+            <a:noAutofit/>
+          </a:bodyPr>
+          <a:lstStyle xmlns:a="http://schemas.openxmlformats.org/drawingml/2006/main"/>
+          <a:p xmlns:a="http://schemas.openxmlformats.org/drawingml/2006/main">
+            <a:pPr>
+              <a:buNone/>
+              <a:defRPr sz="1800">
+                <a:solidFill>
+                  <a:srgbClr val="6D7974"/>
+                </a:solidFill>
+                <a:latin typeface="Avenir Next"/>
+                <a:ea typeface="Avenir Next"/>
+                <a:cs typeface="Avenir Next"/>
+              </a:defRPr>
+            </a:pPr>
+            <a:r>
+              <a:rPr sz="1800">
+                <a:solidFill>
+                  <a:srgbClr val="6D7974"/>
+                </a:solidFill>
+                <a:latin typeface="Avenir Next"/>
+                <a:ea typeface="Avenir Next"/>
+                <a:cs typeface="Avenir Next"/>
+              </a:rPr>
+              <a:t>merchant and pickup point</a:t>
+            </a:r>
+          </a:p>
+        </p:txBody>
+      </p:sp>
+      <p:sp>
+        <p:nvSpPr>
+          <p:cNvPr id="5" name="metric-value-1">
+            <a:extLst xmlns:a="http://schemas.openxmlformats.org/drawingml/2006/main">
+              <a:ext uri="{FF2B5EF4-FFF2-40B4-BE49-F238E27FC236}">
+                <a16:creationId xmlns:a16="http://schemas.microsoft.com/office/drawing/2014/main" id="{C9AA5B59-8D6D-4578-BE98-DA2CCD78BACE}"/>
+              </a:ext>
+            </a:extLst>
+          </p:cNvPr>
+          <p:cNvSpPr>
+            <a:spLocks xmlns:a="http://schemas.openxmlformats.org/drawingml/2006/main" noGrp="1"/>
+          </p:cNvSpPr>
+          <p:nvPr/>
+        </p:nvSpPr>
+        <p:spPr>
+          <a:xfrm xmlns:a="http://schemas.openxmlformats.org/drawingml/2006/main">
+            <a:off x="838200" y="4133850"/>
+            <a:ext cx="2857500" cy="704850"/>
+          </a:xfrm>
+          <a:prstGeom xmlns:a="http://schemas.openxmlformats.org/drawingml/2006/main" prst="rect">
+            <a:avLst/>
+          </a:prstGeom>
+          <a:noFill xmlns:a="http://schemas.openxmlformats.org/drawingml/2006/main"/>
+          <a:ln xmlns:a="http://schemas.openxmlformats.org/drawingml/2006/main" w="0">
+            <a:noFill/>
+            <a:prstDash val="solid"/>
+          </a:ln>
+        </p:spPr>
+        <p:txBody>
+          <a:bodyPr xmlns:a="http://schemas.openxmlformats.org/drawingml/2006/main" wrap="square" lIns="0" tIns="0" rIns="0" bIns="0">
+            <a:noAutofit/>
+          </a:bodyPr>
+          <a:lstStyle xmlns:a="http://schemas.openxmlformats.org/drawingml/2006/main"/>
+          <a:p xmlns:a="http://schemas.openxmlformats.org/drawingml/2006/main">
+            <a:pPr>
+              <a:buNone/>
+              <a:defRPr sz="4350" b="1">
+                <a:solidFill>
+                  <a:srgbClr val="0E4B3B"/>
+                </a:solidFill>
+                <a:latin typeface="Georgia"/>
+                <a:ea typeface="Georgia"/>
+                <a:cs typeface="Georgia"/>
+              </a:defRPr>
+            </a:pPr>
+            <a:r>
+              <a:rPr sz="4350" b="1">
+                <a:solidFill>
+                  <a:srgbClr val="0E4B3B"/>
+                </a:solidFill>
+                <a:latin typeface="Georgia"/>
+                <a:ea typeface="Georgia"/>
+                <a:cs typeface="Georgia"/>
+              </a:rPr>
+              <a:t>4</a:t>
+            </a:r>
+          </a:p>
+        </p:txBody>
+      </p:sp>
+      <p:sp>
+        <p:nvSpPr>
+          <p:cNvPr id="6" name="metric-label-1">
+            <a:extLst xmlns:a="http://schemas.openxmlformats.org/drawingml/2006/main">
+              <a:ext uri="{FF2B5EF4-FFF2-40B4-BE49-F238E27FC236}">
+                <a16:creationId xmlns:a16="http://schemas.microsoft.com/office/drawing/2014/main" id="{D67D50E1-2330-405F-9814-8A977683F612}"/>
+              </a:ext>
+            </a:extLst>
+          </p:cNvPr>
+          <p:cNvSpPr>
+            <a:spLocks xmlns:a="http://schemas.openxmlformats.org/drawingml/2006/main" noGrp="1"/>
+          </p:cNvSpPr>
+          <p:nvPr/>
+        </p:nvSpPr>
+        <p:spPr>
+          <a:xfrm xmlns:a="http://schemas.openxmlformats.org/drawingml/2006/main">
+            <a:off x="838200" y="4819650"/>
+            <a:ext cx="3476625" cy="523875"/>
+          </a:xfrm>
+          <a:prstGeom xmlns:a="http://schemas.openxmlformats.org/drawingml/2006/main" prst="rect">
+            <a:avLst/>
+          </a:prstGeom>
+          <a:noFill xmlns:a="http://schemas.openxmlformats.org/drawingml/2006/main"/>
+          <a:ln xmlns:a="http://schemas.openxmlformats.org/drawingml/2006/main" w="0">
+            <a:noFill/>
+            <a:prstDash val="solid"/>
+          </a:ln>
+        </p:spPr>
+        <p:txBody>
+          <a:bodyPr xmlns:a="http://schemas.openxmlformats.org/drawingml/2006/main" wrap="square" lIns="0" tIns="0" rIns="0" bIns="0">
+            <a:noAutofit/>
+          </a:bodyPr>
+          <a:lstStyle xmlns:a="http://schemas.openxmlformats.org/drawingml/2006/main"/>
+          <a:p xmlns:a="http://schemas.openxmlformats.org/drawingml/2006/main">
+            <a:pPr>
+              <a:buNone/>
+              <a:defRPr sz="1800">
+                <a:solidFill>
+                  <a:srgbClr val="6D7974"/>
+                </a:solidFill>
+                <a:latin typeface="Avenir Next"/>
+                <a:ea typeface="Avenir Next"/>
+                <a:cs typeface="Avenir Next"/>
+              </a:defRPr>
+            </a:pPr>
+            <a:r>
+              <a:rPr sz="1800">
+                <a:solidFill>
+                  <a:srgbClr val="6D7974"/>
+                </a:solidFill>
+                <a:latin typeface="Avenir Next"/>
+                <a:ea typeface="Avenir Next"/>
+                <a:cs typeface="Avenir Next"/>
+              </a:rPr>
+              <a:t>compatible components</a:t>
+            </a:r>
+          </a:p>
+        </p:txBody>
+      </p:sp>
+      <p:sp>
+        <p:nvSpPr>
+          <p:cNvPr id="7" name="metric-value-2">
+            <a:extLst xmlns:a="http://schemas.openxmlformats.org/drawingml/2006/main">
+              <a:ext uri="{FF2B5EF4-FFF2-40B4-BE49-F238E27FC236}">
+                <a16:creationId xmlns:a16="http://schemas.microsoft.com/office/drawing/2014/main" id="{34A2351A-08FA-41EA-9E37-D15FDFEC6DD9}"/>
+              </a:ext>
+            </a:extLst>
+          </p:cNvPr>
+          <p:cNvSpPr>
+            <a:spLocks xmlns:a="http://schemas.openxmlformats.org/drawingml/2006/main" noGrp="1"/>
+          </p:cNvSpPr>
+          <p:nvPr/>
+        </p:nvSpPr>
+        <p:spPr>
+          <a:xfrm xmlns:a="http://schemas.openxmlformats.org/drawingml/2006/main">
+            <a:off x="838200" y="5486400"/>
+            <a:ext cx="2857500" cy="704850"/>
+          </a:xfrm>
+          <a:prstGeom xmlns:a="http://schemas.openxmlformats.org/drawingml/2006/main" prst="rect">
+            <a:avLst/>
+          </a:prstGeom>
+          <a:noFill xmlns:a="http://schemas.openxmlformats.org/drawingml/2006/main"/>
+          <a:ln xmlns:a="http://schemas.openxmlformats.org/drawingml/2006/main" w="0">
+            <a:noFill/>
+            <a:prstDash val="solid"/>
+          </a:ln>
+        </p:spPr>
+        <p:txBody>
+          <a:bodyPr xmlns:a="http://schemas.openxmlformats.org/drawingml/2006/main" wrap="square" lIns="0" tIns="0" rIns="0" bIns="0">
+            <a:noAutofit/>
+          </a:bodyPr>
+          <a:lstStyle xmlns:a="http://schemas.openxmlformats.org/drawingml/2006/main"/>
+          <a:p xmlns:a="http://schemas.openxmlformats.org/drawingml/2006/main">
+            <a:pPr>
+              <a:buNone/>
+              <a:defRPr sz="4350" b="1">
+                <a:solidFill>
+                  <a:srgbClr val="B64032"/>
+                </a:solidFill>
+                <a:latin typeface="Georgia"/>
+                <a:ea typeface="Georgia"/>
+                <a:cs typeface="Georgia"/>
+              </a:defRPr>
+            </a:pPr>
+            <a:r>
+              <a:rPr sz="4350" b="1">
+                <a:solidFill>
+                  <a:srgbClr val="B64032"/>
+                </a:solidFill>
+                <a:latin typeface="Georgia"/>
+                <a:ea typeface="Georgia"/>
+                <a:cs typeface="Georgia"/>
+              </a:rPr>
+              <a:t>S$133</a:t>
+            </a:r>
+          </a:p>
+        </p:txBody>
+      </p:sp>
+      <p:sp>
+        <p:nvSpPr>
+          <p:cNvPr id="8" name="metric-label-2">
+            <a:extLst xmlns:a="http://schemas.openxmlformats.org/drawingml/2006/main">
+              <a:ext uri="{FF2B5EF4-FFF2-40B4-BE49-F238E27FC236}">
+                <a16:creationId xmlns:a16="http://schemas.microsoft.com/office/drawing/2014/main" id="{E17DFFAD-5854-4414-BDBD-56E6D52F7CF6}"/>
+              </a:ext>
+            </a:extLst>
+          </p:cNvPr>
+          <p:cNvSpPr>
+            <a:spLocks xmlns:a="http://schemas.openxmlformats.org/drawingml/2006/main" noGrp="1"/>
+          </p:cNvSpPr>
+          <p:nvPr/>
+        </p:nvSpPr>
+        <p:spPr>
+          <a:xfrm xmlns:a="http://schemas.openxmlformats.org/drawingml/2006/main">
+            <a:off x="838200" y="6172200"/>
+            <a:ext cx="3476625" cy="523875"/>
+          </a:xfrm>
+          <a:prstGeom xmlns:a="http://schemas.openxmlformats.org/drawingml/2006/main" prst="rect">
+            <a:avLst/>
+          </a:prstGeom>
+          <a:noFill xmlns:a="http://schemas.openxmlformats.org/drawingml/2006/main"/>
+          <a:ln xmlns:a="http://schemas.openxmlformats.org/drawingml/2006/main" w="0">
+            <a:noFill/>
+            <a:prstDash val="solid"/>
+          </a:ln>
+        </p:spPr>
+        <p:txBody>
+          <a:bodyPr xmlns:a="http://schemas.openxmlformats.org/drawingml/2006/main" wrap="square" lIns="0" tIns="0" rIns="0" bIns="0">
+            <a:noAutofit/>
+          </a:bodyPr>
+          <a:lstStyle xmlns:a="http://schemas.openxmlformats.org/drawingml/2006/main"/>
+          <a:p xmlns:a="http://schemas.openxmlformats.org/drawingml/2006/main">
+            <a:pPr>
+              <a:buNone/>
+              <a:defRPr sz="1800">
+                <a:solidFill>
+                  <a:srgbClr val="6D7974"/>
+                </a:solidFill>
+                <a:latin typeface="Avenir Next"/>
+                <a:ea typeface="Avenir Next"/>
+                <a:cs typeface="Avenir Next"/>
+              </a:defRPr>
+            </a:pPr>
+            <a:r>
+              <a:rPr sz="1800">
+                <a:solidFill>
+                  <a:srgbClr val="6D7974"/>
+                </a:solidFill>
+                <a:latin typeface="Avenir Next"/>
+                <a:ea typeface="Avenir Next"/>
+                <a:cs typeface="Avenir Next"/>
+              </a:rPr>
+              <a:t>under budget · pickup today</a:t>
+            </a:r>
+          </a:p>
+        </p:txBody>
+      </p:sp>
+      <p:sp>
+        <p:nvSpPr>
+          <p:cNvPr id="9" name="Woven buyer view showing the mission and three complete carts-backplate">
+            <a:extLst xmlns:a="http://schemas.openxmlformats.org/drawingml/2006/main">
+              <a:ext uri="{FF2B5EF4-FFF2-40B4-BE49-F238E27FC236}">
+                <a16:creationId xmlns:a16="http://schemas.microsoft.com/office/drawing/2014/main" id="{ABE8B1E6-CCF5-4ADE-BE71-0884CDDECEDA}"/>
+              </a:ext>
+            </a:extLst>
+          </p:cNvPr>
+          <p:cNvSpPr>
+            <a:spLocks xmlns:a="http://schemas.openxmlformats.org/drawingml/2006/main" noGrp="1"/>
+          </p:cNvSpPr>
+          <p:nvPr/>
+        </p:nvSpPr>
+        <p:spPr>
+          <a:xfrm xmlns:a="http://schemas.openxmlformats.org/drawingml/2006/main">
+            <a:off x="4762500" y="2381250"/>
+            <a:ext cx="9525000" cy="5438775"/>
+          </a:xfrm>
+          <a:prstGeom xmlns:a="http://schemas.openxmlformats.org/drawingml/2006/main" prst="roundRect">
+            <a:avLst>
+              <a:gd name="adj" fmla="val 4203"/>
+            </a:avLst>
+          </a:prstGeom>
+          <a:solidFill xmlns:a="http://schemas.openxmlformats.org/drawingml/2006/main">
+            <a:srgbClr val="FFFFFF"/>
+          </a:solidFill>
+          <a:ln xmlns:a="http://schemas.openxmlformats.org/drawingml/2006/main" w="0">
+            <a:noFill/>
+            <a:prstDash val="solid"/>
+          </a:ln>
+        </p:spPr>
+        <p:style>
+          <a:lnRef xmlns:a="http://schemas.openxmlformats.org/drawingml/2006/main" idx="0"/>
+          <a:fillRef xmlns:a="http://schemas.openxmlformats.org/drawingml/2006/main" idx="0"/>
+          <a:effectRef xmlns:a="http://schemas.openxmlformats.org/drawingml/2006/main" idx="7"/>
+          <a:fontRef xmlns:a="http://schemas.openxmlformats.org/drawingml/2006/main" idx="major"/>
+        </p:style>
+      </p:sp>
+      <p:pic>
+        <p:nvPicPr>
+          <p:cNvPr id="24" name=""/>
+          <p:cNvPicPr>
+            <a:picLocks xmlns:a="http://schemas.openxmlformats.org/drawingml/2006/main" noChangeAspect="1"/>
+          </p:cNvPicPr>
+          <p:nvPr/>
+        </p:nvPicPr>
+        <p:blipFill>
+          <a:blip xmlns:r="http://schemas.openxmlformats.org/officeDocument/2006/relationships" xmlns:a="http://schemas.openxmlformats.org/drawingml/2006/main" r:embed="Rf8dbf73363c04e97"/>
+          <a:stretch xmlns:a="http://schemas.openxmlformats.org/drawingml/2006/main"/>
+        </p:blipFill>
+        <p:spPr>
+          <a:xfrm xmlns:a="http://schemas.openxmlformats.org/drawingml/2006/main" flipH="0" flipV="0">
+            <a:off x="4859867" y="2476500"/>
+            <a:ext cx="9330267" cy="5248275"/>
+          </a:xfrm>
+          <a:prstGeom xmlns:a="http://schemas.openxmlformats.org/drawingml/2006/main" prst="roundRect">
+            <a:avLst/>
+          </a:prstGeom>
+        </p:spPr>
+      </p:pic>
+      <p:sp>
+        <p:nvSpPr>
+          <p:cNvPr id="11" name="footer-label-4">
+            <a:extLst xmlns:a="http://schemas.openxmlformats.org/drawingml/2006/main">
+              <a:ext uri="{FF2B5EF4-FFF2-40B4-BE49-F238E27FC236}">
+                <a16:creationId xmlns:a16="http://schemas.microsoft.com/office/drawing/2014/main" id="{0BF00BD6-0EB2-48D5-B38D-D1AF7B5A15E4}"/>
+              </a:ext>
+            </a:extLst>
+          </p:cNvPr>
+          <p:cNvSpPr>
+            <a:spLocks xmlns:a="http://schemas.openxmlformats.org/drawingml/2006/main" noGrp="1"/>
+          </p:cNvSpPr>
+          <p:nvPr/>
+        </p:nvSpPr>
+        <p:spPr>
+          <a:xfrm xmlns:a="http://schemas.openxmlformats.org/drawingml/2006/main">
+            <a:off x="838200" y="8020050"/>
+            <a:ext cx="5334000" cy="228600"/>
+          </a:xfrm>
+          <a:prstGeom xmlns:a="http://schemas.openxmlformats.org/drawingml/2006/main" prst="rect">
+            <a:avLst/>
+          </a:prstGeom>
+          <a:noFill xmlns:a="http://schemas.openxmlformats.org/drawingml/2006/main"/>
+          <a:ln xmlns:a="http://schemas.openxmlformats.org/drawingml/2006/main" w="0">
+            <a:noFill/>
+            <a:prstDash val="solid"/>
+          </a:ln>
+        </p:spPr>
+        <p:txBody>
+          <a:bodyPr xmlns:a="http://schemas.openxmlformats.org/drawingml/2006/main" wrap="square" lIns="0" tIns="0" rIns="0" bIns="0">
+            <a:noAutofit/>
+          </a:bodyPr>
+          <a:lstStyle xmlns:a="http://schemas.openxmlformats.org/drawingml/2006/main"/>
+          <a:p xmlns:a="http://schemas.openxmlformats.org/drawingml/2006/main">
+            <a:pPr>
+              <a:buNone/>
+              <a:defRPr sz="1200" b="1">
+                <a:solidFill>
+                  <a:srgbClr val="6D7974"/>
+                </a:solidFill>
+                <a:latin typeface="Menlo"/>
+                <a:ea typeface="Menlo"/>
+                <a:cs typeface="Menlo"/>
+              </a:defRPr>
+            </a:pPr>
+            <a:r>
+              <a:rPr sz="1200" b="1">
+                <a:solidFill>
+                  <a:srgbClr val="6D7974"/>
+                </a:solidFill>
+                <a:latin typeface="Menlo"/>
+                <a:ea typeface="Menlo"/>
+                <a:cs typeface="Menlo"/>
+              </a:rPr>
+              <a:t>WOVEN  /  LIFEHACK 2026</a:t>
+            </a:r>
+          </a:p>
+        </p:txBody>
+      </p:sp>
+      <p:sp>
+        <p:nvSpPr>
+          <p:cNvPr id="12" name="footer-number-4">
+            <a:extLst xmlns:a="http://schemas.openxmlformats.org/drawingml/2006/main">
+              <a:ext uri="{FF2B5EF4-FFF2-40B4-BE49-F238E27FC236}">
+                <a16:creationId xmlns:a16="http://schemas.microsoft.com/office/drawing/2014/main" id="{3F952AB5-B91A-4BD1-8A1D-8B5E6278D833}"/>
+              </a:ext>
+            </a:extLst>
+          </p:cNvPr>
+          <p:cNvSpPr>
+            <a:spLocks xmlns:a="http://schemas.openxmlformats.org/drawingml/2006/main" noGrp="1"/>
+          </p:cNvSpPr>
+          <p:nvPr/>
+        </p:nvSpPr>
+        <p:spPr>
+          <a:xfrm xmlns:a="http://schemas.openxmlformats.org/drawingml/2006/main">
+            <a:off x="13620750" y="8001000"/>
+            <a:ext cx="762000" cy="247650"/>
+          </a:xfrm>
+          <a:prstGeom xmlns:a="http://schemas.openxmlformats.org/drawingml/2006/main" prst="rect">
+            <a:avLst/>
+          </a:prstGeom>
+          <a:noFill xmlns:a="http://schemas.openxmlformats.org/drawingml/2006/main"/>
+          <a:ln xmlns:a="http://schemas.openxmlformats.org/drawingml/2006/main" w="0">
+            <a:noFill/>
+            <a:prstDash val="solid"/>
+          </a:ln>
+        </p:spPr>
+        <p:txBody>
+          <a:bodyPr xmlns:a="http://schemas.openxmlformats.org/drawingml/2006/main" wrap="square" lIns="0" tIns="0" rIns="0" bIns="0">
+            <a:noAutofit/>
+          </a:bodyPr>
+          <a:lstStyle xmlns:a="http://schemas.openxmlformats.org/drawingml/2006/main"/>
+          <a:p xmlns:a="http://schemas.openxmlformats.org/drawingml/2006/main">
+            <a:pPr algn="r">
+              <a:buNone/>
+              <a:defRPr sz="1350" b="1">
+                <a:solidFill>
+                  <a:srgbClr val="6D7974"/>
+                </a:solidFill>
+                <a:latin typeface="Menlo"/>
+                <a:ea typeface="Menlo"/>
+                <a:cs typeface="Menlo"/>
+              </a:defRPr>
+            </a:pPr>
+            <a:r>
+              <a:rPr sz="1350" b="1">
+                <a:solidFill>
+                  <a:srgbClr val="6D7974"/>
+                </a:solidFill>
+                <a:latin typeface="Menlo"/>
+                <a:ea typeface="Menlo"/>
+                <a:cs typeface="Menlo"/>
+              </a:rPr>
+              <a:t>03</a:t>
+            </a:r>
+          </a:p>
+        </p:txBody>
+      </p:sp>
+    </p:spTree>
+    <p:extLst>
+      <p:ext uri="{BB962C8B-B14F-4D97-AF65-F5344CB8AC3E}">
+        <p14:creationId xmlns:p14="http://schemas.microsoft.com/office/powerpoint/2010/main" val="512233516"/>
+      </p:ext>
+    </p:extLst>
+  </p:cSld>
+</p:sld>
+</file>
+
+<file path=ppt/slides/slide4.xml><?xml version="1.0" encoding="utf-8"?>
 <p:sld xmlns:p="http://schemas.openxmlformats.org/presentationml/2006/main">
   <p:cSld>
     <p:bg>
@@ -2903,7 +4972,7 @@
                 <a:ea typeface="Menlo"/>
                 <a:cs typeface="Menlo"/>
               </a:rPr>
-              <a:t>THE INSIGHT</a:t>
+              <a:t>LIVE DEMONSTRATION</a:t>
             </a:r>
           </a:p>
         </p:txBody>
@@ -2965,7 +5034,7 @@
                 <a:ea typeface="Georgia"/>
                 <a:cs typeface="Georgia"/>
               </a:rPr>
-              <a:t>The next storefront is the conversation.</a:t>
+              <a:t>Ask once. Let the result prove the value.</a:t>
             </a:r>
           </a:p>
         </p:txBody>
@@ -3611,7 +5680,7 @@
                 <a:ea typeface="Menlo"/>
                 <a:cs typeface="Menlo"/>
               </a:rPr>
-              <a:t>5 hard constraints. 1 natural sentence.</a:t>
+              <a:t>3 complete carts. 1 natural sentence.</a:t>
             </a:r>
           </a:p>
         </p:txBody>
@@ -3729,7 +5798,7 @@
                 <a:ea typeface="Menlo"/>
                 <a:cs typeface="Menlo"/>
               </a:rPr>
-              <a:t>03</a:t>
+              <a:t>04</a:t>
             </a:r>
           </a:p>
         </p:txBody>
@@ -3744,7 +5813,7 @@
 </p:sld>
 </file>
 
-<file path=ppt/slides/slide4.xml><?xml version="1.0" encoding="utf-8"?>
+<file path=ppt/slides/slide5.xml><?xml version="1.0" encoding="utf-8"?>
 <p:sld xmlns:p="http://schemas.openxmlformats.org/presentationml/2006/main">
   <p:cSld>
     <p:bg>
@@ -3765,10 +5834,10 @@
       </p:grpSpPr>
       <p:sp>
         <p:nvSpPr>
-          <p:cNvPr id="13" name="eyebrow-The product">
-            <a:extLst xmlns:a="http://schemas.openxmlformats.org/drawingml/2006/main">
-              <a:ext uri="{FF2B5EF4-FFF2-40B4-BE49-F238E27FC236}">
-                <a16:creationId xmlns:a16="http://schemas.microsoft.com/office/drawing/2014/main" id="{07A88F95-BFF8-48C4-862D-F9984BCFD9CA}"/>
+          <p:cNvPr id="18" name="eyebrow-The problem">
+            <a:extLst xmlns:a="http://schemas.openxmlformats.org/drawingml/2006/main">
+              <a:ext uri="{FF2B5EF4-FFF2-40B4-BE49-F238E27FC236}">
+                <a16:creationId xmlns:a16="http://schemas.microsoft.com/office/drawing/2014/main" id="{44E2CD68-0B5C-4392-A350-CCF598C308CA}"/>
               </a:ext>
             </a:extLst>
           </p:cNvPr>
@@ -3817,17 +5886,17 @@
                 <a:ea typeface="Menlo"/>
                 <a:cs typeface="Menlo"/>
               </a:rPr>
-              <a:t>THE PRODUCT</a:t>
-            </a:r>
-          </a:p>
-        </p:txBody>
-      </p:sp>
-      <p:sp>
-        <p:nvSpPr>
-          <p:cNvPr id="2" name="title-Woven turns intent into a complete cart.">
-            <a:extLst xmlns:a="http://schemas.openxmlformats.org/drawingml/2006/main">
-              <a:ext uri="{FF2B5EF4-FFF2-40B4-BE49-F238E27FC236}">
-                <a16:creationId xmlns:a16="http://schemas.microsoft.com/office/drawing/2014/main" id="{044C183A-E528-4271-8878-340DBD49AD32}"/>
+              <a:t>THE TRUST BOUNDARY</a:t>
+            </a:r>
+          </a:p>
+        </p:txBody>
+      </p:sp>
+      <p:sp>
+        <p:nvSpPr>
+          <p:cNvPr id="2" name="title-Search finds products. People need complete outcomes.">
+            <a:extLst xmlns:a="http://schemas.openxmlformats.org/drawingml/2006/main">
+              <a:ext uri="{FF2B5EF4-FFF2-40B4-BE49-F238E27FC236}">
+                <a16:creationId xmlns:a16="http://schemas.microsoft.com/office/drawing/2014/main" id="{68D09165-98E1-4BBB-8261-E28C47B97877}"/>
               </a:ext>
             </a:extLst>
           </p:cNvPr>
@@ -3839,7 +5908,7 @@
         <p:spPr>
           <a:xfrm xmlns:a="http://schemas.openxmlformats.org/drawingml/2006/main">
             <a:off x="838200" y="990600"/>
-            <a:ext cx="13239750" cy="1028700"/>
+            <a:ext cx="13525500" cy="1028700"/>
           </a:xfrm>
           <a:prstGeom xmlns:a="http://schemas.openxmlformats.org/drawingml/2006/main" prst="rect">
             <a:avLst/>
@@ -3879,50 +5948,53 @@
                 <a:ea typeface="Georgia"/>
                 <a:cs typeface="Georgia"/>
               </a:rPr>
-              <a:t>Woven turns intent into a complete cart.</a:t>
-            </a:r>
-          </a:p>
-        </p:txBody>
-      </p:sp>
-      <p:sp>
-        <p:nvSpPr>
-          <p:cNvPr id="3" name="metric-value-0">
-            <a:extLst xmlns:a="http://schemas.openxmlformats.org/drawingml/2006/main">
-              <a:ext uri="{FF2B5EF4-FFF2-40B4-BE49-F238E27FC236}">
-                <a16:creationId xmlns:a16="http://schemas.microsoft.com/office/drawing/2014/main" id="{E720D8B4-0DC5-4C28-87E9-44D51229EF85}"/>
-              </a:ext>
-            </a:extLst>
-          </p:cNvPr>
-          <p:cNvSpPr>
-            <a:spLocks xmlns:a="http://schemas.openxmlformats.org/drawingml/2006/main" noGrp="1"/>
-          </p:cNvSpPr>
-          <p:nvPr/>
-        </p:nvSpPr>
-        <p:spPr>
-          <a:xfrm xmlns:a="http://schemas.openxmlformats.org/drawingml/2006/main">
-            <a:off x="838200" y="2781300"/>
-            <a:ext cx="2857500" cy="704850"/>
-          </a:xfrm>
-          <a:prstGeom xmlns:a="http://schemas.openxmlformats.org/drawingml/2006/main" prst="rect">
-            <a:avLst/>
-          </a:prstGeom>
-          <a:noFill xmlns:a="http://schemas.openxmlformats.org/drawingml/2006/main"/>
-          <a:ln xmlns:a="http://schemas.openxmlformats.org/drawingml/2006/main" w="0">
-            <a:noFill/>
-            <a:prstDash val="solid"/>
-          </a:ln>
-        </p:spPr>
-        <p:txBody>
-          <a:bodyPr xmlns:a="http://schemas.openxmlformats.org/drawingml/2006/main" wrap="square" lIns="0" tIns="0" rIns="0" bIns="0">
-            <a:noAutofit/>
-          </a:bodyPr>
-          <a:lstStyle xmlns:a="http://schemas.openxmlformats.org/drawingml/2006/main"/>
-          <a:p xmlns:a="http://schemas.openxmlformats.org/drawingml/2006/main">
-            <a:pPr>
-              <a:buNone/>
-              <a:defRPr sz="4350" b="1">
-                <a:solidFill>
-                  <a:srgbClr val="0E4B3B"/>
+              <a:t>The AI recommends. The user authorizes.</a:t>
+            </a:r>
+          </a:p>
+        </p:txBody>
+      </p:sp>
+      <p:sp>
+        <p:nvSpPr>
+          <p:cNvPr id="3" name="problem-big-claim">
+            <a:extLst xmlns:a="http://schemas.openxmlformats.org/drawingml/2006/main">
+              <a:ext uri="{FF2B5EF4-FFF2-40B4-BE49-F238E27FC236}">
+                <a16:creationId xmlns:a16="http://schemas.microsoft.com/office/drawing/2014/main" id="{859D58A8-50A8-4A2E-A3EB-F5B97876071B}"/>
+              </a:ext>
+            </a:extLst>
+          </p:cNvPr>
+          <p:cNvSpPr>
+            <a:spLocks xmlns:a="http://schemas.openxmlformats.org/drawingml/2006/main" noGrp="1"/>
+          </p:cNvSpPr>
+          <p:nvPr/>
+        </p:nvSpPr>
+        <p:spPr>
+          <a:xfrm xmlns:a="http://schemas.openxmlformats.org/drawingml/2006/main">
+            <a:off x="838200" y="2628900"/>
+            <a:ext cx="5429250" cy="1695450"/>
+          </a:xfrm>
+          <a:prstGeom xmlns:a="http://schemas.openxmlformats.org/drawingml/2006/main" prst="rect">
+            <a:avLst/>
+          </a:prstGeom>
+          <a:noFill xmlns:a="http://schemas.openxmlformats.org/drawingml/2006/main"/>
+          <a:ln xmlns:a="http://schemas.openxmlformats.org/drawingml/2006/main" w="0">
+            <a:noFill/>
+            <a:prstDash val="solid"/>
+          </a:ln>
+        </p:spPr>
+        <p:txBody>
+          <a:bodyPr xmlns:a="http://schemas.openxmlformats.org/drawingml/2006/main" wrap="square" lIns="0" tIns="0" rIns="0" bIns="0">
+            <a:noAutofit/>
+          </a:bodyPr>
+          <a:lstStyle xmlns:a="http://schemas.openxmlformats.org/drawingml/2006/main"/>
+          <a:p xmlns:a="http://schemas.openxmlformats.org/drawingml/2006/main">
+            <a:pPr>
+              <a:lnSpc>
+                <a:spcPct val="96000"/>
+              </a:lnSpc>
+              <a:buNone/>
+              <a:defRPr sz="3600" b="1">
+                <a:solidFill>
+                  <a:srgbClr val="B64032"/>
                 </a:solidFill>
                 <a:latin typeface="Georgia"/>
                 <a:ea typeface="Georgia"/>
@@ -3930,58 +6002,149 @@
               </a:defRPr>
             </a:pPr>
             <a:r>
-              <a:rPr sz="4350" b="1">
-                <a:solidFill>
-                  <a:srgbClr val="0E4B3B"/>
+              <a:rPr sz="3600" b="1">
+                <a:solidFill>
+                  <a:srgbClr val="B64032"/>
                 </a:solidFill>
                 <a:latin typeface="Georgia"/>
                 <a:ea typeface="Georgia"/>
                 <a:cs typeface="Georgia"/>
               </a:rPr>
-              <a:t>3</a:t>
-            </a:r>
-          </a:p>
-        </p:txBody>
-      </p:sp>
-      <p:sp>
-        <p:nvSpPr>
-          <p:cNvPr id="4" name="metric-label-0">
-            <a:extLst xmlns:a="http://schemas.openxmlformats.org/drawingml/2006/main">
-              <a:ext uri="{FF2B5EF4-FFF2-40B4-BE49-F238E27FC236}">
-                <a16:creationId xmlns:a16="http://schemas.microsoft.com/office/drawing/2014/main" id="{94B9C37E-E44A-4911-823F-0818603B6764}"/>
-              </a:ext>
-            </a:extLst>
-          </p:cNvPr>
-          <p:cNvSpPr>
-            <a:spLocks xmlns:a="http://schemas.openxmlformats.org/drawingml/2006/main" noGrp="1"/>
-          </p:cNvSpPr>
-          <p:nvPr/>
-        </p:nvSpPr>
-        <p:spPr>
-          <a:xfrm xmlns:a="http://schemas.openxmlformats.org/drawingml/2006/main">
-            <a:off x="838200" y="3467100"/>
-            <a:ext cx="3476625" cy="523875"/>
-          </a:xfrm>
-          <a:prstGeom xmlns:a="http://schemas.openxmlformats.org/drawingml/2006/main" prst="rect">
-            <a:avLst/>
-          </a:prstGeom>
-          <a:noFill xmlns:a="http://schemas.openxmlformats.org/drawingml/2006/main"/>
-          <a:ln xmlns:a="http://schemas.openxmlformats.org/drawingml/2006/main" w="0">
-            <a:noFill/>
-            <a:prstDash val="solid"/>
-          </a:ln>
-        </p:spPr>
-        <p:txBody>
-          <a:bodyPr xmlns:a="http://schemas.openxmlformats.org/drawingml/2006/main" wrap="square" lIns="0" tIns="0" rIns="0" bIns="0">
-            <a:noAutofit/>
-          </a:bodyPr>
-          <a:lstStyle xmlns:a="http://schemas.openxmlformats.org/drawingml/2006/main"/>
-          <a:p xmlns:a="http://schemas.openxmlformats.org/drawingml/2006/main">
-            <a:pPr>
-              <a:buNone/>
-              <a:defRPr sz="1800">
+              <a:t>Identity is the
+next integration.</a:t>
+            </a:r>
+          </a:p>
+        </p:txBody>
+      </p:sp>
+      <p:sp>
+        <p:nvSpPr>
+          <p:cNvPr id="4" name="problem-line-0">
+            <a:extLst xmlns:a="http://schemas.openxmlformats.org/drawingml/2006/main">
+              <a:ext uri="{FF2B5EF4-FFF2-40B4-BE49-F238E27FC236}">
+                <a16:creationId xmlns:a16="http://schemas.microsoft.com/office/drawing/2014/main" id="{F6EFC167-1810-4F7B-8BCB-F004476B0D78}"/>
+              </a:ext>
+            </a:extLst>
+          </p:cNvPr>
+          <p:cNvSpPr>
+            <a:spLocks xmlns:a="http://schemas.openxmlformats.org/drawingml/2006/main" noGrp="1"/>
+          </p:cNvSpPr>
+          <p:nvPr/>
+        </p:nvSpPr>
+        <p:spPr>
+          <a:xfrm xmlns:a="http://schemas.openxmlformats.org/drawingml/2006/main">
+            <a:off x="7029450" y="2495550"/>
+            <a:ext cx="7239000" cy="0"/>
+          </a:xfrm>
+          <a:prstGeom xmlns:a="http://schemas.openxmlformats.org/drawingml/2006/main" prst="line">
+            <a:avLst/>
+          </a:prstGeom>
+          <a:noFill xmlns:a="http://schemas.openxmlformats.org/drawingml/2006/main"/>
+          <a:ln xmlns:a="http://schemas.openxmlformats.org/drawingml/2006/main" w="47625">
+            <a:solidFill>
+              <a:srgbClr val="B7F522"/>
+            </a:solidFill>
+            <a:prstDash val="solid"/>
+          </a:ln>
+        </p:spPr>
+      </p:sp>
+      <p:sp>
+        <p:nvSpPr>
+          <p:cNvPr id="5" name="problem-num-0">
+            <a:extLst xmlns:a="http://schemas.openxmlformats.org/drawingml/2006/main">
+              <a:ext uri="{FF2B5EF4-FFF2-40B4-BE49-F238E27FC236}">
+                <a16:creationId xmlns:a16="http://schemas.microsoft.com/office/drawing/2014/main" id="{49F19DE5-0CDD-49DA-B021-0FD522A3AA82}"/>
+              </a:ext>
+            </a:extLst>
+          </p:cNvPr>
+          <p:cNvSpPr>
+            <a:spLocks xmlns:a="http://schemas.openxmlformats.org/drawingml/2006/main" noGrp="1"/>
+          </p:cNvSpPr>
+          <p:nvPr/>
+        </p:nvSpPr>
+        <p:spPr>
+          <a:xfrm xmlns:a="http://schemas.openxmlformats.org/drawingml/2006/main">
+            <a:off x="7029450" y="2695575"/>
+            <a:ext cx="685800" cy="361950"/>
+          </a:xfrm>
+          <a:prstGeom xmlns:a="http://schemas.openxmlformats.org/drawingml/2006/main" prst="rect">
+            <a:avLst/>
+          </a:prstGeom>
+          <a:noFill xmlns:a="http://schemas.openxmlformats.org/drawingml/2006/main"/>
+          <a:ln xmlns:a="http://schemas.openxmlformats.org/drawingml/2006/main" w="0">
+            <a:noFill/>
+            <a:prstDash val="solid"/>
+          </a:ln>
+        </p:spPr>
+        <p:txBody>
+          <a:bodyPr xmlns:a="http://schemas.openxmlformats.org/drawingml/2006/main" wrap="square" lIns="0" tIns="0" rIns="0" bIns="0">
+            <a:noAutofit/>
+          </a:bodyPr>
+          <a:lstStyle xmlns:a="http://schemas.openxmlformats.org/drawingml/2006/main"/>
+          <a:p xmlns:a="http://schemas.openxmlformats.org/drawingml/2006/main">
+            <a:pPr>
+              <a:buNone/>
+              <a:defRPr sz="1650" b="1">
                 <a:solidFill>
                   <a:srgbClr val="6D7974"/>
+                </a:solidFill>
+                <a:latin typeface="Menlo"/>
+                <a:ea typeface="Menlo"/>
+                <a:cs typeface="Menlo"/>
+              </a:defRPr>
+            </a:pPr>
+            <a:r>
+              <a:rPr sz="1650" b="1">
+                <a:solidFill>
+                  <a:srgbClr val="6D7974"/>
+                </a:solidFill>
+                <a:latin typeface="Menlo"/>
+                <a:ea typeface="Menlo"/>
+                <a:cs typeface="Menlo"/>
+              </a:rPr>
+              <a:t>01</a:t>
+            </a:r>
+          </a:p>
+        </p:txBody>
+      </p:sp>
+      <p:sp>
+        <p:nvSpPr>
+          <p:cNvPr id="6" name="problem-heading-0">
+            <a:extLst xmlns:a="http://schemas.openxmlformats.org/drawingml/2006/main">
+              <a:ext uri="{FF2B5EF4-FFF2-40B4-BE49-F238E27FC236}">
+                <a16:creationId xmlns:a16="http://schemas.microsoft.com/office/drawing/2014/main" id="{CE772126-66DC-4086-BD1B-464082B7C4AB}"/>
+              </a:ext>
+            </a:extLst>
+          </p:cNvPr>
+          <p:cNvSpPr>
+            <a:spLocks xmlns:a="http://schemas.openxmlformats.org/drawingml/2006/main" noGrp="1"/>
+          </p:cNvSpPr>
+          <p:nvPr/>
+        </p:nvSpPr>
+        <p:spPr>
+          <a:xfrm xmlns:a="http://schemas.openxmlformats.org/drawingml/2006/main">
+            <a:off x="7905750" y="2667000"/>
+            <a:ext cx="2952750" cy="400050"/>
+          </a:xfrm>
+          <a:prstGeom xmlns:a="http://schemas.openxmlformats.org/drawingml/2006/main" prst="rect">
+            <a:avLst/>
+          </a:prstGeom>
+          <a:noFill xmlns:a="http://schemas.openxmlformats.org/drawingml/2006/main"/>
+          <a:ln xmlns:a="http://schemas.openxmlformats.org/drawingml/2006/main" w="0">
+            <a:noFill/>
+            <a:prstDash val="solid"/>
+          </a:ln>
+        </p:spPr>
+        <p:txBody>
+          <a:bodyPr xmlns:a="http://schemas.openxmlformats.org/drawingml/2006/main" wrap="square" lIns="0" tIns="0" rIns="0" bIns="0">
+            <a:noAutofit/>
+          </a:bodyPr>
+          <a:lstStyle xmlns:a="http://schemas.openxmlformats.org/drawingml/2006/main"/>
+          <a:p xmlns:a="http://schemas.openxmlformats.org/drawingml/2006/main">
+            <a:pPr>
+              <a:buNone/>
+              <a:defRPr sz="2250" b="1">
+                <a:solidFill>
+                  <a:srgbClr val="0E4B3B"/>
                 </a:solidFill>
                 <a:latin typeface="Avenir Next"/>
                 <a:ea typeface="Avenir Next"/>
@@ -3989,113 +6152,57 @@
               </a:defRPr>
             </a:pPr>
             <a:r>
-              <a:rPr sz="1800">
-                <a:solidFill>
-                  <a:srgbClr val="6D7974"/>
+              <a:rPr sz="2250" b="1">
+                <a:solidFill>
+                  <a:srgbClr val="0E4B3B"/>
                 </a:solidFill>
                 <a:latin typeface="Avenir Next"/>
                 <a:ea typeface="Avenir Next"/>
                 <a:cs typeface="Avenir Next"/>
               </a:rPr>
-              <a:t>ranked, complete carts</a:t>
-            </a:r>
-          </a:p>
-        </p:txBody>
-      </p:sp>
-      <p:sp>
-        <p:nvSpPr>
-          <p:cNvPr id="5" name="metric-value-1">
-            <a:extLst xmlns:a="http://schemas.openxmlformats.org/drawingml/2006/main">
-              <a:ext uri="{FF2B5EF4-FFF2-40B4-BE49-F238E27FC236}">
-                <a16:creationId xmlns:a16="http://schemas.microsoft.com/office/drawing/2014/main" id="{C9AA5B59-8D6D-4578-BE98-DA2CCD78BACE}"/>
-              </a:ext>
-            </a:extLst>
-          </p:cNvPr>
-          <p:cNvSpPr>
-            <a:spLocks xmlns:a="http://schemas.openxmlformats.org/drawingml/2006/main" noGrp="1"/>
-          </p:cNvSpPr>
-          <p:nvPr/>
-        </p:nvSpPr>
-        <p:spPr>
-          <a:xfrm xmlns:a="http://schemas.openxmlformats.org/drawingml/2006/main">
-            <a:off x="838200" y="4133850"/>
-            <a:ext cx="2857500" cy="704850"/>
-          </a:xfrm>
-          <a:prstGeom xmlns:a="http://schemas.openxmlformats.org/drawingml/2006/main" prst="rect">
-            <a:avLst/>
-          </a:prstGeom>
-          <a:noFill xmlns:a="http://schemas.openxmlformats.org/drawingml/2006/main"/>
-          <a:ln xmlns:a="http://schemas.openxmlformats.org/drawingml/2006/main" w="0">
-            <a:noFill/>
-            <a:prstDash val="solid"/>
-          </a:ln>
-        </p:spPr>
-        <p:txBody>
-          <a:bodyPr xmlns:a="http://schemas.openxmlformats.org/drawingml/2006/main" wrap="square" lIns="0" tIns="0" rIns="0" bIns="0">
-            <a:noAutofit/>
-          </a:bodyPr>
-          <a:lstStyle xmlns:a="http://schemas.openxmlformats.org/drawingml/2006/main"/>
-          <a:p xmlns:a="http://schemas.openxmlformats.org/drawingml/2006/main">
-            <a:pPr>
-              <a:buNone/>
-              <a:defRPr sz="4350" b="1">
-                <a:solidFill>
-                  <a:srgbClr val="0E4B3B"/>
-                </a:solidFill>
-                <a:latin typeface="Georgia"/>
-                <a:ea typeface="Georgia"/>
-                <a:cs typeface="Georgia"/>
-              </a:defRPr>
-            </a:pPr>
-            <a:r>
-              <a:rPr sz="4350" b="1">
-                <a:solidFill>
-                  <a:srgbClr val="0E4B3B"/>
-                </a:solidFill>
-                <a:latin typeface="Georgia"/>
-                <a:ea typeface="Georgia"/>
-                <a:cs typeface="Georgia"/>
-              </a:rPr>
-              <a:t>1</a:t>
-            </a:r>
-          </a:p>
-        </p:txBody>
-      </p:sp>
-      <p:sp>
-        <p:nvSpPr>
-          <p:cNvPr id="6" name="metric-label-1">
-            <a:extLst xmlns:a="http://schemas.openxmlformats.org/drawingml/2006/main">
-              <a:ext uri="{FF2B5EF4-FFF2-40B4-BE49-F238E27FC236}">
-                <a16:creationId xmlns:a16="http://schemas.microsoft.com/office/drawing/2014/main" id="{D67D50E1-2330-405F-9814-8A977683F612}"/>
-              </a:ext>
-            </a:extLst>
-          </p:cNvPr>
-          <p:cNvSpPr>
-            <a:spLocks xmlns:a="http://schemas.openxmlformats.org/drawingml/2006/main" noGrp="1"/>
-          </p:cNvSpPr>
-          <p:nvPr/>
-        </p:nvSpPr>
-        <p:spPr>
-          <a:xfrm xmlns:a="http://schemas.openxmlformats.org/drawingml/2006/main">
-            <a:off x="838200" y="4819650"/>
-            <a:ext cx="3476625" cy="523875"/>
-          </a:xfrm>
-          <a:prstGeom xmlns:a="http://schemas.openxmlformats.org/drawingml/2006/main" prst="rect">
-            <a:avLst/>
-          </a:prstGeom>
-          <a:noFill xmlns:a="http://schemas.openxmlformats.org/drawingml/2006/main"/>
-          <a:ln xmlns:a="http://schemas.openxmlformats.org/drawingml/2006/main" w="0">
-            <a:noFill/>
-            <a:prstDash val="solid"/>
-          </a:ln>
-        </p:spPr>
-        <p:txBody>
-          <a:bodyPr xmlns:a="http://schemas.openxmlformats.org/drawingml/2006/main" wrap="square" lIns="0" tIns="0" rIns="0" bIns="0">
-            <a:noAutofit/>
-          </a:bodyPr>
-          <a:lstStyle xmlns:a="http://schemas.openxmlformats.org/drawingml/2006/main"/>
-          <a:p xmlns:a="http://schemas.openxmlformats.org/drawingml/2006/main">
-            <a:pPr>
+              <a:t>Verify identity</a:t>
+            </a:r>
+          </a:p>
+        </p:txBody>
+      </p:sp>
+      <p:sp>
+        <p:nvSpPr>
+          <p:cNvPr id="7" name="problem-body-0">
+            <a:extLst xmlns:a="http://schemas.openxmlformats.org/drawingml/2006/main">
+              <a:ext uri="{FF2B5EF4-FFF2-40B4-BE49-F238E27FC236}">
+                <a16:creationId xmlns:a16="http://schemas.microsoft.com/office/drawing/2014/main" id="{0B2C2F14-6ADC-4106-8ED7-26997B86B0E4}"/>
+              </a:ext>
+            </a:extLst>
+          </p:cNvPr>
+          <p:cNvSpPr>
+            <a:spLocks xmlns:a="http://schemas.openxmlformats.org/drawingml/2006/main" noGrp="1"/>
+          </p:cNvSpPr>
+          <p:nvPr/>
+        </p:nvSpPr>
+        <p:spPr>
+          <a:xfrm xmlns:a="http://schemas.openxmlformats.org/drawingml/2006/main">
+            <a:off x="7905750" y="3133725"/>
+            <a:ext cx="6191250" cy="590550"/>
+          </a:xfrm>
+          <a:prstGeom xmlns:a="http://schemas.openxmlformats.org/drawingml/2006/main" prst="rect">
+            <a:avLst/>
+          </a:prstGeom>
+          <a:noFill xmlns:a="http://schemas.openxmlformats.org/drawingml/2006/main"/>
+          <a:ln xmlns:a="http://schemas.openxmlformats.org/drawingml/2006/main" w="0">
+            <a:noFill/>
+            <a:prstDash val="solid"/>
+          </a:ln>
+        </p:spPr>
+        <p:txBody>
+          <a:bodyPr xmlns:a="http://schemas.openxmlformats.org/drawingml/2006/main" wrap="square" lIns="0" tIns="0" rIns="0" bIns="0">
+            <a:noAutofit/>
+          </a:bodyPr>
+          <a:lstStyle xmlns:a="http://schemas.openxmlformats.org/drawingml/2006/main"/>
+          <a:p xmlns:a="http://schemas.openxmlformats.org/drawingml/2006/main">
+            <a:pPr>
+              <a:lnSpc>
+                <a:spcPct val="108000"/>
+              </a:lnSpc>
               <a:buNone/>
               <a:defRPr sz="1800">
                 <a:solidFill>
@@ -4115,109 +6222,140 @@
                 <a:ea typeface="Avenir Next"/>
                 <a:cs typeface="Avenir Next"/>
               </a:rPr>
-              <a:t>merchant location per cart</a:t>
-            </a:r>
-          </a:p>
-        </p:txBody>
-      </p:sp>
-      <p:sp>
-        <p:nvSpPr>
-          <p:cNvPr id="7" name="metric-value-2">
-            <a:extLst xmlns:a="http://schemas.openxmlformats.org/drawingml/2006/main">
-              <a:ext uri="{FF2B5EF4-FFF2-40B4-BE49-F238E27FC236}">
-                <a16:creationId xmlns:a16="http://schemas.microsoft.com/office/drawing/2014/main" id="{34A2351A-08FA-41EA-9E37-D15FDFEC6DD9}"/>
-              </a:ext>
-            </a:extLst>
-          </p:cNvPr>
-          <p:cNvSpPr>
-            <a:spLocks xmlns:a="http://schemas.openxmlformats.org/drawingml/2006/main" noGrp="1"/>
-          </p:cNvSpPr>
-          <p:nvPr/>
-        </p:nvSpPr>
-        <p:spPr>
-          <a:xfrm xmlns:a="http://schemas.openxmlformats.org/drawingml/2006/main">
-            <a:off x="838200" y="5486400"/>
-            <a:ext cx="2857500" cy="704850"/>
-          </a:xfrm>
-          <a:prstGeom xmlns:a="http://schemas.openxmlformats.org/drawingml/2006/main" prst="rect">
-            <a:avLst/>
-          </a:prstGeom>
-          <a:noFill xmlns:a="http://schemas.openxmlformats.org/drawingml/2006/main"/>
-          <a:ln xmlns:a="http://schemas.openxmlformats.org/drawingml/2006/main" w="0">
-            <a:noFill/>
-            <a:prstDash val="solid"/>
-          </a:ln>
-        </p:spPr>
-        <p:txBody>
-          <a:bodyPr xmlns:a="http://schemas.openxmlformats.org/drawingml/2006/main" wrap="square" lIns="0" tIns="0" rIns="0" bIns="0">
-            <a:noAutofit/>
-          </a:bodyPr>
-          <a:lstStyle xmlns:a="http://schemas.openxmlformats.org/drawingml/2006/main"/>
-          <a:p xmlns:a="http://schemas.openxmlformats.org/drawingml/2006/main">
-            <a:pPr>
-              <a:buNone/>
-              <a:defRPr sz="4350" b="1">
-                <a:solidFill>
-                  <a:srgbClr val="B64032"/>
-                </a:solidFill>
-                <a:latin typeface="Georgia"/>
-                <a:ea typeface="Georgia"/>
-                <a:cs typeface="Georgia"/>
-              </a:defRPr>
-            </a:pPr>
-            <a:r>
-              <a:rPr sz="4350" b="1">
-                <a:solidFill>
-                  <a:srgbClr val="B64032"/>
-                </a:solidFill>
-                <a:latin typeface="Georgia"/>
-                <a:ea typeface="Georgia"/>
-                <a:cs typeface="Georgia"/>
-              </a:rPr>
-              <a:t>S$133</a:t>
-            </a:r>
-          </a:p>
-        </p:txBody>
-      </p:sp>
-      <p:sp>
-        <p:nvSpPr>
-          <p:cNvPr id="8" name="metric-label-2">
-            <a:extLst xmlns:a="http://schemas.openxmlformats.org/drawingml/2006/main">
-              <a:ext uri="{FF2B5EF4-FFF2-40B4-BE49-F238E27FC236}">
-                <a16:creationId xmlns:a16="http://schemas.microsoft.com/office/drawing/2014/main" id="{E17DFFAD-5854-4414-BDBD-56E6D52F7CF6}"/>
-              </a:ext>
-            </a:extLst>
-          </p:cNvPr>
-          <p:cNvSpPr>
-            <a:spLocks xmlns:a="http://schemas.openxmlformats.org/drawingml/2006/main" noGrp="1"/>
-          </p:cNvSpPr>
-          <p:nvPr/>
-        </p:nvSpPr>
-        <p:spPr>
-          <a:xfrm xmlns:a="http://schemas.openxmlformats.org/drawingml/2006/main">
-            <a:off x="838200" y="6172200"/>
-            <a:ext cx="3476625" cy="523875"/>
-          </a:xfrm>
-          <a:prstGeom xmlns:a="http://schemas.openxmlformats.org/drawingml/2006/main" prst="rect">
-            <a:avLst/>
-          </a:prstGeom>
-          <a:noFill xmlns:a="http://schemas.openxmlformats.org/drawingml/2006/main"/>
-          <a:ln xmlns:a="http://schemas.openxmlformats.org/drawingml/2006/main" w="0">
-            <a:noFill/>
-            <a:prstDash val="solid"/>
-          </a:ln>
-        </p:spPr>
-        <p:txBody>
-          <a:bodyPr xmlns:a="http://schemas.openxmlformats.org/drawingml/2006/main" wrap="square" lIns="0" tIns="0" rIns="0" bIns="0">
-            <a:noAutofit/>
-          </a:bodyPr>
-          <a:lstStyle xmlns:a="http://schemas.openxmlformats.org/drawingml/2006/main"/>
-          <a:p xmlns:a="http://schemas.openxmlformats.org/drawingml/2006/main">
-            <a:pPr>
-              <a:buNone/>
-              <a:defRPr sz="1800">
+              <a:t>PLANNED — server-enforced before checkout; not in the live demo.</a:t>
+            </a:r>
+          </a:p>
+        </p:txBody>
+      </p:sp>
+      <p:sp>
+        <p:nvSpPr>
+          <p:cNvPr id="8" name="problem-line-1">
+            <a:extLst xmlns:a="http://schemas.openxmlformats.org/drawingml/2006/main">
+              <a:ext uri="{FF2B5EF4-FFF2-40B4-BE49-F238E27FC236}">
+                <a16:creationId xmlns:a16="http://schemas.microsoft.com/office/drawing/2014/main" id="{6AFC7403-25EE-4D0D-9379-D3185F74FF6C}"/>
+              </a:ext>
+            </a:extLst>
+          </p:cNvPr>
+          <p:cNvSpPr>
+            <a:spLocks xmlns:a="http://schemas.openxmlformats.org/drawingml/2006/main" noGrp="1"/>
+          </p:cNvSpPr>
+          <p:nvPr/>
+        </p:nvSpPr>
+        <p:spPr>
+          <a:xfrm xmlns:a="http://schemas.openxmlformats.org/drawingml/2006/main">
+            <a:off x="7029450" y="3848100"/>
+            <a:ext cx="7239000" cy="0"/>
+          </a:xfrm>
+          <a:prstGeom xmlns:a="http://schemas.openxmlformats.org/drawingml/2006/main" prst="line">
+            <a:avLst/>
+          </a:prstGeom>
+          <a:noFill xmlns:a="http://schemas.openxmlformats.org/drawingml/2006/main"/>
+          <a:ln xmlns:a="http://schemas.openxmlformats.org/drawingml/2006/main" w="19050">
+            <a:solidFill>
+              <a:srgbClr val="D8D0C4"/>
+            </a:solidFill>
+            <a:prstDash val="solid"/>
+          </a:ln>
+        </p:spPr>
+      </p:sp>
+      <p:sp>
+        <p:nvSpPr>
+          <p:cNvPr id="9" name="problem-num-1">
+            <a:extLst xmlns:a="http://schemas.openxmlformats.org/drawingml/2006/main">
+              <a:ext uri="{FF2B5EF4-FFF2-40B4-BE49-F238E27FC236}">
+                <a16:creationId xmlns:a16="http://schemas.microsoft.com/office/drawing/2014/main" id="{CD09E3EF-D7BF-45D7-93B8-4B0261FFB98C}"/>
+              </a:ext>
+            </a:extLst>
+          </p:cNvPr>
+          <p:cNvSpPr>
+            <a:spLocks xmlns:a="http://schemas.openxmlformats.org/drawingml/2006/main" noGrp="1"/>
+          </p:cNvSpPr>
+          <p:nvPr/>
+        </p:nvSpPr>
+        <p:spPr>
+          <a:xfrm xmlns:a="http://schemas.openxmlformats.org/drawingml/2006/main">
+            <a:off x="7029450" y="4048125"/>
+            <a:ext cx="685800" cy="361950"/>
+          </a:xfrm>
+          <a:prstGeom xmlns:a="http://schemas.openxmlformats.org/drawingml/2006/main" prst="rect">
+            <a:avLst/>
+          </a:prstGeom>
+          <a:noFill xmlns:a="http://schemas.openxmlformats.org/drawingml/2006/main"/>
+          <a:ln xmlns:a="http://schemas.openxmlformats.org/drawingml/2006/main" w="0">
+            <a:noFill/>
+            <a:prstDash val="solid"/>
+          </a:ln>
+        </p:spPr>
+        <p:txBody>
+          <a:bodyPr xmlns:a="http://schemas.openxmlformats.org/drawingml/2006/main" wrap="square" lIns="0" tIns="0" rIns="0" bIns="0">
+            <a:noAutofit/>
+          </a:bodyPr>
+          <a:lstStyle xmlns:a="http://schemas.openxmlformats.org/drawingml/2006/main"/>
+          <a:p xmlns:a="http://schemas.openxmlformats.org/drawingml/2006/main">
+            <a:pPr>
+              <a:buNone/>
+              <a:defRPr sz="1650" b="1">
                 <a:solidFill>
                   <a:srgbClr val="6D7974"/>
+                </a:solidFill>
+                <a:latin typeface="Menlo"/>
+                <a:ea typeface="Menlo"/>
+                <a:cs typeface="Menlo"/>
+              </a:defRPr>
+            </a:pPr>
+            <a:r>
+              <a:rPr sz="1650" b="1">
+                <a:solidFill>
+                  <a:srgbClr val="6D7974"/>
+                </a:solidFill>
+                <a:latin typeface="Menlo"/>
+                <a:ea typeface="Menlo"/>
+                <a:cs typeface="Menlo"/>
+              </a:rPr>
+              <a:t>02</a:t>
+            </a:r>
+          </a:p>
+        </p:txBody>
+      </p:sp>
+      <p:sp>
+        <p:nvSpPr>
+          <p:cNvPr id="10" name="problem-heading-1">
+            <a:extLst xmlns:a="http://schemas.openxmlformats.org/drawingml/2006/main">
+              <a:ext uri="{FF2B5EF4-FFF2-40B4-BE49-F238E27FC236}">
+                <a16:creationId xmlns:a16="http://schemas.microsoft.com/office/drawing/2014/main" id="{52462AF3-882B-4600-9871-095535CD92EF}"/>
+              </a:ext>
+            </a:extLst>
+          </p:cNvPr>
+          <p:cNvSpPr>
+            <a:spLocks xmlns:a="http://schemas.openxmlformats.org/drawingml/2006/main" noGrp="1"/>
+          </p:cNvSpPr>
+          <p:nvPr/>
+        </p:nvSpPr>
+        <p:spPr>
+          <a:xfrm xmlns:a="http://schemas.openxmlformats.org/drawingml/2006/main">
+            <a:off x="7905750" y="4019550"/>
+            <a:ext cx="2952750" cy="400050"/>
+          </a:xfrm>
+          <a:prstGeom xmlns:a="http://schemas.openxmlformats.org/drawingml/2006/main" prst="rect">
+            <a:avLst/>
+          </a:prstGeom>
+          <a:noFill xmlns:a="http://schemas.openxmlformats.org/drawingml/2006/main"/>
+          <a:ln xmlns:a="http://schemas.openxmlformats.org/drawingml/2006/main" w="0">
+            <a:noFill/>
+            <a:prstDash val="solid"/>
+          </a:ln>
+        </p:spPr>
+        <p:txBody>
+          <a:bodyPr xmlns:a="http://schemas.openxmlformats.org/drawingml/2006/main" wrap="square" lIns="0" tIns="0" rIns="0" bIns="0">
+            <a:noAutofit/>
+          </a:bodyPr>
+          <a:lstStyle xmlns:a="http://schemas.openxmlformats.org/drawingml/2006/main"/>
+          <a:p xmlns:a="http://schemas.openxmlformats.org/drawingml/2006/main">
+            <a:pPr>
+              <a:buNone/>
+              <a:defRPr sz="2250" b="1">
+                <a:solidFill>
+                  <a:srgbClr val="0E4B3B"/>
                 </a:solidFill>
                 <a:latin typeface="Avenir Next"/>
                 <a:ea typeface="Avenir Next"/>
@@ -4225,86 +6363,298 @@
               </a:defRPr>
             </a:pPr>
             <a:r>
-              <a:rPr sz="1800">
-                <a:solidFill>
-                  <a:srgbClr val="6D7974"/>
+              <a:rPr sz="2250" b="1">
+                <a:solidFill>
+                  <a:srgbClr val="0E4B3B"/>
                 </a:solidFill>
                 <a:latin typeface="Avenir Next"/>
                 <a:ea typeface="Avenir Next"/>
                 <a:cs typeface="Avenir Next"/>
               </a:rPr>
-              <a:t>top match in the demo</a:t>
-            </a:r>
-          </a:p>
-        </p:txBody>
-      </p:sp>
-      <p:sp>
-        <p:nvSpPr>
-          <p:cNvPr id="9" name="Woven buyer view showing the mission and three complete carts-backplate">
-            <a:extLst xmlns:a="http://schemas.openxmlformats.org/drawingml/2006/main">
-              <a:ext uri="{FF2B5EF4-FFF2-40B4-BE49-F238E27FC236}">
-                <a16:creationId xmlns:a16="http://schemas.microsoft.com/office/drawing/2014/main" id="{ABE8B1E6-CCF5-4ADE-BE71-0884CDDECEDA}"/>
-              </a:ext>
-            </a:extLst>
-          </p:cNvPr>
-          <p:cNvSpPr>
-            <a:spLocks xmlns:a="http://schemas.openxmlformats.org/drawingml/2006/main" noGrp="1"/>
-          </p:cNvSpPr>
-          <p:nvPr/>
-        </p:nvSpPr>
-        <p:spPr>
-          <a:xfrm xmlns:a="http://schemas.openxmlformats.org/drawingml/2006/main">
-            <a:off x="4762500" y="2381250"/>
-            <a:ext cx="9525000" cy="5438775"/>
-          </a:xfrm>
-          <a:prstGeom xmlns:a="http://schemas.openxmlformats.org/drawingml/2006/main" prst="roundRect">
-            <a:avLst>
-              <a:gd name="adj" fmla="val 4203"/>
-            </a:avLst>
-          </a:prstGeom>
-          <a:solidFill xmlns:a="http://schemas.openxmlformats.org/drawingml/2006/main">
-            <a:srgbClr val="FFFFFF"/>
-          </a:solidFill>
-          <a:ln xmlns:a="http://schemas.openxmlformats.org/drawingml/2006/main" w="0">
-            <a:noFill/>
-            <a:prstDash val="solid"/>
-          </a:ln>
-        </p:spPr>
-        <p:style>
-          <a:lnRef xmlns:a="http://schemas.openxmlformats.org/drawingml/2006/main" idx="0"/>
-          <a:fillRef xmlns:a="http://schemas.openxmlformats.org/drawingml/2006/main" idx="0"/>
-          <a:effectRef xmlns:a="http://schemas.openxmlformats.org/drawingml/2006/main" idx="7"/>
-          <a:fontRef xmlns:a="http://schemas.openxmlformats.org/drawingml/2006/main" idx="major"/>
-        </p:style>
-      </p:sp>
-      <p:pic>
-        <p:nvPicPr>
-          <p:cNvPr id="24" name=""/>
-          <p:cNvPicPr>
-            <a:picLocks xmlns:a="http://schemas.openxmlformats.org/drawingml/2006/main" noChangeAspect="1"/>
-          </p:cNvPicPr>
-          <p:nvPr/>
-        </p:nvPicPr>
-        <p:blipFill>
-          <a:blip xmlns:r="http://schemas.openxmlformats.org/officeDocument/2006/relationships" xmlns:a="http://schemas.openxmlformats.org/drawingml/2006/main" r:embed="R3a3f835612ee409b"/>
-          <a:stretch xmlns:a="http://schemas.openxmlformats.org/drawingml/2006/main"/>
-        </p:blipFill>
-        <p:spPr>
-          <a:xfrm xmlns:a="http://schemas.openxmlformats.org/drawingml/2006/main" flipH="0" flipV="0">
-            <a:off x="4859867" y="2476500"/>
-            <a:ext cx="9330267" cy="5248275"/>
-          </a:xfrm>
-          <a:prstGeom xmlns:a="http://schemas.openxmlformats.org/drawingml/2006/main" prst="roundRect">
-            <a:avLst/>
-          </a:prstGeom>
-        </p:spPr>
-      </p:pic>
-      <p:sp>
-        <p:nvSpPr>
-          <p:cNvPr id="11" name="footer-label-4">
-            <a:extLst xmlns:a="http://schemas.openxmlformats.org/drawingml/2006/main">
-              <a:ext uri="{FF2B5EF4-FFF2-40B4-BE49-F238E27FC236}">
-                <a16:creationId xmlns:a16="http://schemas.microsoft.com/office/drawing/2014/main" id="{0BF00BD6-0EB2-48D5-B38D-D1AF7B5A15E4}"/>
+              <a:t>Review exact terms</a:t>
+            </a:r>
+          </a:p>
+        </p:txBody>
+      </p:sp>
+      <p:sp>
+        <p:nvSpPr>
+          <p:cNvPr id="11" name="problem-body-1">
+            <a:extLst xmlns:a="http://schemas.openxmlformats.org/drawingml/2006/main">
+              <a:ext uri="{FF2B5EF4-FFF2-40B4-BE49-F238E27FC236}">
+                <a16:creationId xmlns:a16="http://schemas.microsoft.com/office/drawing/2014/main" id="{6431976A-9D94-46B7-9EE9-6E234B727F82}"/>
+              </a:ext>
+            </a:extLst>
+          </p:cNvPr>
+          <p:cNvSpPr>
+            <a:spLocks xmlns:a="http://schemas.openxmlformats.org/drawingml/2006/main" noGrp="1"/>
+          </p:cNvSpPr>
+          <p:nvPr/>
+        </p:nvSpPr>
+        <p:spPr>
+          <a:xfrm xmlns:a="http://schemas.openxmlformats.org/drawingml/2006/main">
+            <a:off x="7905750" y="4486275"/>
+            <a:ext cx="6191250" cy="590550"/>
+          </a:xfrm>
+          <a:prstGeom xmlns:a="http://schemas.openxmlformats.org/drawingml/2006/main" prst="rect">
+            <a:avLst/>
+          </a:prstGeom>
+          <a:noFill xmlns:a="http://schemas.openxmlformats.org/drawingml/2006/main"/>
+          <a:ln xmlns:a="http://schemas.openxmlformats.org/drawingml/2006/main" w="0">
+            <a:noFill/>
+            <a:prstDash val="solid"/>
+          </a:ln>
+        </p:spPr>
+        <p:txBody>
+          <a:bodyPr xmlns:a="http://schemas.openxmlformats.org/drawingml/2006/main" wrap="square" lIns="0" tIns="0" rIns="0" bIns="0">
+            <a:noAutofit/>
+          </a:bodyPr>
+          <a:lstStyle xmlns:a="http://schemas.openxmlformats.org/drawingml/2006/main"/>
+          <a:p xmlns:a="http://schemas.openxmlformats.org/drawingml/2006/main">
+            <a:pPr>
+              <a:lnSpc>
+                <a:spcPct val="108000"/>
+              </a:lnSpc>
+              <a:buNone/>
+              <a:defRPr sz="1800">
+                <a:solidFill>
+                  <a:srgbClr val="6D7974"/>
+                </a:solidFill>
+                <a:latin typeface="Avenir Next"/>
+                <a:ea typeface="Avenir Next"/>
+                <a:cs typeface="Avenir Next"/>
+              </a:defRPr>
+            </a:pPr>
+            <a:r>
+              <a:rPr sz="1800">
+                <a:solidFill>
+                  <a:srgbClr val="6D7974"/>
+                </a:solidFill>
+                <a:latin typeface="Avenir Next"/>
+                <a:ea typeface="Avenir Next"/>
+                <a:cs typeface="Avenir Next"/>
+              </a:rPr>
+              <a:t>WORKING — merchant, items, pickup, total and expiry.</a:t>
+            </a:r>
+          </a:p>
+        </p:txBody>
+      </p:sp>
+      <p:sp>
+        <p:nvSpPr>
+          <p:cNvPr id="12" name="problem-line-2">
+            <a:extLst xmlns:a="http://schemas.openxmlformats.org/drawingml/2006/main">
+              <a:ext uri="{FF2B5EF4-FFF2-40B4-BE49-F238E27FC236}">
+                <a16:creationId xmlns:a16="http://schemas.microsoft.com/office/drawing/2014/main" id="{5101FF83-153A-4FDA-AF88-2D2B9204F4AA}"/>
+              </a:ext>
+            </a:extLst>
+          </p:cNvPr>
+          <p:cNvSpPr>
+            <a:spLocks xmlns:a="http://schemas.openxmlformats.org/drawingml/2006/main" noGrp="1"/>
+          </p:cNvSpPr>
+          <p:nvPr/>
+        </p:nvSpPr>
+        <p:spPr>
+          <a:xfrm xmlns:a="http://schemas.openxmlformats.org/drawingml/2006/main">
+            <a:off x="7029450" y="5200650"/>
+            <a:ext cx="7239000" cy="0"/>
+          </a:xfrm>
+          <a:prstGeom xmlns:a="http://schemas.openxmlformats.org/drawingml/2006/main" prst="line">
+            <a:avLst/>
+          </a:prstGeom>
+          <a:noFill xmlns:a="http://schemas.openxmlformats.org/drawingml/2006/main"/>
+          <a:ln xmlns:a="http://schemas.openxmlformats.org/drawingml/2006/main" w="19050">
+            <a:solidFill>
+              <a:srgbClr val="D8D0C4"/>
+            </a:solidFill>
+            <a:prstDash val="solid"/>
+          </a:ln>
+        </p:spPr>
+      </p:sp>
+      <p:sp>
+        <p:nvSpPr>
+          <p:cNvPr id="13" name="problem-num-2">
+            <a:extLst xmlns:a="http://schemas.openxmlformats.org/drawingml/2006/main">
+              <a:ext uri="{FF2B5EF4-FFF2-40B4-BE49-F238E27FC236}">
+                <a16:creationId xmlns:a16="http://schemas.microsoft.com/office/drawing/2014/main" id="{ECDCB99E-A360-423B-A36F-EB5A299BE325}"/>
+              </a:ext>
+            </a:extLst>
+          </p:cNvPr>
+          <p:cNvSpPr>
+            <a:spLocks xmlns:a="http://schemas.openxmlformats.org/drawingml/2006/main" noGrp="1"/>
+          </p:cNvSpPr>
+          <p:nvPr/>
+        </p:nvSpPr>
+        <p:spPr>
+          <a:xfrm xmlns:a="http://schemas.openxmlformats.org/drawingml/2006/main">
+            <a:off x="7029450" y="5400675"/>
+            <a:ext cx="685800" cy="361950"/>
+          </a:xfrm>
+          <a:prstGeom xmlns:a="http://schemas.openxmlformats.org/drawingml/2006/main" prst="rect">
+            <a:avLst/>
+          </a:prstGeom>
+          <a:noFill xmlns:a="http://schemas.openxmlformats.org/drawingml/2006/main"/>
+          <a:ln xmlns:a="http://schemas.openxmlformats.org/drawingml/2006/main" w="0">
+            <a:noFill/>
+            <a:prstDash val="solid"/>
+          </a:ln>
+        </p:spPr>
+        <p:txBody>
+          <a:bodyPr xmlns:a="http://schemas.openxmlformats.org/drawingml/2006/main" wrap="square" lIns="0" tIns="0" rIns="0" bIns="0">
+            <a:noAutofit/>
+          </a:bodyPr>
+          <a:lstStyle xmlns:a="http://schemas.openxmlformats.org/drawingml/2006/main"/>
+          <a:p xmlns:a="http://schemas.openxmlformats.org/drawingml/2006/main">
+            <a:pPr>
+              <a:buNone/>
+              <a:defRPr sz="1650" b="1">
+                <a:solidFill>
+                  <a:srgbClr val="6D7974"/>
+                </a:solidFill>
+                <a:latin typeface="Menlo"/>
+                <a:ea typeface="Menlo"/>
+                <a:cs typeface="Menlo"/>
+              </a:defRPr>
+            </a:pPr>
+            <a:r>
+              <a:rPr sz="1650" b="1">
+                <a:solidFill>
+                  <a:srgbClr val="6D7974"/>
+                </a:solidFill>
+                <a:latin typeface="Menlo"/>
+                <a:ea typeface="Menlo"/>
+                <a:cs typeface="Menlo"/>
+              </a:rPr>
+              <a:t>03</a:t>
+            </a:r>
+          </a:p>
+        </p:txBody>
+      </p:sp>
+      <p:sp>
+        <p:nvSpPr>
+          <p:cNvPr id="14" name="problem-heading-2">
+            <a:extLst xmlns:a="http://schemas.openxmlformats.org/drawingml/2006/main">
+              <a:ext uri="{FF2B5EF4-FFF2-40B4-BE49-F238E27FC236}">
+                <a16:creationId xmlns:a16="http://schemas.microsoft.com/office/drawing/2014/main" id="{65A5D0AE-23F4-44CE-AAA0-004FA07BB143}"/>
+              </a:ext>
+            </a:extLst>
+          </p:cNvPr>
+          <p:cNvSpPr>
+            <a:spLocks xmlns:a="http://schemas.openxmlformats.org/drawingml/2006/main" noGrp="1"/>
+          </p:cNvSpPr>
+          <p:nvPr/>
+        </p:nvSpPr>
+        <p:spPr>
+          <a:xfrm xmlns:a="http://schemas.openxmlformats.org/drawingml/2006/main">
+            <a:off x="7905750" y="5372100"/>
+            <a:ext cx="2952750" cy="400050"/>
+          </a:xfrm>
+          <a:prstGeom xmlns:a="http://schemas.openxmlformats.org/drawingml/2006/main" prst="rect">
+            <a:avLst/>
+          </a:prstGeom>
+          <a:noFill xmlns:a="http://schemas.openxmlformats.org/drawingml/2006/main"/>
+          <a:ln xmlns:a="http://schemas.openxmlformats.org/drawingml/2006/main" w="0">
+            <a:noFill/>
+            <a:prstDash val="solid"/>
+          </a:ln>
+        </p:spPr>
+        <p:txBody>
+          <a:bodyPr xmlns:a="http://schemas.openxmlformats.org/drawingml/2006/main" wrap="square" lIns="0" tIns="0" rIns="0" bIns="0">
+            <a:noAutofit/>
+          </a:bodyPr>
+          <a:lstStyle xmlns:a="http://schemas.openxmlformats.org/drawingml/2006/main"/>
+          <a:p xmlns:a="http://schemas.openxmlformats.org/drawingml/2006/main">
+            <a:pPr>
+              <a:buNone/>
+              <a:defRPr sz="2250" b="1">
+                <a:solidFill>
+                  <a:srgbClr val="0E4B3B"/>
+                </a:solidFill>
+                <a:latin typeface="Avenir Next"/>
+                <a:ea typeface="Avenir Next"/>
+                <a:cs typeface="Avenir Next"/>
+              </a:defRPr>
+            </a:pPr>
+            <a:r>
+              <a:rPr sz="2250" b="1">
+                <a:solidFill>
+                  <a:srgbClr val="0E4B3B"/>
+                </a:solidFill>
+                <a:latin typeface="Avenir Next"/>
+                <a:ea typeface="Avenir Next"/>
+                <a:cs typeface="Avenir Next"/>
+              </a:rPr>
+              <a:t>Confirm once</a:t>
+            </a:r>
+          </a:p>
+        </p:txBody>
+      </p:sp>
+      <p:sp>
+        <p:nvSpPr>
+          <p:cNvPr id="15" name="problem-body-2">
+            <a:extLst xmlns:a="http://schemas.openxmlformats.org/drawingml/2006/main">
+              <a:ext uri="{FF2B5EF4-FFF2-40B4-BE49-F238E27FC236}">
+                <a16:creationId xmlns:a16="http://schemas.microsoft.com/office/drawing/2014/main" id="{AFFD3B42-B59D-49D8-984E-64CB04792A63}"/>
+              </a:ext>
+            </a:extLst>
+          </p:cNvPr>
+          <p:cNvSpPr>
+            <a:spLocks xmlns:a="http://schemas.openxmlformats.org/drawingml/2006/main" noGrp="1"/>
+          </p:cNvSpPr>
+          <p:nvPr/>
+        </p:nvSpPr>
+        <p:spPr>
+          <a:xfrm xmlns:a="http://schemas.openxmlformats.org/drawingml/2006/main">
+            <a:off x="7905750" y="5838825"/>
+            <a:ext cx="6191250" cy="590550"/>
+          </a:xfrm>
+          <a:prstGeom xmlns:a="http://schemas.openxmlformats.org/drawingml/2006/main" prst="rect">
+            <a:avLst/>
+          </a:prstGeom>
+          <a:noFill xmlns:a="http://schemas.openxmlformats.org/drawingml/2006/main"/>
+          <a:ln xmlns:a="http://schemas.openxmlformats.org/drawingml/2006/main" w="0">
+            <a:noFill/>
+            <a:prstDash val="solid"/>
+          </a:ln>
+        </p:spPr>
+        <p:txBody>
+          <a:bodyPr xmlns:a="http://schemas.openxmlformats.org/drawingml/2006/main" wrap="square" lIns="0" tIns="0" rIns="0" bIns="0">
+            <a:noAutofit/>
+          </a:bodyPr>
+          <a:lstStyle xmlns:a="http://schemas.openxmlformats.org/drawingml/2006/main"/>
+          <a:p xmlns:a="http://schemas.openxmlformats.org/drawingml/2006/main">
+            <a:pPr>
+              <a:lnSpc>
+                <a:spcPct val="108000"/>
+              </a:lnSpc>
+              <a:buNone/>
+              <a:defRPr sz="1800">
+                <a:solidFill>
+                  <a:srgbClr val="6D7974"/>
+                </a:solidFill>
+                <a:latin typeface="Avenir Next"/>
+                <a:ea typeface="Avenir Next"/>
+                <a:cs typeface="Avenir Next"/>
+              </a:defRPr>
+            </a:pPr>
+            <a:r>
+              <a:rPr sz="1800">
+                <a:solidFill>
+                  <a:srgbClr val="6D7974"/>
+                </a:solidFill>
+                <a:latin typeface="Avenir Next"/>
+                <a:ea typeface="Avenir Next"/>
+                <a:cs typeface="Avenir Next"/>
+              </a:rPr>
+              <a:t>WORKING — one human click, then a simulated Visa result.</a:t>
+            </a:r>
+          </a:p>
+        </p:txBody>
+      </p:sp>
+      <p:sp>
+        <p:nvSpPr>
+          <p:cNvPr id="16" name="footer-label-2">
+            <a:extLst xmlns:a="http://schemas.openxmlformats.org/drawingml/2006/main">
+              <a:ext uri="{FF2B5EF4-FFF2-40B4-BE49-F238E27FC236}">
+                <a16:creationId xmlns:a16="http://schemas.microsoft.com/office/drawing/2014/main" id="{6611CBBE-57D8-4F17-ACC1-D8FE5180BE38}"/>
               </a:ext>
             </a:extLst>
           </p:cNvPr>
@@ -4360,10 +6710,10 @@
       </p:sp>
       <p:sp>
         <p:nvSpPr>
-          <p:cNvPr id="12" name="footer-number-4">
-            <a:extLst xmlns:a="http://schemas.openxmlformats.org/drawingml/2006/main">
-              <a:ext uri="{FF2B5EF4-FFF2-40B4-BE49-F238E27FC236}">
-                <a16:creationId xmlns:a16="http://schemas.microsoft.com/office/drawing/2014/main" id="{3F952AB5-B91A-4BD1-8A1D-8B5E6278D833}"/>
+          <p:cNvPr id="17" name="footer-number-2">
+            <a:extLst xmlns:a="http://schemas.openxmlformats.org/drawingml/2006/main">
+              <a:ext uri="{FF2B5EF4-FFF2-40B4-BE49-F238E27FC236}">
+                <a16:creationId xmlns:a16="http://schemas.microsoft.com/office/drawing/2014/main" id="{2AA90FA9-EF01-40BA-9259-56908DEFC5BF}"/>
               </a:ext>
             </a:extLst>
           </p:cNvPr>
@@ -4412,7 +6762,7 @@
                 <a:ea typeface="Menlo"/>
                 <a:cs typeface="Menlo"/>
               </a:rPr>
-              <a:t>04</a:t>
+              <a:t>05</a:t>
             </a:r>
           </a:p>
         </p:txBody>
@@ -4420,54 +6770,7 @@
     </p:spTree>
     <p:extLst>
       <p:ext uri="{BB962C8B-B14F-4D97-AF65-F5344CB8AC3E}">
-        <p14:creationId xmlns:p14="http://schemas.microsoft.com/office/powerpoint/2010/main" val="512233516"/>
-      </p:ext>
-    </p:extLst>
-  </p:cSld>
-</p:sld>
-</file>
-
-<file path=ppt/slides/slide5.xml><?xml version="1.0" encoding="utf-8"?>
-<p:sld xmlns:p="http://schemas.openxmlformats.org/presentationml/2006/main">
-  <p:cSld>
-    <p:spTree>
-      <p:nvGrpSpPr>
-        <p:cNvPr id="1" name=""/>
-        <p:cNvGrpSpPr/>
-        <p:nvPr/>
-      </p:nvGrpSpPr>
-      <p:grpSpPr>
-        <a:xfrm xmlns:a="http://schemas.openxmlformats.org/drawingml/2006/main"/>
-      </p:grpSpPr>
-      <p:pic>
-        <p:nvPicPr>
-          <p:cNvPr id="2" name=""/>
-          <p:cNvPicPr>
-            <a:picLocks xmlns:a="http://schemas.openxmlformats.org/drawingml/2006/main" noChangeAspect="1"/>
-          </p:cNvPicPr>
-          <p:nvPr/>
-        </p:nvPicPr>
-        <p:blipFill>
-          <a:blip xmlns:r="http://schemas.openxmlformats.org/officeDocument/2006/relationships" xmlns:a="http://schemas.openxmlformats.org/drawingml/2006/main" r:embed="Raa545504ff6c40b8"/>
-          <a:srcRect xmlns:a="http://schemas.openxmlformats.org/drawingml/2006/main" l="0" t="0" r="0" b="0"/>
-          <a:stretch xmlns:a="http://schemas.openxmlformats.org/drawingml/2006/main">
-            <a:fillRect l="0" t="0" r="0" b="0"/>
-          </a:stretch>
-        </p:blipFill>
-        <p:spPr>
-          <a:xfrm xmlns:a="http://schemas.openxmlformats.org/drawingml/2006/main" flipH="0" flipV="0">
-            <a:off x="0" y="0"/>
-            <a:ext cx="15240000" cy="8572500"/>
-          </a:xfrm>
-          <a:prstGeom xmlns:a="http://schemas.openxmlformats.org/drawingml/2006/main" prst="rect">
-            <a:avLst/>
-          </a:prstGeom>
-        </p:spPr>
-      </p:pic>
-    </p:spTree>
-    <p:extLst>
-      <p:ext uri="{BB962C8B-B14F-4D97-AF65-F5344CB8AC3E}">
-        <p14:creationId xmlns:p14="http://schemas.microsoft.com/office/powerpoint/2010/main" val="614777387"/>
+        <p14:creationId xmlns:p14="http://schemas.microsoft.com/office/powerpoint/2010/main" val="619982641"/>
       </p:ext>
     </p:extLst>
   </p:cSld>
@@ -4480,7 +6783,7 @@
     <p:bg>
       <p:bgPr>
         <a:solidFill xmlns:a="http://schemas.openxmlformats.org/drawingml/2006/main">
-          <a:srgbClr val="F4EEE4"/>
+          <a:srgbClr val="0E4B3B"/>
         </a:solidFill>
       </p:bgPr>
     </p:bg>
@@ -4495,10 +6798,10 @@
       </p:grpSpPr>
       <p:sp>
         <p:nvSpPr>
-          <p:cNvPr id="11" name="eyebrow-The live demo">
-            <a:extLst xmlns:a="http://schemas.openxmlformats.org/drawingml/2006/main">
-              <a:ext uri="{FF2B5EF4-FFF2-40B4-BE49-F238E27FC236}">
-                <a16:creationId xmlns:a16="http://schemas.microsoft.com/office/drawing/2014/main" id="{46635EF8-3618-4994-81BA-2542F409376A}"/>
+          <p:cNvPr id="16" name="eyebrow-Trust you can test">
+            <a:extLst xmlns:a="http://schemas.openxmlformats.org/drawingml/2006/main">
+              <a:ext uri="{FF2B5EF4-FFF2-40B4-BE49-F238E27FC236}">
+                <a16:creationId xmlns:a16="http://schemas.microsoft.com/office/drawing/2014/main" id="{3F058616-CF95-435A-9AE1-BD44D8B01497}"/>
               </a:ext>
             </a:extLst>
           </p:cNvPr>
@@ -4531,7 +6834,7 @@
               <a:buNone/>
               <a:defRPr sz="1350" b="1">
                 <a:solidFill>
-                  <a:srgbClr val="6D7974"/>
+                  <a:srgbClr val="B7F522"/>
                 </a:solidFill>
                 <a:latin typeface="Menlo"/>
                 <a:ea typeface="Menlo"/>
@@ -4541,23 +6844,23 @@
             <a:r>
               <a:rPr sz="1350" b="1">
                 <a:solidFill>
-                  <a:srgbClr val="6D7974"/>
-                </a:solidFill>
-                <a:latin typeface="Menlo"/>
-                <a:ea typeface="Menlo"/>
-                <a:cs typeface="Menlo"/>
-              </a:rPr>
-              <a:t>THE LIVE DEMO</a:t>
-            </a:r>
-          </a:p>
-        </p:txBody>
-      </p:sp>
-      <p:sp>
-        <p:nvSpPr>
-          <p:cNvPr id="2" name="title-The AI recommends. The user confirms the exact terms.">
-            <a:extLst xmlns:a="http://schemas.openxmlformats.org/drawingml/2006/main">
-              <a:ext uri="{FF2B5EF4-FFF2-40B4-BE49-F238E27FC236}">
-                <a16:creationId xmlns:a16="http://schemas.microsoft.com/office/drawing/2014/main" id="{E6C7E214-CE49-432D-A6ED-84FB60003964}"/>
+                  <a:srgbClr val="B7F522"/>
+                </a:solidFill>
+                <a:latin typeface="Menlo"/>
+                <a:ea typeface="Menlo"/>
+                <a:cs typeface="Menlo"/>
+              </a:rPr>
+              <a:t>MERCHANT CONTROL</a:t>
+            </a:r>
+          </a:p>
+        </p:txBody>
+      </p:sp>
+      <p:sp>
+        <p:nvSpPr>
+          <p:cNvPr id="2" name="title-Autonomy stops where money starts.">
+            <a:extLst xmlns:a="http://schemas.openxmlformats.org/drawingml/2006/main">
+              <a:ext uri="{FF2B5EF4-FFF2-40B4-BE49-F238E27FC236}">
+                <a16:creationId xmlns:a16="http://schemas.microsoft.com/office/drawing/2014/main" id="{DE43C5D3-4F36-4494-B929-E5ECC06287F1}"/>
               </a:ext>
             </a:extLst>
           </p:cNvPr>
@@ -4569,7 +6872,7 @@
         <p:spPr>
           <a:xfrm xmlns:a="http://schemas.openxmlformats.org/drawingml/2006/main">
             <a:off x="838200" y="990600"/>
-            <a:ext cx="13525500" cy="1028700"/>
+            <a:ext cx="12763500" cy="1028700"/>
           </a:xfrm>
           <a:prstGeom xmlns:a="http://schemas.openxmlformats.org/drawingml/2006/main" prst="rect">
             <a:avLst/>
@@ -4593,7 +6896,7 @@
               <a:buNone/>
               <a:defRPr sz="4650" b="1">
                 <a:solidFill>
-                  <a:srgbClr val="0E4B3B"/>
+                  <a:srgbClr val="FFFFFF"/>
                 </a:solidFill>
                 <a:latin typeface="Georgia"/>
                 <a:ea typeface="Georgia"/>
@@ -4603,240 +6906,115 @@
             <a:r>
               <a:rPr sz="4650" b="1">
                 <a:solidFill>
-                  <a:srgbClr val="0E4B3B"/>
+                  <a:srgbClr val="FFFFFF"/>
                 </a:solidFill>
                 <a:latin typeface="Georgia"/>
                 <a:ea typeface="Georgia"/>
                 <a:cs typeface="Georgia"/>
               </a:rPr>
-              <a:t>The AI recommends. The user confirms the exact terms.</a:t>
-            </a:r>
-          </a:p>
-        </p:txBody>
-      </p:sp>
-      <p:sp>
-        <p:nvSpPr>
-          <p:cNvPr id="3" name="boundary-statement">
-            <a:extLst xmlns:a="http://schemas.openxmlformats.org/drawingml/2006/main">
-              <a:ext uri="{FF2B5EF4-FFF2-40B4-BE49-F238E27FC236}">
-                <a16:creationId xmlns:a16="http://schemas.microsoft.com/office/drawing/2014/main" id="{64039A6F-00FA-4C7A-8407-F1FA78BFDFA5}"/>
-              </a:ext>
-            </a:extLst>
-          </p:cNvPr>
-          <p:cNvSpPr>
-            <a:spLocks xmlns:a="http://schemas.openxmlformats.org/drawingml/2006/main" noGrp="1"/>
-          </p:cNvSpPr>
-          <p:nvPr/>
-        </p:nvSpPr>
-        <p:spPr>
-          <a:xfrm xmlns:a="http://schemas.openxmlformats.org/drawingml/2006/main">
-            <a:off x="838200" y="2895600"/>
-            <a:ext cx="4191000" cy="1371600"/>
-          </a:xfrm>
-          <a:prstGeom xmlns:a="http://schemas.openxmlformats.org/drawingml/2006/main" prst="rect">
-            <a:avLst/>
-          </a:prstGeom>
-          <a:noFill xmlns:a="http://schemas.openxmlformats.org/drawingml/2006/main"/>
-          <a:ln xmlns:a="http://schemas.openxmlformats.org/drawingml/2006/main" w="0">
-            <a:noFill/>
-            <a:prstDash val="solid"/>
-          </a:ln>
-        </p:spPr>
-        <p:txBody>
-          <a:bodyPr xmlns:a="http://schemas.openxmlformats.org/drawingml/2006/main" wrap="square" lIns="0" tIns="0" rIns="0" bIns="0">
-            <a:noAutofit/>
-          </a:bodyPr>
-          <a:lstStyle xmlns:a="http://schemas.openxmlformats.org/drawingml/2006/main"/>
-          <a:p xmlns:a="http://schemas.openxmlformats.org/drawingml/2006/main">
-            <a:pPr>
-              <a:lnSpc>
-                <a:spcPct val="95000"/>
-              </a:lnSpc>
-              <a:buNone/>
-              <a:defRPr sz="3150" b="1">
-                <a:solidFill>
-                  <a:srgbClr val="0E4B3B"/>
-                </a:solidFill>
-                <a:latin typeface="Georgia"/>
-                <a:ea typeface="Georgia"/>
-                <a:cs typeface="Georgia"/>
-              </a:defRPr>
-            </a:pPr>
-            <a:r>
-              <a:rPr sz="3150" b="1">
-                <a:solidFill>
-                  <a:srgbClr val="0E4B3B"/>
-                </a:solidFill>
-                <a:latin typeface="Georgia"/>
-                <a:ea typeface="Georgia"/>
-                <a:cs typeface="Georgia"/>
-              </a:rPr>
-              <a:t>Recommendation is not</a:t>
-            </a:r>
-          </a:p>
-          <a:p xmlns:a="http://schemas.openxmlformats.org/drawingml/2006/main">
-            <a:pPr>
-              <a:lnSpc>
-                <a:spcPct val="95000"/>
-              </a:lnSpc>
-              <a:buNone/>
-              <a:defRPr sz="3150" b="1">
-                <a:solidFill>
-                  <a:srgbClr val="0E4B3B"/>
-                </a:solidFill>
-                <a:latin typeface="Georgia"/>
-                <a:ea typeface="Georgia"/>
-                <a:cs typeface="Georgia"/>
-              </a:defRPr>
-            </a:pPr>
-            <a:r>
-              <a:rPr sz="3150" b="1">
-                <a:solidFill>
-                  <a:srgbClr val="0E4B3B"/>
-                </a:solidFill>
-                <a:latin typeface="Georgia"/>
-                <a:ea typeface="Georgia"/>
-                <a:cs typeface="Georgia"/>
-              </a:rPr>
-              <a:t>authorization.</a:t>
-            </a:r>
-          </a:p>
-        </p:txBody>
-      </p:sp>
-      <p:sp>
-        <p:nvSpPr>
-          <p:cNvPr id="4" name="simulated-label">
-            <a:extLst xmlns:a="http://schemas.openxmlformats.org/drawingml/2006/main">
-              <a:ext uri="{FF2B5EF4-FFF2-40B4-BE49-F238E27FC236}">
-                <a16:creationId xmlns:a16="http://schemas.microsoft.com/office/drawing/2014/main" id="{906B7775-6C73-4936-919D-C949C0ED9DEE}"/>
-              </a:ext>
-            </a:extLst>
-          </p:cNvPr>
-          <p:cNvSpPr>
-            <a:spLocks xmlns:a="http://schemas.openxmlformats.org/drawingml/2006/main" noGrp="1"/>
-          </p:cNvSpPr>
-          <p:nvPr/>
-        </p:nvSpPr>
-        <p:spPr>
-          <a:xfrm xmlns:a="http://schemas.openxmlformats.org/drawingml/2006/main">
-            <a:off x="838200" y="4724400"/>
-            <a:ext cx="3143250" cy="514350"/>
-          </a:xfrm>
-          <a:prstGeom xmlns:a="http://schemas.openxmlformats.org/drawingml/2006/main" prst="roundRect">
-            <a:avLst>
-              <a:gd name="adj" fmla="val 50000"/>
-            </a:avLst>
-          </a:prstGeom>
-          <a:solidFill xmlns:a="http://schemas.openxmlformats.org/drawingml/2006/main">
-            <a:srgbClr val="1545E8"/>
-          </a:solidFill>
-          <a:ln xmlns:a="http://schemas.openxmlformats.org/drawingml/2006/main" w="0">
-            <a:noFill/>
-            <a:prstDash val="solid"/>
-          </a:ln>
-        </p:spPr>
-      </p:sp>
-      <p:sp>
-        <p:nvSpPr>
-          <p:cNvPr id="5" name="simulated-label-text">
-            <a:extLst xmlns:a="http://schemas.openxmlformats.org/drawingml/2006/main">
-              <a:ext uri="{FF2B5EF4-FFF2-40B4-BE49-F238E27FC236}">
-                <a16:creationId xmlns:a16="http://schemas.microsoft.com/office/drawing/2014/main" id="{0DCF3A62-833F-4EDD-B0B4-4EEFB00BFC41}"/>
-              </a:ext>
-            </a:extLst>
-          </p:cNvPr>
-          <p:cNvSpPr>
-            <a:spLocks xmlns:a="http://schemas.openxmlformats.org/drawingml/2006/main" noGrp="1"/>
-          </p:cNvSpPr>
-          <p:nvPr/>
-        </p:nvSpPr>
-        <p:spPr>
-          <a:xfrm xmlns:a="http://schemas.openxmlformats.org/drawingml/2006/main">
-            <a:off x="1028700" y="4876800"/>
-            <a:ext cx="2762250" cy="228600"/>
-          </a:xfrm>
-          <a:prstGeom xmlns:a="http://schemas.openxmlformats.org/drawingml/2006/main" prst="rect">
-            <a:avLst/>
-          </a:prstGeom>
-          <a:noFill xmlns:a="http://schemas.openxmlformats.org/drawingml/2006/main"/>
-          <a:ln xmlns:a="http://schemas.openxmlformats.org/drawingml/2006/main" w="0">
-            <a:noFill/>
-            <a:prstDash val="solid"/>
-          </a:ln>
-        </p:spPr>
-        <p:txBody>
-          <a:bodyPr xmlns:a="http://schemas.openxmlformats.org/drawingml/2006/main" wrap="square" lIns="0" tIns="0" rIns="0" bIns="0">
-            <a:noAutofit/>
-          </a:bodyPr>
-          <a:lstStyle xmlns:a="http://schemas.openxmlformats.org/drawingml/2006/main"/>
-          <a:p xmlns:a="http://schemas.openxmlformats.org/drawingml/2006/main">
-            <a:pPr algn="ctr">
-              <a:buNone/>
-              <a:defRPr sz="1275" b="1">
+              <a:t>Merchants control what the AI can sell.</a:t>
+            </a:r>
+          </a:p>
+        </p:txBody>
+      </p:sp>
+      <p:sp>
+        <p:nvSpPr>
+          <p:cNvPr id="3" name="trust-label-0">
+            <a:extLst xmlns:a="http://schemas.openxmlformats.org/drawingml/2006/main">
+              <a:ext uri="{FF2B5EF4-FFF2-40B4-BE49-F238E27FC236}">
+                <a16:creationId xmlns:a16="http://schemas.microsoft.com/office/drawing/2014/main" id="{D041F315-B888-4E6D-A7D1-CDA440438728}"/>
+              </a:ext>
+            </a:extLst>
+          </p:cNvPr>
+          <p:cNvSpPr>
+            <a:spLocks xmlns:a="http://schemas.openxmlformats.org/drawingml/2006/main" noGrp="1"/>
+          </p:cNvSpPr>
+          <p:nvPr/>
+        </p:nvSpPr>
+        <p:spPr>
+          <a:xfrm xmlns:a="http://schemas.openxmlformats.org/drawingml/2006/main">
+            <a:off x="838200" y="2647950"/>
+            <a:ext cx="2095500" cy="238125"/>
+          </a:xfrm>
+          <a:prstGeom xmlns:a="http://schemas.openxmlformats.org/drawingml/2006/main" prst="rect">
+            <a:avLst/>
+          </a:prstGeom>
+          <a:noFill xmlns:a="http://schemas.openxmlformats.org/drawingml/2006/main"/>
+          <a:ln xmlns:a="http://schemas.openxmlformats.org/drawingml/2006/main" w="0">
+            <a:noFill/>
+            <a:prstDash val="solid"/>
+          </a:ln>
+        </p:spPr>
+        <p:txBody>
+          <a:bodyPr xmlns:a="http://schemas.openxmlformats.org/drawingml/2006/main" wrap="square" lIns="0" tIns="0" rIns="0" bIns="0">
+            <a:noAutofit/>
+          </a:bodyPr>
+          <a:lstStyle xmlns:a="http://schemas.openxmlformats.org/drawingml/2006/main"/>
+          <a:p xmlns:a="http://schemas.openxmlformats.org/drawingml/2006/main">
+            <a:pPr>
+              <a:buNone/>
+              <a:defRPr sz="1125" b="1">
+                <a:solidFill>
+                  <a:srgbClr val="B7F522"/>
+                </a:solidFill>
+                <a:latin typeface="Menlo"/>
+                <a:ea typeface="Menlo"/>
+                <a:cs typeface="Menlo"/>
+              </a:defRPr>
+            </a:pPr>
+            <a:r>
+              <a:rPr sz="1125" b="1">
+                <a:solidFill>
+                  <a:srgbClr val="B7F522"/>
+                </a:solidFill>
+                <a:latin typeface="Menlo"/>
+                <a:ea typeface="Menlo"/>
+                <a:cs typeface="Menlo"/>
+              </a:rPr>
+              <a:t>CATALOGUE</a:t>
+            </a:r>
+          </a:p>
+        </p:txBody>
+      </p:sp>
+      <p:sp>
+        <p:nvSpPr>
+          <p:cNvPr id="4" name="trust-result-0">
+            <a:extLst xmlns:a="http://schemas.openxmlformats.org/drawingml/2006/main">
+              <a:ext uri="{FF2B5EF4-FFF2-40B4-BE49-F238E27FC236}">
+                <a16:creationId xmlns:a16="http://schemas.microsoft.com/office/drawing/2014/main" id="{9DB51D62-485A-4145-954A-9CB3FA9EC1C1}"/>
+              </a:ext>
+            </a:extLst>
+          </p:cNvPr>
+          <p:cNvSpPr>
+            <a:spLocks xmlns:a="http://schemas.openxmlformats.org/drawingml/2006/main" noGrp="1"/>
+          </p:cNvSpPr>
+          <p:nvPr/>
+        </p:nvSpPr>
+        <p:spPr>
+          <a:xfrm xmlns:a="http://schemas.openxmlformats.org/drawingml/2006/main">
+            <a:off x="838200" y="2943225"/>
+            <a:ext cx="3524250" cy="514350"/>
+          </a:xfrm>
+          <a:prstGeom xmlns:a="http://schemas.openxmlformats.org/drawingml/2006/main" prst="rect">
+            <a:avLst/>
+          </a:prstGeom>
+          <a:noFill xmlns:a="http://schemas.openxmlformats.org/drawingml/2006/main"/>
+          <a:ln xmlns:a="http://schemas.openxmlformats.org/drawingml/2006/main" w="0">
+            <a:noFill/>
+            <a:prstDash val="solid"/>
+          </a:ln>
+        </p:spPr>
+        <p:txBody>
+          <a:bodyPr xmlns:a="http://schemas.openxmlformats.org/drawingml/2006/main" wrap="square" lIns="0" tIns="0" rIns="0" bIns="0">
+            <a:noAutofit/>
+          </a:bodyPr>
+          <a:lstStyle xmlns:a="http://schemas.openxmlformats.org/drawingml/2006/main"/>
+          <a:p xmlns:a="http://schemas.openxmlformats.org/drawingml/2006/main">
+            <a:pPr>
+              <a:buNone/>
+              <a:defRPr sz="2025" b="1">
                 <a:solidFill>
                   <a:srgbClr val="FFFFFF"/>
-                </a:solidFill>
-                <a:latin typeface="Menlo"/>
-                <a:ea typeface="Menlo"/>
-                <a:cs typeface="Menlo"/>
-              </a:defRPr>
-            </a:pPr>
-            <a:r>
-              <a:rPr sz="1275" b="1">
-                <a:solidFill>
-                  <a:srgbClr val="FFFFFF"/>
-                </a:solidFill>
-                <a:latin typeface="Menlo"/>
-                <a:ea typeface="Menlo"/>
-                <a:cs typeface="Menlo"/>
-              </a:rPr>
-              <a:t>VISA RAIL · SIMULATED</a:t>
-            </a:r>
-          </a:p>
-        </p:txBody>
-      </p:sp>
-      <p:sp>
-        <p:nvSpPr>
-          <p:cNvPr id="6" name="exact-terms">
-            <a:extLst xmlns:a="http://schemas.openxmlformats.org/drawingml/2006/main">
-              <a:ext uri="{FF2B5EF4-FFF2-40B4-BE49-F238E27FC236}">
-                <a16:creationId xmlns:a16="http://schemas.microsoft.com/office/drawing/2014/main" id="{24D4E798-F7E3-4205-9A3C-908586EEA799}"/>
-              </a:ext>
-            </a:extLst>
-          </p:cNvPr>
-          <p:cNvSpPr>
-            <a:spLocks xmlns:a="http://schemas.openxmlformats.org/drawingml/2006/main" noGrp="1"/>
-          </p:cNvSpPr>
-          <p:nvPr/>
-        </p:nvSpPr>
-        <p:spPr>
-          <a:xfrm xmlns:a="http://schemas.openxmlformats.org/drawingml/2006/main">
-            <a:off x="838200" y="5638800"/>
-            <a:ext cx="3810000" cy="1104900"/>
-          </a:xfrm>
-          <a:prstGeom xmlns:a="http://schemas.openxmlformats.org/drawingml/2006/main" prst="rect">
-            <a:avLst/>
-          </a:prstGeom>
-          <a:noFill xmlns:a="http://schemas.openxmlformats.org/drawingml/2006/main"/>
-          <a:ln xmlns:a="http://schemas.openxmlformats.org/drawingml/2006/main" w="0">
-            <a:noFill/>
-            <a:prstDash val="solid"/>
-          </a:ln>
-        </p:spPr>
-        <p:txBody>
-          <a:bodyPr xmlns:a="http://schemas.openxmlformats.org/drawingml/2006/main" wrap="square" lIns="0" tIns="0" rIns="0" bIns="0">
-            <a:noAutofit/>
-          </a:bodyPr>
-          <a:lstStyle xmlns:a="http://schemas.openxmlformats.org/drawingml/2006/main"/>
-          <a:p xmlns:a="http://schemas.openxmlformats.org/drawingml/2006/main">
-            <a:pPr>
-              <a:lnSpc>
-                <a:spcPct val="118000"/>
-              </a:lnSpc>
-              <a:buNone/>
-              <a:defRPr sz="1800">
-                <a:solidFill>
-                  <a:srgbClr val="6D7974"/>
                 </a:solidFill>
                 <a:latin typeface="Avenir Next"/>
                 <a:ea typeface="Avenir Next"/>
@@ -4844,41 +7022,395 @@
               </a:defRPr>
             </a:pPr>
             <a:r>
-              <a:rPr sz="1800">
-                <a:solidFill>
-                  <a:srgbClr val="6D7974"/>
+              <a:rPr sz="2025" b="1">
+                <a:solidFill>
+                  <a:srgbClr val="FFFFFF"/>
                 </a:solidFill>
                 <a:latin typeface="Avenir Next"/>
                 <a:ea typeface="Avenir Next"/>
                 <a:cs typeface="Avenir Next"/>
               </a:rPr>
-              <a:t>Merchant · cart version · line items · S$133 total · 10-minute expiry</a:t>
-            </a:r>
-          </a:p>
-        </p:txBody>
-      </p:sp>
-      <p:sp>
-        <p:nvSpPr>
-          <p:cNvPr id="7" name="Woven checkout mandate showing exact terms and explicit confirmation-backplate">
-            <a:extLst xmlns:a="http://schemas.openxmlformats.org/drawingml/2006/main">
-              <a:ext uri="{FF2B5EF4-FFF2-40B4-BE49-F238E27FC236}">
-                <a16:creationId xmlns:a16="http://schemas.microsoft.com/office/drawing/2014/main" id="{8ADD3CA5-C1ED-4601-B88F-C6932A9AEDCB}"/>
-              </a:ext>
-            </a:extLst>
-          </p:cNvPr>
-          <p:cNvSpPr>
-            <a:spLocks xmlns:a="http://schemas.openxmlformats.org/drawingml/2006/main" noGrp="1"/>
-          </p:cNvSpPr>
-          <p:nvPr/>
-        </p:nvSpPr>
-        <p:spPr>
-          <a:xfrm xmlns:a="http://schemas.openxmlformats.org/drawingml/2006/main">
-            <a:off x="5095875" y="2362200"/>
-            <a:ext cx="9191625" cy="5257800"/>
+              <a:t>Import validated inventory</a:t>
+            </a:r>
+          </a:p>
+        </p:txBody>
+      </p:sp>
+      <p:sp>
+        <p:nvSpPr>
+          <p:cNvPr id="5" name="trust-label-1">
+            <a:extLst xmlns:a="http://schemas.openxmlformats.org/drawingml/2006/main">
+              <a:ext uri="{FF2B5EF4-FFF2-40B4-BE49-F238E27FC236}">
+                <a16:creationId xmlns:a16="http://schemas.microsoft.com/office/drawing/2014/main" id="{6273882A-17B1-47E9-B063-9AE6CDF7B15B}"/>
+              </a:ext>
+            </a:extLst>
+          </p:cNvPr>
+          <p:cNvSpPr>
+            <a:spLocks xmlns:a="http://schemas.openxmlformats.org/drawingml/2006/main" noGrp="1"/>
+          </p:cNvSpPr>
+          <p:nvPr/>
+        </p:nvSpPr>
+        <p:spPr>
+          <a:xfrm xmlns:a="http://schemas.openxmlformats.org/drawingml/2006/main">
+            <a:off x="838200" y="3676650"/>
+            <a:ext cx="2095500" cy="238125"/>
+          </a:xfrm>
+          <a:prstGeom xmlns:a="http://schemas.openxmlformats.org/drawingml/2006/main" prst="rect">
+            <a:avLst/>
+          </a:prstGeom>
+          <a:noFill xmlns:a="http://schemas.openxmlformats.org/drawingml/2006/main"/>
+          <a:ln xmlns:a="http://schemas.openxmlformats.org/drawingml/2006/main" w="0">
+            <a:noFill/>
+            <a:prstDash val="solid"/>
+          </a:ln>
+        </p:spPr>
+        <p:txBody>
+          <a:bodyPr xmlns:a="http://schemas.openxmlformats.org/drawingml/2006/main" wrap="square" lIns="0" tIns="0" rIns="0" bIns="0">
+            <a:noAutofit/>
+          </a:bodyPr>
+          <a:lstStyle xmlns:a="http://schemas.openxmlformats.org/drawingml/2006/main"/>
+          <a:p xmlns:a="http://schemas.openxmlformats.org/drawingml/2006/main">
+            <a:pPr>
+              <a:buNone/>
+              <a:defRPr sz="1125" b="1">
+                <a:solidFill>
+                  <a:srgbClr val="B7F522"/>
+                </a:solidFill>
+                <a:latin typeface="Menlo"/>
+                <a:ea typeface="Menlo"/>
+                <a:cs typeface="Menlo"/>
+              </a:defRPr>
+            </a:pPr>
+            <a:r>
+              <a:rPr sz="1125" b="1">
+                <a:solidFill>
+                  <a:srgbClr val="B7F522"/>
+                </a:solidFill>
+                <a:latin typeface="Menlo"/>
+                <a:ea typeface="Menlo"/>
+                <a:cs typeface="Menlo"/>
+              </a:rPr>
+              <a:t>PRICE + STOCK</a:t>
+            </a:r>
+          </a:p>
+        </p:txBody>
+      </p:sp>
+      <p:sp>
+        <p:nvSpPr>
+          <p:cNvPr id="6" name="trust-result-1">
+            <a:extLst xmlns:a="http://schemas.openxmlformats.org/drawingml/2006/main">
+              <a:ext uri="{FF2B5EF4-FFF2-40B4-BE49-F238E27FC236}">
+                <a16:creationId xmlns:a16="http://schemas.microsoft.com/office/drawing/2014/main" id="{F162B87C-715A-459A-B00C-31141FB34338}"/>
+              </a:ext>
+            </a:extLst>
+          </p:cNvPr>
+          <p:cNvSpPr>
+            <a:spLocks xmlns:a="http://schemas.openxmlformats.org/drawingml/2006/main" noGrp="1"/>
+          </p:cNvSpPr>
+          <p:nvPr/>
+        </p:nvSpPr>
+        <p:spPr>
+          <a:xfrm xmlns:a="http://schemas.openxmlformats.org/drawingml/2006/main">
+            <a:off x="838200" y="3971925"/>
+            <a:ext cx="3524250" cy="514350"/>
+          </a:xfrm>
+          <a:prstGeom xmlns:a="http://schemas.openxmlformats.org/drawingml/2006/main" prst="rect">
+            <a:avLst/>
+          </a:prstGeom>
+          <a:noFill xmlns:a="http://schemas.openxmlformats.org/drawingml/2006/main"/>
+          <a:ln xmlns:a="http://schemas.openxmlformats.org/drawingml/2006/main" w="0">
+            <a:noFill/>
+            <a:prstDash val="solid"/>
+          </a:ln>
+        </p:spPr>
+        <p:txBody>
+          <a:bodyPr xmlns:a="http://schemas.openxmlformats.org/drawingml/2006/main" wrap="square" lIns="0" tIns="0" rIns="0" bIns="0">
+            <a:noAutofit/>
+          </a:bodyPr>
+          <a:lstStyle xmlns:a="http://schemas.openxmlformats.org/drawingml/2006/main"/>
+          <a:p xmlns:a="http://schemas.openxmlformats.org/drawingml/2006/main">
+            <a:pPr>
+              <a:buNone/>
+              <a:defRPr sz="2025" b="1">
+                <a:solidFill>
+                  <a:srgbClr val="FFFFFF"/>
+                </a:solidFill>
+                <a:latin typeface="Avenir Next"/>
+                <a:ea typeface="Avenir Next"/>
+                <a:cs typeface="Avenir Next"/>
+              </a:defRPr>
+            </a:pPr>
+            <a:r>
+              <a:rPr sz="2025" b="1">
+                <a:solidFill>
+                  <a:srgbClr val="FFFFFF"/>
+                </a:solidFill>
+                <a:latin typeface="Avenir Next"/>
+                <a:ea typeface="Avenir Next"/>
+                <a:cs typeface="Avenir Next"/>
+              </a:rPr>
+              <a:t>Update availability in seconds</a:t>
+            </a:r>
+          </a:p>
+        </p:txBody>
+      </p:sp>
+      <p:sp>
+        <p:nvSpPr>
+          <p:cNvPr id="7" name="trust-label-2">
+            <a:extLst xmlns:a="http://schemas.openxmlformats.org/drawingml/2006/main">
+              <a:ext uri="{FF2B5EF4-FFF2-40B4-BE49-F238E27FC236}">
+                <a16:creationId xmlns:a16="http://schemas.microsoft.com/office/drawing/2014/main" id="{C4B81856-03B7-4C6F-8BE0-20567A559FA6}"/>
+              </a:ext>
+            </a:extLst>
+          </p:cNvPr>
+          <p:cNvSpPr>
+            <a:spLocks xmlns:a="http://schemas.openxmlformats.org/drawingml/2006/main" noGrp="1"/>
+          </p:cNvSpPr>
+          <p:nvPr/>
+        </p:nvSpPr>
+        <p:spPr>
+          <a:xfrm xmlns:a="http://schemas.openxmlformats.org/drawingml/2006/main">
+            <a:off x="838200" y="4705350"/>
+            <a:ext cx="2095500" cy="238125"/>
+          </a:xfrm>
+          <a:prstGeom xmlns:a="http://schemas.openxmlformats.org/drawingml/2006/main" prst="rect">
+            <a:avLst/>
+          </a:prstGeom>
+          <a:noFill xmlns:a="http://schemas.openxmlformats.org/drawingml/2006/main"/>
+          <a:ln xmlns:a="http://schemas.openxmlformats.org/drawingml/2006/main" w="0">
+            <a:noFill/>
+            <a:prstDash val="solid"/>
+          </a:ln>
+        </p:spPr>
+        <p:txBody>
+          <a:bodyPr xmlns:a="http://schemas.openxmlformats.org/drawingml/2006/main" wrap="square" lIns="0" tIns="0" rIns="0" bIns="0">
+            <a:noAutofit/>
+          </a:bodyPr>
+          <a:lstStyle xmlns:a="http://schemas.openxmlformats.org/drawingml/2006/main"/>
+          <a:p xmlns:a="http://schemas.openxmlformats.org/drawingml/2006/main">
+            <a:pPr>
+              <a:buNone/>
+              <a:defRPr sz="1125" b="1">
+                <a:solidFill>
+                  <a:srgbClr val="B7F522"/>
+                </a:solidFill>
+                <a:latin typeface="Menlo"/>
+                <a:ea typeface="Menlo"/>
+                <a:cs typeface="Menlo"/>
+              </a:defRPr>
+            </a:pPr>
+            <a:r>
+              <a:rPr sz="1125" b="1">
+                <a:solidFill>
+                  <a:srgbClr val="B7F522"/>
+                </a:solidFill>
+                <a:latin typeface="Menlo"/>
+                <a:ea typeface="Menlo"/>
+                <a:cs typeface="Menlo"/>
+              </a:rPr>
+              <a:t>ORDERS</a:t>
+            </a:r>
+          </a:p>
+        </p:txBody>
+      </p:sp>
+      <p:sp>
+        <p:nvSpPr>
+          <p:cNvPr id="8" name="trust-result-2">
+            <a:extLst xmlns:a="http://schemas.openxmlformats.org/drawingml/2006/main">
+              <a:ext uri="{FF2B5EF4-FFF2-40B4-BE49-F238E27FC236}">
+                <a16:creationId xmlns:a16="http://schemas.microsoft.com/office/drawing/2014/main" id="{4710E187-A73B-458B-9E26-75865D8C4963}"/>
+              </a:ext>
+            </a:extLst>
+          </p:cNvPr>
+          <p:cNvSpPr>
+            <a:spLocks xmlns:a="http://schemas.openxmlformats.org/drawingml/2006/main" noGrp="1"/>
+          </p:cNvSpPr>
+          <p:nvPr/>
+        </p:nvSpPr>
+        <p:spPr>
+          <a:xfrm xmlns:a="http://schemas.openxmlformats.org/drawingml/2006/main">
+            <a:off x="838200" y="5000625"/>
+            <a:ext cx="3524250" cy="514350"/>
+          </a:xfrm>
+          <a:prstGeom xmlns:a="http://schemas.openxmlformats.org/drawingml/2006/main" prst="rect">
+            <a:avLst/>
+          </a:prstGeom>
+          <a:noFill xmlns:a="http://schemas.openxmlformats.org/drawingml/2006/main"/>
+          <a:ln xmlns:a="http://schemas.openxmlformats.org/drawingml/2006/main" w="0">
+            <a:noFill/>
+            <a:prstDash val="solid"/>
+          </a:ln>
+        </p:spPr>
+        <p:txBody>
+          <a:bodyPr xmlns:a="http://schemas.openxmlformats.org/drawingml/2006/main" wrap="square" lIns="0" tIns="0" rIns="0" bIns="0">
+            <a:noAutofit/>
+          </a:bodyPr>
+          <a:lstStyle xmlns:a="http://schemas.openxmlformats.org/drawingml/2006/main"/>
+          <a:p xmlns:a="http://schemas.openxmlformats.org/drawingml/2006/main">
+            <a:pPr>
+              <a:buNone/>
+              <a:defRPr sz="2025" b="1">
+                <a:solidFill>
+                  <a:srgbClr val="FFFFFF"/>
+                </a:solidFill>
+                <a:latin typeface="Avenir Next"/>
+                <a:ea typeface="Avenir Next"/>
+                <a:cs typeface="Avenir Next"/>
+              </a:defRPr>
+            </a:pPr>
+            <a:r>
+              <a:rPr sz="2025" b="1">
+                <a:solidFill>
+                  <a:srgbClr val="FFFFFF"/>
+                </a:solidFill>
+                <a:latin typeface="Avenir Next"/>
+                <a:ea typeface="Avenir Next"/>
+                <a:cs typeface="Avenir Next"/>
+              </a:rPr>
+              <a:t>Receive exact confirmed orders</a:t>
+            </a:r>
+          </a:p>
+        </p:txBody>
+      </p:sp>
+      <p:sp>
+        <p:nvSpPr>
+          <p:cNvPr id="9" name="trust-label-3">
+            <a:extLst xmlns:a="http://schemas.openxmlformats.org/drawingml/2006/main">
+              <a:ext uri="{FF2B5EF4-FFF2-40B4-BE49-F238E27FC236}">
+                <a16:creationId xmlns:a16="http://schemas.microsoft.com/office/drawing/2014/main" id="{8447503C-1BBD-48B3-8538-611E1FF67E77}"/>
+              </a:ext>
+            </a:extLst>
+          </p:cNvPr>
+          <p:cNvSpPr>
+            <a:spLocks xmlns:a="http://schemas.openxmlformats.org/drawingml/2006/main" noGrp="1"/>
+          </p:cNvSpPr>
+          <p:nvPr/>
+        </p:nvSpPr>
+        <p:spPr>
+          <a:xfrm xmlns:a="http://schemas.openxmlformats.org/drawingml/2006/main">
+            <a:off x="838200" y="5734050"/>
+            <a:ext cx="2095500" cy="238125"/>
+          </a:xfrm>
+          <a:prstGeom xmlns:a="http://schemas.openxmlformats.org/drawingml/2006/main" prst="rect">
+            <a:avLst/>
+          </a:prstGeom>
+          <a:noFill xmlns:a="http://schemas.openxmlformats.org/drawingml/2006/main"/>
+          <a:ln xmlns:a="http://schemas.openxmlformats.org/drawingml/2006/main" w="0">
+            <a:noFill/>
+            <a:prstDash val="solid"/>
+          </a:ln>
+        </p:spPr>
+        <p:txBody>
+          <a:bodyPr xmlns:a="http://schemas.openxmlformats.org/drawingml/2006/main" wrap="square" lIns="0" tIns="0" rIns="0" bIns="0">
+            <a:noAutofit/>
+          </a:bodyPr>
+          <a:lstStyle xmlns:a="http://schemas.openxmlformats.org/drawingml/2006/main"/>
+          <a:p xmlns:a="http://schemas.openxmlformats.org/drawingml/2006/main">
+            <a:pPr>
+              <a:buNone/>
+              <a:defRPr sz="1125" b="1">
+                <a:solidFill>
+                  <a:srgbClr val="B7F522"/>
+                </a:solidFill>
+                <a:latin typeface="Menlo"/>
+                <a:ea typeface="Menlo"/>
+                <a:cs typeface="Menlo"/>
+              </a:defRPr>
+            </a:pPr>
+            <a:r>
+              <a:rPr sz="1125" b="1">
+                <a:solidFill>
+                  <a:srgbClr val="B7F522"/>
+                </a:solidFill>
+                <a:latin typeface="Menlo"/>
+                <a:ea typeface="Menlo"/>
+                <a:cs typeface="Menlo"/>
+              </a:rPr>
+              <a:t>AUDIT</a:t>
+            </a:r>
+          </a:p>
+        </p:txBody>
+      </p:sp>
+      <p:sp>
+        <p:nvSpPr>
+          <p:cNvPr id="10" name="trust-result-3">
+            <a:extLst xmlns:a="http://schemas.openxmlformats.org/drawingml/2006/main">
+              <a:ext uri="{FF2B5EF4-FFF2-40B4-BE49-F238E27FC236}">
+                <a16:creationId xmlns:a16="http://schemas.microsoft.com/office/drawing/2014/main" id="{8AB19497-155D-432D-8278-3D6F1A1EE437}"/>
+              </a:ext>
+            </a:extLst>
+          </p:cNvPr>
+          <p:cNvSpPr>
+            <a:spLocks xmlns:a="http://schemas.openxmlformats.org/drawingml/2006/main" noGrp="1"/>
+          </p:cNvSpPr>
+          <p:nvPr/>
+        </p:nvSpPr>
+        <p:spPr>
+          <a:xfrm xmlns:a="http://schemas.openxmlformats.org/drawingml/2006/main">
+            <a:off x="838200" y="6029325"/>
+            <a:ext cx="3524250" cy="514350"/>
+          </a:xfrm>
+          <a:prstGeom xmlns:a="http://schemas.openxmlformats.org/drawingml/2006/main" prst="rect">
+            <a:avLst/>
+          </a:prstGeom>
+          <a:noFill xmlns:a="http://schemas.openxmlformats.org/drawingml/2006/main"/>
+          <a:ln xmlns:a="http://schemas.openxmlformats.org/drawingml/2006/main" w="0">
+            <a:noFill/>
+            <a:prstDash val="solid"/>
+          </a:ln>
+        </p:spPr>
+        <p:txBody>
+          <a:bodyPr xmlns:a="http://schemas.openxmlformats.org/drawingml/2006/main" wrap="square" lIns="0" tIns="0" rIns="0" bIns="0">
+            <a:noAutofit/>
+          </a:bodyPr>
+          <a:lstStyle xmlns:a="http://schemas.openxmlformats.org/drawingml/2006/main"/>
+          <a:p xmlns:a="http://schemas.openxmlformats.org/drawingml/2006/main">
+            <a:pPr>
+              <a:buNone/>
+              <a:defRPr sz="2025" b="1">
+                <a:solidFill>
+                  <a:srgbClr val="FFFFFF"/>
+                </a:solidFill>
+                <a:latin typeface="Avenir Next"/>
+                <a:ea typeface="Avenir Next"/>
+                <a:cs typeface="Avenir Next"/>
+              </a:defRPr>
+            </a:pPr>
+            <a:r>
+              <a:rPr sz="2025" b="1">
+                <a:solidFill>
+                  <a:srgbClr val="FFFFFF"/>
+                </a:solidFill>
+                <a:latin typeface="Avenir Next"/>
+                <a:ea typeface="Avenir Next"/>
+                <a:cs typeface="Avenir Next"/>
+              </a:rPr>
+              <a:t>Inspect every action</a:t>
+            </a:r>
+          </a:p>
+        </p:txBody>
+      </p:sp>
+      <p:sp>
+        <p:nvSpPr>
+          <p:cNvPr id="11" name="Woven merchant operations desk with inventory and failure scenarios-backplate">
+            <a:extLst xmlns:a="http://schemas.openxmlformats.org/drawingml/2006/main">
+              <a:ext uri="{FF2B5EF4-FFF2-40B4-BE49-F238E27FC236}">
+                <a16:creationId xmlns:a16="http://schemas.microsoft.com/office/drawing/2014/main" id="{EF59AED9-65B8-4527-8126-6B9C87CB4BB9}"/>
+              </a:ext>
+            </a:extLst>
+          </p:cNvPr>
+          <p:cNvSpPr>
+            <a:spLocks xmlns:a="http://schemas.openxmlformats.org/drawingml/2006/main" noGrp="1"/>
+          </p:cNvSpPr>
+          <p:nvPr/>
+        </p:nvSpPr>
+        <p:spPr>
+          <a:xfrm xmlns:a="http://schemas.openxmlformats.org/drawingml/2006/main">
+            <a:off x="4762500" y="2247900"/>
+            <a:ext cx="9525000" cy="5438775"/>
           </a:xfrm>
           <a:prstGeom xmlns:a="http://schemas.openxmlformats.org/drawingml/2006/main" prst="roundRect">
             <a:avLst>
-              <a:gd name="adj" fmla="val 4348"/>
+              <a:gd name="adj" fmla="val 4203"/>
             </a:avLst>
           </a:prstGeom>
           <a:solidFill xmlns:a="http://schemas.openxmlformats.org/drawingml/2006/main">
@@ -4898,20 +7430,20 @@
       </p:sp>
       <p:pic>
         <p:nvPicPr>
-          <p:cNvPr id="20" name=""/>
+          <p:cNvPr id="29" name=""/>
           <p:cNvPicPr>
             <a:picLocks xmlns:a="http://schemas.openxmlformats.org/drawingml/2006/main" noChangeAspect="1"/>
           </p:cNvPicPr>
           <p:nvPr/>
         </p:nvPicPr>
         <p:blipFill>
-          <a:blip xmlns:r="http://schemas.openxmlformats.org/officeDocument/2006/relationships" xmlns:a="http://schemas.openxmlformats.org/drawingml/2006/main" r:embed="R13b74459dc7b44eb"/>
+          <a:blip xmlns:r="http://schemas.openxmlformats.org/officeDocument/2006/relationships" xmlns:a="http://schemas.openxmlformats.org/drawingml/2006/main" r:embed="Rf3b93ab8cd4c41ef"/>
           <a:stretch xmlns:a="http://schemas.openxmlformats.org/drawingml/2006/main"/>
         </p:blipFill>
         <p:spPr>
           <a:xfrm xmlns:a="http://schemas.openxmlformats.org/drawingml/2006/main" flipH="0" flipV="0">
-            <a:off x="5191125" y="2459534"/>
-            <a:ext cx="9001125" cy="5063133"/>
+            <a:off x="4859867" y="2343150"/>
+            <a:ext cx="9330267" cy="5248275"/>
           </a:xfrm>
           <a:prstGeom xmlns:a="http://schemas.openxmlformats.org/drawingml/2006/main" prst="roundRect">
             <a:avLst/>
@@ -4920,10 +7452,99 @@
       </p:pic>
       <p:sp>
         <p:nvSpPr>
-          <p:cNvPr id="9" name="footer-label-6">
-            <a:extLst xmlns:a="http://schemas.openxmlformats.org/drawingml/2006/main">
-              <a:ext uri="{FF2B5EF4-FFF2-40B4-BE49-F238E27FC236}">
-                <a16:creationId xmlns:a16="http://schemas.microsoft.com/office/drawing/2014/main" id="{180E82C5-4959-4CB6-9B7C-CA48FE5A4C58}"/>
+          <p:cNvPr id="13" name="trust-footnote">
+            <a:extLst xmlns:a="http://schemas.openxmlformats.org/drawingml/2006/main">
+              <a:ext uri="{FF2B5EF4-FFF2-40B4-BE49-F238E27FC236}">
+                <a16:creationId xmlns:a16="http://schemas.microsoft.com/office/drawing/2014/main" id="{DCBEF5DD-5567-4EF5-B8A2-D085501EF181}"/>
+              </a:ext>
+            </a:extLst>
+          </p:cNvPr>
+          <p:cNvSpPr>
+            <a:spLocks xmlns:a="http://schemas.openxmlformats.org/drawingml/2006/main" noGrp="1"/>
+          </p:cNvSpPr>
+          <p:nvPr/>
+        </p:nvSpPr>
+        <p:spPr>
+          <a:xfrm xmlns:a="http://schemas.openxmlformats.org/drawingml/2006/main">
+            <a:off x="838200" y="7086600"/>
+            <a:ext cx="3429000" cy="514350"/>
+          </a:xfrm>
+          <a:prstGeom xmlns:a="http://schemas.openxmlformats.org/drawingml/2006/main" prst="rect">
+            <a:avLst/>
+          </a:prstGeom>
+          <a:noFill xmlns:a="http://schemas.openxmlformats.org/drawingml/2006/main"/>
+          <a:ln xmlns:a="http://schemas.openxmlformats.org/drawingml/2006/main" w="0">
+            <a:noFill/>
+            <a:prstDash val="solid"/>
+          </a:ln>
+        </p:spPr>
+        <p:txBody>
+          <a:bodyPr xmlns:a="http://schemas.openxmlformats.org/drawingml/2006/main" wrap="square" lIns="0" tIns="0" rIns="0" bIns="0">
+            <a:noAutofit/>
+          </a:bodyPr>
+          <a:lstStyle xmlns:a="http://schemas.openxmlformats.org/drawingml/2006/main"/>
+          <a:p xmlns:a="http://schemas.openxmlformats.org/drawingml/2006/main">
+            <a:pPr>
+              <a:lnSpc>
+                <a:spcPct val="115000"/>
+              </a:lnSpc>
+              <a:buNone/>
+              <a:defRPr sz="1050" b="1">
+                <a:solidFill>
+                  <a:srgbClr val="DCECE5"/>
+                </a:solidFill>
+                <a:latin typeface="Menlo"/>
+                <a:ea typeface="Menlo"/>
+                <a:cs typeface="Menlo"/>
+              </a:defRPr>
+            </a:pPr>
+            <a:r>
+              <a:rPr sz="1050" b="1">
+                <a:solidFill>
+                  <a:srgbClr val="DCECE5"/>
+                </a:solidFill>
+                <a:latin typeface="Menlo"/>
+                <a:ea typeface="Menlo"/>
+                <a:cs typeface="Menlo"/>
+              </a:rPr>
+              <a:t>SEEDED DEMO DATA · WORKING CONTROL DESK</a:t>
+            </a:r>
+          </a:p>
+          <a:p xmlns:a="http://schemas.openxmlformats.org/drawingml/2006/main">
+            <a:pPr>
+              <a:lnSpc>
+                <a:spcPct val="115000"/>
+              </a:lnSpc>
+              <a:buNone/>
+              <a:defRPr sz="1050" b="1">
+                <a:solidFill>
+                  <a:srgbClr val="DCECE5"/>
+                </a:solidFill>
+                <a:latin typeface="Menlo"/>
+                <a:ea typeface="Menlo"/>
+                <a:cs typeface="Menlo"/>
+              </a:defRPr>
+            </a:pPr>
+            <a:r>
+              <a:rPr sz="1050" b="1">
+                <a:solidFill>
+                  <a:srgbClr val="DCECE5"/>
+                </a:solidFill>
+                <a:latin typeface="Menlo"/>
+                <a:ea typeface="Menlo"/>
+                <a:cs typeface="Menlo"/>
+              </a:rPr>
+              <a:t>DECLINE + REVERSAL SCENARIOS · NO LIVE RAIL</a:t>
+            </a:r>
+          </a:p>
+        </p:txBody>
+      </p:sp>
+      <p:sp>
+        <p:nvSpPr>
+          <p:cNvPr id="14" name="footer-label-7">
+            <a:extLst xmlns:a="http://schemas.openxmlformats.org/drawingml/2006/main">
+              <a:ext uri="{FF2B5EF4-FFF2-40B4-BE49-F238E27FC236}">
+                <a16:creationId xmlns:a16="http://schemas.microsoft.com/office/drawing/2014/main" id="{D1CEC107-8456-466A-976F-F8A491F8F0D9}"/>
               </a:ext>
             </a:extLst>
           </p:cNvPr>
@@ -4956,7 +7577,7 @@
               <a:buNone/>
               <a:defRPr sz="1200" b="1">
                 <a:solidFill>
-                  <a:srgbClr val="6D7974"/>
+                  <a:srgbClr val="DCECE5"/>
                 </a:solidFill>
                 <a:latin typeface="Menlo"/>
                 <a:ea typeface="Menlo"/>
@@ -4966,7 +7587,7 @@
             <a:r>
               <a:rPr sz="1200" b="1">
                 <a:solidFill>
-                  <a:srgbClr val="6D7974"/>
+                  <a:srgbClr val="DCECE5"/>
                 </a:solidFill>
                 <a:latin typeface="Menlo"/>
                 <a:ea typeface="Menlo"/>
@@ -4979,10 +7600,10 @@
       </p:sp>
       <p:sp>
         <p:nvSpPr>
-          <p:cNvPr id="10" name="footer-number-6">
-            <a:extLst xmlns:a="http://schemas.openxmlformats.org/drawingml/2006/main">
-              <a:ext uri="{FF2B5EF4-FFF2-40B4-BE49-F238E27FC236}">
-                <a16:creationId xmlns:a16="http://schemas.microsoft.com/office/drawing/2014/main" id="{573541B3-83F3-4ADA-A401-90AC23E83D47}"/>
+          <p:cNvPr id="15" name="footer-number-7">
+            <a:extLst xmlns:a="http://schemas.openxmlformats.org/drawingml/2006/main">
+              <a:ext uri="{FF2B5EF4-FFF2-40B4-BE49-F238E27FC236}">
+                <a16:creationId xmlns:a16="http://schemas.microsoft.com/office/drawing/2014/main" id="{C71BD092-E5FA-4867-9F30-E72953CEA489}"/>
               </a:ext>
             </a:extLst>
           </p:cNvPr>
@@ -5015,7 +7636,7 @@
               <a:buNone/>
               <a:defRPr sz="1350" b="1">
                 <a:solidFill>
-                  <a:srgbClr val="6D7974"/>
+                  <a:srgbClr val="DCECE5"/>
                 </a:solidFill>
                 <a:latin typeface="Menlo"/>
                 <a:ea typeface="Menlo"/>
@@ -5025,7 +7646,7 @@
             <a:r>
               <a:rPr sz="1350" b="1">
                 <a:solidFill>
-                  <a:srgbClr val="6D7974"/>
+                  <a:srgbClr val="DCECE5"/>
                 </a:solidFill>
                 <a:latin typeface="Menlo"/>
                 <a:ea typeface="Menlo"/>
@@ -5039,7 +7660,7 @@
     </p:spTree>
     <p:extLst>
       <p:ext uri="{BB962C8B-B14F-4D97-AF65-F5344CB8AC3E}">
-        <p14:creationId xmlns:p14="http://schemas.microsoft.com/office/powerpoint/2010/main" val="2091917452"/>
+        <p14:creationId xmlns:p14="http://schemas.microsoft.com/office/powerpoint/2010/main" val="1014882248"/>
       </p:ext>
     </p:extLst>
   </p:cSld>
@@ -5067,10 +7688,10 @@
       </p:grpSpPr>
       <p:sp>
         <p:nvSpPr>
-          <p:cNvPr id="16" name="eyebrow-Trust you can test">
-            <a:extLst xmlns:a="http://schemas.openxmlformats.org/drawingml/2006/main">
-              <a:ext uri="{FF2B5EF4-FFF2-40B4-BE49-F238E27FC236}">
-                <a16:creationId xmlns:a16="http://schemas.microsoft.com/office/drawing/2014/main" id="{3F058616-CF95-435A-9AE1-BD44D8B01497}"/>
+          <p:cNvPr id="10" name="eyebrow-The takeaway">
+            <a:extLst xmlns:a="http://schemas.openxmlformats.org/drawingml/2006/main">
+              <a:ext uri="{FF2B5EF4-FFF2-40B4-BE49-F238E27FC236}">
+                <a16:creationId xmlns:a16="http://schemas.microsoft.com/office/drawing/2014/main" id="{127A4371-AA64-41B4-BB82-2074B9A226A8}"/>
               </a:ext>
             </a:extLst>
           </p:cNvPr>
@@ -5119,29 +7740,29 @@
                 <a:ea typeface="Menlo"/>
                 <a:cs typeface="Menlo"/>
               </a:rPr>
-              <a:t>TRUST YOU CAN TEST</a:t>
-            </a:r>
-          </a:p>
-        </p:txBody>
-      </p:sp>
-      <p:sp>
-        <p:nvSpPr>
-          <p:cNvPr id="2" name="title-Autonomy stops where money starts.">
-            <a:extLst xmlns:a="http://schemas.openxmlformats.org/drawingml/2006/main">
-              <a:ext uri="{FF2B5EF4-FFF2-40B4-BE49-F238E27FC236}">
-                <a16:creationId xmlns:a16="http://schemas.microsoft.com/office/drawing/2014/main" id="{DE43C5D3-4F36-4494-B929-E5ECC06287F1}"/>
-              </a:ext>
-            </a:extLst>
-          </p:cNvPr>
-          <p:cNvSpPr>
-            <a:spLocks xmlns:a="http://schemas.openxmlformats.org/drawingml/2006/main" noGrp="1"/>
-          </p:cNvSpPr>
-          <p:nvPr/>
-        </p:nvSpPr>
-        <p:spPr>
-          <a:xfrm xmlns:a="http://schemas.openxmlformats.org/drawingml/2006/main">
-            <a:off x="838200" y="990600"/>
-            <a:ext cx="12763500" cy="1028700"/>
+              <a:t>THE TAKEAWAY</a:t>
+            </a:r>
+          </a:p>
+        </p:txBody>
+      </p:sp>
+      <p:sp>
+        <p:nvSpPr>
+          <p:cNvPr id="2" name="closing-title">
+            <a:extLst xmlns:a="http://schemas.openxmlformats.org/drawingml/2006/main">
+              <a:ext uri="{FF2B5EF4-FFF2-40B4-BE49-F238E27FC236}">
+                <a16:creationId xmlns:a16="http://schemas.microsoft.com/office/drawing/2014/main" id="{96611E61-644B-4FDB-B197-448F38D56EC2}"/>
+              </a:ext>
+            </a:extLst>
+          </p:cNvPr>
+          <p:cNvSpPr>
+            <a:spLocks xmlns:a="http://schemas.openxmlformats.org/drawingml/2006/main" noGrp="1"/>
+          </p:cNvSpPr>
+          <p:nvPr/>
+        </p:nvSpPr>
+        <p:spPr>
+          <a:xfrm xmlns:a="http://schemas.openxmlformats.org/drawingml/2006/main">
+            <a:off x="838200" y="1314450"/>
+            <a:ext cx="6572250" cy="2533650"/>
           </a:xfrm>
           <a:prstGeom xmlns:a="http://schemas.openxmlformats.org/drawingml/2006/main" prst="rect">
             <a:avLst/>
@@ -5160,10 +7781,10 @@
           <a:p xmlns:a="http://schemas.openxmlformats.org/drawingml/2006/main">
             <a:pPr>
               <a:lnSpc>
-                <a:spcPct val="95000"/>
+                <a:spcPct val="94000"/>
               </a:lnSpc>
               <a:buNone/>
-              <a:defRPr sz="4650" b="1">
+              <a:defRPr sz="4200" b="1">
                 <a:solidFill>
                   <a:srgbClr val="FFFFFF"/>
                 </a:solidFill>
@@ -5173,7 +7794,7 @@
               </a:defRPr>
             </a:pPr>
             <a:r>
-              <a:rPr sz="4650" b="1">
+              <a:rPr sz="4200" b="1">
                 <a:solidFill>
                   <a:srgbClr val="FFFFFF"/>
                 </a:solidFill>
@@ -5181,109 +7802,107 @@
                 <a:ea typeface="Georgia"/>
                 <a:cs typeface="Georgia"/>
               </a:rPr>
-              <a:t>Autonomy stops where money starts.</a:t>
-            </a:r>
-          </a:p>
-        </p:txBody>
-      </p:sp>
-      <p:sp>
-        <p:nvSpPr>
-          <p:cNvPr id="3" name="trust-label-0">
-            <a:extLst xmlns:a="http://schemas.openxmlformats.org/drawingml/2006/main">
-              <a:ext uri="{FF2B5EF4-FFF2-40B4-BE49-F238E27FC236}">
-                <a16:creationId xmlns:a16="http://schemas.microsoft.com/office/drawing/2014/main" id="{D041F315-B888-4E6D-A7D1-CDA440438728}"/>
-              </a:ext>
-            </a:extLst>
-          </p:cNvPr>
-          <p:cNvSpPr>
-            <a:spLocks xmlns:a="http://schemas.openxmlformats.org/drawingml/2006/main" noGrp="1"/>
-          </p:cNvSpPr>
-          <p:nvPr/>
-        </p:nvSpPr>
-        <p:spPr>
-          <a:xfrm xmlns:a="http://schemas.openxmlformats.org/drawingml/2006/main">
-            <a:off x="838200" y="2647950"/>
-            <a:ext cx="2095500" cy="238125"/>
-          </a:xfrm>
-          <a:prstGeom xmlns:a="http://schemas.openxmlformats.org/drawingml/2006/main" prst="rect">
-            <a:avLst/>
-          </a:prstGeom>
-          <a:noFill xmlns:a="http://schemas.openxmlformats.org/drawingml/2006/main"/>
-          <a:ln xmlns:a="http://schemas.openxmlformats.org/drawingml/2006/main" w="0">
-            <a:noFill/>
-            <a:prstDash val="solid"/>
-          </a:ln>
-        </p:spPr>
-        <p:txBody>
-          <a:bodyPr xmlns:a="http://schemas.openxmlformats.org/drawingml/2006/main" wrap="square" lIns="0" tIns="0" rIns="0" bIns="0">
-            <a:noAutofit/>
-          </a:bodyPr>
-          <a:lstStyle xmlns:a="http://schemas.openxmlformats.org/drawingml/2006/main"/>
-          <a:p xmlns:a="http://schemas.openxmlformats.org/drawingml/2006/main">
-            <a:pPr>
-              <a:buNone/>
-              <a:defRPr sz="1125" b="1">
+              <a:t>The checkout belongs</a:t>
+            </a:r>
+          </a:p>
+          <a:p xmlns:a="http://schemas.openxmlformats.org/drawingml/2006/main">
+            <a:pPr>
+              <a:lnSpc>
+                <a:spcPct val="94000"/>
+              </a:lnSpc>
+              <a:buNone/>
+              <a:defRPr sz="4200" b="1">
+                <a:solidFill>
+                  <a:srgbClr val="FFFFFF"/>
+                </a:solidFill>
+                <a:latin typeface="Georgia"/>
+                <a:ea typeface="Georgia"/>
+                <a:cs typeface="Georgia"/>
+              </a:defRPr>
+            </a:pPr>
+            <a:r>
+              <a:rPr sz="4200" b="1">
+                <a:solidFill>
+                  <a:srgbClr val="FFFFFF"/>
+                </a:solidFill>
+                <a:latin typeface="Georgia"/>
+                <a:ea typeface="Georgia"/>
+                <a:cs typeface="Georgia"/>
+              </a:rPr>
+              <a:t>where the request</a:t>
+            </a:r>
+          </a:p>
+          <a:p xmlns:a="http://schemas.openxmlformats.org/drawingml/2006/main">
+            <a:pPr>
+              <a:lnSpc>
+                <a:spcPct val="94000"/>
+              </a:lnSpc>
+              <a:buNone/>
+              <a:defRPr sz="4200" b="1">
+                <a:solidFill>
+                  <a:srgbClr val="FFFFFF"/>
+                </a:solidFill>
+                <a:latin typeface="Georgia"/>
+                <a:ea typeface="Georgia"/>
+                <a:cs typeface="Georgia"/>
+              </a:defRPr>
+            </a:pPr>
+            <a:r>
+              <a:rPr sz="4200" b="1">
+                <a:solidFill>
+                  <a:srgbClr val="FFFFFF"/>
+                </a:solidFill>
+                <a:latin typeface="Georgia"/>
+                <a:ea typeface="Georgia"/>
+                <a:cs typeface="Georgia"/>
+              </a:rPr>
+              <a:t>begins.</a:t>
+            </a:r>
+          </a:p>
+        </p:txBody>
+      </p:sp>
+      <p:sp>
+        <p:nvSpPr>
+          <p:cNvPr id="3" name="closing-tagline">
+            <a:extLst xmlns:a="http://schemas.openxmlformats.org/drawingml/2006/main">
+              <a:ext uri="{FF2B5EF4-FFF2-40B4-BE49-F238E27FC236}">
+                <a16:creationId xmlns:a16="http://schemas.microsoft.com/office/drawing/2014/main" id="{6EC2DC6F-0A7B-4F6E-BD30-C7C0CF8409EC}"/>
+              </a:ext>
+            </a:extLst>
+          </p:cNvPr>
+          <p:cNvSpPr>
+            <a:spLocks xmlns:a="http://schemas.openxmlformats.org/drawingml/2006/main" noGrp="1"/>
+          </p:cNvSpPr>
+          <p:nvPr/>
+        </p:nvSpPr>
+        <p:spPr>
+          <a:xfrm xmlns:a="http://schemas.openxmlformats.org/drawingml/2006/main">
+            <a:off x="838200" y="4438650"/>
+            <a:ext cx="6572250" cy="876300"/>
+          </a:xfrm>
+          <a:prstGeom xmlns:a="http://schemas.openxmlformats.org/drawingml/2006/main" prst="rect">
+            <a:avLst/>
+          </a:prstGeom>
+          <a:noFill xmlns:a="http://schemas.openxmlformats.org/drawingml/2006/main"/>
+          <a:ln xmlns:a="http://schemas.openxmlformats.org/drawingml/2006/main" w="0">
+            <a:noFill/>
+            <a:prstDash val="solid"/>
+          </a:ln>
+        </p:spPr>
+        <p:txBody>
+          <a:bodyPr xmlns:a="http://schemas.openxmlformats.org/drawingml/2006/main" wrap="square" lIns="0" tIns="0" rIns="0" bIns="0">
+            <a:noAutofit/>
+          </a:bodyPr>
+          <a:lstStyle xmlns:a="http://schemas.openxmlformats.org/drawingml/2006/main"/>
+          <a:p xmlns:a="http://schemas.openxmlformats.org/drawingml/2006/main">
+            <a:pPr>
+              <a:lnSpc>
+                <a:spcPct val="108000"/>
+              </a:lnSpc>
+              <a:buNone/>
+              <a:defRPr sz="2100" b="1">
                 <a:solidFill>
                   <a:srgbClr val="B7F522"/>
-                </a:solidFill>
-                <a:latin typeface="Menlo"/>
-                <a:ea typeface="Menlo"/>
-                <a:cs typeface="Menlo"/>
-              </a:defRPr>
-            </a:pPr>
-            <a:r>
-              <a:rPr sz="1125" b="1">
-                <a:solidFill>
-                  <a:srgbClr val="B7F522"/>
-                </a:solidFill>
-                <a:latin typeface="Menlo"/>
-                <a:ea typeface="Menlo"/>
-                <a:cs typeface="Menlo"/>
-              </a:rPr>
-              <a:t>PRICE CHANGES</a:t>
-            </a:r>
-          </a:p>
-        </p:txBody>
-      </p:sp>
-      <p:sp>
-        <p:nvSpPr>
-          <p:cNvPr id="4" name="trust-result-0">
-            <a:extLst xmlns:a="http://schemas.openxmlformats.org/drawingml/2006/main">
-              <a:ext uri="{FF2B5EF4-FFF2-40B4-BE49-F238E27FC236}">
-                <a16:creationId xmlns:a16="http://schemas.microsoft.com/office/drawing/2014/main" id="{9DB51D62-485A-4145-954A-9CB3FA9EC1C1}"/>
-              </a:ext>
-            </a:extLst>
-          </p:cNvPr>
-          <p:cNvSpPr>
-            <a:spLocks xmlns:a="http://schemas.openxmlformats.org/drawingml/2006/main" noGrp="1"/>
-          </p:cNvSpPr>
-          <p:nvPr/>
-        </p:nvSpPr>
-        <p:spPr>
-          <a:xfrm xmlns:a="http://schemas.openxmlformats.org/drawingml/2006/main">
-            <a:off x="838200" y="2943225"/>
-            <a:ext cx="3524250" cy="514350"/>
-          </a:xfrm>
-          <a:prstGeom xmlns:a="http://schemas.openxmlformats.org/drawingml/2006/main" prst="rect">
-            <a:avLst/>
-          </a:prstGeom>
-          <a:noFill xmlns:a="http://schemas.openxmlformats.org/drawingml/2006/main"/>
-          <a:ln xmlns:a="http://schemas.openxmlformats.org/drawingml/2006/main" w="0">
-            <a:noFill/>
-            <a:prstDash val="solid"/>
-          </a:ln>
-        </p:spPr>
-        <p:txBody>
-          <a:bodyPr xmlns:a="http://schemas.openxmlformats.org/drawingml/2006/main" wrap="square" lIns="0" tIns="0" rIns="0" bIns="0">
-            <a:noAutofit/>
-          </a:bodyPr>
-          <a:lstStyle xmlns:a="http://schemas.openxmlformats.org/drawingml/2006/main"/>
-          <a:p xmlns:a="http://schemas.openxmlformats.org/drawingml/2006/main">
-            <a:pPr>
-              <a:buNone/>
-              <a:defRPr sz="2025" b="1">
-                <a:solidFill>
-                  <a:srgbClr val="FFFFFF"/>
                 </a:solidFill>
                 <a:latin typeface="Avenir Next"/>
                 <a:ea typeface="Avenir Next"/>
@@ -5291,395 +7910,157 @@
               </a:defRPr>
             </a:pPr>
             <a:r>
-              <a:rPr sz="2025" b="1">
-                <a:solidFill>
-                  <a:srgbClr val="FFFFFF"/>
+              <a:rPr sz="2100" b="1">
+                <a:solidFill>
+                  <a:srgbClr val="B7F522"/>
                 </a:solidFill>
                 <a:latin typeface="Avenir Next"/>
                 <a:ea typeface="Avenir Next"/>
                 <a:cs typeface="Avenir Next"/>
               </a:rPr>
-              <a:t>Old preview is rejected</a:t>
-            </a:r>
-          </a:p>
-        </p:txBody>
-      </p:sp>
-      <p:sp>
-        <p:nvSpPr>
-          <p:cNvPr id="5" name="trust-label-1">
-            <a:extLst xmlns:a="http://schemas.openxmlformats.org/drawingml/2006/main">
-              <a:ext uri="{FF2B5EF4-FFF2-40B4-BE49-F238E27FC236}">
-                <a16:creationId xmlns:a16="http://schemas.microsoft.com/office/drawing/2014/main" id="{6273882A-17B1-47E9-B063-9AE6CDF7B15B}"/>
-              </a:ext>
-            </a:extLst>
-          </p:cNvPr>
-          <p:cNvSpPr>
-            <a:spLocks xmlns:a="http://schemas.openxmlformats.org/drawingml/2006/main" noGrp="1"/>
-          </p:cNvSpPr>
-          <p:nvPr/>
-        </p:nvSpPr>
-        <p:spPr>
-          <a:xfrm xmlns:a="http://schemas.openxmlformats.org/drawingml/2006/main">
-            <a:off x="838200" y="3676650"/>
-            <a:ext cx="2095500" cy="238125"/>
-          </a:xfrm>
-          <a:prstGeom xmlns:a="http://schemas.openxmlformats.org/drawingml/2006/main" prst="rect">
-            <a:avLst/>
-          </a:prstGeom>
-          <a:noFill xmlns:a="http://schemas.openxmlformats.org/drawingml/2006/main"/>
-          <a:ln xmlns:a="http://schemas.openxmlformats.org/drawingml/2006/main" w="0">
-            <a:noFill/>
-            <a:prstDash val="solid"/>
-          </a:ln>
-        </p:spPr>
-        <p:txBody>
-          <a:bodyPr xmlns:a="http://schemas.openxmlformats.org/drawingml/2006/main" wrap="square" lIns="0" tIns="0" rIns="0" bIns="0">
-            <a:noAutofit/>
-          </a:bodyPr>
-          <a:lstStyle xmlns:a="http://schemas.openxmlformats.org/drawingml/2006/main"/>
-          <a:p xmlns:a="http://schemas.openxmlformats.org/drawingml/2006/main">
-            <a:pPr>
-              <a:buNone/>
-              <a:defRPr sz="1125" b="1">
-                <a:solidFill>
-                  <a:srgbClr val="B7F522"/>
-                </a:solidFill>
-                <a:latin typeface="Menlo"/>
-                <a:ea typeface="Menlo"/>
-                <a:cs typeface="Menlo"/>
-              </a:defRPr>
-            </a:pPr>
-            <a:r>
-              <a:rPr sz="1125" b="1">
-                <a:solidFill>
-                  <a:srgbClr val="B7F522"/>
-                </a:solidFill>
-                <a:latin typeface="Menlo"/>
-                <a:ea typeface="Menlo"/>
-                <a:cs typeface="Menlo"/>
-              </a:rPr>
-              <a:t>STOCKOUT</a:t>
-            </a:r>
-          </a:p>
-        </p:txBody>
-      </p:sp>
-      <p:sp>
-        <p:nvSpPr>
-          <p:cNvPr id="6" name="trust-result-1">
-            <a:extLst xmlns:a="http://schemas.openxmlformats.org/drawingml/2006/main">
-              <a:ext uri="{FF2B5EF4-FFF2-40B4-BE49-F238E27FC236}">
-                <a16:creationId xmlns:a16="http://schemas.microsoft.com/office/drawing/2014/main" id="{F162B87C-715A-459A-B00C-31141FB34338}"/>
-              </a:ext>
-            </a:extLst>
-          </p:cNvPr>
-          <p:cNvSpPr>
-            <a:spLocks xmlns:a="http://schemas.openxmlformats.org/drawingml/2006/main" noGrp="1"/>
-          </p:cNvSpPr>
-          <p:nvPr/>
-        </p:nvSpPr>
-        <p:spPr>
-          <a:xfrm xmlns:a="http://schemas.openxmlformats.org/drawingml/2006/main">
-            <a:off x="838200" y="3971925"/>
-            <a:ext cx="3524250" cy="514350"/>
-          </a:xfrm>
-          <a:prstGeom xmlns:a="http://schemas.openxmlformats.org/drawingml/2006/main" prst="rect">
-            <a:avLst/>
-          </a:prstGeom>
-          <a:noFill xmlns:a="http://schemas.openxmlformats.org/drawingml/2006/main"/>
-          <a:ln xmlns:a="http://schemas.openxmlformats.org/drawingml/2006/main" w="0">
-            <a:noFill/>
-            <a:prstDash val="solid"/>
-          </a:ln>
-        </p:spPr>
-        <p:txBody>
-          <a:bodyPr xmlns:a="http://schemas.openxmlformats.org/drawingml/2006/main" wrap="square" lIns="0" tIns="0" rIns="0" bIns="0">
-            <a:noAutofit/>
-          </a:bodyPr>
-          <a:lstStyle xmlns:a="http://schemas.openxmlformats.org/drawingml/2006/main"/>
-          <a:p xmlns:a="http://schemas.openxmlformats.org/drawingml/2006/main">
-            <a:pPr>
+              <a:t>Ask once. Review once. Confirm once.</a:t>
+            </a:r>
+          </a:p>
+        </p:txBody>
+      </p:sp>
+      <p:sp>
+        <p:nvSpPr>
+          <p:cNvPr id="4" name="closing-triad">
+            <a:extLst xmlns:a="http://schemas.openxmlformats.org/drawingml/2006/main">
+              <a:ext uri="{FF2B5EF4-FFF2-40B4-BE49-F238E27FC236}">
+                <a16:creationId xmlns:a16="http://schemas.microsoft.com/office/drawing/2014/main" id="{72F89658-D2BF-4658-B511-4AA10AF9E935}"/>
+              </a:ext>
+            </a:extLst>
+          </p:cNvPr>
+          <p:cNvSpPr>
+            <a:spLocks xmlns:a="http://schemas.openxmlformats.org/drawingml/2006/main" noGrp="1"/>
+          </p:cNvSpPr>
+          <p:nvPr/>
+        </p:nvSpPr>
+        <p:spPr>
+          <a:xfrm xmlns:a="http://schemas.openxmlformats.org/drawingml/2006/main">
+            <a:off x="838200" y="5810250"/>
+            <a:ext cx="5334000" cy="1238250"/>
+          </a:xfrm>
+          <a:prstGeom xmlns:a="http://schemas.openxmlformats.org/drawingml/2006/main" prst="rect">
+            <a:avLst/>
+          </a:prstGeom>
+          <a:noFill xmlns:a="http://schemas.openxmlformats.org/drawingml/2006/main"/>
+          <a:ln xmlns:a="http://schemas.openxmlformats.org/drawingml/2006/main" w="0">
+            <a:noFill/>
+            <a:prstDash val="solid"/>
+          </a:ln>
+        </p:spPr>
+        <p:txBody>
+          <a:bodyPr xmlns:a="http://schemas.openxmlformats.org/drawingml/2006/main" wrap="square" lIns="0" tIns="0" rIns="0" bIns="0">
+            <a:noAutofit/>
+          </a:bodyPr>
+          <a:lstStyle xmlns:a="http://schemas.openxmlformats.org/drawingml/2006/main"/>
+          <a:p xmlns:a="http://schemas.openxmlformats.org/drawingml/2006/main">
+            <a:pPr>
+              <a:lnSpc>
+                <a:spcPct val="118000"/>
+              </a:lnSpc>
               <a:buNone/>
               <a:defRPr sz="2025" b="1">
                 <a:solidFill>
-                  <a:srgbClr val="FFFFFF"/>
-                </a:solidFill>
-                <a:latin typeface="Avenir Next"/>
-                <a:ea typeface="Avenir Next"/>
-                <a:cs typeface="Avenir Next"/>
+                  <a:srgbClr val="DCECE5"/>
+                </a:solidFill>
+                <a:latin typeface="Menlo"/>
+                <a:ea typeface="Menlo"/>
+                <a:cs typeface="Menlo"/>
               </a:defRPr>
             </a:pPr>
             <a:r>
               <a:rPr sz="2025" b="1">
                 <a:solidFill>
-                  <a:srgbClr val="FFFFFF"/>
-                </a:solidFill>
-                <a:latin typeface="Avenir Next"/>
-                <a:ea typeface="Avenir Next"/>
-                <a:cs typeface="Avenir Next"/>
-              </a:rPr>
-              <a:t>No impossible order is created</a:t>
-            </a:r>
-          </a:p>
-        </p:txBody>
-      </p:sp>
-      <p:sp>
-        <p:nvSpPr>
-          <p:cNvPr id="7" name="trust-label-2">
-            <a:extLst xmlns:a="http://schemas.openxmlformats.org/drawingml/2006/main">
-              <a:ext uri="{FF2B5EF4-FFF2-40B4-BE49-F238E27FC236}">
-                <a16:creationId xmlns:a16="http://schemas.microsoft.com/office/drawing/2014/main" id="{C4B81856-03B7-4C6F-8BE0-20567A559FA6}"/>
-              </a:ext>
-            </a:extLst>
-          </p:cNvPr>
-          <p:cNvSpPr>
-            <a:spLocks xmlns:a="http://schemas.openxmlformats.org/drawingml/2006/main" noGrp="1"/>
-          </p:cNvSpPr>
-          <p:nvPr/>
-        </p:nvSpPr>
-        <p:spPr>
-          <a:xfrm xmlns:a="http://schemas.openxmlformats.org/drawingml/2006/main">
-            <a:off x="838200" y="4705350"/>
-            <a:ext cx="2095500" cy="238125"/>
-          </a:xfrm>
-          <a:prstGeom xmlns:a="http://schemas.openxmlformats.org/drawingml/2006/main" prst="rect">
-            <a:avLst/>
-          </a:prstGeom>
-          <a:noFill xmlns:a="http://schemas.openxmlformats.org/drawingml/2006/main"/>
-          <a:ln xmlns:a="http://schemas.openxmlformats.org/drawingml/2006/main" w="0">
-            <a:noFill/>
-            <a:prstDash val="solid"/>
-          </a:ln>
-        </p:spPr>
-        <p:txBody>
-          <a:bodyPr xmlns:a="http://schemas.openxmlformats.org/drawingml/2006/main" wrap="square" lIns="0" tIns="0" rIns="0" bIns="0">
-            <a:noAutofit/>
-          </a:bodyPr>
-          <a:lstStyle xmlns:a="http://schemas.openxmlformats.org/drawingml/2006/main"/>
-          <a:p xmlns:a="http://schemas.openxmlformats.org/drawingml/2006/main">
-            <a:pPr>
-              <a:buNone/>
-              <a:defRPr sz="1125" b="1">
-                <a:solidFill>
-                  <a:srgbClr val="B7F522"/>
-                </a:solidFill>
-                <a:latin typeface="Menlo"/>
-                <a:ea typeface="Menlo"/>
-                <a:cs typeface="Menlo"/>
-              </a:defRPr>
-            </a:pPr>
-            <a:r>
-              <a:rPr sz="1125" b="1">
-                <a:solidFill>
-                  <a:srgbClr val="B7F522"/>
-                </a:solidFill>
-                <a:latin typeface="Menlo"/>
-                <a:ea typeface="Menlo"/>
-                <a:cs typeface="Menlo"/>
-              </a:rPr>
-              <a:t>AUTH DECLINE</a:t>
-            </a:r>
-          </a:p>
-        </p:txBody>
-      </p:sp>
-      <p:sp>
-        <p:nvSpPr>
-          <p:cNvPr id="8" name="trust-result-2">
-            <a:extLst xmlns:a="http://schemas.openxmlformats.org/drawingml/2006/main">
-              <a:ext uri="{FF2B5EF4-FFF2-40B4-BE49-F238E27FC236}">
-                <a16:creationId xmlns:a16="http://schemas.microsoft.com/office/drawing/2014/main" id="{4710E187-A73B-458B-9E26-75865D8C4963}"/>
-              </a:ext>
-            </a:extLst>
-          </p:cNvPr>
-          <p:cNvSpPr>
-            <a:spLocks xmlns:a="http://schemas.openxmlformats.org/drawingml/2006/main" noGrp="1"/>
-          </p:cNvSpPr>
-          <p:nvPr/>
-        </p:nvSpPr>
-        <p:spPr>
-          <a:xfrm xmlns:a="http://schemas.openxmlformats.org/drawingml/2006/main">
-            <a:off x="838200" y="5000625"/>
-            <a:ext cx="3524250" cy="514350"/>
-          </a:xfrm>
-          <a:prstGeom xmlns:a="http://schemas.openxmlformats.org/drawingml/2006/main" prst="rect">
-            <a:avLst/>
-          </a:prstGeom>
-          <a:noFill xmlns:a="http://schemas.openxmlformats.org/drawingml/2006/main"/>
-          <a:ln xmlns:a="http://schemas.openxmlformats.org/drawingml/2006/main" w="0">
-            <a:noFill/>
-            <a:prstDash val="solid"/>
-          </a:ln>
-        </p:spPr>
-        <p:txBody>
-          <a:bodyPr xmlns:a="http://schemas.openxmlformats.org/drawingml/2006/main" wrap="square" lIns="0" tIns="0" rIns="0" bIns="0">
-            <a:noAutofit/>
-          </a:bodyPr>
-          <a:lstStyle xmlns:a="http://schemas.openxmlformats.org/drawingml/2006/main"/>
-          <a:p xmlns:a="http://schemas.openxmlformats.org/drawingml/2006/main">
-            <a:pPr>
+                  <a:srgbClr val="DCECE5"/>
+                </a:solidFill>
+                <a:latin typeface="Menlo"/>
+                <a:ea typeface="Menlo"/>
+                <a:cs typeface="Menlo"/>
+              </a:rPr>
+              <a:t>ChatGPT understands.</a:t>
+            </a:r>
+          </a:p>
+          <a:p xmlns:a="http://schemas.openxmlformats.org/drawingml/2006/main">
+            <a:pPr>
+              <a:lnSpc>
+                <a:spcPct val="118000"/>
+              </a:lnSpc>
               <a:buNone/>
               <a:defRPr sz="2025" b="1">
                 <a:solidFill>
-                  <a:srgbClr val="FFFFFF"/>
-                </a:solidFill>
-                <a:latin typeface="Avenir Next"/>
-                <a:ea typeface="Avenir Next"/>
-                <a:cs typeface="Avenir Next"/>
+                  <a:srgbClr val="DCECE5"/>
+                </a:solidFill>
+                <a:latin typeface="Menlo"/>
+                <a:ea typeface="Menlo"/>
+                <a:cs typeface="Menlo"/>
               </a:defRPr>
             </a:pPr>
             <a:r>
               <a:rPr sz="2025" b="1">
                 <a:solidFill>
-                  <a:srgbClr val="FFFFFF"/>
-                </a:solidFill>
-                <a:latin typeface="Avenir Next"/>
-                <a:ea typeface="Avenir Next"/>
-                <a:cs typeface="Avenir Next"/>
-              </a:rPr>
-              <a:t>No confirmed merchant order</a:t>
-            </a:r>
-          </a:p>
-        </p:txBody>
-      </p:sp>
-      <p:sp>
-        <p:nvSpPr>
-          <p:cNvPr id="9" name="trust-label-3">
-            <a:extLst xmlns:a="http://schemas.openxmlformats.org/drawingml/2006/main">
-              <a:ext uri="{FF2B5EF4-FFF2-40B4-BE49-F238E27FC236}">
-                <a16:creationId xmlns:a16="http://schemas.microsoft.com/office/drawing/2014/main" id="{8447503C-1BBD-48B3-8538-611E1FF67E77}"/>
-              </a:ext>
-            </a:extLst>
-          </p:cNvPr>
-          <p:cNvSpPr>
-            <a:spLocks xmlns:a="http://schemas.openxmlformats.org/drawingml/2006/main" noGrp="1"/>
-          </p:cNvSpPr>
-          <p:nvPr/>
-        </p:nvSpPr>
-        <p:spPr>
-          <a:xfrm xmlns:a="http://schemas.openxmlformats.org/drawingml/2006/main">
-            <a:off x="838200" y="5734050"/>
-            <a:ext cx="2095500" cy="238125"/>
-          </a:xfrm>
-          <a:prstGeom xmlns:a="http://schemas.openxmlformats.org/drawingml/2006/main" prst="rect">
-            <a:avLst/>
-          </a:prstGeom>
-          <a:noFill xmlns:a="http://schemas.openxmlformats.org/drawingml/2006/main"/>
-          <a:ln xmlns:a="http://schemas.openxmlformats.org/drawingml/2006/main" w="0">
-            <a:noFill/>
-            <a:prstDash val="solid"/>
-          </a:ln>
-        </p:spPr>
-        <p:txBody>
-          <a:bodyPr xmlns:a="http://schemas.openxmlformats.org/drawingml/2006/main" wrap="square" lIns="0" tIns="0" rIns="0" bIns="0">
-            <a:noAutofit/>
-          </a:bodyPr>
-          <a:lstStyle xmlns:a="http://schemas.openxmlformats.org/drawingml/2006/main"/>
-          <a:p xmlns:a="http://schemas.openxmlformats.org/drawingml/2006/main">
-            <a:pPr>
-              <a:buNone/>
-              <a:defRPr sz="1125" b="1">
-                <a:solidFill>
-                  <a:srgbClr val="B7F522"/>
-                </a:solidFill>
-                <a:latin typeface="Menlo"/>
-                <a:ea typeface="Menlo"/>
-                <a:cs typeface="Menlo"/>
-              </a:defRPr>
-            </a:pPr>
-            <a:r>
-              <a:rPr sz="1125" b="1">
-                <a:solidFill>
-                  <a:srgbClr val="B7F522"/>
-                </a:solidFill>
-                <a:latin typeface="Menlo"/>
-                <a:ea typeface="Menlo"/>
-                <a:cs typeface="Menlo"/>
-              </a:rPr>
-              <a:t>ORDER FAILURE</a:t>
-            </a:r>
-          </a:p>
-        </p:txBody>
-      </p:sp>
-      <p:sp>
-        <p:nvSpPr>
-          <p:cNvPr id="10" name="trust-result-3">
-            <a:extLst xmlns:a="http://schemas.openxmlformats.org/drawingml/2006/main">
-              <a:ext uri="{FF2B5EF4-FFF2-40B4-BE49-F238E27FC236}">
-                <a16:creationId xmlns:a16="http://schemas.microsoft.com/office/drawing/2014/main" id="{8AB19497-155D-432D-8278-3D6F1A1EE437}"/>
-              </a:ext>
-            </a:extLst>
-          </p:cNvPr>
-          <p:cNvSpPr>
-            <a:spLocks xmlns:a="http://schemas.openxmlformats.org/drawingml/2006/main" noGrp="1"/>
-          </p:cNvSpPr>
-          <p:nvPr/>
-        </p:nvSpPr>
-        <p:spPr>
-          <a:xfrm xmlns:a="http://schemas.openxmlformats.org/drawingml/2006/main">
-            <a:off x="838200" y="6029325"/>
-            <a:ext cx="3524250" cy="514350"/>
-          </a:xfrm>
-          <a:prstGeom xmlns:a="http://schemas.openxmlformats.org/drawingml/2006/main" prst="rect">
-            <a:avLst/>
-          </a:prstGeom>
-          <a:noFill xmlns:a="http://schemas.openxmlformats.org/drawingml/2006/main"/>
-          <a:ln xmlns:a="http://schemas.openxmlformats.org/drawingml/2006/main" w="0">
-            <a:noFill/>
-            <a:prstDash val="solid"/>
-          </a:ln>
-        </p:spPr>
-        <p:txBody>
-          <a:bodyPr xmlns:a="http://schemas.openxmlformats.org/drawingml/2006/main" wrap="square" lIns="0" tIns="0" rIns="0" bIns="0">
-            <a:noAutofit/>
-          </a:bodyPr>
-          <a:lstStyle xmlns:a="http://schemas.openxmlformats.org/drawingml/2006/main"/>
-          <a:p xmlns:a="http://schemas.openxmlformats.org/drawingml/2006/main">
-            <a:pPr>
+                  <a:srgbClr val="DCECE5"/>
+                </a:solidFill>
+                <a:latin typeface="Menlo"/>
+                <a:ea typeface="Menlo"/>
+                <a:cs typeface="Menlo"/>
+              </a:rPr>
+              <a:t>Woven builds the right cart.</a:t>
+            </a:r>
+          </a:p>
+          <a:p xmlns:a="http://schemas.openxmlformats.org/drawingml/2006/main">
+            <a:pPr>
+              <a:lnSpc>
+                <a:spcPct val="118000"/>
+              </a:lnSpc>
               <a:buNone/>
               <a:defRPr sz="2025" b="1">
                 <a:solidFill>
-                  <a:srgbClr val="FFFFFF"/>
-                </a:solidFill>
-                <a:latin typeface="Avenir Next"/>
-                <a:ea typeface="Avenir Next"/>
-                <a:cs typeface="Avenir Next"/>
+                  <a:srgbClr val="DCECE5"/>
+                </a:solidFill>
+                <a:latin typeface="Menlo"/>
+                <a:ea typeface="Menlo"/>
+                <a:cs typeface="Menlo"/>
               </a:defRPr>
             </a:pPr>
             <a:r>
               <a:rPr sz="2025" b="1">
                 <a:solidFill>
-                  <a:srgbClr val="FFFFFF"/>
-                </a:solidFill>
-                <a:latin typeface="Avenir Next"/>
-                <a:ea typeface="Avenir Next"/>
-                <a:cs typeface="Avenir Next"/>
-              </a:rPr>
-              <a:t>Authorization enters reversal</a:t>
-            </a:r>
-          </a:p>
-        </p:txBody>
-      </p:sp>
-      <p:sp>
-        <p:nvSpPr>
-          <p:cNvPr id="11" name="Woven merchant operations desk with inventory and failure scenarios-backplate">
-            <a:extLst xmlns:a="http://schemas.openxmlformats.org/drawingml/2006/main">
-              <a:ext uri="{FF2B5EF4-FFF2-40B4-BE49-F238E27FC236}">
-                <a16:creationId xmlns:a16="http://schemas.microsoft.com/office/drawing/2014/main" id="{EF59AED9-65B8-4527-8126-6B9C87CB4BB9}"/>
-              </a:ext>
-            </a:extLst>
-          </p:cNvPr>
-          <p:cNvSpPr>
-            <a:spLocks xmlns:a="http://schemas.openxmlformats.org/drawingml/2006/main" noGrp="1"/>
-          </p:cNvSpPr>
-          <p:nvPr/>
-        </p:nvSpPr>
-        <p:spPr>
-          <a:xfrm xmlns:a="http://schemas.openxmlformats.org/drawingml/2006/main">
-            <a:off x="4762500" y="2247900"/>
-            <a:ext cx="9525000" cy="5438775"/>
+                  <a:srgbClr val="DCECE5"/>
+                </a:solidFill>
+                <a:latin typeface="Menlo"/>
+                <a:ea typeface="Menlo"/>
+                <a:cs typeface="Menlo"/>
+              </a:rPr>
+              <a:t>The user controls authorization.</a:t>
+            </a:r>
+          </a:p>
+        </p:txBody>
+      </p:sp>
+      <p:sp>
+        <p:nvSpPr>
+          <p:cNvPr id="5" name="Woven simulated authorization result and pickup receipt-backplate">
+            <a:extLst xmlns:a="http://schemas.openxmlformats.org/drawingml/2006/main">
+              <a:ext uri="{FF2B5EF4-FFF2-40B4-BE49-F238E27FC236}">
+                <a16:creationId xmlns:a16="http://schemas.microsoft.com/office/drawing/2014/main" id="{6657EEA8-CC04-4F82-BABF-52A8AB7EB24E}"/>
+              </a:ext>
+            </a:extLst>
+          </p:cNvPr>
+          <p:cNvSpPr>
+            <a:spLocks xmlns:a="http://schemas.openxmlformats.org/drawingml/2006/main" noGrp="1"/>
+          </p:cNvSpPr>
+          <p:nvPr/>
+        </p:nvSpPr>
+        <p:spPr>
+          <a:xfrm xmlns:a="http://schemas.openxmlformats.org/drawingml/2006/main">
+            <a:off x="7620000" y="2381250"/>
+            <a:ext cx="6858000" cy="3943350"/>
           </a:xfrm>
           <a:prstGeom xmlns:a="http://schemas.openxmlformats.org/drawingml/2006/main" prst="roundRect">
             <a:avLst>
-              <a:gd name="adj" fmla="val 4203"/>
+              <a:gd name="adj" fmla="val 5797"/>
             </a:avLst>
           </a:prstGeom>
           <a:solidFill xmlns:a="http://schemas.openxmlformats.org/drawingml/2006/main">
@@ -5699,20 +8080,20 @@
       </p:sp>
       <p:pic>
         <p:nvPicPr>
-          <p:cNvPr id="29" name=""/>
+          <p:cNvPr id="17" name=""/>
           <p:cNvPicPr>
             <a:picLocks xmlns:a="http://schemas.openxmlformats.org/drawingml/2006/main" noChangeAspect="1"/>
           </p:cNvPicPr>
           <p:nvPr/>
         </p:nvPicPr>
         <p:blipFill>
-          <a:blip xmlns:r="http://schemas.openxmlformats.org/officeDocument/2006/relationships" xmlns:a="http://schemas.openxmlformats.org/drawingml/2006/main" r:embed="R2fa4a6fe333c46ff"/>
+          <a:blip xmlns:r="http://schemas.openxmlformats.org/officeDocument/2006/relationships" xmlns:a="http://schemas.openxmlformats.org/drawingml/2006/main" r:embed="Re5524c358c254334"/>
           <a:stretch xmlns:a="http://schemas.openxmlformats.org/drawingml/2006/main"/>
         </p:blipFill>
         <p:spPr>
           <a:xfrm xmlns:a="http://schemas.openxmlformats.org/drawingml/2006/main" flipH="0" flipV="0">
-            <a:off x="4859867" y="2343150"/>
-            <a:ext cx="9330267" cy="5248275"/>
+            <a:off x="7715250" y="2477691"/>
+            <a:ext cx="6667500" cy="3750469"/>
           </a:xfrm>
           <a:prstGeom xmlns:a="http://schemas.openxmlformats.org/drawingml/2006/main" prst="roundRect">
             <a:avLst/>
@@ -5721,99 +8102,69 @@
       </p:pic>
       <p:sp>
         <p:nvSpPr>
-          <p:cNvPr id="13" name="trust-footnote">
-            <a:extLst xmlns:a="http://schemas.openxmlformats.org/drawingml/2006/main">
-              <a:ext uri="{FF2B5EF4-FFF2-40B4-BE49-F238E27FC236}">
-                <a16:creationId xmlns:a16="http://schemas.microsoft.com/office/drawing/2014/main" id="{DCBEF5DD-5567-4EF5-B8A2-D085501EF181}"/>
-              </a:ext>
-            </a:extLst>
-          </p:cNvPr>
-          <p:cNvSpPr>
-            <a:spLocks xmlns:a="http://schemas.openxmlformats.org/drawingml/2006/main" noGrp="1"/>
-          </p:cNvSpPr>
-          <p:nvPr/>
-        </p:nvSpPr>
-        <p:spPr>
-          <a:xfrm xmlns:a="http://schemas.openxmlformats.org/drawingml/2006/main">
-            <a:off x="838200" y="7086600"/>
-            <a:ext cx="3429000" cy="514350"/>
-          </a:xfrm>
-          <a:prstGeom xmlns:a="http://schemas.openxmlformats.org/drawingml/2006/main" prst="rect">
-            <a:avLst/>
-          </a:prstGeom>
-          <a:noFill xmlns:a="http://schemas.openxmlformats.org/drawingml/2006/main"/>
-          <a:ln xmlns:a="http://schemas.openxmlformats.org/drawingml/2006/main" w="0">
-            <a:noFill/>
-            <a:prstDash val="solid"/>
-          </a:ln>
-        </p:spPr>
-        <p:txBody>
-          <a:bodyPr xmlns:a="http://schemas.openxmlformats.org/drawingml/2006/main" wrap="square" lIns="0" tIns="0" rIns="0" bIns="0">
-            <a:noAutofit/>
-          </a:bodyPr>
-          <a:lstStyle xmlns:a="http://schemas.openxmlformats.org/drawingml/2006/main"/>
-          <a:p xmlns:a="http://schemas.openxmlformats.org/drawingml/2006/main">
-            <a:pPr>
-              <a:lnSpc>
-                <a:spcPct val="115000"/>
-              </a:lnSpc>
-              <a:buNone/>
-              <a:defRPr sz="1050" b="1">
-                <a:solidFill>
-                  <a:srgbClr val="DCECE5"/>
-                </a:solidFill>
-                <a:latin typeface="Menlo"/>
-                <a:ea typeface="Menlo"/>
-                <a:cs typeface="Menlo"/>
-              </a:defRPr>
-            </a:pPr>
-            <a:r>
-              <a:rPr sz="1050" b="1">
-                <a:solidFill>
-                  <a:srgbClr val="DCECE5"/>
-                </a:solidFill>
-                <a:latin typeface="Menlo"/>
-                <a:ea typeface="Menlo"/>
-                <a:cs typeface="Menlo"/>
-              </a:rPr>
-              <a:t>NO CARD DATA · SEEDED INVENTORY</a:t>
-            </a:r>
-          </a:p>
-          <a:p xmlns:a="http://schemas.openxmlformats.org/drawingml/2006/main">
-            <a:pPr>
-              <a:lnSpc>
-                <a:spcPct val="115000"/>
-              </a:lnSpc>
-              <a:buNone/>
-              <a:defRPr sz="1050" b="1">
-                <a:solidFill>
-                  <a:srgbClr val="DCECE5"/>
-                </a:solidFill>
-                <a:latin typeface="Menlo"/>
-                <a:ea typeface="Menlo"/>
-                <a:cs typeface="Menlo"/>
-              </a:defRPr>
-            </a:pPr>
-            <a:r>
-              <a:rPr sz="1050" b="1">
-                <a:solidFill>
-                  <a:srgbClr val="DCECE5"/>
-                </a:solidFill>
-                <a:latin typeface="Menlo"/>
-                <a:ea typeface="Menlo"/>
-                <a:cs typeface="Menlo"/>
-              </a:rPr>
-              <a:t>SIMULATED AUTHORIZATION · AUDIT TRAIL</a:t>
-            </a:r>
-          </a:p>
-        </p:txBody>
-      </p:sp>
-      <p:sp>
-        <p:nvSpPr>
-          <p:cNvPr id="14" name="footer-label-7">
-            <a:extLst xmlns:a="http://schemas.openxmlformats.org/drawingml/2006/main">
-              <a:ext uri="{FF2B5EF4-FFF2-40B4-BE49-F238E27FC236}">
-                <a16:creationId xmlns:a16="http://schemas.microsoft.com/office/drawing/2014/main" id="{D1CEC107-8456-466A-976F-F8A491F8F0D9}"/>
+          <p:cNvPr id="7" name="closing-boundary">
+            <a:extLst xmlns:a="http://schemas.openxmlformats.org/drawingml/2006/main">
+              <a:ext uri="{FF2B5EF4-FFF2-40B4-BE49-F238E27FC236}">
+                <a16:creationId xmlns:a16="http://schemas.microsoft.com/office/drawing/2014/main" id="{F366E3E1-58EC-4B9E-85AC-84B9FDF83536}"/>
+              </a:ext>
+            </a:extLst>
+          </p:cNvPr>
+          <p:cNvSpPr>
+            <a:spLocks xmlns:a="http://schemas.openxmlformats.org/drawingml/2006/main" noGrp="1"/>
+          </p:cNvSpPr>
+          <p:nvPr/>
+        </p:nvSpPr>
+        <p:spPr>
+          <a:xfrm xmlns:a="http://schemas.openxmlformats.org/drawingml/2006/main">
+            <a:off x="8401050" y="6572250"/>
+            <a:ext cx="5334000" cy="247650"/>
+          </a:xfrm>
+          <a:prstGeom xmlns:a="http://schemas.openxmlformats.org/drawingml/2006/main" prst="rect">
+            <a:avLst/>
+          </a:prstGeom>
+          <a:noFill xmlns:a="http://schemas.openxmlformats.org/drawingml/2006/main"/>
+          <a:ln xmlns:a="http://schemas.openxmlformats.org/drawingml/2006/main" w="0">
+            <a:noFill/>
+            <a:prstDash val="solid"/>
+          </a:ln>
+        </p:spPr>
+        <p:txBody>
+          <a:bodyPr xmlns:a="http://schemas.openxmlformats.org/drawingml/2006/main" wrap="square" lIns="0" tIns="0" rIns="0" bIns="0">
+            <a:noAutofit/>
+          </a:bodyPr>
+          <a:lstStyle xmlns:a="http://schemas.openxmlformats.org/drawingml/2006/main"/>
+          <a:p xmlns:a="http://schemas.openxmlformats.org/drawingml/2006/main">
+            <a:pPr algn="ctr">
+              <a:buNone/>
+              <a:defRPr sz="1200" b="1">
+                <a:solidFill>
+                  <a:srgbClr val="B7F522"/>
+                </a:solidFill>
+                <a:latin typeface="Menlo"/>
+                <a:ea typeface="Menlo"/>
+                <a:cs typeface="Menlo"/>
+              </a:defRPr>
+            </a:pPr>
+            <a:r>
+              <a:rPr sz="1200" b="1">
+                <a:solidFill>
+                  <a:srgbClr val="B7F522"/>
+                </a:solidFill>
+                <a:latin typeface="Menlo"/>
+                <a:ea typeface="Menlo"/>
+                <a:cs typeface="Menlo"/>
+              </a:rPr>
+              <a:t>IDENTITY DIRECTION + VISA RESULT · CLEARLY SIMULATED</a:t>
+            </a:r>
+          </a:p>
+        </p:txBody>
+      </p:sp>
+      <p:sp>
+        <p:nvSpPr>
+          <p:cNvPr id="8" name="footer-label-9">
+            <a:extLst xmlns:a="http://schemas.openxmlformats.org/drawingml/2006/main">
+              <a:ext uri="{FF2B5EF4-FFF2-40B4-BE49-F238E27FC236}">
+                <a16:creationId xmlns:a16="http://schemas.microsoft.com/office/drawing/2014/main" id="{D2647B79-80DB-4F8E-8A2F-05922DDDED74}"/>
               </a:ext>
             </a:extLst>
           </p:cNvPr>
@@ -5869,10 +8220,10 @@
       </p:sp>
       <p:sp>
         <p:nvSpPr>
-          <p:cNvPr id="15" name="footer-number-7">
-            <a:extLst xmlns:a="http://schemas.openxmlformats.org/drawingml/2006/main">
-              <a:ext uri="{FF2B5EF4-FFF2-40B4-BE49-F238E27FC236}">
-                <a16:creationId xmlns:a16="http://schemas.microsoft.com/office/drawing/2014/main" id="{C71BD092-E5FA-4867-9F30-E72953CEA489}"/>
+          <p:cNvPr id="9" name="footer-number-9">
+            <a:extLst xmlns:a="http://schemas.openxmlformats.org/drawingml/2006/main">
+              <a:ext uri="{FF2B5EF4-FFF2-40B4-BE49-F238E27FC236}">
+                <a16:creationId xmlns:a16="http://schemas.microsoft.com/office/drawing/2014/main" id="{62445167-1406-4B61-A1CF-80F49583F03F}"/>
               </a:ext>
             </a:extLst>
           </p:cNvPr>
@@ -5929,7 +8280,7 @@
     </p:spTree>
     <p:extLst>
       <p:ext uri="{BB962C8B-B14F-4D97-AF65-F5344CB8AC3E}">
-        <p14:creationId xmlns:p14="http://schemas.microsoft.com/office/powerpoint/2010/main" val="1014882248"/>
+        <p14:creationId xmlns:p14="http://schemas.microsoft.com/office/powerpoint/2010/main" val="1060689594"/>
       </p:ext>
     </p:extLst>
   </p:cSld>
@@ -6009,7 +8360,7 @@
                 <a:ea typeface="Menlo"/>
                 <a:cs typeface="Menlo"/>
               </a:rPr>
-              <a:t>MERCHANT ACCESS AND SCALE</a:t>
+              <a:t>BACKUP · WHAT IS REAL</a:t>
             </a:r>
           </a:p>
         </p:txBody>
@@ -6071,7 +8422,7 @@
                 <a:ea typeface="Georgia"/>
                 <a:cs typeface="Georgia"/>
               </a:rPr>
-              <a:t>Merchants connect commerce once. Woven handles the conversation.</a:t>
+              <a:t>The working prototype already completes the core journey.</a:t>
             </a:r>
           </a:p>
         </p:txBody>
@@ -6223,7 +8574,7 @@
                 <a:ea typeface="Georgia"/>
                 <a:cs typeface="Georgia"/>
               </a:rPr>
-              <a:t>Expose the catalogue</a:t>
+              <a:t>Cart engine</a:t>
             </a:r>
           </a:p>
         </p:txBody>
@@ -6285,7 +8636,8 @@
                 <a:ea typeface="Avenir Next"/>
                 <a:cs typeface="Avenir Next"/>
               </a:rPr>
-              <a:t>Prototype: validated CSV updates for known offers. Next: merchant catalogue and stock APIs.</a:t>
+              <a:t>Complete one-merchant carts.
+Compatibility · budget · pickup.</a:t>
             </a:r>
           </a:p>
         </p:txBody>
@@ -6437,7 +8789,7 @@
                 <a:ea typeface="Georgia"/>
                 <a:cs typeface="Georgia"/>
               </a:rPr>
-              <a:t>Apply category rules</a:t>
+              <a:t>Checkout control</a:t>
             </a:r>
           </a:p>
         </p:txBody>
@@ -6499,7 +8851,8 @@
                 <a:ea typeface="Avenir Next"/>
                 <a:cs typeface="Avenir Next"/>
               </a:rPr>
-              <a:t>Today: charging-kit compatibility. Next: category-specific constraints and substitutions.</a:t>
+              <a:t>Expiring exact terms.
+Direct confirmation · idempotency.</a:t>
             </a:r>
           </a:p>
         </p:txBody>
@@ -6651,7 +9004,7 @@
                 <a:ea typeface="Georgia"/>
                 <a:cs typeface="Georgia"/>
               </a:rPr>
-              <a:t>Keep checkout exact</a:t>
+              <a:t>Merchant operations</a:t>
             </a:r>
           </a:p>
         </p:txBody>
@@ -6713,7 +9066,8 @@
                 <a:ea typeface="Avenir Next"/>
                 <a:cs typeface="Avenir Next"/>
               </a:rPr>
-              <a:t>The same expiring mandate, confirmation and audit boundary applies across merchants.</a:t>
+              <a:t>Inventory · scenarios · orders.
+Audit trail.</a:t>
             </a:r>
           </a:p>
         </p:txBody>
@@ -6805,7 +9159,7 @@
                 <a:ea typeface="Avenir Next"/>
                 <a:cs typeface="Avenir Next"/>
               </a:rPr>
-              <a:t>Start where compatibility is hardest: electronics. Reuse the trust model for every mission-bound purchase.</a:t>
+              <a:t>MCP APP + REACT UI · SEEDED DATA · SIMULATED PAYMENT</a:t>
             </a:r>
           </a:p>
         </p:txBody>
@@ -6944,7 +9298,7 @@
     <p:bg>
       <p:bgPr>
         <a:solidFill xmlns:a="http://schemas.openxmlformats.org/drawingml/2006/main">
-          <a:srgbClr val="0E4B3B"/>
+          <a:srgbClr val="F4EEE4"/>
         </a:solidFill>
       </p:bgPr>
     </p:bg>
@@ -6959,10 +9313,10 @@
       </p:grpSpPr>
       <p:sp>
         <p:nvSpPr>
-          <p:cNvPr id="10" name="eyebrow-The takeaway">
-            <a:extLst xmlns:a="http://schemas.openxmlformats.org/drawingml/2006/main">
-              <a:ext uri="{FF2B5EF4-FFF2-40B4-BE49-F238E27FC236}">
-                <a16:creationId xmlns:a16="http://schemas.microsoft.com/office/drawing/2014/main" id="{127A4371-AA64-41B4-BB82-2074B9A226A8}"/>
+          <p:cNvPr id="19" name="eyebrow-Merchant access and scale">
+            <a:extLst xmlns:a="http://schemas.openxmlformats.org/drawingml/2006/main">
+              <a:ext uri="{FF2B5EF4-FFF2-40B4-BE49-F238E27FC236}">
+                <a16:creationId xmlns:a16="http://schemas.microsoft.com/office/drawing/2014/main" id="{45608E1F-4AAA-4FB7-BC67-CDD26807E062}"/>
               </a:ext>
             </a:extLst>
           </p:cNvPr>
@@ -6995,7 +9349,7 @@
               <a:buNone/>
               <a:defRPr sz="1350" b="1">
                 <a:solidFill>
-                  <a:srgbClr val="B7F522"/>
+                  <a:srgbClr val="6D7974"/>
                 </a:solidFill>
                 <a:latin typeface="Menlo"/>
                 <a:ea typeface="Menlo"/>
@@ -7005,35 +9359,35 @@
             <a:r>
               <a:rPr sz="1350" b="1">
                 <a:solidFill>
-                  <a:srgbClr val="B7F522"/>
-                </a:solidFill>
-                <a:latin typeface="Menlo"/>
-                <a:ea typeface="Menlo"/>
-                <a:cs typeface="Menlo"/>
-              </a:rPr>
-              <a:t>THE TAKEAWAY</a:t>
-            </a:r>
-          </a:p>
-        </p:txBody>
-      </p:sp>
-      <p:sp>
-        <p:nvSpPr>
-          <p:cNvPr id="2" name="closing-title">
-            <a:extLst xmlns:a="http://schemas.openxmlformats.org/drawingml/2006/main">
-              <a:ext uri="{FF2B5EF4-FFF2-40B4-BE49-F238E27FC236}">
-                <a16:creationId xmlns:a16="http://schemas.microsoft.com/office/drawing/2014/main" id="{96611E61-644B-4FDB-B197-448F38D56EC2}"/>
-              </a:ext>
-            </a:extLst>
-          </p:cNvPr>
-          <p:cNvSpPr>
-            <a:spLocks xmlns:a="http://schemas.openxmlformats.org/drawingml/2006/main" noGrp="1"/>
-          </p:cNvSpPr>
-          <p:nvPr/>
-        </p:nvSpPr>
-        <p:spPr>
-          <a:xfrm xmlns:a="http://schemas.openxmlformats.org/drawingml/2006/main">
-            <a:off x="838200" y="1314450"/>
-            <a:ext cx="6572250" cy="2533650"/>
+                  <a:srgbClr val="6D7974"/>
+                </a:solidFill>
+                <a:latin typeface="Menlo"/>
+                <a:ea typeface="Menlo"/>
+                <a:cs typeface="Menlo"/>
+              </a:rPr>
+              <a:t>BACKUP · WHAT IS SIMULATED</a:t>
+            </a:r>
+          </a:p>
+        </p:txBody>
+      </p:sp>
+      <p:sp>
+        <p:nvSpPr>
+          <p:cNvPr id="2" name="title-Merchants connect commerce once. Woven handles the conversation.">
+            <a:extLst xmlns:a="http://schemas.openxmlformats.org/drawingml/2006/main">
+              <a:ext uri="{FF2B5EF4-FFF2-40B4-BE49-F238E27FC236}">
+                <a16:creationId xmlns:a16="http://schemas.microsoft.com/office/drawing/2014/main" id="{092C5D01-8197-4D10-8BE3-3B03DD3DF7BC}"/>
+              </a:ext>
+            </a:extLst>
+          </p:cNvPr>
+          <p:cNvSpPr>
+            <a:spLocks xmlns:a="http://schemas.openxmlformats.org/drawingml/2006/main" noGrp="1"/>
+          </p:cNvSpPr>
+          <p:nvPr/>
+        </p:nvSpPr>
+        <p:spPr>
+          <a:xfrm xmlns:a="http://schemas.openxmlformats.org/drawingml/2006/main">
+            <a:off x="838200" y="990600"/>
+            <a:ext cx="13620750" cy="1028700"/>
           </a:xfrm>
           <a:prstGeom xmlns:a="http://schemas.openxmlformats.org/drawingml/2006/main" prst="rect">
             <a:avLst/>
@@ -7052,12 +9406,12 @@
           <a:p xmlns:a="http://schemas.openxmlformats.org/drawingml/2006/main">
             <a:pPr>
               <a:lnSpc>
-                <a:spcPct val="94000"/>
+                <a:spcPct val="95000"/>
               </a:lnSpc>
               <a:buNone/>
-              <a:defRPr sz="4200" b="1">
-                <a:solidFill>
-                  <a:srgbClr val="FFFFFF"/>
+              <a:defRPr sz="4650" b="1">
+                <a:solidFill>
+                  <a:srgbClr val="0E4B3B"/>
                 </a:solidFill>
                 <a:latin typeface="Georgia"/>
                 <a:ea typeface="Georgia"/>
@@ -7065,26 +9419,151 @@
               </a:defRPr>
             </a:pPr>
             <a:r>
-              <a:rPr sz="4200" b="1">
-                <a:solidFill>
-                  <a:srgbClr val="FFFFFF"/>
+              <a:rPr sz="4650" b="1">
+                <a:solidFill>
+                  <a:srgbClr val="0E4B3B"/>
                 </a:solidFill>
                 <a:latin typeface="Georgia"/>
                 <a:ea typeface="Georgia"/>
                 <a:cs typeface="Georgia"/>
               </a:rPr>
-              <a:t>Search finds products.</a:t>
-            </a:r>
-          </a:p>
+              <a:t>The prototype never claims live identity, inventory or payments.</a:t>
+            </a:r>
+          </a:p>
+        </p:txBody>
+      </p:sp>
+      <p:sp>
+        <p:nvSpPr>
+          <p:cNvPr id="3" name="scale-number-0">
+            <a:extLst xmlns:a="http://schemas.openxmlformats.org/drawingml/2006/main">
+              <a:ext uri="{FF2B5EF4-FFF2-40B4-BE49-F238E27FC236}">
+                <a16:creationId xmlns:a16="http://schemas.microsoft.com/office/drawing/2014/main" id="{BD9CC34B-FE98-411F-90C6-63673C207103}"/>
+              </a:ext>
+            </a:extLst>
+          </p:cNvPr>
+          <p:cNvSpPr>
+            <a:spLocks xmlns:a="http://schemas.openxmlformats.org/drawingml/2006/main" noGrp="1"/>
+          </p:cNvSpPr>
+          <p:nvPr/>
+        </p:nvSpPr>
+        <p:spPr>
+          <a:xfrm xmlns:a="http://schemas.openxmlformats.org/drawingml/2006/main">
+            <a:off x="838200" y="2952750"/>
+            <a:ext cx="952500" cy="438150"/>
+          </a:xfrm>
+          <a:prstGeom xmlns:a="http://schemas.openxmlformats.org/drawingml/2006/main" prst="rect">
+            <a:avLst/>
+          </a:prstGeom>
+          <a:noFill xmlns:a="http://schemas.openxmlformats.org/drawingml/2006/main"/>
+          <a:ln xmlns:a="http://schemas.openxmlformats.org/drawingml/2006/main" w="0">
+            <a:noFill/>
+            <a:prstDash val="solid"/>
+          </a:ln>
+        </p:spPr>
+        <p:txBody>
+          <a:bodyPr xmlns:a="http://schemas.openxmlformats.org/drawingml/2006/main" wrap="square" lIns="0" tIns="0" rIns="0" bIns="0">
+            <a:noAutofit/>
+          </a:bodyPr>
+          <a:lstStyle xmlns:a="http://schemas.openxmlformats.org/drawingml/2006/main"/>
+          <a:p xmlns:a="http://schemas.openxmlformats.org/drawingml/2006/main">
+            <a:pPr>
+              <a:buNone/>
+              <a:defRPr sz="1800" b="1">
+                <a:solidFill>
+                  <a:srgbClr val="6D7974"/>
+                </a:solidFill>
+                <a:latin typeface="Menlo"/>
+                <a:ea typeface="Menlo"/>
+                <a:cs typeface="Menlo"/>
+              </a:defRPr>
+            </a:pPr>
+            <a:r>
+              <a:rPr sz="1800" b="1">
+                <a:solidFill>
+                  <a:srgbClr val="6D7974"/>
+                </a:solidFill>
+                <a:latin typeface="Menlo"/>
+                <a:ea typeface="Menlo"/>
+                <a:cs typeface="Menlo"/>
+              </a:rPr>
+              <a:t>01</a:t>
+            </a:r>
+          </a:p>
+        </p:txBody>
+      </p:sp>
+      <p:sp>
+        <p:nvSpPr>
+          <p:cNvPr id="4" name="scale-line-0">
+            <a:extLst xmlns:a="http://schemas.openxmlformats.org/drawingml/2006/main">
+              <a:ext uri="{FF2B5EF4-FFF2-40B4-BE49-F238E27FC236}">
+                <a16:creationId xmlns:a16="http://schemas.microsoft.com/office/drawing/2014/main" id="{8020E27B-8543-4CD1-842D-6418530300E7}"/>
+              </a:ext>
+            </a:extLst>
+          </p:cNvPr>
+          <p:cNvSpPr>
+            <a:spLocks xmlns:a="http://schemas.openxmlformats.org/drawingml/2006/main" noGrp="1"/>
+          </p:cNvSpPr>
+          <p:nvPr/>
+        </p:nvSpPr>
+        <p:spPr>
+          <a:xfrm xmlns:a="http://schemas.openxmlformats.org/drawingml/2006/main">
+            <a:off x="838200" y="3600450"/>
+            <a:ext cx="4000500" cy="0"/>
+          </a:xfrm>
+          <a:prstGeom xmlns:a="http://schemas.openxmlformats.org/drawingml/2006/main" prst="line">
+            <a:avLst/>
+          </a:prstGeom>
+          <a:noFill xmlns:a="http://schemas.openxmlformats.org/drawingml/2006/main"/>
+          <a:ln xmlns:a="http://schemas.openxmlformats.org/drawingml/2006/main" w="57150">
+            <a:solidFill>
+              <a:srgbClr val="B7F522"/>
+            </a:solidFill>
+            <a:prstDash val="solid"/>
+          </a:ln>
+        </p:spPr>
+      </p:sp>
+      <p:sp>
+        <p:nvSpPr>
+          <p:cNvPr id="5" name="scale-heading-0">
+            <a:extLst xmlns:a="http://schemas.openxmlformats.org/drawingml/2006/main">
+              <a:ext uri="{FF2B5EF4-FFF2-40B4-BE49-F238E27FC236}">
+                <a16:creationId xmlns:a16="http://schemas.microsoft.com/office/drawing/2014/main" id="{8F92E23D-A432-42BD-9333-22DC4085330E}"/>
+              </a:ext>
+            </a:extLst>
+          </p:cNvPr>
+          <p:cNvSpPr>
+            <a:spLocks xmlns:a="http://schemas.openxmlformats.org/drawingml/2006/main" noGrp="1"/>
+          </p:cNvSpPr>
+          <p:nvPr/>
+        </p:nvSpPr>
+        <p:spPr>
+          <a:xfrm xmlns:a="http://schemas.openxmlformats.org/drawingml/2006/main">
+            <a:off x="838200" y="3905250"/>
+            <a:ext cx="3905250" cy="704850"/>
+          </a:xfrm>
+          <a:prstGeom xmlns:a="http://schemas.openxmlformats.org/drawingml/2006/main" prst="rect">
+            <a:avLst/>
+          </a:prstGeom>
+          <a:noFill xmlns:a="http://schemas.openxmlformats.org/drawingml/2006/main"/>
+          <a:ln xmlns:a="http://schemas.openxmlformats.org/drawingml/2006/main" w="0">
+            <a:noFill/>
+            <a:prstDash val="solid"/>
+          </a:ln>
+        </p:spPr>
+        <p:txBody>
+          <a:bodyPr xmlns:a="http://schemas.openxmlformats.org/drawingml/2006/main" wrap="square" lIns="0" tIns="0" rIns="0" bIns="0">
+            <a:noAutofit/>
+          </a:bodyPr>
+          <a:lstStyle xmlns:a="http://schemas.openxmlformats.org/drawingml/2006/main"/>
           <a:p xmlns:a="http://schemas.openxmlformats.org/drawingml/2006/main">
             <a:pPr>
               <a:lnSpc>
-                <a:spcPct val="94000"/>
+                <a:spcPct val="97000"/>
               </a:lnSpc>
               <a:buNone/>
-              <a:defRPr sz="4200" b="1">
-                <a:solidFill>
-                  <a:srgbClr val="FFFFFF"/>
+              <a:defRPr sz="2550" b="1">
+                <a:solidFill>
+                  <a:srgbClr val="0E4B3B"/>
                 </a:solidFill>
                 <a:latin typeface="Georgia"/>
                 <a:ea typeface="Georgia"/>
@@ -7092,26 +9571,214 @@
               </a:defRPr>
             </a:pPr>
             <a:r>
-              <a:rPr sz="4200" b="1">
-                <a:solidFill>
-                  <a:srgbClr val="FFFFFF"/>
+              <a:rPr sz="2550" b="1">
+                <a:solidFill>
+                  <a:srgbClr val="0E4B3B"/>
                 </a:solidFill>
                 <a:latin typeface="Georgia"/>
                 <a:ea typeface="Georgia"/>
                 <a:cs typeface="Georgia"/>
               </a:rPr>
-              <a:t>Woven completes</a:t>
-            </a:r>
-          </a:p>
+              <a:t>Demo data</a:t>
+            </a:r>
+          </a:p>
+        </p:txBody>
+      </p:sp>
+      <p:sp>
+        <p:nvSpPr>
+          <p:cNvPr id="6" name="scale-body-0">
+            <a:extLst xmlns:a="http://schemas.openxmlformats.org/drawingml/2006/main">
+              <a:ext uri="{FF2B5EF4-FFF2-40B4-BE49-F238E27FC236}">
+                <a16:creationId xmlns:a16="http://schemas.microsoft.com/office/drawing/2014/main" id="{7804FC9D-8D9A-4950-BAE7-1823E6AE21F0}"/>
+              </a:ext>
+            </a:extLst>
+          </p:cNvPr>
+          <p:cNvSpPr>
+            <a:spLocks xmlns:a="http://schemas.openxmlformats.org/drawingml/2006/main" noGrp="1"/>
+          </p:cNvSpPr>
+          <p:nvPr/>
+        </p:nvSpPr>
+        <p:spPr>
+          <a:xfrm xmlns:a="http://schemas.openxmlformats.org/drawingml/2006/main">
+            <a:off x="838200" y="4838700"/>
+            <a:ext cx="3905250" cy="1447800"/>
+          </a:xfrm>
+          <a:prstGeom xmlns:a="http://schemas.openxmlformats.org/drawingml/2006/main" prst="rect">
+            <a:avLst/>
+          </a:prstGeom>
+          <a:noFill xmlns:a="http://schemas.openxmlformats.org/drawingml/2006/main"/>
+          <a:ln xmlns:a="http://schemas.openxmlformats.org/drawingml/2006/main" w="0">
+            <a:noFill/>
+            <a:prstDash val="solid"/>
+          </a:ln>
+        </p:spPr>
+        <p:txBody>
+          <a:bodyPr xmlns:a="http://schemas.openxmlformats.org/drawingml/2006/main" wrap="square" lIns="0" tIns="0" rIns="0" bIns="0">
+            <a:noAutofit/>
+          </a:bodyPr>
+          <a:lstStyle xmlns:a="http://schemas.openxmlformats.org/drawingml/2006/main"/>
           <a:p xmlns:a="http://schemas.openxmlformats.org/drawingml/2006/main">
             <a:pPr>
               <a:lnSpc>
-                <a:spcPct val="94000"/>
+                <a:spcPct val="118000"/>
               </a:lnSpc>
               <a:buNone/>
-              <a:defRPr sz="4200" b="1">
-                <a:solidFill>
-                  <a:srgbClr val="FFFFFF"/>
+              <a:defRPr sz="1800">
+                <a:solidFill>
+                  <a:srgbClr val="6D7974"/>
+                </a:solidFill>
+                <a:latin typeface="Avenir Next"/>
+                <a:ea typeface="Avenir Next"/>
+                <a:cs typeface="Avenir Next"/>
+              </a:defRPr>
+            </a:pPr>
+            <a:r>
+              <a:rPr sz="1800">
+                <a:solidFill>
+                  <a:srgbClr val="6D7974"/>
+                </a:solidFill>
+                <a:latin typeface="Avenir Next"/>
+                <a:ea typeface="Avenir Next"/>
+                <a:cs typeface="Avenir Next"/>
+              </a:rPr>
+              <a:t>Seeded merchant inventory
+and pickup estimates.</a:t>
+            </a:r>
+          </a:p>
+        </p:txBody>
+      </p:sp>
+      <p:sp>
+        <p:nvSpPr>
+          <p:cNvPr id="7" name="scale-number-1">
+            <a:extLst xmlns:a="http://schemas.openxmlformats.org/drawingml/2006/main">
+              <a:ext uri="{FF2B5EF4-FFF2-40B4-BE49-F238E27FC236}">
+                <a16:creationId xmlns:a16="http://schemas.microsoft.com/office/drawing/2014/main" id="{CDAA3358-24A7-437B-9A64-77A5253F42A9}"/>
+              </a:ext>
+            </a:extLst>
+          </p:cNvPr>
+          <p:cNvSpPr>
+            <a:spLocks xmlns:a="http://schemas.openxmlformats.org/drawingml/2006/main" noGrp="1"/>
+          </p:cNvSpPr>
+          <p:nvPr/>
+        </p:nvSpPr>
+        <p:spPr>
+          <a:xfrm xmlns:a="http://schemas.openxmlformats.org/drawingml/2006/main">
+            <a:off x="5600700" y="2952750"/>
+            <a:ext cx="952500" cy="438150"/>
+          </a:xfrm>
+          <a:prstGeom xmlns:a="http://schemas.openxmlformats.org/drawingml/2006/main" prst="rect">
+            <a:avLst/>
+          </a:prstGeom>
+          <a:noFill xmlns:a="http://schemas.openxmlformats.org/drawingml/2006/main"/>
+          <a:ln xmlns:a="http://schemas.openxmlformats.org/drawingml/2006/main" w="0">
+            <a:noFill/>
+            <a:prstDash val="solid"/>
+          </a:ln>
+        </p:spPr>
+        <p:txBody>
+          <a:bodyPr xmlns:a="http://schemas.openxmlformats.org/drawingml/2006/main" wrap="square" lIns="0" tIns="0" rIns="0" bIns="0">
+            <a:noAutofit/>
+          </a:bodyPr>
+          <a:lstStyle xmlns:a="http://schemas.openxmlformats.org/drawingml/2006/main"/>
+          <a:p xmlns:a="http://schemas.openxmlformats.org/drawingml/2006/main">
+            <a:pPr>
+              <a:buNone/>
+              <a:defRPr sz="1800" b="1">
+                <a:solidFill>
+                  <a:srgbClr val="6D7974"/>
+                </a:solidFill>
+                <a:latin typeface="Menlo"/>
+                <a:ea typeface="Menlo"/>
+                <a:cs typeface="Menlo"/>
+              </a:defRPr>
+            </a:pPr>
+            <a:r>
+              <a:rPr sz="1800" b="1">
+                <a:solidFill>
+                  <a:srgbClr val="6D7974"/>
+                </a:solidFill>
+                <a:latin typeface="Menlo"/>
+                <a:ea typeface="Menlo"/>
+                <a:cs typeface="Menlo"/>
+              </a:rPr>
+              <a:t>02</a:t>
+            </a:r>
+          </a:p>
+        </p:txBody>
+      </p:sp>
+      <p:sp>
+        <p:nvSpPr>
+          <p:cNvPr id="8" name="scale-line-1">
+            <a:extLst xmlns:a="http://schemas.openxmlformats.org/drawingml/2006/main">
+              <a:ext uri="{FF2B5EF4-FFF2-40B4-BE49-F238E27FC236}">
+                <a16:creationId xmlns:a16="http://schemas.microsoft.com/office/drawing/2014/main" id="{F984DF2F-AB5D-47C4-916F-75204267A738}"/>
+              </a:ext>
+            </a:extLst>
+          </p:cNvPr>
+          <p:cNvSpPr>
+            <a:spLocks xmlns:a="http://schemas.openxmlformats.org/drawingml/2006/main" noGrp="1"/>
+          </p:cNvSpPr>
+          <p:nvPr/>
+        </p:nvSpPr>
+        <p:spPr>
+          <a:xfrm xmlns:a="http://schemas.openxmlformats.org/drawingml/2006/main">
+            <a:off x="5600700" y="3600450"/>
+            <a:ext cx="4000500" cy="0"/>
+          </a:xfrm>
+          <a:prstGeom xmlns:a="http://schemas.openxmlformats.org/drawingml/2006/main" prst="line">
+            <a:avLst/>
+          </a:prstGeom>
+          <a:noFill xmlns:a="http://schemas.openxmlformats.org/drawingml/2006/main"/>
+          <a:ln xmlns:a="http://schemas.openxmlformats.org/drawingml/2006/main" w="19050">
+            <a:solidFill>
+              <a:srgbClr val="D8D0C4"/>
+            </a:solidFill>
+            <a:prstDash val="solid"/>
+          </a:ln>
+        </p:spPr>
+      </p:sp>
+      <p:sp>
+        <p:nvSpPr>
+          <p:cNvPr id="9" name="scale-heading-1">
+            <a:extLst xmlns:a="http://schemas.openxmlformats.org/drawingml/2006/main">
+              <a:ext uri="{FF2B5EF4-FFF2-40B4-BE49-F238E27FC236}">
+                <a16:creationId xmlns:a16="http://schemas.microsoft.com/office/drawing/2014/main" id="{7E87D58D-B04D-4C2A-B726-635DDE240DB6}"/>
+              </a:ext>
+            </a:extLst>
+          </p:cNvPr>
+          <p:cNvSpPr>
+            <a:spLocks xmlns:a="http://schemas.openxmlformats.org/drawingml/2006/main" noGrp="1"/>
+          </p:cNvSpPr>
+          <p:nvPr/>
+        </p:nvSpPr>
+        <p:spPr>
+          <a:xfrm xmlns:a="http://schemas.openxmlformats.org/drawingml/2006/main">
+            <a:off x="5600700" y="3905250"/>
+            <a:ext cx="3905250" cy="704850"/>
+          </a:xfrm>
+          <a:prstGeom xmlns:a="http://schemas.openxmlformats.org/drawingml/2006/main" prst="rect">
+            <a:avLst/>
+          </a:prstGeom>
+          <a:noFill xmlns:a="http://schemas.openxmlformats.org/drawingml/2006/main"/>
+          <a:ln xmlns:a="http://schemas.openxmlformats.org/drawingml/2006/main" w="0">
+            <a:noFill/>
+            <a:prstDash val="solid"/>
+          </a:ln>
+        </p:spPr>
+        <p:txBody>
+          <a:bodyPr xmlns:a="http://schemas.openxmlformats.org/drawingml/2006/main" wrap="square" lIns="0" tIns="0" rIns="0" bIns="0">
+            <a:noAutofit/>
+          </a:bodyPr>
+          <a:lstStyle xmlns:a="http://schemas.openxmlformats.org/drawingml/2006/main"/>
+          <a:p xmlns:a="http://schemas.openxmlformats.org/drawingml/2006/main">
+            <a:pPr>
+              <a:lnSpc>
+                <a:spcPct val="97000"/>
+              </a:lnSpc>
+              <a:buNone/>
+              <a:defRPr sz="2550" b="1">
+                <a:solidFill>
+                  <a:srgbClr val="0E4B3B"/>
                 </a:solidFill>
                 <a:latin typeface="Georgia"/>
                 <a:ea typeface="Georgia"/>
@@ -7119,37 +9786,37 @@
               </a:defRPr>
             </a:pPr>
             <a:r>
-              <a:rPr sz="4200" b="1">
-                <a:solidFill>
-                  <a:srgbClr val="FFFFFF"/>
+              <a:rPr sz="2550" b="1">
+                <a:solidFill>
+                  <a:srgbClr val="0E4B3B"/>
                 </a:solidFill>
                 <a:latin typeface="Georgia"/>
                 <a:ea typeface="Georgia"/>
                 <a:cs typeface="Georgia"/>
               </a:rPr>
-              <a:t>the mission.</a:t>
-            </a:r>
-          </a:p>
-        </p:txBody>
-      </p:sp>
-      <p:sp>
-        <p:nvSpPr>
-          <p:cNvPr id="3" name="closing-tagline">
-            <a:extLst xmlns:a="http://schemas.openxmlformats.org/drawingml/2006/main">
-              <a:ext uri="{FF2B5EF4-FFF2-40B4-BE49-F238E27FC236}">
-                <a16:creationId xmlns:a16="http://schemas.microsoft.com/office/drawing/2014/main" id="{6EC2DC6F-0A7B-4F6E-BD30-C7C0CF8409EC}"/>
-              </a:ext>
-            </a:extLst>
-          </p:cNvPr>
-          <p:cNvSpPr>
-            <a:spLocks xmlns:a="http://schemas.openxmlformats.org/drawingml/2006/main" noGrp="1"/>
-          </p:cNvSpPr>
-          <p:nvPr/>
-        </p:nvSpPr>
-        <p:spPr>
-          <a:xfrm xmlns:a="http://schemas.openxmlformats.org/drawingml/2006/main">
-            <a:off x="838200" y="4438650"/>
-            <a:ext cx="6572250" cy="876300"/>
+              <a:t>Identity direction</a:t>
+            </a:r>
+          </a:p>
+        </p:txBody>
+      </p:sp>
+      <p:sp>
+        <p:nvSpPr>
+          <p:cNvPr id="10" name="scale-body-1">
+            <a:extLst xmlns:a="http://schemas.openxmlformats.org/drawingml/2006/main">
+              <a:ext uri="{FF2B5EF4-FFF2-40B4-BE49-F238E27FC236}">
+                <a16:creationId xmlns:a16="http://schemas.microsoft.com/office/drawing/2014/main" id="{16E18AA4-AE39-4AEC-9985-ED711ED0D766}"/>
+              </a:ext>
+            </a:extLst>
+          </p:cNvPr>
+          <p:cNvSpPr>
+            <a:spLocks xmlns:a="http://schemas.openxmlformats.org/drawingml/2006/main" noGrp="1"/>
+          </p:cNvSpPr>
+          <p:nvPr/>
+        </p:nvSpPr>
+        <p:spPr>
+          <a:xfrm xmlns:a="http://schemas.openxmlformats.org/drawingml/2006/main">
+            <a:off x="5600700" y="4838700"/>
+            <a:ext cx="3905250" cy="1447800"/>
           </a:xfrm>
           <a:prstGeom xmlns:a="http://schemas.openxmlformats.org/drawingml/2006/main" prst="rect">
             <a:avLst/>
@@ -7168,12 +9835,12 @@
           <a:p xmlns:a="http://schemas.openxmlformats.org/drawingml/2006/main">
             <a:pPr>
               <a:lnSpc>
-                <a:spcPct val="108000"/>
+                <a:spcPct val="118000"/>
               </a:lnSpc>
               <a:buNone/>
-              <a:defRPr sz="2100" b="1">
-                <a:solidFill>
-                  <a:srgbClr val="B7F522"/>
+              <a:defRPr sz="1800">
+                <a:solidFill>
+                  <a:srgbClr val="6D7974"/>
                 </a:solidFill>
                 <a:latin typeface="Avenir Next"/>
                 <a:ea typeface="Avenir Next"/>
@@ -7181,37 +9848,190 @@
               </a:defRPr>
             </a:pPr>
             <a:r>
-              <a:rPr sz="2100" b="1">
-                <a:solidFill>
-                  <a:srgbClr val="B7F522"/>
+              <a:rPr sz="1800">
+                <a:solidFill>
+                  <a:srgbClr val="6D7974"/>
                 </a:solidFill>
                 <a:latin typeface="Avenir Next"/>
                 <a:ea typeface="Avenir Next"/>
                 <a:cs typeface="Avenir Next"/>
               </a:rPr>
-              <a:t>Everything works together.</a:t>
-            </a:r>
-          </a:p>
-        </p:txBody>
-      </p:sp>
-      <p:sp>
-        <p:nvSpPr>
-          <p:cNvPr id="4" name="closing-triad">
-            <a:extLst xmlns:a="http://schemas.openxmlformats.org/drawingml/2006/main">
-              <a:ext uri="{FF2B5EF4-FFF2-40B4-BE49-F238E27FC236}">
-                <a16:creationId xmlns:a16="http://schemas.microsoft.com/office/drawing/2014/main" id="{72F89658-D2BF-4658-B511-4AA10AF9E935}"/>
-              </a:ext>
-            </a:extLst>
-          </p:cNvPr>
-          <p:cNvSpPr>
-            <a:spLocks xmlns:a="http://schemas.openxmlformats.org/drawingml/2006/main" noGrp="1"/>
-          </p:cNvSpPr>
-          <p:nvPr/>
-        </p:nvSpPr>
-        <p:spPr>
-          <a:xfrm xmlns:a="http://schemas.openxmlformats.org/drawingml/2006/main">
-            <a:off x="838200" y="5810250"/>
-            <a:ext cx="5334000" cy="1238250"/>
+              <a:t>Connector-style check is planned
+and not in the live demo.</a:t>
+            </a:r>
+          </a:p>
+        </p:txBody>
+      </p:sp>
+      <p:sp>
+        <p:nvSpPr>
+          <p:cNvPr id="11" name="scale-number-2">
+            <a:extLst xmlns:a="http://schemas.openxmlformats.org/drawingml/2006/main">
+              <a:ext uri="{FF2B5EF4-FFF2-40B4-BE49-F238E27FC236}">
+                <a16:creationId xmlns:a16="http://schemas.microsoft.com/office/drawing/2014/main" id="{EA2A17C8-CFB5-4E9D-ABFA-E6E8D2B7F253}"/>
+              </a:ext>
+            </a:extLst>
+          </p:cNvPr>
+          <p:cNvSpPr>
+            <a:spLocks xmlns:a="http://schemas.openxmlformats.org/drawingml/2006/main" noGrp="1"/>
+          </p:cNvSpPr>
+          <p:nvPr/>
+        </p:nvSpPr>
+        <p:spPr>
+          <a:xfrm xmlns:a="http://schemas.openxmlformats.org/drawingml/2006/main">
+            <a:off x="10363200" y="2952750"/>
+            <a:ext cx="952500" cy="438150"/>
+          </a:xfrm>
+          <a:prstGeom xmlns:a="http://schemas.openxmlformats.org/drawingml/2006/main" prst="rect">
+            <a:avLst/>
+          </a:prstGeom>
+          <a:noFill xmlns:a="http://schemas.openxmlformats.org/drawingml/2006/main"/>
+          <a:ln xmlns:a="http://schemas.openxmlformats.org/drawingml/2006/main" w="0">
+            <a:noFill/>
+            <a:prstDash val="solid"/>
+          </a:ln>
+        </p:spPr>
+        <p:txBody>
+          <a:bodyPr xmlns:a="http://schemas.openxmlformats.org/drawingml/2006/main" wrap="square" lIns="0" tIns="0" rIns="0" bIns="0">
+            <a:noAutofit/>
+          </a:bodyPr>
+          <a:lstStyle xmlns:a="http://schemas.openxmlformats.org/drawingml/2006/main"/>
+          <a:p xmlns:a="http://schemas.openxmlformats.org/drawingml/2006/main">
+            <a:pPr>
+              <a:buNone/>
+              <a:defRPr sz="1800" b="1">
+                <a:solidFill>
+                  <a:srgbClr val="B7F522"/>
+                </a:solidFill>
+                <a:latin typeface="Menlo"/>
+                <a:ea typeface="Menlo"/>
+                <a:cs typeface="Menlo"/>
+              </a:defRPr>
+            </a:pPr>
+            <a:r>
+              <a:rPr sz="1800" b="1">
+                <a:solidFill>
+                  <a:srgbClr val="B7F522"/>
+                </a:solidFill>
+                <a:latin typeface="Menlo"/>
+                <a:ea typeface="Menlo"/>
+                <a:cs typeface="Menlo"/>
+              </a:rPr>
+              <a:t>03</a:t>
+            </a:r>
+          </a:p>
+        </p:txBody>
+      </p:sp>
+      <p:sp>
+        <p:nvSpPr>
+          <p:cNvPr id="12" name="scale-line-2">
+            <a:extLst xmlns:a="http://schemas.openxmlformats.org/drawingml/2006/main">
+              <a:ext uri="{FF2B5EF4-FFF2-40B4-BE49-F238E27FC236}">
+                <a16:creationId xmlns:a16="http://schemas.microsoft.com/office/drawing/2014/main" id="{BDE99F7F-19DB-4BD7-AD70-CD6275150621}"/>
+              </a:ext>
+            </a:extLst>
+          </p:cNvPr>
+          <p:cNvSpPr>
+            <a:spLocks xmlns:a="http://schemas.openxmlformats.org/drawingml/2006/main" noGrp="1"/>
+          </p:cNvSpPr>
+          <p:nvPr/>
+        </p:nvSpPr>
+        <p:spPr>
+          <a:xfrm xmlns:a="http://schemas.openxmlformats.org/drawingml/2006/main">
+            <a:off x="10363200" y="3600450"/>
+            <a:ext cx="4000500" cy="0"/>
+          </a:xfrm>
+          <a:prstGeom xmlns:a="http://schemas.openxmlformats.org/drawingml/2006/main" prst="line">
+            <a:avLst/>
+          </a:prstGeom>
+          <a:noFill xmlns:a="http://schemas.openxmlformats.org/drawingml/2006/main"/>
+          <a:ln xmlns:a="http://schemas.openxmlformats.org/drawingml/2006/main" w="19050">
+            <a:solidFill>
+              <a:srgbClr val="D8D0C4"/>
+            </a:solidFill>
+            <a:prstDash val="solid"/>
+          </a:ln>
+        </p:spPr>
+      </p:sp>
+      <p:sp>
+        <p:nvSpPr>
+          <p:cNvPr id="13" name="scale-heading-2">
+            <a:extLst xmlns:a="http://schemas.openxmlformats.org/drawingml/2006/main">
+              <a:ext uri="{FF2B5EF4-FFF2-40B4-BE49-F238E27FC236}">
+                <a16:creationId xmlns:a16="http://schemas.microsoft.com/office/drawing/2014/main" id="{5AB63753-F0D5-4803-98BD-F4BF46F889B7}"/>
+              </a:ext>
+            </a:extLst>
+          </p:cNvPr>
+          <p:cNvSpPr>
+            <a:spLocks xmlns:a="http://schemas.openxmlformats.org/drawingml/2006/main" noGrp="1"/>
+          </p:cNvSpPr>
+          <p:nvPr/>
+        </p:nvSpPr>
+        <p:spPr>
+          <a:xfrm xmlns:a="http://schemas.openxmlformats.org/drawingml/2006/main">
+            <a:off x="10363200" y="3905250"/>
+            <a:ext cx="3905250" cy="704850"/>
+          </a:xfrm>
+          <a:prstGeom xmlns:a="http://schemas.openxmlformats.org/drawingml/2006/main" prst="rect">
+            <a:avLst/>
+          </a:prstGeom>
+          <a:noFill xmlns:a="http://schemas.openxmlformats.org/drawingml/2006/main"/>
+          <a:ln xmlns:a="http://schemas.openxmlformats.org/drawingml/2006/main" w="0">
+            <a:noFill/>
+            <a:prstDash val="solid"/>
+          </a:ln>
+        </p:spPr>
+        <p:txBody>
+          <a:bodyPr xmlns:a="http://schemas.openxmlformats.org/drawingml/2006/main" wrap="square" lIns="0" tIns="0" rIns="0" bIns="0">
+            <a:noAutofit/>
+          </a:bodyPr>
+          <a:lstStyle xmlns:a="http://schemas.openxmlformats.org/drawingml/2006/main"/>
+          <a:p xmlns:a="http://schemas.openxmlformats.org/drawingml/2006/main">
+            <a:pPr>
+              <a:lnSpc>
+                <a:spcPct val="97000"/>
+              </a:lnSpc>
+              <a:buNone/>
+              <a:defRPr sz="2550" b="1">
+                <a:solidFill>
+                  <a:srgbClr val="0E4B3B"/>
+                </a:solidFill>
+                <a:latin typeface="Georgia"/>
+                <a:ea typeface="Georgia"/>
+                <a:cs typeface="Georgia"/>
+              </a:defRPr>
+            </a:pPr>
+            <a:r>
+              <a:rPr sz="2550" b="1">
+                <a:solidFill>
+                  <a:srgbClr val="0E4B3B"/>
+                </a:solidFill>
+                <a:latin typeface="Georgia"/>
+                <a:ea typeface="Georgia"/>
+                <a:cs typeface="Georgia"/>
+              </a:rPr>
+              <a:t>Visa response</a:t>
+            </a:r>
+          </a:p>
+        </p:txBody>
+      </p:sp>
+      <p:sp>
+        <p:nvSpPr>
+          <p:cNvPr id="14" name="scale-body-2">
+            <a:extLst xmlns:a="http://schemas.openxmlformats.org/drawingml/2006/main">
+              <a:ext uri="{FF2B5EF4-FFF2-40B4-BE49-F238E27FC236}">
+                <a16:creationId xmlns:a16="http://schemas.microsoft.com/office/drawing/2014/main" id="{E7963198-1A16-48D2-952D-7AD01966B27A}"/>
+              </a:ext>
+            </a:extLst>
+          </p:cNvPr>
+          <p:cNvSpPr>
+            <a:spLocks xmlns:a="http://schemas.openxmlformats.org/drawingml/2006/main" noGrp="1"/>
+          </p:cNvSpPr>
+          <p:nvPr/>
+        </p:nvSpPr>
+        <p:spPr>
+          <a:xfrm xmlns:a="http://schemas.openxmlformats.org/drawingml/2006/main">
+            <a:off x="10363200" y="4838700"/>
+            <a:ext cx="3905250" cy="1447800"/>
           </a:xfrm>
           <a:prstGeom xmlns:a="http://schemas.openxmlformats.org/drawingml/2006/main" prst="rect">
             <a:avLst/>
@@ -7233,162 +10053,81 @@
                 <a:spcPct val="118000"/>
               </a:lnSpc>
               <a:buNone/>
-              <a:defRPr sz="2025" b="1">
-                <a:solidFill>
-                  <a:srgbClr val="DCECE5"/>
-                </a:solidFill>
-                <a:latin typeface="Menlo"/>
-                <a:ea typeface="Menlo"/>
-                <a:cs typeface="Menlo"/>
-              </a:defRPr>
-            </a:pPr>
-            <a:r>
-              <a:rPr sz="2025" b="1">
-                <a:solidFill>
-                  <a:srgbClr val="DCECE5"/>
-                </a:solidFill>
-                <a:latin typeface="Menlo"/>
-                <a:ea typeface="Menlo"/>
-                <a:cs typeface="Menlo"/>
-              </a:rPr>
-              <a:t>ChatGPT understands.</a:t>
-            </a:r>
-          </a:p>
-          <a:p xmlns:a="http://schemas.openxmlformats.org/drawingml/2006/main">
-            <a:pPr>
-              <a:lnSpc>
-                <a:spcPct val="118000"/>
-              </a:lnSpc>
-              <a:buNone/>
-              <a:defRPr sz="2025" b="1">
-                <a:solidFill>
-                  <a:srgbClr val="DCECE5"/>
-                </a:solidFill>
-                <a:latin typeface="Menlo"/>
-                <a:ea typeface="Menlo"/>
-                <a:cs typeface="Menlo"/>
-              </a:defRPr>
-            </a:pPr>
-            <a:r>
-              <a:rPr sz="2025" b="1">
-                <a:solidFill>
-                  <a:srgbClr val="DCECE5"/>
-                </a:solidFill>
-                <a:latin typeface="Menlo"/>
-                <a:ea typeface="Menlo"/>
-                <a:cs typeface="Menlo"/>
-              </a:rPr>
-              <a:t>Woven assembles.</a:t>
-            </a:r>
-          </a:p>
-          <a:p xmlns:a="http://schemas.openxmlformats.org/drawingml/2006/main">
-            <a:pPr>
-              <a:lnSpc>
-                <a:spcPct val="118000"/>
-              </a:lnSpc>
-              <a:buNone/>
-              <a:defRPr sz="2025" b="1">
-                <a:solidFill>
-                  <a:srgbClr val="DCECE5"/>
-                </a:solidFill>
-                <a:latin typeface="Menlo"/>
-                <a:ea typeface="Menlo"/>
-                <a:cs typeface="Menlo"/>
-              </a:defRPr>
-            </a:pPr>
-            <a:r>
-              <a:rPr sz="2025" b="1">
-                <a:solidFill>
-                  <a:srgbClr val="DCECE5"/>
-                </a:solidFill>
-                <a:latin typeface="Menlo"/>
-                <a:ea typeface="Menlo"/>
-                <a:cs typeface="Menlo"/>
-              </a:rPr>
-              <a:t>The user authorizes.</a:t>
-            </a:r>
-          </a:p>
-        </p:txBody>
-      </p:sp>
-      <p:sp>
-        <p:nvSpPr>
-          <p:cNvPr id="5" name="Woven simulated authorization result and pickup receipt-backplate">
-            <a:extLst xmlns:a="http://schemas.openxmlformats.org/drawingml/2006/main">
-              <a:ext uri="{FF2B5EF4-FFF2-40B4-BE49-F238E27FC236}">
-                <a16:creationId xmlns:a16="http://schemas.microsoft.com/office/drawing/2014/main" id="{6657EEA8-CC04-4F82-BABF-52A8AB7EB24E}"/>
-              </a:ext>
-            </a:extLst>
-          </p:cNvPr>
-          <p:cNvSpPr>
-            <a:spLocks xmlns:a="http://schemas.openxmlformats.org/drawingml/2006/main" noGrp="1"/>
-          </p:cNvSpPr>
-          <p:nvPr/>
-        </p:nvSpPr>
-        <p:spPr>
-          <a:xfrm xmlns:a="http://schemas.openxmlformats.org/drawingml/2006/main">
-            <a:off x="7620000" y="2381250"/>
-            <a:ext cx="6858000" cy="3943350"/>
+              <a:defRPr sz="1800">
+                <a:solidFill>
+                  <a:srgbClr val="6D7974"/>
+                </a:solidFill>
+                <a:latin typeface="Avenir Next"/>
+                <a:ea typeface="Avenir Next"/>
+                <a:cs typeface="Avenir Next"/>
+              </a:defRPr>
+            </a:pPr>
+            <a:r>
+              <a:rPr sz="1800">
+                <a:solidFill>
+                  <a:srgbClr val="6D7974"/>
+                </a:solidFill>
+                <a:latin typeface="Avenir Next"/>
+                <a:ea typeface="Avenir Next"/>
+                <a:cs typeface="Avenir Next"/>
+              </a:rPr>
+              <a:t>Simulated approval, decline
+and reversal · no live charge.</a:t>
+            </a:r>
+          </a:p>
+        </p:txBody>
+      </p:sp>
+      <p:sp>
+        <p:nvSpPr>
+          <p:cNvPr id="15" name="scale-bottom-band">
+            <a:extLst xmlns:a="http://schemas.openxmlformats.org/drawingml/2006/main">
+              <a:ext uri="{FF2B5EF4-FFF2-40B4-BE49-F238E27FC236}">
+                <a16:creationId xmlns:a16="http://schemas.microsoft.com/office/drawing/2014/main" id="{F6065CF4-96C7-491E-BA9B-6F2C83818CF1}"/>
+              </a:ext>
+            </a:extLst>
+          </p:cNvPr>
+          <p:cNvSpPr>
+            <a:spLocks xmlns:a="http://schemas.openxmlformats.org/drawingml/2006/main" noGrp="1"/>
+          </p:cNvSpPr>
+          <p:nvPr/>
+        </p:nvSpPr>
+        <p:spPr>
+          <a:xfrm xmlns:a="http://schemas.openxmlformats.org/drawingml/2006/main">
+            <a:off x="838200" y="6781800"/>
+            <a:ext cx="13544550" cy="742950"/>
           </a:xfrm>
           <a:prstGeom xmlns:a="http://schemas.openxmlformats.org/drawingml/2006/main" prst="roundRect">
             <a:avLst>
-              <a:gd name="adj" fmla="val 5797"/>
+              <a:gd name="adj" fmla="val 25641"/>
             </a:avLst>
           </a:prstGeom>
           <a:solidFill xmlns:a="http://schemas.openxmlformats.org/drawingml/2006/main">
-            <a:srgbClr val="FFFFFF"/>
+            <a:srgbClr val="DFF1EB"/>
           </a:solidFill>
           <a:ln xmlns:a="http://schemas.openxmlformats.org/drawingml/2006/main" w="0">
             <a:noFill/>
             <a:prstDash val="solid"/>
           </a:ln>
         </p:spPr>
-        <p:style>
-          <a:lnRef xmlns:a="http://schemas.openxmlformats.org/drawingml/2006/main" idx="0"/>
-          <a:fillRef xmlns:a="http://schemas.openxmlformats.org/drawingml/2006/main" idx="0"/>
-          <a:effectRef xmlns:a="http://schemas.openxmlformats.org/drawingml/2006/main" idx="7"/>
-          <a:fontRef xmlns:a="http://schemas.openxmlformats.org/drawingml/2006/main" idx="major"/>
-        </p:style>
-      </p:sp>
-      <p:pic>
-        <p:nvPicPr>
-          <p:cNvPr id="17" name=""/>
-          <p:cNvPicPr>
-            <a:picLocks xmlns:a="http://schemas.openxmlformats.org/drawingml/2006/main" noChangeAspect="1"/>
-          </p:cNvPicPr>
-          <p:nvPr/>
-        </p:nvPicPr>
-        <p:blipFill>
-          <a:blip xmlns:r="http://schemas.openxmlformats.org/officeDocument/2006/relationships" xmlns:a="http://schemas.openxmlformats.org/drawingml/2006/main" r:embed="Rc63ab80ad15a43e0"/>
-          <a:stretch xmlns:a="http://schemas.openxmlformats.org/drawingml/2006/main"/>
-        </p:blipFill>
-        <p:spPr>
-          <a:xfrm xmlns:a="http://schemas.openxmlformats.org/drawingml/2006/main" flipH="0" flipV="0">
-            <a:off x="7715250" y="2477691"/>
-            <a:ext cx="6667500" cy="3750469"/>
-          </a:xfrm>
-          <a:prstGeom xmlns:a="http://schemas.openxmlformats.org/drawingml/2006/main" prst="roundRect">
-            <a:avLst/>
-          </a:prstGeom>
-        </p:spPr>
-      </p:pic>
-      <p:sp>
-        <p:nvSpPr>
-          <p:cNvPr id="7" name="closing-boundary">
-            <a:extLst xmlns:a="http://schemas.openxmlformats.org/drawingml/2006/main">
-              <a:ext uri="{FF2B5EF4-FFF2-40B4-BE49-F238E27FC236}">
-                <a16:creationId xmlns:a16="http://schemas.microsoft.com/office/drawing/2014/main" id="{F366E3E1-58EC-4B9E-85AC-84B9FDF83536}"/>
-              </a:ext>
-            </a:extLst>
-          </p:cNvPr>
-          <p:cNvSpPr>
-            <a:spLocks xmlns:a="http://schemas.openxmlformats.org/drawingml/2006/main" noGrp="1"/>
-          </p:cNvSpPr>
-          <p:nvPr/>
-        </p:nvSpPr>
-        <p:spPr>
-          <a:xfrm xmlns:a="http://schemas.openxmlformats.org/drawingml/2006/main">
-            <a:off x="8401050" y="6572250"/>
-            <a:ext cx="5334000" cy="247650"/>
+      </p:sp>
+      <p:sp>
+        <p:nvSpPr>
+          <p:cNvPr id="16" name="scale-bottom-text">
+            <a:extLst xmlns:a="http://schemas.openxmlformats.org/drawingml/2006/main">
+              <a:ext uri="{FF2B5EF4-FFF2-40B4-BE49-F238E27FC236}">
+                <a16:creationId xmlns:a16="http://schemas.microsoft.com/office/drawing/2014/main" id="{D6B78FC7-412E-4A33-887B-13E37937B350}"/>
+              </a:ext>
+            </a:extLst>
+          </p:cNvPr>
+          <p:cNvSpPr>
+            <a:spLocks xmlns:a="http://schemas.openxmlformats.org/drawingml/2006/main" noGrp="1"/>
+          </p:cNvSpPr>
+          <p:nvPr/>
+        </p:nvSpPr>
+        <p:spPr>
+          <a:xfrm xmlns:a="http://schemas.openxmlformats.org/drawingml/2006/main">
+            <a:off x="1181100" y="7010400"/>
+            <a:ext cx="12858750" cy="323850"/>
           </a:xfrm>
           <a:prstGeom xmlns:a="http://schemas.openxmlformats.org/drawingml/2006/main" prst="rect">
             <a:avLst/>
@@ -7407,35 +10146,35 @@
           <a:p xmlns:a="http://schemas.openxmlformats.org/drawingml/2006/main">
             <a:pPr algn="ctr">
               <a:buNone/>
-              <a:defRPr sz="1200" b="1">
-                <a:solidFill>
-                  <a:srgbClr val="B7F522"/>
-                </a:solidFill>
-                <a:latin typeface="Menlo"/>
-                <a:ea typeface="Menlo"/>
-                <a:cs typeface="Menlo"/>
-              </a:defRPr>
-            </a:pPr>
-            <a:r>
-              <a:rPr sz="1200" b="1">
-                <a:solidFill>
-                  <a:srgbClr val="B7F522"/>
-                </a:solidFill>
-                <a:latin typeface="Menlo"/>
-                <a:ea typeface="Menlo"/>
-                <a:cs typeface="Menlo"/>
-              </a:rPr>
-              <a:t>SIMULATED VISA RESULT · NO LIVE CHARGE</a:t>
-            </a:r>
-          </a:p>
-        </p:txBody>
-      </p:sp>
-      <p:sp>
-        <p:nvSpPr>
-          <p:cNvPr id="8" name="footer-label-9">
-            <a:extLst xmlns:a="http://schemas.openxmlformats.org/drawingml/2006/main">
-              <a:ext uri="{FF2B5EF4-FFF2-40B4-BE49-F238E27FC236}">
-                <a16:creationId xmlns:a16="http://schemas.microsoft.com/office/drawing/2014/main" id="{D2647B79-80DB-4F8E-8A2F-05922DDDED74}"/>
+              <a:defRPr sz="1950" b="1">
+                <a:solidFill>
+                  <a:srgbClr val="0E4B3B"/>
+                </a:solidFill>
+                <a:latin typeface="Avenir Next"/>
+                <a:ea typeface="Avenir Next"/>
+                <a:cs typeface="Avenir Next"/>
+              </a:defRPr>
+            </a:pPr>
+            <a:r>
+              <a:rPr sz="1950" b="1">
+                <a:solidFill>
+                  <a:srgbClr val="0E4B3B"/>
+                </a:solidFill>
+                <a:latin typeface="Avenir Next"/>
+                <a:ea typeface="Avenir Next"/>
+                <a:cs typeface="Avenir Next"/>
+              </a:rPr>
+              <a:t>NO VISA ACCOUNT · NO PAYMENT CREDENTIALS · NO PARTNERSHIP CLAIM</a:t>
+            </a:r>
+          </a:p>
+        </p:txBody>
+      </p:sp>
+      <p:sp>
+        <p:nvSpPr>
+          <p:cNvPr id="17" name="footer-label-8">
+            <a:extLst xmlns:a="http://schemas.openxmlformats.org/drawingml/2006/main">
+              <a:ext uri="{FF2B5EF4-FFF2-40B4-BE49-F238E27FC236}">
+                <a16:creationId xmlns:a16="http://schemas.microsoft.com/office/drawing/2014/main" id="{9082A8B2-54A2-4FFA-BF7F-CAF73884DF6D}"/>
               </a:ext>
             </a:extLst>
           </p:cNvPr>
@@ -7468,7 +10207,7 @@
               <a:buNone/>
               <a:defRPr sz="1200" b="1">
                 <a:solidFill>
-                  <a:srgbClr val="DCECE5"/>
+                  <a:srgbClr val="6D7974"/>
                 </a:solidFill>
                 <a:latin typeface="Menlo"/>
                 <a:ea typeface="Menlo"/>
@@ -7478,7 +10217,7 @@
             <a:r>
               <a:rPr sz="1200" b="1">
                 <a:solidFill>
-                  <a:srgbClr val="DCECE5"/>
+                  <a:srgbClr val="6D7974"/>
                 </a:solidFill>
                 <a:latin typeface="Menlo"/>
                 <a:ea typeface="Menlo"/>
@@ -7491,10 +10230,10 @@
       </p:sp>
       <p:sp>
         <p:nvSpPr>
-          <p:cNvPr id="9" name="footer-number-9">
-            <a:extLst xmlns:a="http://schemas.openxmlformats.org/drawingml/2006/main">
-              <a:ext uri="{FF2B5EF4-FFF2-40B4-BE49-F238E27FC236}">
-                <a16:creationId xmlns:a16="http://schemas.microsoft.com/office/drawing/2014/main" id="{62445167-1406-4B61-A1CF-80F49583F03F}"/>
+          <p:cNvPr id="18" name="footer-number-8">
+            <a:extLst xmlns:a="http://schemas.openxmlformats.org/drawingml/2006/main">
+              <a:ext uri="{FF2B5EF4-FFF2-40B4-BE49-F238E27FC236}">
+                <a16:creationId xmlns:a16="http://schemas.microsoft.com/office/drawing/2014/main" id="{A05B45A2-0753-4E4D-906E-D80A40A98AC8}"/>
               </a:ext>
             </a:extLst>
           </p:cNvPr>
@@ -7527,7 +10266,7 @@
               <a:buNone/>
               <a:defRPr sz="1350" b="1">
                 <a:solidFill>
-                  <a:srgbClr val="DCECE5"/>
+                  <a:srgbClr val="6D7974"/>
                 </a:solidFill>
                 <a:latin typeface="Menlo"/>
                 <a:ea typeface="Menlo"/>
@@ -7537,7 +10276,7 @@
             <a:r>
               <a:rPr sz="1350" b="1">
                 <a:solidFill>
-                  <a:srgbClr val="DCECE5"/>
+                  <a:srgbClr val="6D7974"/>
                 </a:solidFill>
                 <a:latin typeface="Menlo"/>
                 <a:ea typeface="Menlo"/>
@@ -7551,7 +10290,7 @@
     </p:spTree>
     <p:extLst>
       <p:ext uri="{BB962C8B-B14F-4D97-AF65-F5344CB8AC3E}">
-        <p14:creationId xmlns:p14="http://schemas.microsoft.com/office/powerpoint/2010/main" val="1060689594"/>
+        <p14:creationId xmlns:p14="http://schemas.microsoft.com/office/powerpoint/2010/main" val="1578701116"/>
       </p:ext>
     </p:extLst>
   </p:cSld>

--- a/docs/Woven-Hackathon-Pitch.pptx
+++ b/docs/Woven-Hackathon-Pitch.pptx
@@ -2,23 +2,23 @@
 <file path=ppt/presentation.xml><?xml version="1.0" encoding="utf-8"?>
 <p:presentation xmlns:p="http://schemas.openxmlformats.org/presentationml/2006/main">
   <p:sldMasterIdLst>
-    <p:sldMasterId xmlns:r="http://schemas.openxmlformats.org/officeDocument/2006/relationships" id="2147483648" r:id="Rfdd70b2d0eb640ea"/>
+    <p:sldMasterId xmlns:r="http://schemas.openxmlformats.org/officeDocument/2006/relationships" id="2147483648" r:id="R68a0510b5c074beb"/>
   </p:sldMasterIdLst>
   <p:notesMasterIdLst>
-    <p:notesMasterId xmlns:r="http://schemas.openxmlformats.org/officeDocument/2006/relationships" r:id="Rd94d24f1179f4038"/>
+    <p:notesMasterId xmlns:r="http://schemas.openxmlformats.org/officeDocument/2006/relationships" r:id="Rf9928dd6c9a04bd2"/>
   </p:notesMasterIdLst>
   <p:sldIdLst>
-    <p:sldId xmlns:r="http://schemas.openxmlformats.org/officeDocument/2006/relationships" id="256" r:id="R2bfccfe80b304a7c"/>
-    <p:sldId xmlns:r="http://schemas.openxmlformats.org/officeDocument/2006/relationships" id="257" r:id="R178dfa31bb7d4269"/>
-    <p:sldId xmlns:r="http://schemas.openxmlformats.org/officeDocument/2006/relationships" id="258" r:id="R56812137f54c4342"/>
-    <p:sldId xmlns:r="http://schemas.openxmlformats.org/officeDocument/2006/relationships" id="259" r:id="Rcce94e1e0fab4348"/>
-    <p:sldId xmlns:r="http://schemas.openxmlformats.org/officeDocument/2006/relationships" id="260" r:id="Rb77869934b2b4de1"/>
-    <p:sldId xmlns:r="http://schemas.openxmlformats.org/officeDocument/2006/relationships" id="261" r:id="R6ae9a51c77174f8f"/>
-    <p:sldId xmlns:r="http://schemas.openxmlformats.org/officeDocument/2006/relationships" id="262" r:id="R3f718b01b8784c59"/>
-    <p:sldId xmlns:r="http://schemas.openxmlformats.org/officeDocument/2006/relationships" id="263" r:id="R7ae926f952e241a5"/>
-    <p:sldId xmlns:r="http://schemas.openxmlformats.org/officeDocument/2006/relationships" id="264" r:id="Rb1696b5a38e04c10"/>
-    <p:sldId xmlns:r="http://schemas.openxmlformats.org/officeDocument/2006/relationships" id="265" r:id="Rf1ffd916467540e4"/>
-    <p:sldId xmlns:r="http://schemas.openxmlformats.org/officeDocument/2006/relationships" id="266" r:id="Rc7301704a3aa4726"/>
+    <p:sldId xmlns:r="http://schemas.openxmlformats.org/officeDocument/2006/relationships" id="256" r:id="R0decddf6a35947c4"/>
+    <p:sldId xmlns:r="http://schemas.openxmlformats.org/officeDocument/2006/relationships" id="257" r:id="Rbb4c27554b7f424e"/>
+    <p:sldId xmlns:r="http://schemas.openxmlformats.org/officeDocument/2006/relationships" id="258" r:id="R1cebdef5fc064b88"/>
+    <p:sldId xmlns:r="http://schemas.openxmlformats.org/officeDocument/2006/relationships" id="259" r:id="R8ff12b12200d4eb7"/>
+    <p:sldId xmlns:r="http://schemas.openxmlformats.org/officeDocument/2006/relationships" id="260" r:id="R054cc70841b14097"/>
+    <p:sldId xmlns:r="http://schemas.openxmlformats.org/officeDocument/2006/relationships" id="261" r:id="Rabbf44ddb3734ac5"/>
+    <p:sldId xmlns:r="http://schemas.openxmlformats.org/officeDocument/2006/relationships" id="262" r:id="R04c0a818d091424b"/>
+    <p:sldId xmlns:r="http://schemas.openxmlformats.org/officeDocument/2006/relationships" id="263" r:id="R91f342426f8e4a28"/>
+    <p:sldId xmlns:r="http://schemas.openxmlformats.org/officeDocument/2006/relationships" id="264" r:id="R4a1e1fa7c16e4f7a"/>
+    <p:sldId xmlns:r="http://schemas.openxmlformats.org/officeDocument/2006/relationships" id="265" r:id="Rccf0164c366e467a"/>
+    <p:sldId xmlns:r="http://schemas.openxmlformats.org/officeDocument/2006/relationships" id="266" r:id="R8afa91bf4bb64a53"/>
   </p:sldIdLst>
   <p:sldSz cx="15240000" cy="8572500"/>
   <p:notesSz cx="6858000" cy="9144000"/>
@@ -1485,7 +1485,7 @@
   </p:cSld>
   <p:clrMap bg1="lt1" tx1="dk1" bg2="lt2" tx2="dk2" accent1="accent1" accent2="accent2" accent3="accent3" accent4="accent4" accent5="accent5" accent6="accent6" hlink="hlink" folHlink="folHlink"/>
   <p:sldLayoutIdLst>
-    <p:sldLayoutId xmlns:r="http://schemas.openxmlformats.org/officeDocument/2006/relationships" id="2147483649" r:id="R521b3641302342b1"/>
+    <p:sldLayoutId xmlns:r="http://schemas.openxmlformats.org/officeDocument/2006/relationships" id="2147483649" r:id="Rf952ab71b1574858"/>
   </p:sldLayoutIdLst>
   <p:txStyles>
     <p:titleStyle>
@@ -2425,14 +2425,14 @@
       </p:sp>
       <p:pic>
         <p:nvPicPr>
-          <p:cNvPr id="17" name=""/>
+          <p:cNvPr id="18" name=""/>
           <p:cNvPicPr>
             <a:picLocks xmlns:a="http://schemas.openxmlformats.org/drawingml/2006/main" noChangeAspect="1"/>
           </p:cNvPicPr>
           <p:nvPr/>
         </p:nvPicPr>
         <p:blipFill>
-          <a:blip xmlns:r="http://schemas.openxmlformats.org/officeDocument/2006/relationships" xmlns:a="http://schemas.openxmlformats.org/drawingml/2006/main" r:embed="R982966bbc874459b"/>
+          <a:blip xmlns:r="http://schemas.openxmlformats.org/officeDocument/2006/relationships" xmlns:a="http://schemas.openxmlformats.org/drawingml/2006/main" r:embed="R6927022f668944f0"/>
           <a:stretch xmlns:a="http://schemas.openxmlformats.org/drawingml/2006/main"/>
         </p:blipFill>
         <p:spPr>
@@ -2622,6 +2622,31 @@
           </a:p>
         </p:txBody>
       </p:sp>
+      <p:pic>
+        <p:nvPicPr>
+          <p:cNvPr id="22" name=""/>
+          <p:cNvPicPr>
+            <a:picLocks xmlns:a="http://schemas.openxmlformats.org/drawingml/2006/main" noChangeAspect="1"/>
+          </p:cNvPicPr>
+          <p:nvPr/>
+        </p:nvPicPr>
+        <p:blipFill>
+          <a:blip xmlns:r="http://schemas.openxmlformats.org/officeDocument/2006/relationships" xmlns:a="http://schemas.openxmlformats.org/drawingml/2006/main" r:embed="Rd1d0da75597c4e87"/>
+          <a:srcRect xmlns:a="http://schemas.openxmlformats.org/drawingml/2006/main" l="0" t="0" r="0" b="0"/>
+          <a:stretch xmlns:a="http://schemas.openxmlformats.org/drawingml/2006/main">
+            <a:fillRect l="0" t="0" r="0" b="0"/>
+          </a:stretch>
+        </p:blipFill>
+        <p:spPr>
+          <a:xfrm xmlns:a="http://schemas.openxmlformats.org/drawingml/2006/main">
+            <a:off x="7715250" y="2477691"/>
+            <a:ext cx="6667500" cy="3750469"/>
+          </a:xfrm>
+          <a:prstGeom xmlns:a="http://schemas.openxmlformats.org/drawingml/2006/main" prst="roundRect">
+            <a:avLst/>
+          </a:prstGeom>
+        </p:spPr>
+      </p:pic>
     </p:spTree>
     <p:extLst>
       <p:ext uri="{BB962C8B-B14F-4D97-AF65-F5344CB8AC3E}">
@@ -2653,7 +2678,7 @@
           <p:nvPr/>
         </p:nvPicPr>
         <p:blipFill>
-          <a:blip xmlns:r="http://schemas.openxmlformats.org/officeDocument/2006/relationships" xmlns:a="http://schemas.openxmlformats.org/drawingml/2006/main" r:embed="Raca72cacdcfe4a26"/>
+          <a:blip xmlns:r="http://schemas.openxmlformats.org/officeDocument/2006/relationships" xmlns:a="http://schemas.openxmlformats.org/drawingml/2006/main" r:embed="R9909b5a239234798"/>
           <a:srcRect xmlns:a="http://schemas.openxmlformats.org/drawingml/2006/main" l="0" t="0" r="0" b="0"/>
           <a:stretch xmlns:a="http://schemas.openxmlformats.org/drawingml/2006/main">
             <a:fillRect l="0" t="0" r="0" b="0"/>
@@ -3111,7 +3136,7 @@
           <p:nvPr/>
         </p:nvPicPr>
         <p:blipFill>
-          <a:blip xmlns:r="http://schemas.openxmlformats.org/officeDocument/2006/relationships" xmlns:a="http://schemas.openxmlformats.org/drawingml/2006/main" r:embed="R6ca6cfb145b04e6c"/>
+          <a:blip xmlns:r="http://schemas.openxmlformats.org/officeDocument/2006/relationships" xmlns:a="http://schemas.openxmlformats.org/drawingml/2006/main" r:embed="R0ec13a034f654de9"/>
           <a:stretch xmlns:a="http://schemas.openxmlformats.org/drawingml/2006/main"/>
         </p:blipFill>
         <p:spPr>
@@ -4758,7 +4783,7 @@
           <p:nvPr/>
         </p:nvPicPr>
         <p:blipFill>
-          <a:blip xmlns:r="http://schemas.openxmlformats.org/officeDocument/2006/relationships" xmlns:a="http://schemas.openxmlformats.org/drawingml/2006/main" r:embed="Rf8dbf73363c04e97"/>
+          <a:blip xmlns:r="http://schemas.openxmlformats.org/officeDocument/2006/relationships" xmlns:a="http://schemas.openxmlformats.org/drawingml/2006/main" r:embed="R32925bf3c169406a"/>
           <a:stretch xmlns:a="http://schemas.openxmlformats.org/drawingml/2006/main"/>
         </p:blipFill>
         <p:spPr>
@@ -7437,7 +7462,7 @@
           <p:nvPr/>
         </p:nvPicPr>
         <p:blipFill>
-          <a:blip xmlns:r="http://schemas.openxmlformats.org/officeDocument/2006/relationships" xmlns:a="http://schemas.openxmlformats.org/drawingml/2006/main" r:embed="Rf3b93ab8cd4c41ef"/>
+          <a:blip xmlns:r="http://schemas.openxmlformats.org/officeDocument/2006/relationships" xmlns:a="http://schemas.openxmlformats.org/drawingml/2006/main" r:embed="Ra2ccd8e92fed4c21"/>
           <a:stretch xmlns:a="http://schemas.openxmlformats.org/drawingml/2006/main"/>
         </p:blipFill>
         <p:spPr>
@@ -8087,7 +8112,7 @@
           <p:nvPr/>
         </p:nvPicPr>
         <p:blipFill>
-          <a:blip xmlns:r="http://schemas.openxmlformats.org/officeDocument/2006/relationships" xmlns:a="http://schemas.openxmlformats.org/drawingml/2006/main" r:embed="Re5524c358c254334"/>
+          <a:blip xmlns:r="http://schemas.openxmlformats.org/officeDocument/2006/relationships" xmlns:a="http://schemas.openxmlformats.org/drawingml/2006/main" r:embed="Re4b6b5bc752e42e0"/>
           <a:stretch xmlns:a="http://schemas.openxmlformats.org/drawingml/2006/main"/>
         </p:blipFill>
         <p:spPr>

--- a/docs/Woven-Hackathon-Pitch.pptx
+++ b/docs/Woven-Hackathon-Pitch.pptx
@@ -2,23 +2,23 @@
 <file path=ppt/presentation.xml><?xml version="1.0" encoding="utf-8"?>
 <p:presentation xmlns:p="http://schemas.openxmlformats.org/presentationml/2006/main">
   <p:sldMasterIdLst>
-    <p:sldMasterId xmlns:r="http://schemas.openxmlformats.org/officeDocument/2006/relationships" id="2147483648" r:id="R68a0510b5c074beb"/>
+    <p:sldMasterId xmlns:r="http://schemas.openxmlformats.org/officeDocument/2006/relationships" id="2147483648" r:id="Rbd7b917bceef459a"/>
   </p:sldMasterIdLst>
   <p:notesMasterIdLst>
-    <p:notesMasterId xmlns:r="http://schemas.openxmlformats.org/officeDocument/2006/relationships" r:id="Rf9928dd6c9a04bd2"/>
+    <p:notesMasterId xmlns:r="http://schemas.openxmlformats.org/officeDocument/2006/relationships" r:id="Reb6cee3a506b43cf"/>
   </p:notesMasterIdLst>
   <p:sldIdLst>
-    <p:sldId xmlns:r="http://schemas.openxmlformats.org/officeDocument/2006/relationships" id="256" r:id="R0decddf6a35947c4"/>
-    <p:sldId xmlns:r="http://schemas.openxmlformats.org/officeDocument/2006/relationships" id="257" r:id="Rbb4c27554b7f424e"/>
-    <p:sldId xmlns:r="http://schemas.openxmlformats.org/officeDocument/2006/relationships" id="258" r:id="R1cebdef5fc064b88"/>
-    <p:sldId xmlns:r="http://schemas.openxmlformats.org/officeDocument/2006/relationships" id="259" r:id="R8ff12b12200d4eb7"/>
-    <p:sldId xmlns:r="http://schemas.openxmlformats.org/officeDocument/2006/relationships" id="260" r:id="R054cc70841b14097"/>
-    <p:sldId xmlns:r="http://schemas.openxmlformats.org/officeDocument/2006/relationships" id="261" r:id="Rabbf44ddb3734ac5"/>
-    <p:sldId xmlns:r="http://schemas.openxmlformats.org/officeDocument/2006/relationships" id="262" r:id="R04c0a818d091424b"/>
-    <p:sldId xmlns:r="http://schemas.openxmlformats.org/officeDocument/2006/relationships" id="263" r:id="R91f342426f8e4a28"/>
-    <p:sldId xmlns:r="http://schemas.openxmlformats.org/officeDocument/2006/relationships" id="264" r:id="R4a1e1fa7c16e4f7a"/>
-    <p:sldId xmlns:r="http://schemas.openxmlformats.org/officeDocument/2006/relationships" id="265" r:id="Rccf0164c366e467a"/>
-    <p:sldId xmlns:r="http://schemas.openxmlformats.org/officeDocument/2006/relationships" id="266" r:id="R8afa91bf4bb64a53"/>
+    <p:sldId xmlns:r="http://schemas.openxmlformats.org/officeDocument/2006/relationships" id="256" r:id="R5326ca9495684228"/>
+    <p:sldId xmlns:r="http://schemas.openxmlformats.org/officeDocument/2006/relationships" id="257" r:id="R7129933df5f84180"/>
+    <p:sldId xmlns:r="http://schemas.openxmlformats.org/officeDocument/2006/relationships" id="258" r:id="Ree048974157b4473"/>
+    <p:sldId xmlns:r="http://schemas.openxmlformats.org/officeDocument/2006/relationships" id="259" r:id="Rfbc0c85f698f4fa6"/>
+    <p:sldId xmlns:r="http://schemas.openxmlformats.org/officeDocument/2006/relationships" id="260" r:id="R4aba994753af4d4e"/>
+    <p:sldId xmlns:r="http://schemas.openxmlformats.org/officeDocument/2006/relationships" id="261" r:id="R1293d76b0bb24c15"/>
+    <p:sldId xmlns:r="http://schemas.openxmlformats.org/officeDocument/2006/relationships" id="262" r:id="R7b5ce42f81a54f6f"/>
+    <p:sldId xmlns:r="http://schemas.openxmlformats.org/officeDocument/2006/relationships" id="263" r:id="R42e87175a6a34fd9"/>
+    <p:sldId xmlns:r="http://schemas.openxmlformats.org/officeDocument/2006/relationships" id="264" r:id="R37dfb12e7e61470d"/>
+    <p:sldId xmlns:r="http://schemas.openxmlformats.org/officeDocument/2006/relationships" id="265" r:id="R43bbd7ed52b947d6"/>
+    <p:sldId xmlns:r="http://schemas.openxmlformats.org/officeDocument/2006/relationships" id="266" r:id="R6026b644a94e4a72"/>
   </p:sldIdLst>
   <p:sldSz cx="15240000" cy="8572500"/>
   <p:notesSz cx="6858000" cy="9144000"/>
@@ -452,7 +452,17 @@
           <a:lstStyle xmlns:a="http://schemas.openxmlformats.org/drawingml/2006/main"/>
           <a:p xmlns:a="http://schemas.openxmlformats.org/drawingml/2006/main">
             <a:r>
-              <a:t>Open with the core idea: shopping should start and finish in the conversation where the need was expressed. Woven turns one request into a complete cart, then keeps the final purchase visibly human.</a:t>
+              <a:t>TIME 0:00–0:12</a:t>
+            </a:r>
+          </a:p>
+          <a:p xmlns:a="http://schemas.openxmlformats.org/drawingml/2006/main">
+            <a:r>
+              <a:t>NARRATIVE JOB</a:t>
+            </a:r>
+          </a:p>
+          <a:p xmlns:a="http://schemas.openxmlformats.org/drawingml/2006/main">
+            <a:r>
+              <a:t>Establish that shopping should start and finish in the conversation where the need was expressed.</a:t>
             </a:r>
           </a:p>
           <a:p xmlns:a="http://schemas.openxmlformats.org/drawingml/2006/main">
@@ -462,22 +472,67 @@
           </a:p>
           <a:p xmlns:a="http://schemas.openxmlformats.org/drawingml/2006/main">
             <a:r>
+              <a:t>SAY</a:t>
+            </a:r>
+          </a:p>
+          <a:p xmlns:a="http://schemas.openxmlformats.org/drawingml/2006/main">
+            <a:r>
+              <a:t>“We already ask ChatGPT what to buy. But actually buying still means opening tabs, checking compatibility, finding stock, and rebuilding everything at checkout. We built Woven to finish that process.”</a:t>
+            </a:r>
+          </a:p>
+          <a:p xmlns:a="http://schemas.openxmlformats.org/drawingml/2006/main">
+            <a:r>
+              <a:t/>
+            </a:r>
+          </a:p>
+          <a:p xmlns:a="http://schemas.openxmlformats.org/drawingml/2006/main">
+            <a:r>
+              <a:t>STAGE CUE</a:t>
+            </a:r>
+          </a:p>
+          <a:p xmlns:a="http://schemas.openxmlformats.org/drawingml/2006/main">
+            <a:r>
+              <a:t>Hold this slide for the full opening. The Flightpath hero is illustrative brand artwork; the working product proof begins on slide 3.</a:t>
+            </a:r>
+          </a:p>
+          <a:p xmlns:a="http://schemas.openxmlformats.org/drawingml/2006/main">
+            <a:r>
+              <a:t/>
+            </a:r>
+          </a:p>
+          <a:p xmlns:a="http://schemas.openxmlformats.org/drawingml/2006/main">
+            <a:r>
+              <a:t>TRANSITION</a:t>
+            </a:r>
+          </a:p>
+          <a:p xmlns:a="http://schemas.openxmlformats.org/drawingml/2006/main">
+            <a:r>
+              <a:t>“The hard part is not finding a product. It is completing the whole mission.”</a:t>
+            </a:r>
+          </a:p>
+          <a:p xmlns:a="http://schemas.openxmlformats.org/drawingml/2006/main">
+            <a:r>
+              <a:t/>
+            </a:r>
+          </a:p>
+          <a:p xmlns:a="http://schemas.openxmlformats.org/drawingml/2006/main">
+            <a:r>
               <a:t>[Sources]</a:t>
             </a:r>
           </a:p>
           <a:p xmlns:a="http://schemas.openxmlformats.org/drawingml/2006/main">
             <a:r>
-              <a:t>- SCRIPT.md — Opening</a:t>
-            </a:r>
-          </a:p>
-          <a:p xmlns:a="http://schemas.openxmlformats.org/drawingml/2006/main">
-            <a:r>
-              <a:t>- docs/assets/screenshots/buyer-overview.png</a:t>
-            </a:r>
-          </a:p>
-          <a:p xmlns:a="http://schemas.openxmlformats.org/drawingml/2006/main">
-            <a:r>
-              <a:t>- docs/BRAND_GUIDE.md — Product voice and visual system</a:t>
+              <a:t>- script.md — 0:00–0:12 opening</a:t>
+            </a:r>
+          </a:p>
+          <a:p xmlns:a="http://schemas.openxmlformats.org/drawingml/2006/main">
+            <a:r>
+              <a:t>- docs/assets/brand/woven-hero-flightpath.png</a:t>
+            </a:r>
+          </a:p>
+          <a:p xmlns:a="http://schemas.openxmlformats.org/drawingml/2006/main">
+            <a:r>
+              <a:t>- docs/BRAND_GUIDE.md — Product promise and visual system</a:t>
             </a:r>
           </a:p>
         </p:txBody>
@@ -547,7 +602,12 @@
           <a:lstStyle xmlns:a="http://schemas.openxmlformats.org/drawingml/2006/main"/>
           <a:p xmlns:a="http://schemas.openxmlformats.org/drawingml/2006/main">
             <a:r>
-              <a:t>Use this in technical Q&amp;A. The ChatGPT or Codex host invokes Woven's MCP tools. The one-service backend owns cart construction, mandate binding, confirmation, order state and the simulated authorization adapter. The browser demo is a second transport over the same backend.</a:t>
+              <a:t>USE IN TECHNICAL Q&amp;A — ARCHITECTURE</a:t>
+            </a:r>
+          </a:p>
+          <a:p xmlns:a="http://schemas.openxmlformats.org/drawingml/2006/main">
+            <a:r>
+              <a:t>The ChatGPT or Codex host invokes Woven’s MCP tools. One Node.js service owns cart construction, checkout mandate binding, confirmation, order state, merchant operations, and the simulated Visa adapter. The browser demo is a second transport over the same backend, not a separate product.</a:t>
             </a:r>
           </a:p>
           <a:p xmlns:a="http://schemas.openxmlformats.org/drawingml/2006/main">
@@ -557,6 +617,21 @@
           </a:p>
           <a:p xmlns:a="http://schemas.openxmlformats.org/drawingml/2006/main">
             <a:r>
+              <a:t>POINT TO</a:t>
+            </a:r>
+          </a:p>
+          <a:p xmlns:a="http://schemas.openxmlformats.org/drawingml/2006/main">
+            <a:r>
+              <a:t>MCP and HTTP transports. Mission and cart engine. Checkout guard. Node SQLite atomic inventory and order transaction. Simulated Visa boundary.</a:t>
+            </a:r>
+          </a:p>
+          <a:p xmlns:a="http://schemas.openxmlformats.org/drawingml/2006/main">
+            <a:r>
+              <a:t/>
+            </a:r>
+          </a:p>
+          <a:p xmlns:a="http://schemas.openxmlformats.org/drawingml/2006/main">
+            <a:r>
               <a:t>[Sources]</a:t>
             </a:r>
           </a:p>
@@ -568,6 +643,11 @@
           <a:p xmlns:a="http://schemas.openxmlformats.org/drawingml/2006/main">
             <a:r>
               <a:t>- docs/architecture.md — System architecture and trust boundaries</a:t>
+            </a:r>
+          </a:p>
+          <a:p xmlns:a="http://schemas.openxmlformats.org/drawingml/2006/main">
+            <a:r>
+              <a:t>- docs/HANDOVER.md — One-service product invariant</a:t>
             </a:r>
           </a:p>
         </p:txBody>
@@ -637,7 +717,12 @@
           <a:lstStyle xmlns:a="http://schemas.openxmlformats.org/drawingml/2006/main"/>
           <a:p xmlns:a="http://schemas.openxmlformats.org/drawingml/2006/main">
             <a:r>
-              <a:t>Use this in trust and safety Q&amp;A. Current controls bind merchant, cart version, amount, expiry, nonce and idempotency key; recheck price and stock; keep the confirmation nonce outside model-visible tool arguments; and simulate reversals on downstream order failure. Identity is a planned pre-checkout control and is not implemented.</a:t>
+              <a:t>USE IN TRUST AND SAFETY Q&amp;A</a:t>
+            </a:r>
+          </a:p>
+          <a:p xmlns:a="http://schemas.openxmlformats.org/drawingml/2006/main">
+            <a:r>
+              <a:t>Current controls bind merchant, cart version, amount, expiry, nonce, and idempotency key; recheck price and stock; keep the confirmation nonce outside model-visible tool arguments; and simulate reversal after downstream merchant failure. Identity is a planned pre-checkout control and is not implemented.</a:t>
             </a:r>
           </a:p>
           <a:p xmlns:a="http://schemas.openxmlformats.org/drawingml/2006/main">
@@ -647,6 +732,21 @@
           </a:p>
           <a:p xmlns:a="http://schemas.openxmlformats.org/drawingml/2006/main">
             <a:r>
+              <a:t>JUDGE ANSWER</a:t>
+            </a:r>
+          </a:p>
+          <a:p xmlns:a="http://schemas.openxmlformats.org/drawingml/2006/main">
+            <a:r>
+              <a:t>“The model never gets the final yes. It can recommend, but only the widget receives the private confirmation value, and only a direct user action can consume it for the exact displayed terms.”</a:t>
+            </a:r>
+          </a:p>
+          <a:p xmlns:a="http://schemas.openxmlformats.org/drawingml/2006/main">
+            <a:r>
+              <a:t/>
+            </a:r>
+          </a:p>
+          <a:p xmlns:a="http://schemas.openxmlformats.org/drawingml/2006/main">
+            <a:r>
               <a:t>[Sources]</a:t>
             </a:r>
           </a:p>
@@ -657,7 +757,7 @@
           </a:p>
           <a:p xmlns:a="http://schemas.openxmlformats.org/drawingml/2006/main">
             <a:r>
-              <a:t>- docs/architecture.md — Mandate, confirmation and failure state machine</a:t>
+              <a:t>- docs/architecture.md — Mandate, nonce, idempotency, and reversal state machine</a:t>
             </a:r>
           </a:p>
           <a:p xmlns:a="http://schemas.openxmlformats.org/drawingml/2006/main">
@@ -732,7 +832,17 @@
           <a:lstStyle xmlns:a="http://schemas.openxmlformats.org/drawingml/2006/main"/>
           <a:p xmlns:a="http://schemas.openxmlformats.org/drawingml/2006/main">
             <a:r>
-              <a:t>Search can discover products, but the buyer still has to compare tabs, verify compatibility, reconstruct a single-store cart, and re-enter the decision at checkout. The friction is not finding an item; it is completing the mission.</a:t>
+              <a:t>TIME 0:12–0:30</a:t>
+            </a:r>
+          </a:p>
+          <a:p xmlns:a="http://schemas.openxmlformats.org/drawingml/2006/main">
+            <a:r>
+              <a:t>NARRATIVE JOB</a:t>
+            </a:r>
+          </a:p>
+          <a:p xmlns:a="http://schemas.openxmlformats.org/drawingml/2006/main">
+            <a:r>
+              <a:t>Make the unfinished work after search concrete.</a:t>
             </a:r>
           </a:p>
           <a:p xmlns:a="http://schemas.openxmlformats.org/drawingml/2006/main">
@@ -742,17 +852,67 @@
           </a:p>
           <a:p xmlns:a="http://schemas.openxmlformats.org/drawingml/2006/main">
             <a:r>
+              <a:t>SAY</a:t>
+            </a:r>
+          </a:p>
+          <a:p xmlns:a="http://schemas.openxmlformats.org/drawingml/2006/main">
+            <a:r>
+              <a:t>“Imagine flying tonight and needing a charger for three devices. Search can recommend individual products, but it does not guarantee that everything works together, fits your budget, is available today, and can be collected from one place.”</a:t>
+            </a:r>
+          </a:p>
+          <a:p xmlns:a="http://schemas.openxmlformats.org/drawingml/2006/main">
+            <a:r>
+              <a:t/>
+            </a:r>
+          </a:p>
+          <a:p xmlns:a="http://schemas.openxmlformats.org/drawingml/2006/main">
+            <a:r>
+              <a:t>POINT TO</a:t>
+            </a:r>
+          </a:p>
+          <a:p xmlns:a="http://schemas.openxmlformats.org/drawingml/2006/main">
+            <a:r>
+              <a:t>Compare products. Check compatibility. Find one store. The user still has to rebuild the cart at checkout.</a:t>
+            </a:r>
+          </a:p>
+          <a:p xmlns:a="http://schemas.openxmlformats.org/drawingml/2006/main">
+            <a:r>
+              <a:t/>
+            </a:r>
+          </a:p>
+          <a:p xmlns:a="http://schemas.openxmlformats.org/drawingml/2006/main">
+            <a:r>
+              <a:t>TRANSITION</a:t>
+            </a:r>
+          </a:p>
+          <a:p xmlns:a="http://schemas.openxmlformats.org/drawingml/2006/main">
+            <a:r>
+              <a:t>“Woven resolves those constraints together.”</a:t>
+            </a:r>
+          </a:p>
+          <a:p xmlns:a="http://schemas.openxmlformats.org/drawingml/2006/main">
+            <a:r>
+              <a:t/>
+            </a:r>
+          </a:p>
+          <a:p xmlns:a="http://schemas.openxmlformats.org/drawingml/2006/main">
+            <a:r>
               <a:t>[Sources]</a:t>
             </a:r>
           </a:p>
           <a:p xmlns:a="http://schemas.openxmlformats.org/drawingml/2006/main">
             <a:r>
-              <a:t>- SCRIPT.md — The problem</a:t>
+              <a:t>- script.md — 0:12–0:30 problem framing</a:t>
             </a:r>
           </a:p>
           <a:p xmlns:a="http://schemas.openxmlformats.org/drawingml/2006/main">
             <a:r>
               <a:t>- docs/PRD.md — Primary persona and canonical mission</a:t>
+            </a:r>
+          </a:p>
+          <a:p xmlns:a="http://schemas.openxmlformats.org/drawingml/2006/main">
+            <a:r>
+              <a:t>- README.md — Product search versus Woven</a:t>
             </a:r>
           </a:p>
         </p:txBody>
@@ -822,7 +982,17 @@
           <a:lstStyle xmlns:a="http://schemas.openxmlformats.org/drawingml/2006/main"/>
           <a:p xmlns:a="http://schemas.openxmlformats.org/drawingml/2006/main">
             <a:r>
-              <a:t>The result is deliberately cart-level: one merchant and pickup point, four compatible components, S$133 total, and pickup today. Every item works with the others; the buyer does not have to rebuild the answer.</a:t>
+              <a:t>TIME 0:30–0:48</a:t>
+            </a:r>
+          </a:p>
+          <a:p xmlns:a="http://schemas.openxmlformats.org/drawingml/2006/main">
+            <a:r>
+              <a:t>NARRATIVE JOB</a:t>
+            </a:r>
+          </a:p>
+          <a:p xmlns:a="http://schemas.openxmlformats.org/drawingml/2006/main">
+            <a:r>
+              <a:t>Reveal Woven’s cart-level difference before switching to the product.</a:t>
             </a:r>
           </a:p>
           <a:p xmlns:a="http://schemas.openxmlformats.org/drawingml/2006/main">
@@ -832,12 +1002,57 @@
           </a:p>
           <a:p xmlns:a="http://schemas.openxmlformats.org/drawingml/2006/main">
             <a:r>
+              <a:t>SAY</a:t>
+            </a:r>
+          </a:p>
+          <a:p xmlns:a="http://schemas.openxmlformats.org/drawingml/2006/main">
+            <a:r>
+              <a:t>“Woven understands the complete request, eliminates incompatible combinations, and creates ready-to-buy carts. Every cart comes from one merchant and one location, with an explanation of why every component works.”</a:t>
+            </a:r>
+          </a:p>
+          <a:p xmlns:a="http://schemas.openxmlformats.org/drawingml/2006/main">
+            <a:r>
+              <a:t/>
+            </a:r>
+          </a:p>
+          <a:p xmlns:a="http://schemas.openxmlformats.org/drawingml/2006/main">
+            <a:r>
+              <a:t>POINT TO</a:t>
+            </a:r>
+          </a:p>
+          <a:p xmlns:a="http://schemas.openxmlformats.org/drawingml/2006/main">
+            <a:r>
+              <a:t>One merchant and pickup point. Four compatible components. S$133 total. Pickup today.</a:t>
+            </a:r>
+          </a:p>
+          <a:p xmlns:a="http://schemas.openxmlformats.org/drawingml/2006/main">
+            <a:r>
+              <a:t/>
+            </a:r>
+          </a:p>
+          <a:p xmlns:a="http://schemas.openxmlformats.org/drawingml/2006/main">
+            <a:r>
+              <a:t>TRANSITION</a:t>
+            </a:r>
+          </a:p>
+          <a:p xmlns:a="http://schemas.openxmlformats.org/drawingml/2006/main">
+            <a:r>
+              <a:t>“Let me show you.”</a:t>
+            </a:r>
+          </a:p>
+          <a:p xmlns:a="http://schemas.openxmlformats.org/drawingml/2006/main">
+            <a:r>
+              <a:t/>
+            </a:r>
+          </a:p>
+          <a:p xmlns:a="http://schemas.openxmlformats.org/drawingml/2006/main">
+            <a:r>
               <a:t>[Sources]</a:t>
             </a:r>
           </a:p>
           <a:p xmlns:a="http://schemas.openxmlformats.org/drawingml/2006/main">
             <a:r>
-              <a:t>- SCRIPT.md — Product reveal</a:t>
+              <a:t>- script.md — 0:30–0:48 product reveal</a:t>
             </a:r>
           </a:p>
           <a:p xmlns:a="http://schemas.openxmlformats.org/drawingml/2006/main">
@@ -847,7 +1062,7 @@
           </a:p>
           <a:p xmlns:a="http://schemas.openxmlformats.org/drawingml/2006/main">
             <a:r>
-              <a:t>- docs/PRD.md — Cart requirements</a:t>
+              <a:t>- docs/PRD.md — Complete-cart requirements</a:t>
             </a:r>
           </a:p>
         </p:txBody>
@@ -917,7 +1132,17 @@
           <a:lstStyle xmlns:a="http://schemas.openxmlformats.org/drawingml/2006/main"/>
           <a:p xmlns:a="http://schemas.openxmlformats.org/drawingml/2006/main">
             <a:r>
-              <a:t>Switch to the working app now. Use the canonical Tokyo request. Show the three complete carts, then open ByteRoute and point out the charger, cables, destination adapter, one pickup location, seeded demo stock, and S$133 total. Do not explain the ranking algorithm unless asked.</a:t>
+              <a:t>TIME 0:48–1:30</a:t>
+            </a:r>
+          </a:p>
+          <a:p xmlns:a="http://schemas.openxmlformats.org/drawingml/2006/main">
+            <a:r>
+              <a:t>NARRATIVE JOB</a:t>
+            </a:r>
+          </a:p>
+          <a:p xmlns:a="http://schemas.openxmlformats.org/drawingml/2006/main">
+            <a:r>
+              <a:t>Hand off to the working MCP App or the /demo fallback and let the result prove the value.</a:t>
             </a:r>
           </a:p>
           <a:p xmlns:a="http://schemas.openxmlformats.org/drawingml/2006/main">
@@ -927,22 +1152,92 @@
           </a:p>
           <a:p xmlns:a="http://schemas.openxmlformats.org/drawingml/2006/main">
             <a:r>
+              <a:t>ENTER OR REVEAL</a:t>
+            </a:r>
+          </a:p>
+          <a:p xmlns:a="http://schemas.openxmlformats.org/drawingml/2006/main">
+            <a:r>
+              <a:t>“I fly to Tokyo tonight. Build a charging kit for my MacBook Air, iPhone and AirPods under S$150, with pickup today.”</a:t>
+            </a:r>
+          </a:p>
+          <a:p xmlns:a="http://schemas.openxmlformats.org/drawingml/2006/main">
+            <a:r>
+              <a:t/>
+            </a:r>
+          </a:p>
+          <a:p xmlns:a="http://schemas.openxmlformats.org/drawingml/2006/main">
+            <a:r>
+              <a:t>DEMO ACTIONS</a:t>
+            </a:r>
+          </a:p>
+          <a:p xmlns:a="http://schemas.openxmlformats.org/drawingml/2006/main">
+            <a:r>
+              <a:t>1. Show the three ranked, one-merchant carts.</a:t>
+            </a:r>
+          </a:p>
+          <a:p xmlns:a="http://schemas.openxmlformats.org/drawingml/2006/main">
+            <a:r>
+              <a:t>2. Select ByteRoute.</a:t>
+            </a:r>
+          </a:p>
+          <a:p xmlns:a="http://schemas.openxmlformats.org/drawingml/2006/main">
+            <a:r>
+              <a:t>3. Point to charger wattage and voltage, both required cables, the Japan adapter, one pickup location, seeded demo stock, and the S$133 total.</a:t>
+            </a:r>
+          </a:p>
+          <a:p xmlns:a="http://schemas.openxmlformats.org/drawingml/2006/main">
+            <a:r>
+              <a:t/>
+            </a:r>
+          </a:p>
+          <a:p xmlns:a="http://schemas.openxmlformats.org/drawingml/2006/main">
+            <a:r>
+              <a:t>SAY</a:t>
+            </a:r>
+          </a:p>
+          <a:p xmlns:a="http://schemas.openxmlformats.org/drawingml/2006/main">
+            <a:r>
+              <a:t>“Woven returned three complete options—not loose product links. This S$133 cart includes the charger, both required cables, and the Japan adapter. Everything is compatible, under budget, available in our demo inventory, and ready at one pickup location.”</a:t>
+            </a:r>
+          </a:p>
+          <a:p xmlns:a="http://schemas.openxmlformats.org/drawingml/2006/main">
+            <a:r>
+              <a:t/>
+            </a:r>
+          </a:p>
+          <a:p xmlns:a="http://schemas.openxmlformats.org/drawingml/2006/main">
+            <a:r>
+              <a:t>STAGE GUARDRAIL</a:t>
+            </a:r>
+          </a:p>
+          <a:p xmlns:a="http://schemas.openxmlformats.org/drawingml/2006/main">
+            <a:r>
+              <a:t>Do not explain the ranking algorithm unless asked. If the MCP host fails, move immediately to /demo; it uses the same backend.</a:t>
+            </a:r>
+          </a:p>
+          <a:p xmlns:a="http://schemas.openxmlformats.org/drawingml/2006/main">
+            <a:r>
+              <a:t/>
+            </a:r>
+          </a:p>
+          <a:p xmlns:a="http://schemas.openxmlformats.org/drawingml/2006/main">
+            <a:r>
               <a:t>[Sources]</a:t>
             </a:r>
           </a:p>
           <a:p xmlns:a="http://schemas.openxmlformats.org/drawingml/2006/main">
             <a:r>
-              <a:t>- SCRIPT.md — Live demo, working checkout block</a:t>
-            </a:r>
-          </a:p>
-          <a:p xmlns:a="http://schemas.openxmlformats.org/drawingml/2006/main">
-            <a:r>
-              <a:t>- docs/HANDOVER.md — Canonical demo path</a:t>
-            </a:r>
-          </a:p>
-          <a:p xmlns:a="http://schemas.openxmlformats.org/drawingml/2006/main">
-            <a:r>
-              <a:t>- docs/PRD.md — Canonical story</a:t>
+              <a:t>- script.md — 0:48–1:30 live demo</a:t>
+            </a:r>
+          </a:p>
+          <a:p xmlns:a="http://schemas.openxmlformats.org/drawingml/2006/main">
+            <a:r>
+              <a:t>- docs/HANDOVER.md — Canonical demo and fallback</a:t>
+            </a:r>
+          </a:p>
+          <a:p xmlns:a="http://schemas.openxmlformats.org/drawingml/2006/main">
+            <a:r>
+              <a:t>- docs/PRD.md — Canonical story and cart constraints</a:t>
             </a:r>
           </a:p>
         </p:txBody>
@@ -1012,7 +1307,17 @@
           <a:lstStyle xmlns:a="http://schemas.openxmlformats.org/drawingml/2006/main"/>
           <a:p xmlns:a="http://schemas.openxmlformats.org/drawingml/2006/main">
             <a:r>
-              <a:t>Demo the working checkout path only: preview the exact terms, show merchant, items, pickup, total and expiry, then use one direct human confirmation. The returned authorization is simulated. Identity verification is the next server-enforced integration and is not present in the live build. Never present a static identity screen as a working check.</a:t>
+              <a:t>TIME 1:30–2:15</a:t>
+            </a:r>
+          </a:p>
+          <a:p xmlns:a="http://schemas.openxmlformats.org/drawingml/2006/main">
+            <a:r>
+              <a:t>NARRATIVE JOB</a:t>
+            </a:r>
+          </a:p>
+          <a:p xmlns:a="http://schemas.openxmlformats.org/drawingml/2006/main">
+            <a:r>
+              <a:t>Draw the authorization boundary: the AI recommends; the user authorizes the exact purchase.</a:t>
             </a:r>
           </a:p>
           <a:p xmlns:a="http://schemas.openxmlformats.org/drawingml/2006/main">
@@ -1022,12 +1327,97 @@
           </a:p>
           <a:p xmlns:a="http://schemas.openxmlformats.org/drawingml/2006/main">
             <a:r>
+              <a:t>WORKING DEMO ACTIONS — USE NOW</a:t>
+            </a:r>
+          </a:p>
+          <a:p xmlns:a="http://schemas.openxmlformats.org/drawingml/2006/main">
+            <a:r>
+              <a:t>1. Click Review checkout.</a:t>
+            </a:r>
+          </a:p>
+          <a:p xmlns:a="http://schemas.openxmlformats.org/drawingml/2006/main">
+            <a:r>
+              <a:t>2. Show the exact merchant, items, pickup location, total, cart version, and expiry.</a:t>
+            </a:r>
+          </a:p>
+          <a:p xmlns:a="http://schemas.openxmlformats.org/drawingml/2006/main">
+            <a:r>
+              <a:t>3. Pause before clicking Confirm S$133.00.</a:t>
+            </a:r>
+          </a:p>
+          <a:p xmlns:a="http://schemas.openxmlformats.org/drawingml/2006/main">
+            <a:r>
+              <a:t>4. Confirm and show the simulated Visa authorization result and pickup receipt.</a:t>
+            </a:r>
+          </a:p>
+          <a:p xmlns:a="http://schemas.openxmlformats.org/drawingml/2006/main">
+            <a:r>
+              <a:t/>
+            </a:r>
+          </a:p>
+          <a:p xmlns:a="http://schemas.openxmlformats.org/drawingml/2006/main">
+            <a:r>
+              <a:t>SAY</a:t>
+            </a:r>
+          </a:p>
+          <a:p xmlns:a="http://schemas.openxmlformats.org/drawingml/2006/main">
+            <a:r>
+              <a:t>“Woven rechecks the price and stock, then creates an exact ten-minute checkout preview. The AI recommended this cart, but it cannot approve it. The user sees the merchant, every item, the pickup location, and the S$133 total before one direct confirmation.”</a:t>
+            </a:r>
+          </a:p>
+          <a:p xmlns:a="http://schemas.openxmlformats.org/drawingml/2006/main">
+            <a:r>
+              <a:t/>
+            </a:r>
+          </a:p>
+          <a:p xmlns:a="http://schemas.openxmlformats.org/drawingml/2006/main">
+            <a:r>
+              <a:t>“Only after that click does Woven produce a simulated Visa authorization and pickup receipt. No card details enter Woven, and no live charge occurs.”</a:t>
+            </a:r>
+          </a:p>
+          <a:p xmlns:a="http://schemas.openxmlformats.org/drawingml/2006/main">
+            <a:r>
+              <a:t/>
+            </a:r>
+          </a:p>
+          <a:p xmlns:a="http://schemas.openxmlformats.org/drawingml/2006/main">
+            <a:r>
+              <a:t>TRUTH BOUNDARY</a:t>
+            </a:r>
+          </a:p>
+          <a:p xmlns:a="http://schemas.openxmlformats.org/drawingml/2006/main">
+            <a:r>
+              <a:t>Identity verification is planned and not in the live build. Do not show a static identity mock as verification. After server enforcement exists, insert the connector-style demo identity check before exact-term review and keep it separate from final confirmation.</a:t>
+            </a:r>
+          </a:p>
+          <a:p xmlns:a="http://schemas.openxmlformats.org/drawingml/2006/main">
+            <a:r>
+              <a:t/>
+            </a:r>
+          </a:p>
+          <a:p xmlns:a="http://schemas.openxmlformats.org/drawingml/2006/main">
+            <a:r>
+              <a:t>TRANSITION</a:t>
+            </a:r>
+          </a:p>
+          <a:p xmlns:a="http://schemas.openxmlformats.org/drawingml/2006/main">
+            <a:r>
+              <a:t>“The same controls are visible on the merchant side.”</a:t>
+            </a:r>
+          </a:p>
+          <a:p xmlns:a="http://schemas.openxmlformats.org/drawingml/2006/main">
+            <a:r>
+              <a:t/>
+            </a:r>
+          </a:p>
+          <a:p xmlns:a="http://schemas.openxmlformats.org/drawingml/2006/main">
+            <a:r>
               <a:t>[Sources]</a:t>
             </a:r>
           </a:p>
           <a:p xmlns:a="http://schemas.openxmlformats.org/drawingml/2006/main">
             <a:r>
-              <a:t>- SCRIPT.md — Working checkout block and target identity block</a:t>
+              <a:t>- script.md — Working checkout block and target identity block</a:t>
             </a:r>
           </a:p>
           <a:p xmlns:a="http://schemas.openxmlformats.org/drawingml/2006/main">
@@ -1107,7 +1497,17 @@
           <a:lstStyle xmlns:a="http://schemas.openxmlformats.org/drawingml/2006/main"/>
           <a:p xmlns:a="http://schemas.openxmlformats.org/drawingml/2006/main">
             <a:r>
-              <a:t>Switch to the merchant desk. Show inventory and price edits, confirmed orders, the audit trail, and the decline and reversal demo scenarios. Clarify that inventory is seeded and authorization is simulated.</a:t>
+              <a:t>TIME 2:15–2:35</a:t>
+            </a:r>
+          </a:p>
+          <a:p xmlns:a="http://schemas.openxmlformats.org/drawingml/2006/main">
+            <a:r>
+              <a:t>NARRATIVE JOB</a:t>
+            </a:r>
+          </a:p>
+          <a:p xmlns:a="http://schemas.openxmlformats.org/drawingml/2006/main">
+            <a:r>
+              <a:t>Prove that merchants control inventory, scenarios, orders, and auditability.</a:t>
             </a:r>
           </a:p>
           <a:p xmlns:a="http://schemas.openxmlformats.org/drawingml/2006/main">
@@ -1117,12 +1517,72 @@
           </a:p>
           <a:p xmlns:a="http://schemas.openxmlformats.org/drawingml/2006/main">
             <a:r>
+              <a:t>DEMO ACTIONS</a:t>
+            </a:r>
+          </a:p>
+          <a:p xmlns:a="http://schemas.openxmlformats.org/drawingml/2006/main">
+            <a:r>
+              <a:t>Open the Merchant Desk. Show inventory and price controls, confirmed orders, the audit trail, and the stockout, price-change, decline, and reversal scenarios.</a:t>
+            </a:r>
+          </a:p>
+          <a:p xmlns:a="http://schemas.openxmlformats.org/drawingml/2006/main">
+            <a:r>
+              <a:t/>
+            </a:r>
+          </a:p>
+          <a:p xmlns:a="http://schemas.openxmlformats.org/drawingml/2006/main">
+            <a:r>
+              <a:t>SAY</a:t>
+            </a:r>
+          </a:p>
+          <a:p xmlns:a="http://schemas.openxmlformats.org/drawingml/2006/main">
+            <a:r>
+              <a:t>“On the merchant side, Woven already supports inventory import, price and stock controls, orders, and an audit trail. Merchants can simulate a price change, stockout, authorization decline, or reversal without changing code.”</a:t>
+            </a:r>
+          </a:p>
+          <a:p xmlns:a="http://schemas.openxmlformats.org/drawingml/2006/main">
+            <a:r>
+              <a:t/>
+            </a:r>
+          </a:p>
+          <a:p xmlns:a="http://schemas.openxmlformats.org/drawingml/2006/main">
+            <a:r>
+              <a:t>TRUTH BOUNDARY</a:t>
+            </a:r>
+          </a:p>
+          <a:p xmlns:a="http://schemas.openxmlformats.org/drawingml/2006/main">
+            <a:r>
+              <a:t>Call the current values seeded demo data. Do not call the CSV workflow a production merchant integration or imply a live payment rail.</a:t>
+            </a:r>
+          </a:p>
+          <a:p xmlns:a="http://schemas.openxmlformats.org/drawingml/2006/main">
+            <a:r>
+              <a:t/>
+            </a:r>
+          </a:p>
+          <a:p xmlns:a="http://schemas.openxmlformats.org/drawingml/2006/main">
+            <a:r>
+              <a:t>TRANSITION</a:t>
+            </a:r>
+          </a:p>
+          <a:p xmlns:a="http://schemas.openxmlformats.org/drawingml/2006/main">
+            <a:r>
+              <a:t>“That brings us back to why this belongs inside ChatGPT.”</a:t>
+            </a:r>
+          </a:p>
+          <a:p xmlns:a="http://schemas.openxmlformats.org/drawingml/2006/main">
+            <a:r>
+              <a:t/>
+            </a:r>
+          </a:p>
+          <a:p xmlns:a="http://schemas.openxmlformats.org/drawingml/2006/main">
+            <a:r>
               <a:t>[Sources]</a:t>
             </a:r>
           </a:p>
           <a:p xmlns:a="http://schemas.openxmlformats.org/drawingml/2006/main">
             <a:r>
-              <a:t>- SCRIPT.md — Merchant operations</a:t>
+              <a:t>- script.md — 2:15–2:35 merchant operations</a:t>
             </a:r>
           </a:p>
           <a:p xmlns:a="http://schemas.openxmlformats.org/drawingml/2006/main">
@@ -1202,7 +1662,17 @@
           <a:lstStyle xmlns:a="http://schemas.openxmlformats.org/drawingml/2006/main"/>
           <a:p xmlns:a="http://schemas.openxmlformats.org/drawingml/2006/main">
             <a:r>
-              <a:t>Close on the product thesis: the checkout belongs where the request begins. ChatGPT understands the mission, Woven builds the complete cart, and the user controls authorization. Ask once. Review once. Confirm once.</a:t>
+              <a:t>TIME 2:35–3:00</a:t>
+            </a:r>
+          </a:p>
+          <a:p xmlns:a="http://schemas.openxmlformats.org/drawingml/2006/main">
+            <a:r>
+              <a:t>NARRATIVE JOB</a:t>
+            </a:r>
+          </a:p>
+          <a:p xmlns:a="http://schemas.openxmlformats.org/drawingml/2006/main">
+            <a:r>
+              <a:t>Resolve the opening thesis and land the memorable close.</a:t>
             </a:r>
           </a:p>
           <a:p xmlns:a="http://schemas.openxmlformats.org/drawingml/2006/main">
@@ -1212,12 +1682,77 @@
           </a:p>
           <a:p xmlns:a="http://schemas.openxmlformats.org/drawingml/2006/main">
             <a:r>
+              <a:t>SAY</a:t>
+            </a:r>
+          </a:p>
+          <a:p xmlns:a="http://schemas.openxmlformats.org/drawingml/2006/main">
+            <a:r>
+              <a:t>“Why ChatGPT? Because that is where the user’s request already exists. Why a plugin? Because Woven can turn that conversation into merchant actions and a reviewable checkout without asking the user to start again.”</a:t>
+            </a:r>
+          </a:p>
+          <a:p xmlns:a="http://schemas.openxmlformats.org/drawingml/2006/main">
+            <a:r>
+              <a:t/>
+            </a:r>
+          </a:p>
+          <a:p xmlns:a="http://schemas.openxmlformats.org/drawingml/2006/main">
+            <a:r>
+              <a:t>“This prototype uses seeded inventory and a simulated Visa authorization; no live charge occurs. Our next trust step is the connector-style demo identity check.”</a:t>
+            </a:r>
+          </a:p>
+          <a:p xmlns:a="http://schemas.openxmlformats.org/drawingml/2006/main">
+            <a:r>
+              <a:t/>
+            </a:r>
+          </a:p>
+          <a:p xmlns:a="http://schemas.openxmlformats.org/drawingml/2006/main">
+            <a:r>
+              <a:t>“Woven makes shopping through AI simple enough to use—and controlled enough to trust.”</a:t>
+            </a:r>
+          </a:p>
+          <a:p xmlns:a="http://schemas.openxmlformats.org/drawingml/2006/main">
+            <a:r>
+              <a:t/>
+            </a:r>
+          </a:p>
+          <a:p xmlns:a="http://schemas.openxmlformats.org/drawingml/2006/main">
+            <a:r>
+              <a:t>CLOSE</a:t>
+            </a:r>
+          </a:p>
+          <a:p xmlns:a="http://schemas.openxmlformats.org/drawingml/2006/main">
+            <a:r>
+              <a:t>Ask once. Review once. Confirm once.</a:t>
+            </a:r>
+          </a:p>
+          <a:p xmlns:a="http://schemas.openxmlformats.org/drawingml/2006/main">
+            <a:r>
+              <a:t/>
+            </a:r>
+          </a:p>
+          <a:p xmlns:a="http://schemas.openxmlformats.org/drawingml/2006/main">
+            <a:r>
+              <a:t>STAGE CUE</a:t>
+            </a:r>
+          </a:p>
+          <a:p xmlns:a="http://schemas.openxmlformats.org/drawingml/2006/main">
+            <a:r>
+              <a:t>End the three-minute pitch here. Slides 8–11 are Q&amp;A backups only.</a:t>
+            </a:r>
+          </a:p>
+          <a:p xmlns:a="http://schemas.openxmlformats.org/drawingml/2006/main">
+            <a:r>
+              <a:t/>
+            </a:r>
+          </a:p>
+          <a:p xmlns:a="http://schemas.openxmlformats.org/drawingml/2006/main">
+            <a:r>
               <a:t>[Sources]</a:t>
             </a:r>
           </a:p>
           <a:p xmlns:a="http://schemas.openxmlformats.org/drawingml/2006/main">
             <a:r>
-              <a:t>- SCRIPT.md — Closing</a:t>
+              <a:t>- script.md — 2:35–3:00 closing</a:t>
             </a:r>
           </a:p>
           <a:p xmlns:a="http://schemas.openxmlformats.org/drawingml/2006/main">
@@ -1227,7 +1762,7 @@
           </a:p>
           <a:p xmlns:a="http://schemas.openxmlformats.org/drawingml/2006/main">
             <a:r>
-              <a:t>- docs/DEVPOST_SUBMISSION.md — Pitch</a:t>
+              <a:t>- docs/DEVPOST_SUBMISSION.md — Three-minute judge demo</a:t>
             </a:r>
           </a:p>
         </p:txBody>
@@ -1297,7 +1832,12 @@
           <a:lstStyle xmlns:a="http://schemas.openxmlformats.org/drawingml/2006/main"/>
           <a:p xmlns:a="http://schemas.openxmlformats.org/drawingml/2006/main">
             <a:r>
-              <a:t>Use this only in Q&amp;A. The working prototype includes cart construction, MCP tools and UI, exact expiring checkout terms, direct confirmation, idempotency, merchant operations, failure scenarios, and an audit trail.</a:t>
+              <a:t>USE IN Q&amp;A — WHAT IS REAL</a:t>
+            </a:r>
+          </a:p>
+          <a:p xmlns:a="http://schemas.openxmlformats.org/drawingml/2006/main">
+            <a:r>
+              <a:t>The working prototype includes the MCP App and browser fallback, complete one-merchant carts, compatibility and budget proof, exact expiring checkout terms, direct confirmation, idempotency, merchant operations, failure scenarios, and an audit trail.</a:t>
             </a:r>
           </a:p>
           <a:p xmlns:a="http://schemas.openxmlformats.org/drawingml/2006/main">
@@ -1307,12 +1847,27 @@
           </a:p>
           <a:p xmlns:a="http://schemas.openxmlformats.org/drawingml/2006/main">
             <a:r>
+              <a:t>JUDGE ANSWER</a:t>
+            </a:r>
+          </a:p>
+          <a:p xmlns:a="http://schemas.openxmlformats.org/drawingml/2006/main">
+            <a:r>
+              <a:t>“The core journey is working end to end with seeded demo inventory and a simulated payment boundary. The primary product is the MCP App; /demo is the same backend over HTTP for stage reliability.”</a:t>
+            </a:r>
+          </a:p>
+          <a:p xmlns:a="http://schemas.openxmlformats.org/drawingml/2006/main">
+            <a:r>
+              <a:t/>
+            </a:r>
+          </a:p>
+          <a:p xmlns:a="http://schemas.openxmlformats.org/drawingml/2006/main">
+            <a:r>
               <a:t>[Sources]</a:t>
             </a:r>
           </a:p>
           <a:p xmlns:a="http://schemas.openxmlformats.org/drawingml/2006/main">
             <a:r>
-              <a:t>- README.md — What is implemented</a:t>
+              <a:t>- README.md — Implemented surfaces and workflow</a:t>
             </a:r>
           </a:p>
           <a:p xmlns:a="http://schemas.openxmlformats.org/drawingml/2006/main">
@@ -1392,7 +1947,12 @@
           <a:lstStyle xmlns:a="http://schemas.openxmlformats.org/drawingml/2006/main"/>
           <a:p xmlns:a="http://schemas.openxmlformats.org/drawingml/2006/main">
             <a:r>
-              <a:t>Use this when judges ask what is simulated. Inventory and pickup are seeded. Identity is a product direction, not a live feature. Visa approval, decline and reversal are simulated. The prototype accepts no card data and makes no Visa partnership claim.</a:t>
+              <a:t>USE IN Q&amp;A — WHAT IS SIMULATED</a:t>
+            </a:r>
+          </a:p>
+          <a:p xmlns:a="http://schemas.openxmlformats.org/drawingml/2006/main">
+            <a:r>
+              <a:t>Inventory and pickup estimates are seeded. Identity verification is a planned product direction, not a live feature. Visa approval, decline, and reversal are simulated. No Visa account is accessed, no payment credentials are collected, and no live charge or partnership is claimed.</a:t>
             </a:r>
           </a:p>
           <a:p xmlns:a="http://schemas.openxmlformats.org/drawingml/2006/main">
@@ -1402,6 +1962,21 @@
           </a:p>
           <a:p xmlns:a="http://schemas.openxmlformats.org/drawingml/2006/main">
             <a:r>
+              <a:t>JUDGE ANSWER</a:t>
+            </a:r>
+          </a:p>
+          <a:p xmlns:a="http://schemas.openxmlformats.org/drawingml/2006/main">
+            <a:r>
+              <a:t>“The trust boundary is explicit: the working product binds exact terms and requires direct confirmation; identity is next, and the payment rail is clearly simulated.”</a:t>
+            </a:r>
+          </a:p>
+          <a:p xmlns:a="http://schemas.openxmlformats.org/drawingml/2006/main">
+            <a:r>
+              <a:t/>
+            </a:r>
+          </a:p>
+          <a:p xmlns:a="http://schemas.openxmlformats.org/drawingml/2006/main">
+            <a:r>
               <a:t>[Sources]</a:t>
             </a:r>
           </a:p>
@@ -1412,7 +1987,7 @@
           </a:p>
           <a:p xmlns:a="http://schemas.openxmlformats.org/drawingml/2006/main">
             <a:r>
-              <a:t>- SCRIPT.md — Truth guardrails</a:t>
+              <a:t>- script.md — Truth guardrails</a:t>
             </a:r>
           </a:p>
           <a:p xmlns:a="http://schemas.openxmlformats.org/drawingml/2006/main">
@@ -1485,7 +2060,7 @@
   </p:cSld>
   <p:clrMap bg1="lt1" tx1="dk1" bg2="lt2" tx2="dk2" accent1="accent1" accent2="accent2" accent3="accent3" accent4="accent4" accent5="accent5" accent6="accent6" hlink="hlink" folHlink="folHlink"/>
   <p:sldLayoutIdLst>
-    <p:sldLayoutId xmlns:r="http://schemas.openxmlformats.org/officeDocument/2006/relationships" id="2147483649" r:id="Rf952ab71b1574858"/>
+    <p:sldLayoutId xmlns:r="http://schemas.openxmlformats.org/officeDocument/2006/relationships" id="2147483649" r:id="R02831dc36adb413d"/>
   </p:sldLayoutIdLst>
   <p:txStyles>
     <p:titleStyle>
@@ -2423,222 +2998,200 @@
           <a:fontRef xmlns:a="http://schemas.openxmlformats.org/drawingml/2006/main" idx="major"/>
         </p:style>
       </p:sp>
+      <p:sp>
+        <p:nvSpPr>
+          <p:cNvPr id="7" name="closing-boundary">
+            <a:extLst xmlns:a="http://schemas.openxmlformats.org/drawingml/2006/main">
+              <a:ext uri="{FF2B5EF4-FFF2-40B4-BE49-F238E27FC236}">
+                <a16:creationId xmlns:a16="http://schemas.microsoft.com/office/drawing/2014/main" id="{F366E3E1-58EC-4B9E-85AC-84B9FDF83536}"/>
+              </a:ext>
+            </a:extLst>
+          </p:cNvPr>
+          <p:cNvSpPr>
+            <a:spLocks xmlns:a="http://schemas.openxmlformats.org/drawingml/2006/main" noGrp="1"/>
+          </p:cNvSpPr>
+          <p:nvPr/>
+        </p:nvSpPr>
+        <p:spPr>
+          <a:xfrm xmlns:a="http://schemas.openxmlformats.org/drawingml/2006/main">
+            <a:off x="8401050" y="6572250"/>
+            <a:ext cx="5334000" cy="247650"/>
+          </a:xfrm>
+          <a:prstGeom xmlns:a="http://schemas.openxmlformats.org/drawingml/2006/main" prst="rect">
+            <a:avLst/>
+          </a:prstGeom>
+          <a:noFill xmlns:a="http://schemas.openxmlformats.org/drawingml/2006/main"/>
+          <a:ln xmlns:a="http://schemas.openxmlformats.org/drawingml/2006/main" w="0">
+            <a:noFill/>
+            <a:prstDash val="solid"/>
+          </a:ln>
+        </p:spPr>
+        <p:txBody>
+          <a:bodyPr xmlns:a="http://schemas.openxmlformats.org/drawingml/2006/main" wrap="square" lIns="0" tIns="0" rIns="0" bIns="0">
+            <a:noAutofit/>
+          </a:bodyPr>
+          <a:lstStyle xmlns:a="http://schemas.openxmlformats.org/drawingml/2006/main"/>
+          <a:p xmlns:a="http://schemas.openxmlformats.org/drawingml/2006/main">
+            <a:pPr algn="ctr">
+              <a:buNone/>
+              <a:defRPr sz="1200" b="1">
+                <a:solidFill>
+                  <a:srgbClr val="B7F522"/>
+                </a:solidFill>
+                <a:latin typeface="Menlo"/>
+                <a:ea typeface="Menlo"/>
+                <a:cs typeface="Menlo"/>
+              </a:defRPr>
+            </a:pPr>
+            <a:r>
+              <a:rPr sz="1200" b="1">
+                <a:solidFill>
+                  <a:srgbClr val="B7F522"/>
+                </a:solidFill>
+                <a:latin typeface="Menlo"/>
+                <a:ea typeface="Menlo"/>
+                <a:cs typeface="Menlo"/>
+              </a:rPr>
+              <a:t>WORKING MCP APP · SEEDED DEMO DATA</a:t>
+            </a:r>
+          </a:p>
+        </p:txBody>
+      </p:sp>
+      <p:sp>
+        <p:nvSpPr>
+          <p:cNvPr id="8" name="footer-label-9">
+            <a:extLst xmlns:a="http://schemas.openxmlformats.org/drawingml/2006/main">
+              <a:ext uri="{FF2B5EF4-FFF2-40B4-BE49-F238E27FC236}">
+                <a16:creationId xmlns:a16="http://schemas.microsoft.com/office/drawing/2014/main" id="{D2647B79-80DB-4F8E-8A2F-05922DDDED74}"/>
+              </a:ext>
+            </a:extLst>
+          </p:cNvPr>
+          <p:cNvSpPr>
+            <a:spLocks xmlns:a="http://schemas.openxmlformats.org/drawingml/2006/main" noGrp="1"/>
+          </p:cNvSpPr>
+          <p:nvPr/>
+        </p:nvSpPr>
+        <p:spPr>
+          <a:xfrm xmlns:a="http://schemas.openxmlformats.org/drawingml/2006/main">
+            <a:off x="838200" y="8020050"/>
+            <a:ext cx="5334000" cy="228600"/>
+          </a:xfrm>
+          <a:prstGeom xmlns:a="http://schemas.openxmlformats.org/drawingml/2006/main" prst="rect">
+            <a:avLst/>
+          </a:prstGeom>
+          <a:noFill xmlns:a="http://schemas.openxmlformats.org/drawingml/2006/main"/>
+          <a:ln xmlns:a="http://schemas.openxmlformats.org/drawingml/2006/main" w="0">
+            <a:noFill/>
+            <a:prstDash val="solid"/>
+          </a:ln>
+        </p:spPr>
+        <p:txBody>
+          <a:bodyPr xmlns:a="http://schemas.openxmlformats.org/drawingml/2006/main" wrap="square" lIns="0" tIns="0" rIns="0" bIns="0">
+            <a:noAutofit/>
+          </a:bodyPr>
+          <a:lstStyle xmlns:a="http://schemas.openxmlformats.org/drawingml/2006/main"/>
+          <a:p xmlns:a="http://schemas.openxmlformats.org/drawingml/2006/main">
+            <a:pPr>
+              <a:buNone/>
+              <a:defRPr sz="1200" b="1">
+                <a:solidFill>
+                  <a:srgbClr val="DCECE5"/>
+                </a:solidFill>
+                <a:latin typeface="Menlo"/>
+                <a:ea typeface="Menlo"/>
+                <a:cs typeface="Menlo"/>
+              </a:defRPr>
+            </a:pPr>
+            <a:r>
+              <a:rPr sz="1200" b="1">
+                <a:solidFill>
+                  <a:srgbClr val="DCECE5"/>
+                </a:solidFill>
+                <a:latin typeface="Menlo"/>
+                <a:ea typeface="Menlo"/>
+                <a:cs typeface="Menlo"/>
+              </a:rPr>
+              <a:t>WOVEN  /  LIFEHACK 2026</a:t>
+            </a:r>
+          </a:p>
+        </p:txBody>
+      </p:sp>
+      <p:sp>
+        <p:nvSpPr>
+          <p:cNvPr id="9" name="footer-number-9">
+            <a:extLst xmlns:a="http://schemas.openxmlformats.org/drawingml/2006/main">
+              <a:ext uri="{FF2B5EF4-FFF2-40B4-BE49-F238E27FC236}">
+                <a16:creationId xmlns:a16="http://schemas.microsoft.com/office/drawing/2014/main" id="{62445167-1406-4B61-A1CF-80F49583F03F}"/>
+              </a:ext>
+            </a:extLst>
+          </p:cNvPr>
+          <p:cNvSpPr>
+            <a:spLocks xmlns:a="http://schemas.openxmlformats.org/drawingml/2006/main" noGrp="1"/>
+          </p:cNvSpPr>
+          <p:nvPr/>
+        </p:nvSpPr>
+        <p:spPr>
+          <a:xfrm xmlns:a="http://schemas.openxmlformats.org/drawingml/2006/main">
+            <a:off x="13620750" y="8001000"/>
+            <a:ext cx="762000" cy="247650"/>
+          </a:xfrm>
+          <a:prstGeom xmlns:a="http://schemas.openxmlformats.org/drawingml/2006/main" prst="rect">
+            <a:avLst/>
+          </a:prstGeom>
+          <a:noFill xmlns:a="http://schemas.openxmlformats.org/drawingml/2006/main"/>
+          <a:ln xmlns:a="http://schemas.openxmlformats.org/drawingml/2006/main" w="0">
+            <a:noFill/>
+            <a:prstDash val="solid"/>
+          </a:ln>
+        </p:spPr>
+        <p:txBody>
+          <a:bodyPr xmlns:a="http://schemas.openxmlformats.org/drawingml/2006/main" wrap="square" lIns="0" tIns="0" rIns="0" bIns="0">
+            <a:noAutofit/>
+          </a:bodyPr>
+          <a:lstStyle xmlns:a="http://schemas.openxmlformats.org/drawingml/2006/main"/>
+          <a:p xmlns:a="http://schemas.openxmlformats.org/drawingml/2006/main">
+            <a:pPr algn="r">
+              <a:buNone/>
+              <a:defRPr sz="1350" b="1">
+                <a:solidFill>
+                  <a:srgbClr val="DCECE5"/>
+                </a:solidFill>
+                <a:latin typeface="Menlo"/>
+                <a:ea typeface="Menlo"/>
+                <a:cs typeface="Menlo"/>
+              </a:defRPr>
+            </a:pPr>
+            <a:r>
+              <a:rPr sz="1350" b="1">
+                <a:solidFill>
+                  <a:srgbClr val="DCECE5"/>
+                </a:solidFill>
+                <a:latin typeface="Menlo"/>
+                <a:ea typeface="Menlo"/>
+                <a:cs typeface="Menlo"/>
+              </a:rPr>
+              <a:t>01</a:t>
+            </a:r>
+          </a:p>
+        </p:txBody>
+      </p:sp>
       <p:pic>
         <p:nvPicPr>
-          <p:cNvPr id="18" name=""/>
+          <p:cNvPr id="21" name=""/>
           <p:cNvPicPr>
             <a:picLocks xmlns:a="http://schemas.openxmlformats.org/drawingml/2006/main" noChangeAspect="1"/>
           </p:cNvPicPr>
           <p:nvPr/>
         </p:nvPicPr>
         <p:blipFill>
-          <a:blip xmlns:r="http://schemas.openxmlformats.org/officeDocument/2006/relationships" xmlns:a="http://schemas.openxmlformats.org/drawingml/2006/main" r:embed="R6927022f668944f0"/>
-          <a:stretch xmlns:a="http://schemas.openxmlformats.org/drawingml/2006/main"/>
-        </p:blipFill>
-        <p:spPr>
-          <a:xfrm xmlns:a="http://schemas.openxmlformats.org/drawingml/2006/main" flipH="0" flipV="0">
-            <a:off x="7715250" y="2477691"/>
-            <a:ext cx="6667500" cy="3750469"/>
-          </a:xfrm>
-          <a:prstGeom xmlns:a="http://schemas.openxmlformats.org/drawingml/2006/main" prst="roundRect">
-            <a:avLst/>
-          </a:prstGeom>
-        </p:spPr>
-      </p:pic>
-      <p:sp>
-        <p:nvSpPr>
-          <p:cNvPr id="7" name="closing-boundary">
-            <a:extLst xmlns:a="http://schemas.openxmlformats.org/drawingml/2006/main">
-              <a:ext uri="{FF2B5EF4-FFF2-40B4-BE49-F238E27FC236}">
-                <a16:creationId xmlns:a16="http://schemas.microsoft.com/office/drawing/2014/main" id="{F366E3E1-58EC-4B9E-85AC-84B9FDF83536}"/>
-              </a:ext>
-            </a:extLst>
-          </p:cNvPr>
-          <p:cNvSpPr>
-            <a:spLocks xmlns:a="http://schemas.openxmlformats.org/drawingml/2006/main" noGrp="1"/>
-          </p:cNvSpPr>
-          <p:nvPr/>
-        </p:nvSpPr>
-        <p:spPr>
-          <a:xfrm xmlns:a="http://schemas.openxmlformats.org/drawingml/2006/main">
-            <a:off x="8401050" y="6572250"/>
-            <a:ext cx="5334000" cy="247650"/>
-          </a:xfrm>
-          <a:prstGeom xmlns:a="http://schemas.openxmlformats.org/drawingml/2006/main" prst="rect">
-            <a:avLst/>
-          </a:prstGeom>
-          <a:noFill xmlns:a="http://schemas.openxmlformats.org/drawingml/2006/main"/>
-          <a:ln xmlns:a="http://schemas.openxmlformats.org/drawingml/2006/main" w="0">
-            <a:noFill/>
-            <a:prstDash val="solid"/>
-          </a:ln>
-        </p:spPr>
-        <p:txBody>
-          <a:bodyPr xmlns:a="http://schemas.openxmlformats.org/drawingml/2006/main" wrap="square" lIns="0" tIns="0" rIns="0" bIns="0">
-            <a:noAutofit/>
-          </a:bodyPr>
-          <a:lstStyle xmlns:a="http://schemas.openxmlformats.org/drawingml/2006/main"/>
-          <a:p xmlns:a="http://schemas.openxmlformats.org/drawingml/2006/main">
-            <a:pPr algn="ctr">
-              <a:buNone/>
-              <a:defRPr sz="1200" b="1">
-                <a:solidFill>
-                  <a:srgbClr val="B7F522"/>
-                </a:solidFill>
-                <a:latin typeface="Menlo"/>
-                <a:ea typeface="Menlo"/>
-                <a:cs typeface="Menlo"/>
-              </a:defRPr>
-            </a:pPr>
-            <a:r>
-              <a:rPr sz="1200" b="1">
-                <a:solidFill>
-                  <a:srgbClr val="B7F522"/>
-                </a:solidFill>
-                <a:latin typeface="Menlo"/>
-                <a:ea typeface="Menlo"/>
-                <a:cs typeface="Menlo"/>
-              </a:rPr>
-              <a:t>WORKING MCP APP · SEEDED DEMO DATA</a:t>
-            </a:r>
-          </a:p>
-        </p:txBody>
-      </p:sp>
-      <p:sp>
-        <p:nvSpPr>
-          <p:cNvPr id="8" name="footer-label-9">
-            <a:extLst xmlns:a="http://schemas.openxmlformats.org/drawingml/2006/main">
-              <a:ext uri="{FF2B5EF4-FFF2-40B4-BE49-F238E27FC236}">
-                <a16:creationId xmlns:a16="http://schemas.microsoft.com/office/drawing/2014/main" id="{D2647B79-80DB-4F8E-8A2F-05922DDDED74}"/>
-              </a:ext>
-            </a:extLst>
-          </p:cNvPr>
-          <p:cNvSpPr>
-            <a:spLocks xmlns:a="http://schemas.openxmlformats.org/drawingml/2006/main" noGrp="1"/>
-          </p:cNvSpPr>
-          <p:nvPr/>
-        </p:nvSpPr>
-        <p:spPr>
-          <a:xfrm xmlns:a="http://schemas.openxmlformats.org/drawingml/2006/main">
-            <a:off x="838200" y="8020050"/>
-            <a:ext cx="5334000" cy="228600"/>
-          </a:xfrm>
-          <a:prstGeom xmlns:a="http://schemas.openxmlformats.org/drawingml/2006/main" prst="rect">
-            <a:avLst/>
-          </a:prstGeom>
-          <a:noFill xmlns:a="http://schemas.openxmlformats.org/drawingml/2006/main"/>
-          <a:ln xmlns:a="http://schemas.openxmlformats.org/drawingml/2006/main" w="0">
-            <a:noFill/>
-            <a:prstDash val="solid"/>
-          </a:ln>
-        </p:spPr>
-        <p:txBody>
-          <a:bodyPr xmlns:a="http://schemas.openxmlformats.org/drawingml/2006/main" wrap="square" lIns="0" tIns="0" rIns="0" bIns="0">
-            <a:noAutofit/>
-          </a:bodyPr>
-          <a:lstStyle xmlns:a="http://schemas.openxmlformats.org/drawingml/2006/main"/>
-          <a:p xmlns:a="http://schemas.openxmlformats.org/drawingml/2006/main">
-            <a:pPr>
-              <a:buNone/>
-              <a:defRPr sz="1200" b="1">
-                <a:solidFill>
-                  <a:srgbClr val="DCECE5"/>
-                </a:solidFill>
-                <a:latin typeface="Menlo"/>
-                <a:ea typeface="Menlo"/>
-                <a:cs typeface="Menlo"/>
-              </a:defRPr>
-            </a:pPr>
-            <a:r>
-              <a:rPr sz="1200" b="1">
-                <a:solidFill>
-                  <a:srgbClr val="DCECE5"/>
-                </a:solidFill>
-                <a:latin typeface="Menlo"/>
-                <a:ea typeface="Menlo"/>
-                <a:cs typeface="Menlo"/>
-              </a:rPr>
-              <a:t>WOVEN  /  LIFEHACK 2026</a:t>
-            </a:r>
-          </a:p>
-        </p:txBody>
-      </p:sp>
-      <p:sp>
-        <p:nvSpPr>
-          <p:cNvPr id="9" name="footer-number-9">
-            <a:extLst xmlns:a="http://schemas.openxmlformats.org/drawingml/2006/main">
-              <a:ext uri="{FF2B5EF4-FFF2-40B4-BE49-F238E27FC236}">
-                <a16:creationId xmlns:a16="http://schemas.microsoft.com/office/drawing/2014/main" id="{62445167-1406-4B61-A1CF-80F49583F03F}"/>
-              </a:ext>
-            </a:extLst>
-          </p:cNvPr>
-          <p:cNvSpPr>
-            <a:spLocks xmlns:a="http://schemas.openxmlformats.org/drawingml/2006/main" noGrp="1"/>
-          </p:cNvSpPr>
-          <p:nvPr/>
-        </p:nvSpPr>
-        <p:spPr>
-          <a:xfrm xmlns:a="http://schemas.openxmlformats.org/drawingml/2006/main">
-            <a:off x="13620750" y="8001000"/>
-            <a:ext cx="762000" cy="247650"/>
-          </a:xfrm>
-          <a:prstGeom xmlns:a="http://schemas.openxmlformats.org/drawingml/2006/main" prst="rect">
-            <a:avLst/>
-          </a:prstGeom>
-          <a:noFill xmlns:a="http://schemas.openxmlformats.org/drawingml/2006/main"/>
-          <a:ln xmlns:a="http://schemas.openxmlformats.org/drawingml/2006/main" w="0">
-            <a:noFill/>
-            <a:prstDash val="solid"/>
-          </a:ln>
-        </p:spPr>
-        <p:txBody>
-          <a:bodyPr xmlns:a="http://schemas.openxmlformats.org/drawingml/2006/main" wrap="square" lIns="0" tIns="0" rIns="0" bIns="0">
-            <a:noAutofit/>
-          </a:bodyPr>
-          <a:lstStyle xmlns:a="http://schemas.openxmlformats.org/drawingml/2006/main"/>
-          <a:p xmlns:a="http://schemas.openxmlformats.org/drawingml/2006/main">
-            <a:pPr algn="r">
-              <a:buNone/>
-              <a:defRPr sz="1350" b="1">
-                <a:solidFill>
-                  <a:srgbClr val="DCECE5"/>
-                </a:solidFill>
-                <a:latin typeface="Menlo"/>
-                <a:ea typeface="Menlo"/>
-                <a:cs typeface="Menlo"/>
-              </a:defRPr>
-            </a:pPr>
-            <a:r>
-              <a:rPr sz="1350" b="1">
-                <a:solidFill>
-                  <a:srgbClr val="DCECE5"/>
-                </a:solidFill>
-                <a:latin typeface="Menlo"/>
-                <a:ea typeface="Menlo"/>
-                <a:cs typeface="Menlo"/>
-              </a:rPr>
-              <a:t>01</a:t>
-            </a:r>
-          </a:p>
-        </p:txBody>
-      </p:sp>
-      <p:pic>
-        <p:nvPicPr>
-          <p:cNvPr id="22" name=""/>
-          <p:cNvPicPr>
-            <a:picLocks xmlns:a="http://schemas.openxmlformats.org/drawingml/2006/main" noChangeAspect="1"/>
-          </p:cNvPicPr>
-          <p:nvPr/>
-        </p:nvPicPr>
-        <p:blipFill>
-          <a:blip xmlns:r="http://schemas.openxmlformats.org/officeDocument/2006/relationships" xmlns:a="http://schemas.openxmlformats.org/drawingml/2006/main" r:embed="Rd1d0da75597c4e87"/>
-          <a:srcRect xmlns:a="http://schemas.openxmlformats.org/drawingml/2006/main" l="0" t="0" r="0" b="0"/>
+          <a:blip xmlns:r="http://schemas.openxmlformats.org/officeDocument/2006/relationships" xmlns:a="http://schemas.openxmlformats.org/drawingml/2006/main" r:embed="R64deff9c5da942be"/>
+          <a:srcRect xmlns:a="http://schemas.openxmlformats.org/drawingml/2006/main" l="12000" t="0" r="2000" b="0"/>
           <a:stretch xmlns:a="http://schemas.openxmlformats.org/drawingml/2006/main">
             <a:fillRect l="0" t="0" r="0" b="0"/>
           </a:stretch>
         </p:blipFill>
         <p:spPr>
-          <a:xfrm xmlns:a="http://schemas.openxmlformats.org/drawingml/2006/main">
+          <a:xfrm xmlns:a="http://schemas.openxmlformats.org/drawingml/2006/main" flipH="0" flipV="0">
             <a:off x="7715250" y="2477691"/>
             <a:ext cx="6667500" cy="3750469"/>
           </a:xfrm>
@@ -2678,7 +3231,7 @@
           <p:nvPr/>
         </p:nvPicPr>
         <p:blipFill>
-          <a:blip xmlns:r="http://schemas.openxmlformats.org/officeDocument/2006/relationships" xmlns:a="http://schemas.openxmlformats.org/drawingml/2006/main" r:embed="R9909b5a239234798"/>
+          <a:blip xmlns:r="http://schemas.openxmlformats.org/officeDocument/2006/relationships" xmlns:a="http://schemas.openxmlformats.org/drawingml/2006/main" r:embed="R9bffdb01cf344feb"/>
           <a:srcRect xmlns:a="http://schemas.openxmlformats.org/drawingml/2006/main" l="0" t="0" r="0" b="0"/>
           <a:stretch xmlns:a="http://schemas.openxmlformats.org/drawingml/2006/main">
             <a:fillRect l="0" t="0" r="0" b="0"/>
@@ -3136,7 +3689,7 @@
           <p:nvPr/>
         </p:nvPicPr>
         <p:blipFill>
-          <a:blip xmlns:r="http://schemas.openxmlformats.org/officeDocument/2006/relationships" xmlns:a="http://schemas.openxmlformats.org/drawingml/2006/main" r:embed="R0ec13a034f654de9"/>
+          <a:blip xmlns:r="http://schemas.openxmlformats.org/officeDocument/2006/relationships" xmlns:a="http://schemas.openxmlformats.org/drawingml/2006/main" r:embed="R3785bd862f514d5a"/>
           <a:stretch xmlns:a="http://schemas.openxmlformats.org/drawingml/2006/main"/>
         </p:blipFill>
         <p:spPr>
@@ -4783,7 +5336,7 @@
           <p:nvPr/>
         </p:nvPicPr>
         <p:blipFill>
-          <a:blip xmlns:r="http://schemas.openxmlformats.org/officeDocument/2006/relationships" xmlns:a="http://schemas.openxmlformats.org/drawingml/2006/main" r:embed="R32925bf3c169406a"/>
+          <a:blip xmlns:r="http://schemas.openxmlformats.org/officeDocument/2006/relationships" xmlns:a="http://schemas.openxmlformats.org/drawingml/2006/main" r:embed="R815bc04db61343b4"/>
           <a:stretch xmlns:a="http://schemas.openxmlformats.org/drawingml/2006/main"/>
         </p:blipFill>
         <p:spPr>
@@ -6669,7 +7222,7 @@
                 <a:ea typeface="Avenir Next"/>
                 <a:cs typeface="Avenir Next"/>
               </a:rPr>
-              <a:t>WORKING — one human click, then a simulated Visa result.</a:t>
+              <a:t>WORKING — one click, then simulated Visa authorization.</a:t>
             </a:r>
           </a:p>
         </p:txBody>
@@ -7462,7 +8015,7 @@
           <p:nvPr/>
         </p:nvPicPr>
         <p:blipFill>
-          <a:blip xmlns:r="http://schemas.openxmlformats.org/officeDocument/2006/relationships" xmlns:a="http://schemas.openxmlformats.org/drawingml/2006/main" r:embed="Ra2ccd8e92fed4c21"/>
+          <a:blip xmlns:r="http://schemas.openxmlformats.org/officeDocument/2006/relationships" xmlns:a="http://schemas.openxmlformats.org/drawingml/2006/main" r:embed="Rf6c24c0f2c7d4d70"/>
           <a:stretch xmlns:a="http://schemas.openxmlformats.org/drawingml/2006/main"/>
         </p:blipFill>
         <p:spPr>
@@ -8112,7 +8665,7 @@
           <p:nvPr/>
         </p:nvPicPr>
         <p:blipFill>
-          <a:blip xmlns:r="http://schemas.openxmlformats.org/officeDocument/2006/relationships" xmlns:a="http://schemas.openxmlformats.org/drawingml/2006/main" r:embed="Re4b6b5bc752e42e0"/>
+          <a:blip xmlns:r="http://schemas.openxmlformats.org/officeDocument/2006/relationships" xmlns:a="http://schemas.openxmlformats.org/drawingml/2006/main" r:embed="R442128613b45476b"/>
           <a:stretch xmlns:a="http://schemas.openxmlformats.org/drawingml/2006/main"/>
         </p:blipFill>
         <p:spPr>
@@ -8179,7 +8732,7 @@
                 <a:ea typeface="Menlo"/>
                 <a:cs typeface="Menlo"/>
               </a:rPr>
-              <a:t>IDENTITY DIRECTION + VISA RESULT · CLEARLY SIMULATED</a:t>
+              <a:t>IDENTITY PLANNED · VISA AUTHORIZATION SIMULATED</a:t>
             </a:r>
           </a:p>
         </p:txBody>

--- a/docs/Woven-Hackathon-Pitch.pptx
+++ b/docs/Woven-Hackathon-Pitch.pptx
@@ -17,6 +17,7 @@
     <p:sldId xmlns:r="http://schemas.openxmlformats.org/officeDocument/2006/relationships" id="262" r:id="R7b5ce42f81a54f6f"/>
     <p:sldId xmlns:r="http://schemas.openxmlformats.org/officeDocument/2006/relationships" id="263" r:id="R42e87175a6a34fd9"/>
     <p:sldId xmlns:r="http://schemas.openxmlformats.org/officeDocument/2006/relationships" id="264" r:id="R37dfb12e7e61470d"/>
+    <p:sldId xmlns:r="http://schemas.openxmlformats.org/officeDocument/2006/relationships" id="267" r:id="Rab12cd34ef567801"/>
     <p:sldId xmlns:r="http://schemas.openxmlformats.org/officeDocument/2006/relationships" id="265" r:id="R43bbd7ed52b947d6"/>
     <p:sldId xmlns:r="http://schemas.openxmlformats.org/officeDocument/2006/relationships" id="266" r:id="R6026b644a94e4a72"/>
   </p:sldIdLst>
@@ -3830,6 +3831,53 @@
 </p:sld>
 </file>
 
+<file path=ppt/slides/slide12.xml><?xml version="1.0" encoding="utf-8"?>
+<p:sld xmlns:p="http://schemas.openxmlformats.org/presentationml/2006/main">
+  <p:cSld>
+    <p:spTree>
+      <p:nvGrpSpPr>
+        <p:cNvPr id="1" name=""/>
+        <p:cNvGrpSpPr/>
+        <p:nvPr/>
+      </p:nvGrpSpPr>
+      <p:grpSpPr>
+        <a:xfrm xmlns:a="http://schemas.openxmlformats.org/drawingml/2006/main"/>
+      </p:grpSpPr>
+      <p:pic>
+        <p:nvPicPr>
+          <p:cNvPr id="2" name=""/>
+          <p:cNvPicPr>
+            <a:picLocks xmlns:a="http://schemas.openxmlformats.org/drawingml/2006/main" noChangeAspect="1"/>
+          </p:cNvPicPr>
+          <p:nvPr/>
+        </p:nvPicPr>
+        <p:blipFill>
+          <a:blip xmlns:r="http://schemas.openxmlformats.org/officeDocument/2006/relationships" xmlns:a="http://schemas.openxmlformats.org/drawingml/2006/main" r:embed="R9bffdb01cf344feb"/>
+          <a:srcRect xmlns:a="http://schemas.openxmlformats.org/drawingml/2006/main" l="0" t="0" r="0" b="0"/>
+          <a:stretch xmlns:a="http://schemas.openxmlformats.org/drawingml/2006/main">
+            <a:fillRect l="0" t="0" r="0" b="0"/>
+          </a:stretch>
+        </p:blipFill>
+        <p:spPr>
+          <a:xfrm xmlns:a="http://schemas.openxmlformats.org/drawingml/2006/main" flipH="0" flipV="0">
+            <a:off x="0" y="0"/>
+            <a:ext cx="15240000" cy="8572500"/>
+          </a:xfrm>
+          <a:prstGeom xmlns:a="http://schemas.openxmlformats.org/drawingml/2006/main" prst="rect">
+            <a:avLst/>
+          </a:prstGeom>
+        </p:spPr>
+      </p:pic>
+    </p:spTree>
+    <p:extLst>
+      <p:ext uri="{BB962C8B-B14F-4D97-AF65-F5344CB8AC3E}">
+        <p14:creationId xmlns:p14="http://schemas.microsoft.com/office/powerpoint/2010/main" val="614777387"/>
+      </p:ext>
+    </p:extLst>
+  </p:cSld>
+</p:sld>
+</file>
+
 <file path=ppt/slides/slide2.xml><?xml version="1.0" encoding="utf-8"?>
 <p:sld xmlns:p="http://schemas.openxmlformats.org/presentationml/2006/main">
   <p:cSld>

--- a/docs/Woven-Hackathon-Pitch.pptx
+++ b/docs/Woven-Hackathon-Pitch.pptx
@@ -18,6 +18,7 @@
     <p:sldId xmlns:r="http://schemas.openxmlformats.org/officeDocument/2006/relationships" id="263" r:id="R42e87175a6a34fd9"/>
     <p:sldId xmlns:r="http://schemas.openxmlformats.org/officeDocument/2006/relationships" id="264" r:id="R37dfb12e7e61470d"/>
     <p:sldId xmlns:r="http://schemas.openxmlformats.org/officeDocument/2006/relationships" id="267" r:id="Rab12cd34ef567801"/>
+    <p:sldId xmlns:r="http://schemas.openxmlformats.org/officeDocument/2006/relationships" id="268" r:id="Rab12cd34ef567802"/>
     <p:sldId xmlns:r="http://schemas.openxmlformats.org/officeDocument/2006/relationships" id="265" r:id="R43bbd7ed52b947d6"/>
     <p:sldId xmlns:r="http://schemas.openxmlformats.org/officeDocument/2006/relationships" id="266" r:id="R6026b644a94e4a72"/>
   </p:sldIdLst>
@@ -3878,6 +3879,53 @@
 </p:sld>
 </file>
 
+<file path=ppt/slides/slide13.xml><?xml version="1.0" encoding="utf-8"?>
+<p:sld xmlns:p="http://schemas.openxmlformats.org/presentationml/2006/main">
+  <p:cSld>
+    <p:spTree>
+      <p:nvGrpSpPr>
+        <p:cNvPr id="1" name=""/>
+        <p:cNvGrpSpPr/>
+        <p:nvPr/>
+      </p:nvGrpSpPr>
+      <p:grpSpPr>
+        <a:xfrm xmlns:a="http://schemas.openxmlformats.org/drawingml/2006/main"/>
+      </p:grpSpPr>
+      <p:pic>
+        <p:nvPicPr>
+          <p:cNvPr id="2" name=""/>
+          <p:cNvPicPr>
+            <a:picLocks xmlns:a="http://schemas.openxmlformats.org/drawingml/2006/main" noChangeAspect="1"/>
+          </p:cNvPicPr>
+          <p:nvPr/>
+        </p:nvPicPr>
+        <p:blipFill>
+          <a:blip xmlns:r="http://schemas.openxmlformats.org/officeDocument/2006/relationships" xmlns:a="http://schemas.openxmlformats.org/drawingml/2006/main" r:embed="R9bffdb01cf344feb"/>
+          <a:srcRect xmlns:a="http://schemas.openxmlformats.org/drawingml/2006/main" l="0" t="0" r="0" b="0"/>
+          <a:stretch xmlns:a="http://schemas.openxmlformats.org/drawingml/2006/main">
+            <a:fillRect l="0" t="0" r="0" b="0"/>
+          </a:stretch>
+        </p:blipFill>
+        <p:spPr>
+          <a:xfrm xmlns:a="http://schemas.openxmlformats.org/drawingml/2006/main" flipH="0" flipV="0">
+            <a:off x="0" y="0"/>
+            <a:ext cx="15240000" cy="8572500"/>
+          </a:xfrm>
+          <a:prstGeom xmlns:a="http://schemas.openxmlformats.org/drawingml/2006/main" prst="rect">
+            <a:avLst/>
+          </a:prstGeom>
+        </p:spPr>
+      </p:pic>
+    </p:spTree>
+    <p:extLst>
+      <p:ext uri="{BB962C8B-B14F-4D97-AF65-F5344CB8AC3E}">
+        <p14:creationId xmlns:p14="http://schemas.microsoft.com/office/powerpoint/2010/main" val="614777387"/>
+      </p:ext>
+    </p:extLst>
+  </p:cSld>
+</p:sld>
+</file>
+
 <file path=ppt/slides/slide2.xml><?xml version="1.0" encoding="utf-8"?>
 <p:sld xmlns:p="http://schemas.openxmlformats.org/presentationml/2006/main">
   <p:cSld>

--- a/docs/Woven-Hackathon-Pitch.pptx
+++ b/docs/Woven-Hackathon-Pitch.pptx
@@ -2,25 +2,25 @@
 <file path=ppt/presentation.xml><?xml version="1.0" encoding="utf-8"?>
 <p:presentation xmlns:p="http://schemas.openxmlformats.org/presentationml/2006/main">
   <p:sldMasterIdLst>
-    <p:sldMasterId xmlns:r="http://schemas.openxmlformats.org/officeDocument/2006/relationships" id="2147483648" r:id="Rbd7b917bceef459a"/>
+    <p:sldMasterId xmlns:r="http://schemas.openxmlformats.org/officeDocument/2006/relationships" id="2147483648" r:id="Rb6a2fb069c8f4569"/>
   </p:sldMasterIdLst>
   <p:notesMasterIdLst>
-    <p:notesMasterId xmlns:r="http://schemas.openxmlformats.org/officeDocument/2006/relationships" r:id="Reb6cee3a506b43cf"/>
+    <p:notesMasterId xmlns:r="http://schemas.openxmlformats.org/officeDocument/2006/relationships" r:id="R5e20c70de6fc4b11"/>
   </p:notesMasterIdLst>
   <p:sldIdLst>
-    <p:sldId xmlns:r="http://schemas.openxmlformats.org/officeDocument/2006/relationships" id="256" r:id="R5326ca9495684228"/>
-    <p:sldId xmlns:r="http://schemas.openxmlformats.org/officeDocument/2006/relationships" id="257" r:id="R7129933df5f84180"/>
-    <p:sldId xmlns:r="http://schemas.openxmlformats.org/officeDocument/2006/relationships" id="258" r:id="Ree048974157b4473"/>
-    <p:sldId xmlns:r="http://schemas.openxmlformats.org/officeDocument/2006/relationships" id="259" r:id="Rfbc0c85f698f4fa6"/>
-    <p:sldId xmlns:r="http://schemas.openxmlformats.org/officeDocument/2006/relationships" id="260" r:id="R4aba994753af4d4e"/>
-    <p:sldId xmlns:r="http://schemas.openxmlformats.org/officeDocument/2006/relationships" id="261" r:id="R1293d76b0bb24c15"/>
-    <p:sldId xmlns:r="http://schemas.openxmlformats.org/officeDocument/2006/relationships" id="262" r:id="R7b5ce42f81a54f6f"/>
-    <p:sldId xmlns:r="http://schemas.openxmlformats.org/officeDocument/2006/relationships" id="263" r:id="R42e87175a6a34fd9"/>
-    <p:sldId xmlns:r="http://schemas.openxmlformats.org/officeDocument/2006/relationships" id="264" r:id="R37dfb12e7e61470d"/>
-    <p:sldId xmlns:r="http://schemas.openxmlformats.org/officeDocument/2006/relationships" id="267" r:id="Rab12cd34ef567801"/>
-    <p:sldId xmlns:r="http://schemas.openxmlformats.org/officeDocument/2006/relationships" id="268" r:id="Rab12cd34ef567802"/>
-    <p:sldId xmlns:r="http://schemas.openxmlformats.org/officeDocument/2006/relationships" id="265" r:id="R43bbd7ed52b947d6"/>
-    <p:sldId xmlns:r="http://schemas.openxmlformats.org/officeDocument/2006/relationships" id="266" r:id="R6026b644a94e4a72"/>
+    <p:sldId xmlns:r="http://schemas.openxmlformats.org/officeDocument/2006/relationships" id="256" r:id="R98d8ee8416cf4ffc"/>
+    <p:sldId xmlns:r="http://schemas.openxmlformats.org/officeDocument/2006/relationships" id="257" r:id="Ra4c4b5f632f94241"/>
+    <p:sldId xmlns:r="http://schemas.openxmlformats.org/officeDocument/2006/relationships" id="258" r:id="R7d208e6ec878474d"/>
+    <p:sldId xmlns:r="http://schemas.openxmlformats.org/officeDocument/2006/relationships" id="259" r:id="R89d593be9e6d4cf4"/>
+    <p:sldId xmlns:r="http://schemas.openxmlformats.org/officeDocument/2006/relationships" id="260" r:id="Rffeb4586ba4a41b9"/>
+    <p:sldId xmlns:r="http://schemas.openxmlformats.org/officeDocument/2006/relationships" id="261" r:id="Rb92cde8e70064a37"/>
+    <p:sldId xmlns:r="http://schemas.openxmlformats.org/officeDocument/2006/relationships" id="262" r:id="R4128fb2bf0704f25"/>
+    <p:sldId xmlns:r="http://schemas.openxmlformats.org/officeDocument/2006/relationships" id="263" r:id="R7f4b1f12886e40c8"/>
+    <p:sldId xmlns:r="http://schemas.openxmlformats.org/officeDocument/2006/relationships" id="264" r:id="Re341b4aa7f1547c4"/>
+    <p:sldId xmlns:r="http://schemas.openxmlformats.org/officeDocument/2006/relationships" id="265" r:id="R42eafb655d4e4181"/>
+    <p:sldId xmlns:r="http://schemas.openxmlformats.org/officeDocument/2006/relationships" id="266" r:id="Rab76a8025d71479b"/>
+    <p:sldId xmlns:r="http://schemas.openxmlformats.org/officeDocument/2006/relationships" id="267" r:id="R03200bae06724954"/>
+    <p:sldId xmlns:r="http://schemas.openxmlformats.org/officeDocument/2006/relationships" id="268" r:id="R17020387e05549b3"/>
   </p:sldIdLst>
   <p:sldSz cx="15240000" cy="8572500"/>
   <p:notesSz cx="6858000" cy="9144000"/>
@@ -602,56 +602,7 @@
         <p:txBody>
           <a:bodyPr xmlns:a="http://schemas.openxmlformats.org/drawingml/2006/main"/>
           <a:lstStyle xmlns:a="http://schemas.openxmlformats.org/drawingml/2006/main"/>
-          <a:p xmlns:a="http://schemas.openxmlformats.org/drawingml/2006/main">
-            <a:r>
-              <a:t>USE IN TECHNICAL Q&amp;A — ARCHITECTURE</a:t>
-            </a:r>
-          </a:p>
-          <a:p xmlns:a="http://schemas.openxmlformats.org/drawingml/2006/main">
-            <a:r>
-              <a:t>The ChatGPT or Codex host invokes Woven’s MCP tools. One Node.js service owns cart construction, checkout mandate binding, confirmation, order state, merchant operations, and the simulated Visa adapter. The browser demo is a second transport over the same backend, not a separate product.</a:t>
-            </a:r>
-          </a:p>
-          <a:p xmlns:a="http://schemas.openxmlformats.org/drawingml/2006/main">
-            <a:r>
-              <a:t/>
-            </a:r>
-          </a:p>
-          <a:p xmlns:a="http://schemas.openxmlformats.org/drawingml/2006/main">
-            <a:r>
-              <a:t>POINT TO</a:t>
-            </a:r>
-          </a:p>
-          <a:p xmlns:a="http://schemas.openxmlformats.org/drawingml/2006/main">
-            <a:r>
-              <a:t>MCP and HTTP transports. Mission and cart engine. Checkout guard. Node SQLite atomic inventory and order transaction. Simulated Visa boundary.</a:t>
-            </a:r>
-          </a:p>
-          <a:p xmlns:a="http://schemas.openxmlformats.org/drawingml/2006/main">
-            <a:r>
-              <a:t/>
-            </a:r>
-          </a:p>
-          <a:p xmlns:a="http://schemas.openxmlformats.org/drawingml/2006/main">
-            <a:r>
-              <a:t>[Sources]</a:t>
-            </a:r>
-          </a:p>
-          <a:p xmlns:a="http://schemas.openxmlformats.org/drawingml/2006/main">
-            <a:r>
-              <a:t>- docs/assets/devpost/woven-architecture.png</a:t>
-            </a:r>
-          </a:p>
-          <a:p xmlns:a="http://schemas.openxmlformats.org/drawingml/2006/main">
-            <a:r>
-              <a:t>- docs/architecture.md — System architecture and trust boundaries</a:t>
-            </a:r>
-          </a:p>
-          <a:p xmlns:a="http://schemas.openxmlformats.org/drawingml/2006/main">
-            <a:r>
-              <a:t>- docs/HANDOVER.md — One-service product invariant</a:t>
-            </a:r>
-          </a:p>
+          <a:p xmlns:a="http://schemas.openxmlformats.org/drawingml/2006/main"/>
         </p:txBody>
       </p:sp>
       <p:sp>
@@ -717,6 +668,187 @@
         <p:txBody>
           <a:bodyPr xmlns:a="http://schemas.openxmlformats.org/drawingml/2006/main"/>
           <a:lstStyle xmlns:a="http://schemas.openxmlformats.org/drawingml/2006/main"/>
+          <a:p xmlns:a="http://schemas.openxmlformats.org/drawingml/2006/main"/>
+        </p:txBody>
+      </p:sp>
+      <p:sp>
+        <p:nvSpPr>
+          <p:cNvPr id="4" name="Slide Number Placeholder 3"/>
+          <p:cNvSpPr>
+            <a:spLocks xmlns:a="http://schemas.openxmlformats.org/drawingml/2006/main" noGrp="1"/>
+          </p:cNvSpPr>
+          <p:nvPr>
+            <p:ph type="sldNum" idx="5"/>
+          </p:nvPr>
+        </p:nvSpPr>
+        <p:spPr/>
+        <p:txBody>
+          <a:bodyPr xmlns:a="http://schemas.openxmlformats.org/drawingml/2006/main"/>
+          <a:lstStyle xmlns:a="http://schemas.openxmlformats.org/drawingml/2006/main"/>
+          <a:p xmlns:a="http://schemas.openxmlformats.org/drawingml/2006/main"/>
+        </p:txBody>
+      </p:sp>
+    </p:spTree>
+  </p:cSld>
+  <p:clrMapOvr>
+    <a:masterClrMapping xmlns:a="http://schemas.openxmlformats.org/drawingml/2006/main"/>
+  </p:clrMapOvr>
+</p:notes>
+</file>
+
+<file path=ppt/notesSlides/notesSlide12.xml><?xml version="1.0" encoding="utf-8"?>
+<p:notes xmlns:p="http://schemas.openxmlformats.org/presentationml/2006/main">
+  <p:cSld>
+    <p:spTree>
+      <p:nvGrpSpPr>
+        <p:cNvPr id="1" name=""/>
+        <p:cNvGrpSpPr/>
+        <p:nvPr/>
+      </p:nvGrpSpPr>
+      <p:grpSpPr>
+        <a:xfrm xmlns:a="http://schemas.openxmlformats.org/drawingml/2006/main"/>
+      </p:grpSpPr>
+      <p:sp>
+        <p:nvSpPr>
+          <p:cNvPr id="2" name="Slide Image Placeholder 1"/>
+          <p:cNvSpPr>
+            <a:spLocks xmlns:a="http://schemas.openxmlformats.org/drawingml/2006/main" noGrp="1"/>
+          </p:cNvSpPr>
+          <p:nvPr>
+            <p:ph type="sldImg" idx="0"/>
+          </p:nvPr>
+        </p:nvSpPr>
+        <p:spPr/>
+      </p:sp>
+      <p:sp>
+        <p:nvSpPr>
+          <p:cNvPr id="3" name="Notes Placeholder 2"/>
+          <p:cNvSpPr>
+            <a:spLocks xmlns:a="http://schemas.openxmlformats.org/drawingml/2006/main" noGrp="1"/>
+          </p:cNvSpPr>
+          <p:nvPr>
+            <p:ph type="body" idx="1"/>
+          </p:nvPr>
+        </p:nvSpPr>
+        <p:spPr/>
+        <p:txBody>
+          <a:bodyPr xmlns:a="http://schemas.openxmlformats.org/drawingml/2006/main"/>
+          <a:lstStyle xmlns:a="http://schemas.openxmlformats.org/drawingml/2006/main"/>
+          <a:p xmlns:a="http://schemas.openxmlformats.org/drawingml/2006/main">
+            <a:r>
+              <a:t>USE IN TECHNICAL Q&amp;A — ARCHITECTURE</a:t>
+            </a:r>
+          </a:p>
+          <a:p xmlns:a="http://schemas.openxmlformats.org/drawingml/2006/main">
+            <a:r>
+              <a:t>The ChatGPT or Codex host invokes Woven’s MCP tools. One Node.js service owns cart construction, checkout mandate binding, confirmation, order state, merchant operations, and the simulated Visa adapter. The browser demo is a second transport over the same backend, not a separate product.</a:t>
+            </a:r>
+          </a:p>
+          <a:p xmlns:a="http://schemas.openxmlformats.org/drawingml/2006/main">
+            <a:r>
+              <a:t/>
+            </a:r>
+          </a:p>
+          <a:p xmlns:a="http://schemas.openxmlformats.org/drawingml/2006/main">
+            <a:r>
+              <a:t>POINT TO</a:t>
+            </a:r>
+          </a:p>
+          <a:p xmlns:a="http://schemas.openxmlformats.org/drawingml/2006/main">
+            <a:r>
+              <a:t>MCP and HTTP transports. Mission and cart engine. Checkout guard. Node SQLite atomic inventory and order transaction. Simulated Visa boundary.</a:t>
+            </a:r>
+          </a:p>
+          <a:p xmlns:a="http://schemas.openxmlformats.org/drawingml/2006/main">
+            <a:r>
+              <a:t/>
+            </a:r>
+          </a:p>
+          <a:p xmlns:a="http://schemas.openxmlformats.org/drawingml/2006/main">
+            <a:r>
+              <a:t>[Sources]</a:t>
+            </a:r>
+          </a:p>
+          <a:p xmlns:a="http://schemas.openxmlformats.org/drawingml/2006/main">
+            <a:r>
+              <a:t>- docs/assets/devpost/woven-architecture.png</a:t>
+            </a:r>
+          </a:p>
+          <a:p xmlns:a="http://schemas.openxmlformats.org/drawingml/2006/main">
+            <a:r>
+              <a:t>- docs/architecture.md — System architecture and trust boundaries</a:t>
+            </a:r>
+          </a:p>
+          <a:p xmlns:a="http://schemas.openxmlformats.org/drawingml/2006/main">
+            <a:r>
+              <a:t>- docs/HANDOVER.md — One-service product invariant</a:t>
+            </a:r>
+          </a:p>
+        </p:txBody>
+      </p:sp>
+      <p:sp>
+        <p:nvSpPr>
+          <p:cNvPr id="4" name="Slide Number Placeholder 3"/>
+          <p:cNvSpPr>
+            <a:spLocks xmlns:a="http://schemas.openxmlformats.org/drawingml/2006/main" noGrp="1"/>
+          </p:cNvSpPr>
+          <p:nvPr>
+            <p:ph type="sldNum" idx="5"/>
+          </p:nvPr>
+        </p:nvSpPr>
+        <p:spPr/>
+        <p:txBody>
+          <a:bodyPr xmlns:a="http://schemas.openxmlformats.org/drawingml/2006/main"/>
+          <a:lstStyle xmlns:a="http://schemas.openxmlformats.org/drawingml/2006/main"/>
+          <a:p xmlns:a="http://schemas.openxmlformats.org/drawingml/2006/main"/>
+        </p:txBody>
+      </p:sp>
+    </p:spTree>
+  </p:cSld>
+  <p:clrMapOvr>
+    <a:masterClrMapping xmlns:a="http://schemas.openxmlformats.org/drawingml/2006/main"/>
+  </p:clrMapOvr>
+</p:notes>
+</file>
+
+<file path=ppt/notesSlides/notesSlide13.xml><?xml version="1.0" encoding="utf-8"?>
+<p:notes xmlns:p="http://schemas.openxmlformats.org/presentationml/2006/main">
+  <p:cSld>
+    <p:spTree>
+      <p:nvGrpSpPr>
+        <p:cNvPr id="1" name=""/>
+        <p:cNvGrpSpPr/>
+        <p:nvPr/>
+      </p:nvGrpSpPr>
+      <p:grpSpPr>
+        <a:xfrm xmlns:a="http://schemas.openxmlformats.org/drawingml/2006/main"/>
+      </p:grpSpPr>
+      <p:sp>
+        <p:nvSpPr>
+          <p:cNvPr id="2" name="Slide Image Placeholder 1"/>
+          <p:cNvSpPr>
+            <a:spLocks xmlns:a="http://schemas.openxmlformats.org/drawingml/2006/main" noGrp="1"/>
+          </p:cNvSpPr>
+          <p:nvPr>
+            <p:ph type="sldImg" idx="0"/>
+          </p:nvPr>
+        </p:nvSpPr>
+        <p:spPr/>
+      </p:sp>
+      <p:sp>
+        <p:nvSpPr>
+          <p:cNvPr id="3" name="Notes Placeholder 2"/>
+          <p:cNvSpPr>
+            <a:spLocks xmlns:a="http://schemas.openxmlformats.org/drawingml/2006/main" noGrp="1"/>
+          </p:cNvSpPr>
+          <p:nvPr>
+            <p:ph type="body" idx="1"/>
+          </p:nvPr>
+        </p:nvSpPr>
+        <p:spPr/>
+        <p:txBody>
+          <a:bodyPr xmlns:a="http://schemas.openxmlformats.org/drawingml/2006/main"/>
+          <a:lstStyle xmlns:a="http://schemas.openxmlformats.org/drawingml/2006/main"/>
           <a:p xmlns:a="http://schemas.openxmlformats.org/drawingml/2006/main">
             <a:r>
               <a:t>USE IN TRUST AND SAFETY Q&amp;A</a:t>
@@ -724,7 +856,7 @@
           </a:p>
           <a:p xmlns:a="http://schemas.openxmlformats.org/drawingml/2006/main">
             <a:r>
-              <a:t>Current controls bind merchant, cart version, amount, expiry, nonce, and idempotency key; recheck price and stock; keep the confirmation nonce outside model-visible tool arguments; and simulate reversal after downstream merchant failure. Identity is a planned pre-checkout control and is not implemented.</a:t>
+              <a:t>Current controls require a short-lived simulated identity session before checkout; bind merchant, cart version, amount, expiry, identity session, nonce, and idempotency key; recheck price and stock; keep confirmation secrets outside model-visible tool arguments; and simulate reversal after downstream merchant failure.</a:t>
             </a:r>
           </a:p>
           <a:p xmlns:a="http://schemas.openxmlformats.org/drawingml/2006/main">
@@ -1334,22 +1466,32 @@
           </a:p>
           <a:p xmlns:a="http://schemas.openxmlformats.org/drawingml/2006/main">
             <a:r>
-              <a:t>1. Click Review checkout.</a:t>
-            </a:r>
-          </a:p>
-          <a:p xmlns:a="http://schemas.openxmlformats.org/drawingml/2006/main">
-            <a:r>
-              <a:t>2. Show the exact merchant, items, pickup location, total, cart version, and expiry.</a:t>
-            </a:r>
-          </a:p>
-          <a:p xmlns:a="http://schemas.openxmlformats.org/drawingml/2006/main">
-            <a:r>
-              <a:t>3. Pause before clicking Confirm S$133.00.</a:t>
-            </a:r>
-          </a:p>
-          <a:p xmlns:a="http://schemas.openxmlformats.org/drawingml/2006/main">
-            <a:r>
-              <a:t>4. Confirm and show the simulated Visa authorization result and pickup receipt.</a:t>
+              <a:t>1. Click Verify demo identity.</a:t>
+            </a:r>
+          </a:p>
+          <a:p xmlns:a="http://schemas.openxmlformats.org/drawingml/2006/main">
+            <a:r>
+              <a:t>2. On the clearly labeled simulator page, point out that no Visa account, password, or card credential is accessed; click Continue as Chai.</a:t>
+            </a:r>
+          </a:p>
+          <a:p xmlns:a="http://schemas.openxmlformats.org/drawingml/2006/main">
+            <a:r>
+              <a:t>3. Return to Woven, check identity status, then click Review checkout.</a:t>
+            </a:r>
+          </a:p>
+          <a:p xmlns:a="http://schemas.openxmlformats.org/drawingml/2006/main">
+            <a:r>
+              <a:t>4. Show the exact merchant, items, pickup location, total, cart version, and expiry.</a:t>
+            </a:r>
+          </a:p>
+          <a:p xmlns:a="http://schemas.openxmlformats.org/drawingml/2006/main">
+            <a:r>
+              <a:t>5. Pause before clicking Confirm S$133.00.</a:t>
+            </a:r>
+          </a:p>
+          <a:p xmlns:a="http://schemas.openxmlformats.org/drawingml/2006/main">
+            <a:r>
+              <a:t>6. Confirm and show the simulated Visa authorization result and pickup receipt.</a:t>
             </a:r>
           </a:p>
           <a:p xmlns:a="http://schemas.openxmlformats.org/drawingml/2006/main">
@@ -1364,7 +1506,7 @@
           </a:p>
           <a:p xmlns:a="http://schemas.openxmlformats.org/drawingml/2006/main">
             <a:r>
-              <a:t>“Woven rechecks the price and stock, then creates an exact ten-minute checkout preview. The AI recommended this cart, but it cannot approve it. The user sees the merchant, every item, the pickup location, and the S$133 total before one direct confirmation.”</a:t>
+              <a:t>“Before checkout, Woven requires a short, server-enforced demo identity session. The page is visibly simulated and accepts no password or payment credential. Woven then rechecks the price and stock and creates an exact ten-minute checkout preview. The AI recommended this cart, but it cannot approve it.”</a:t>
             </a:r>
           </a:p>
           <a:p xmlns:a="http://schemas.openxmlformats.org/drawingml/2006/main">
@@ -1389,7 +1531,7 @@
           </a:p>
           <a:p xmlns:a="http://schemas.openxmlformats.org/drawingml/2006/main">
             <a:r>
-              <a:t>Identity verification is planned and not in the live build. Do not show a static identity mock as verification. After server enforcement exists, insert the connector-style demo identity check before exact-term review and keep it separate from final confirmation.</a:t>
+              <a:t>The identity simulator is working and server-enforced, but it is not Visa identity verification and accesses no Visa account or credential. Keep the simulated identity gate visibly separate from final purchase confirmation.</a:t>
             </a:r>
           </a:p>
           <a:p xmlns:a="http://schemas.openxmlformats.org/drawingml/2006/main">
@@ -1699,7 +1841,7 @@
           </a:p>
           <a:p xmlns:a="http://schemas.openxmlformats.org/drawingml/2006/main">
             <a:r>
-              <a:t>“This prototype uses seeded inventory and a simulated Visa authorization; no live charge occurs. Our next trust step is the connector-style demo identity check.”</a:t>
+              <a:t>“This prototype uses seeded inventory, a server-enforced demo identity simulator, and a simulated Visa authorization. No Visa account is accessed and no live charge occurs.”</a:t>
             </a:r>
           </a:p>
           <a:p xmlns:a="http://schemas.openxmlformats.org/drawingml/2006/main">
@@ -1954,7 +2096,7 @@
           </a:p>
           <a:p xmlns:a="http://schemas.openxmlformats.org/drawingml/2006/main">
             <a:r>
-              <a:t>Inventory and pickup estimates are seeded. Identity verification is a planned product direction, not a live feature. Visa approval, decline, and reversal are simulated. No Visa account is accessed, no payment credentials are collected, and no live charge or partnership is claimed.</a:t>
+              <a:t>Inventory and pickup estimates are seeded. The demo identity gate is working and server-enforced, but it is not Visa identity verification. Visa approval, decline, and reversal are simulated. No Visa account is accessed, no payment credentials are collected, and no live charge or partnership is claimed.</a:t>
             </a:r>
           </a:p>
           <a:p xmlns:a="http://schemas.openxmlformats.org/drawingml/2006/main">
@@ -1969,7 +2111,7 @@
           </a:p>
           <a:p xmlns:a="http://schemas.openxmlformats.org/drawingml/2006/main">
             <a:r>
-              <a:t>“The trust boundary is explicit: the working product binds exact terms and requires direct confirmation; identity is next, and the payment rail is clearly simulated.”</a:t>
+              <a:t>“The trust boundary is explicit: simulated identity is one enforced gate, and direct confirmation of exact terms is a separate gate. The payment rail is also clearly simulated.”</a:t>
             </a:r>
           </a:p>
           <a:p xmlns:a="http://schemas.openxmlformats.org/drawingml/2006/main">
@@ -2062,7 +2204,7 @@
   </p:cSld>
   <p:clrMap bg1="lt1" tx1="dk1" bg2="lt2" tx2="dk2" accent1="accent1" accent2="accent2" accent3="accent3" accent4="accent4" accent5="accent5" accent6="accent6" hlink="hlink" folHlink="folHlink"/>
   <p:sldLayoutIdLst>
-    <p:sldLayoutId xmlns:r="http://schemas.openxmlformats.org/officeDocument/2006/relationships" id="2147483649" r:id="R02831dc36adb413d"/>
+    <p:sldLayoutId xmlns:r="http://schemas.openxmlformats.org/officeDocument/2006/relationships" id="2147483649" r:id="Ra770cef4c9d4443d"/>
   </p:sldLayoutIdLst>
   <p:txStyles>
     <p:titleStyle>
@@ -3179,14 +3321,14 @@
       </p:sp>
       <p:pic>
         <p:nvPicPr>
-          <p:cNvPr id="21" name=""/>
+          <p:cNvPr id="20" name=""/>
           <p:cNvPicPr>
             <a:picLocks xmlns:a="http://schemas.openxmlformats.org/drawingml/2006/main" noChangeAspect="1"/>
           </p:cNvPicPr>
           <p:nvPr/>
         </p:nvPicPr>
         <p:blipFill>
-          <a:blip xmlns:r="http://schemas.openxmlformats.org/officeDocument/2006/relationships" xmlns:a="http://schemas.openxmlformats.org/drawingml/2006/main" r:embed="R64deff9c5da942be"/>
+          <a:blip xmlns:r="http://schemas.openxmlformats.org/officeDocument/2006/relationships" xmlns:a="http://schemas.openxmlformats.org/drawingml/2006/main" r:embed="Rb0dc8e30eddc4c2b"/>
           <a:srcRect xmlns:a="http://schemas.openxmlformats.org/drawingml/2006/main" l="12000" t="0" r="2000" b="0"/>
           <a:stretch xmlns:a="http://schemas.openxmlformats.org/drawingml/2006/main">
             <a:fillRect l="0" t="0" r="0" b="0"/>
@@ -3233,7 +3375,7 @@
           <p:nvPr/>
         </p:nvPicPr>
         <p:blipFill>
-          <a:blip xmlns:r="http://schemas.openxmlformats.org/officeDocument/2006/relationships" xmlns:a="http://schemas.openxmlformats.org/drawingml/2006/main" r:embed="R9bffdb01cf344feb"/>
+          <a:blip xmlns:r="http://schemas.openxmlformats.org/officeDocument/2006/relationships" xmlns:a="http://schemas.openxmlformats.org/drawingml/2006/main" r:embed="R0619994766454326"/>
           <a:srcRect xmlns:a="http://schemas.openxmlformats.org/drawingml/2006/main" l="0" t="0" r="0" b="0"/>
           <a:stretch xmlns:a="http://schemas.openxmlformats.org/drawingml/2006/main">
             <a:fillRect l="0" t="0" r="0" b="0"/>
@@ -3262,13 +3404,6 @@
 <file path=ppt/slides/slide11.xml><?xml version="1.0" encoding="utf-8"?>
 <p:sld xmlns:p="http://schemas.openxmlformats.org/presentationml/2006/main">
   <p:cSld>
-    <p:bg>
-      <p:bgPr>
-        <a:solidFill xmlns:a="http://schemas.openxmlformats.org/drawingml/2006/main">
-          <a:srgbClr val="F4EEE4"/>
-        </a:solidFill>
-      </p:bgPr>
-    </p:bg>
     <p:spTree>
       <p:nvGrpSpPr>
         <p:cNvPr id="1" name=""/>
@@ -3278,554 +3413,35 @@
       <p:grpSpPr>
         <a:xfrm xmlns:a="http://schemas.openxmlformats.org/drawingml/2006/main"/>
       </p:grpSpPr>
-      <p:sp>
-        <p:nvSpPr>
-          <p:cNvPr id="11" name="eyebrow-The live demo">
-            <a:extLst xmlns:a="http://schemas.openxmlformats.org/drawingml/2006/main">
-              <a:ext uri="{FF2B5EF4-FFF2-40B4-BE49-F238E27FC236}">
-                <a16:creationId xmlns:a16="http://schemas.microsoft.com/office/drawing/2014/main" id="{46635EF8-3618-4994-81BA-2542F409376A}"/>
-              </a:ext>
-            </a:extLst>
-          </p:cNvPr>
-          <p:cNvSpPr>
-            <a:spLocks xmlns:a="http://schemas.openxmlformats.org/drawingml/2006/main" noGrp="1"/>
-          </p:cNvSpPr>
-          <p:nvPr/>
-        </p:nvSpPr>
-        <p:spPr>
-          <a:xfrm xmlns:a="http://schemas.openxmlformats.org/drawingml/2006/main">
-            <a:off x="838200" y="590550"/>
-            <a:ext cx="8572500" cy="247650"/>
-          </a:xfrm>
-          <a:prstGeom xmlns:a="http://schemas.openxmlformats.org/drawingml/2006/main" prst="rect">
-            <a:avLst/>
-          </a:prstGeom>
-          <a:noFill xmlns:a="http://schemas.openxmlformats.org/drawingml/2006/main"/>
-          <a:ln xmlns:a="http://schemas.openxmlformats.org/drawingml/2006/main" w="0">
-            <a:noFill/>
-            <a:prstDash val="solid"/>
-          </a:ln>
-        </p:spPr>
-        <p:txBody>
-          <a:bodyPr xmlns:a="http://schemas.openxmlformats.org/drawingml/2006/main" wrap="square" lIns="0" tIns="0" rIns="0" bIns="0">
-            <a:noAutofit/>
-          </a:bodyPr>
-          <a:lstStyle xmlns:a="http://schemas.openxmlformats.org/drawingml/2006/main"/>
-          <a:p xmlns:a="http://schemas.openxmlformats.org/drawingml/2006/main">
-            <a:pPr>
-              <a:buNone/>
-              <a:defRPr sz="1350" b="1">
-                <a:solidFill>
-                  <a:srgbClr val="6D7974"/>
-                </a:solidFill>
-                <a:latin typeface="Menlo"/>
-                <a:ea typeface="Menlo"/>
-                <a:cs typeface="Menlo"/>
-              </a:defRPr>
-            </a:pPr>
-            <a:r>
-              <a:rPr sz="1350" b="1">
-                <a:solidFill>
-                  <a:srgbClr val="6D7974"/>
-                </a:solidFill>
-                <a:latin typeface="Menlo"/>
-                <a:ea typeface="Menlo"/>
-                <a:cs typeface="Menlo"/>
-              </a:rPr>
-              <a:t>BACKUP · TRUST CONTROLS</a:t>
-            </a:r>
-          </a:p>
-        </p:txBody>
-      </p:sp>
-      <p:sp>
-        <p:nvSpPr>
-          <p:cNvPr id="2" name="title-The AI recommends. The user confirms the exact terms.">
-            <a:extLst xmlns:a="http://schemas.openxmlformats.org/drawingml/2006/main">
-              <a:ext uri="{FF2B5EF4-FFF2-40B4-BE49-F238E27FC236}">
-                <a16:creationId xmlns:a16="http://schemas.microsoft.com/office/drawing/2014/main" id="{E6C7E214-CE49-432D-A6ED-84FB60003964}"/>
-              </a:ext>
-            </a:extLst>
-          </p:cNvPr>
-          <p:cNvSpPr>
-            <a:spLocks xmlns:a="http://schemas.openxmlformats.org/drawingml/2006/main" noGrp="1"/>
-          </p:cNvSpPr>
-          <p:nvPr/>
-        </p:nvSpPr>
-        <p:spPr>
-          <a:xfrm xmlns:a="http://schemas.openxmlformats.org/drawingml/2006/main">
-            <a:off x="838200" y="990600"/>
-            <a:ext cx="13525500" cy="1028700"/>
-          </a:xfrm>
-          <a:prstGeom xmlns:a="http://schemas.openxmlformats.org/drawingml/2006/main" prst="rect">
-            <a:avLst/>
-          </a:prstGeom>
-          <a:noFill xmlns:a="http://schemas.openxmlformats.org/drawingml/2006/main"/>
-          <a:ln xmlns:a="http://schemas.openxmlformats.org/drawingml/2006/main" w="0">
-            <a:noFill/>
-            <a:prstDash val="solid"/>
-          </a:ln>
-        </p:spPr>
-        <p:txBody>
-          <a:bodyPr xmlns:a="http://schemas.openxmlformats.org/drawingml/2006/main" wrap="square" lIns="0" tIns="0" rIns="0" bIns="0">
-            <a:noAutofit/>
-          </a:bodyPr>
-          <a:lstStyle xmlns:a="http://schemas.openxmlformats.org/drawingml/2006/main"/>
-          <a:p xmlns:a="http://schemas.openxmlformats.org/drawingml/2006/main">
-            <a:pPr>
-              <a:lnSpc>
-                <a:spcPct val="95000"/>
-              </a:lnSpc>
-              <a:buNone/>
-              <a:defRPr sz="4650" b="1">
-                <a:solidFill>
-                  <a:srgbClr val="0E4B3B"/>
-                </a:solidFill>
-                <a:latin typeface="Georgia"/>
-                <a:ea typeface="Georgia"/>
-                <a:cs typeface="Georgia"/>
-              </a:defRPr>
-            </a:pPr>
-            <a:r>
-              <a:rPr sz="4650" b="1">
-                <a:solidFill>
-                  <a:srgbClr val="0E4B3B"/>
-                </a:solidFill>
-                <a:latin typeface="Georgia"/>
-                <a:ea typeface="Georgia"/>
-                <a:cs typeface="Georgia"/>
-              </a:rPr>
-              <a:t>Trust is enforced at the purchase boundary.</a:t>
-            </a:r>
-          </a:p>
-        </p:txBody>
-      </p:sp>
-      <p:sp>
-        <p:nvSpPr>
-          <p:cNvPr id="3" name="boundary-statement">
-            <a:extLst xmlns:a="http://schemas.openxmlformats.org/drawingml/2006/main">
-              <a:ext uri="{FF2B5EF4-FFF2-40B4-BE49-F238E27FC236}">
-                <a16:creationId xmlns:a16="http://schemas.microsoft.com/office/drawing/2014/main" id="{64039A6F-00FA-4C7A-8407-F1FA78BFDFA5}"/>
-              </a:ext>
-            </a:extLst>
-          </p:cNvPr>
-          <p:cNvSpPr>
-            <a:spLocks xmlns:a="http://schemas.openxmlformats.org/drawingml/2006/main" noGrp="1"/>
-          </p:cNvSpPr>
-          <p:nvPr/>
-        </p:nvSpPr>
-        <p:spPr>
-          <a:xfrm xmlns:a="http://schemas.openxmlformats.org/drawingml/2006/main">
-            <a:off x="838200" y="2895600"/>
-            <a:ext cx="4191000" cy="1371600"/>
-          </a:xfrm>
-          <a:prstGeom xmlns:a="http://schemas.openxmlformats.org/drawingml/2006/main" prst="rect">
-            <a:avLst/>
-          </a:prstGeom>
-          <a:noFill xmlns:a="http://schemas.openxmlformats.org/drawingml/2006/main"/>
-          <a:ln xmlns:a="http://schemas.openxmlformats.org/drawingml/2006/main" w="0">
-            <a:noFill/>
-            <a:prstDash val="solid"/>
-          </a:ln>
-        </p:spPr>
-        <p:txBody>
-          <a:bodyPr xmlns:a="http://schemas.openxmlformats.org/drawingml/2006/main" wrap="square" lIns="0" tIns="0" rIns="0" bIns="0">
-            <a:noAutofit/>
-          </a:bodyPr>
-          <a:lstStyle xmlns:a="http://schemas.openxmlformats.org/drawingml/2006/main"/>
-          <a:p xmlns:a="http://schemas.openxmlformats.org/drawingml/2006/main">
-            <a:pPr>
-              <a:lnSpc>
-                <a:spcPct val="95000"/>
-              </a:lnSpc>
-              <a:buNone/>
-              <a:defRPr sz="3150" b="1">
-                <a:solidFill>
-                  <a:srgbClr val="0E4B3B"/>
-                </a:solidFill>
-                <a:latin typeface="Georgia"/>
-                <a:ea typeface="Georgia"/>
-                <a:cs typeface="Georgia"/>
-              </a:defRPr>
-            </a:pPr>
-            <a:r>
-              <a:rPr sz="3150" b="1">
-                <a:solidFill>
-                  <a:srgbClr val="0E4B3B"/>
-                </a:solidFill>
-                <a:latin typeface="Georgia"/>
-                <a:ea typeface="Georgia"/>
-                <a:cs typeface="Georgia"/>
-              </a:rPr>
-              <a:t>Exact terms are bound.</a:t>
-            </a:r>
-          </a:p>
-          <a:p xmlns:a="http://schemas.openxmlformats.org/drawingml/2006/main">
-            <a:pPr>
-              <a:lnSpc>
-                <a:spcPct val="95000"/>
-              </a:lnSpc>
-              <a:buNone/>
-              <a:defRPr sz="3150" b="1">
-                <a:solidFill>
-                  <a:srgbClr val="0E4B3B"/>
-                </a:solidFill>
-                <a:latin typeface="Georgia"/>
-                <a:ea typeface="Georgia"/>
-                <a:cs typeface="Georgia"/>
-              </a:defRPr>
-            </a:pPr>
-            <a:r>
-              <a:rPr sz="3150" b="1">
-                <a:solidFill>
-                  <a:srgbClr val="0E4B3B"/>
-                </a:solidFill>
-                <a:latin typeface="Georgia"/>
-                <a:ea typeface="Georgia"/>
-                <a:cs typeface="Georgia"/>
-              </a:rPr>
-              <a:t>Only the user confirms.</a:t>
-            </a:r>
-          </a:p>
-        </p:txBody>
-      </p:sp>
-      <p:sp>
-        <p:nvSpPr>
-          <p:cNvPr id="4" name="simulated-label">
-            <a:extLst xmlns:a="http://schemas.openxmlformats.org/drawingml/2006/main">
-              <a:ext uri="{FF2B5EF4-FFF2-40B4-BE49-F238E27FC236}">
-                <a16:creationId xmlns:a16="http://schemas.microsoft.com/office/drawing/2014/main" id="{906B7775-6C73-4936-919D-C949C0ED9DEE}"/>
-              </a:ext>
-            </a:extLst>
-          </p:cNvPr>
-          <p:cNvSpPr>
-            <a:spLocks xmlns:a="http://schemas.openxmlformats.org/drawingml/2006/main" noGrp="1"/>
-          </p:cNvSpPr>
-          <p:nvPr/>
-        </p:nvSpPr>
-        <p:spPr>
-          <a:xfrm xmlns:a="http://schemas.openxmlformats.org/drawingml/2006/main">
-            <a:off x="838200" y="4724400"/>
-            <a:ext cx="3143250" cy="514350"/>
-          </a:xfrm>
-          <a:prstGeom xmlns:a="http://schemas.openxmlformats.org/drawingml/2006/main" prst="roundRect">
-            <a:avLst>
-              <a:gd name="adj" fmla="val 50000"/>
-            </a:avLst>
-          </a:prstGeom>
-          <a:solidFill xmlns:a="http://schemas.openxmlformats.org/drawingml/2006/main">
-            <a:srgbClr val="1545E8"/>
-          </a:solidFill>
-          <a:ln xmlns:a="http://schemas.openxmlformats.org/drawingml/2006/main" w="0">
-            <a:noFill/>
-            <a:prstDash val="solid"/>
-          </a:ln>
-        </p:spPr>
-      </p:sp>
-      <p:sp>
-        <p:nvSpPr>
-          <p:cNvPr id="5" name="simulated-label-text">
-            <a:extLst xmlns:a="http://schemas.openxmlformats.org/drawingml/2006/main">
-              <a:ext uri="{FF2B5EF4-FFF2-40B4-BE49-F238E27FC236}">
-                <a16:creationId xmlns:a16="http://schemas.microsoft.com/office/drawing/2014/main" id="{0DCF3A62-833F-4EDD-B0B4-4EEFB00BFC41}"/>
-              </a:ext>
-            </a:extLst>
-          </p:cNvPr>
-          <p:cNvSpPr>
-            <a:spLocks xmlns:a="http://schemas.openxmlformats.org/drawingml/2006/main" noGrp="1"/>
-          </p:cNvSpPr>
-          <p:nvPr/>
-        </p:nvSpPr>
-        <p:spPr>
-          <a:xfrm xmlns:a="http://schemas.openxmlformats.org/drawingml/2006/main">
-            <a:off x="1028700" y="4876800"/>
-            <a:ext cx="2762250" cy="228600"/>
-          </a:xfrm>
-          <a:prstGeom xmlns:a="http://schemas.openxmlformats.org/drawingml/2006/main" prst="rect">
-            <a:avLst/>
-          </a:prstGeom>
-          <a:noFill xmlns:a="http://schemas.openxmlformats.org/drawingml/2006/main"/>
-          <a:ln xmlns:a="http://schemas.openxmlformats.org/drawingml/2006/main" w="0">
-            <a:noFill/>
-            <a:prstDash val="solid"/>
-          </a:ln>
-        </p:spPr>
-        <p:txBody>
-          <a:bodyPr xmlns:a="http://schemas.openxmlformats.org/drawingml/2006/main" wrap="square" lIns="0" tIns="0" rIns="0" bIns="0">
-            <a:noAutofit/>
-          </a:bodyPr>
-          <a:lstStyle xmlns:a="http://schemas.openxmlformats.org/drawingml/2006/main"/>
-          <a:p xmlns:a="http://schemas.openxmlformats.org/drawingml/2006/main">
-            <a:pPr algn="ctr">
-              <a:buNone/>
-              <a:defRPr sz="1275" b="1">
-                <a:solidFill>
-                  <a:srgbClr val="FFFFFF"/>
-                </a:solidFill>
-                <a:latin typeface="Menlo"/>
-                <a:ea typeface="Menlo"/>
-                <a:cs typeface="Menlo"/>
-              </a:defRPr>
-            </a:pPr>
-            <a:r>
-              <a:rPr sz="1275" b="1">
-                <a:solidFill>
-                  <a:srgbClr val="FFFFFF"/>
-                </a:solidFill>
-                <a:latin typeface="Menlo"/>
-                <a:ea typeface="Menlo"/>
-                <a:cs typeface="Menlo"/>
-              </a:rPr>
-              <a:t>IDENTITY · PLANNED / NOT LIVE</a:t>
-            </a:r>
-          </a:p>
-        </p:txBody>
-      </p:sp>
-      <p:sp>
-        <p:nvSpPr>
-          <p:cNvPr id="6" name="exact-terms">
-            <a:extLst xmlns:a="http://schemas.openxmlformats.org/drawingml/2006/main">
-              <a:ext uri="{FF2B5EF4-FFF2-40B4-BE49-F238E27FC236}">
-                <a16:creationId xmlns:a16="http://schemas.microsoft.com/office/drawing/2014/main" id="{24D4E798-F7E3-4205-9A3C-908586EEA799}"/>
-              </a:ext>
-            </a:extLst>
-          </p:cNvPr>
-          <p:cNvSpPr>
-            <a:spLocks xmlns:a="http://schemas.openxmlformats.org/drawingml/2006/main" noGrp="1"/>
-          </p:cNvSpPr>
-          <p:nvPr/>
-        </p:nvSpPr>
-        <p:spPr>
-          <a:xfrm xmlns:a="http://schemas.openxmlformats.org/drawingml/2006/main">
-            <a:off x="838200" y="5638800"/>
-            <a:ext cx="3810000" cy="1104900"/>
-          </a:xfrm>
-          <a:prstGeom xmlns:a="http://schemas.openxmlformats.org/drawingml/2006/main" prst="rect">
-            <a:avLst/>
-          </a:prstGeom>
-          <a:noFill xmlns:a="http://schemas.openxmlformats.org/drawingml/2006/main"/>
-          <a:ln xmlns:a="http://schemas.openxmlformats.org/drawingml/2006/main" w="0">
-            <a:noFill/>
-            <a:prstDash val="solid"/>
-          </a:ln>
-        </p:spPr>
-        <p:txBody>
-          <a:bodyPr xmlns:a="http://schemas.openxmlformats.org/drawingml/2006/main" wrap="square" lIns="0" tIns="0" rIns="0" bIns="0">
-            <a:noAutofit/>
-          </a:bodyPr>
-          <a:lstStyle xmlns:a="http://schemas.openxmlformats.org/drawingml/2006/main"/>
-          <a:p xmlns:a="http://schemas.openxmlformats.org/drawingml/2006/main">
-            <a:pPr>
-              <a:lnSpc>
-                <a:spcPct val="118000"/>
-              </a:lnSpc>
-              <a:buNone/>
-              <a:defRPr sz="1800">
-                <a:solidFill>
-                  <a:srgbClr val="6D7974"/>
-                </a:solidFill>
-                <a:latin typeface="Avenir Next"/>
-                <a:ea typeface="Avenir Next"/>
-                <a:cs typeface="Avenir Next"/>
-              </a:defRPr>
-            </a:pPr>
-            <a:r>
-              <a:rPr sz="1800">
-                <a:solidFill>
-                  <a:srgbClr val="6D7974"/>
-                </a:solidFill>
-                <a:latin typeface="Avenir Next"/>
-                <a:ea typeface="Avenir Next"/>
-                <a:cs typeface="Avenir Next"/>
-              </a:rPr>
-              <a:t>Price + stock rechecked · mandate expires · private nonce
-Idempotent order · simulated reversal</a:t>
-            </a:r>
-          </a:p>
-        </p:txBody>
-      </p:sp>
-      <p:sp>
-        <p:nvSpPr>
-          <p:cNvPr id="7" name="Woven checkout mandate showing exact terms and explicit confirmation-backplate">
-            <a:extLst xmlns:a="http://schemas.openxmlformats.org/drawingml/2006/main">
-              <a:ext uri="{FF2B5EF4-FFF2-40B4-BE49-F238E27FC236}">
-                <a16:creationId xmlns:a16="http://schemas.microsoft.com/office/drawing/2014/main" id="{8ADD3CA5-C1ED-4601-B88F-C6932A9AEDCB}"/>
-              </a:ext>
-            </a:extLst>
-          </p:cNvPr>
-          <p:cNvSpPr>
-            <a:spLocks xmlns:a="http://schemas.openxmlformats.org/drawingml/2006/main" noGrp="1"/>
-          </p:cNvSpPr>
-          <p:nvPr/>
-        </p:nvSpPr>
-        <p:spPr>
-          <a:xfrm xmlns:a="http://schemas.openxmlformats.org/drawingml/2006/main">
-            <a:off x="5095875" y="2362200"/>
-            <a:ext cx="9191625" cy="5257800"/>
-          </a:xfrm>
-          <a:prstGeom xmlns:a="http://schemas.openxmlformats.org/drawingml/2006/main" prst="roundRect">
-            <a:avLst>
-              <a:gd name="adj" fmla="val 4348"/>
-            </a:avLst>
-          </a:prstGeom>
-          <a:solidFill xmlns:a="http://schemas.openxmlformats.org/drawingml/2006/main">
-            <a:srgbClr val="FFFFFF"/>
-          </a:solidFill>
-          <a:ln xmlns:a="http://schemas.openxmlformats.org/drawingml/2006/main" w="0">
-            <a:noFill/>
-            <a:prstDash val="solid"/>
-          </a:ln>
-        </p:spPr>
-        <p:style>
-          <a:lnRef xmlns:a="http://schemas.openxmlformats.org/drawingml/2006/main" idx="0"/>
-          <a:fillRef xmlns:a="http://schemas.openxmlformats.org/drawingml/2006/main" idx="0"/>
-          <a:effectRef xmlns:a="http://schemas.openxmlformats.org/drawingml/2006/main" idx="7"/>
-          <a:fontRef xmlns:a="http://schemas.openxmlformats.org/drawingml/2006/main" idx="major"/>
-        </p:style>
-      </p:sp>
       <p:pic>
         <p:nvPicPr>
-          <p:cNvPr id="20" name=""/>
+          <p:cNvPr id="2" name=""/>
           <p:cNvPicPr>
             <a:picLocks xmlns:a="http://schemas.openxmlformats.org/drawingml/2006/main" noChangeAspect="1"/>
           </p:cNvPicPr>
           <p:nvPr/>
         </p:nvPicPr>
         <p:blipFill>
-          <a:blip xmlns:r="http://schemas.openxmlformats.org/officeDocument/2006/relationships" xmlns:a="http://schemas.openxmlformats.org/drawingml/2006/main" r:embed="R3785bd862f514d5a"/>
-          <a:stretch xmlns:a="http://schemas.openxmlformats.org/drawingml/2006/main"/>
+          <a:blip xmlns:r="http://schemas.openxmlformats.org/officeDocument/2006/relationships" xmlns:a="http://schemas.openxmlformats.org/drawingml/2006/main" r:embed="Rb29ea2cbe63d48c4"/>
+          <a:srcRect xmlns:a="http://schemas.openxmlformats.org/drawingml/2006/main" l="0" t="0" r="0" b="0"/>
+          <a:stretch xmlns:a="http://schemas.openxmlformats.org/drawingml/2006/main">
+            <a:fillRect l="0" t="0" r="0" b="0"/>
+          </a:stretch>
         </p:blipFill>
         <p:spPr>
           <a:xfrm xmlns:a="http://schemas.openxmlformats.org/drawingml/2006/main" flipH="0" flipV="0">
-            <a:off x="5191125" y="2459534"/>
-            <a:ext cx="9001125" cy="5063133"/>
-          </a:xfrm>
-          <a:prstGeom xmlns:a="http://schemas.openxmlformats.org/drawingml/2006/main" prst="roundRect">
+            <a:off x="0" y="0"/>
+            <a:ext cx="15240000" cy="8572500"/>
+          </a:xfrm>
+          <a:prstGeom xmlns:a="http://schemas.openxmlformats.org/drawingml/2006/main" prst="rect">
             <a:avLst/>
           </a:prstGeom>
         </p:spPr>
       </p:pic>
-      <p:sp>
-        <p:nvSpPr>
-          <p:cNvPr id="9" name="footer-label-6">
-            <a:extLst xmlns:a="http://schemas.openxmlformats.org/drawingml/2006/main">
-              <a:ext uri="{FF2B5EF4-FFF2-40B4-BE49-F238E27FC236}">
-                <a16:creationId xmlns:a16="http://schemas.microsoft.com/office/drawing/2014/main" id="{180E82C5-4959-4CB6-9B7C-CA48FE5A4C58}"/>
-              </a:ext>
-            </a:extLst>
-          </p:cNvPr>
-          <p:cNvSpPr>
-            <a:spLocks xmlns:a="http://schemas.openxmlformats.org/drawingml/2006/main" noGrp="1"/>
-          </p:cNvSpPr>
-          <p:nvPr/>
-        </p:nvSpPr>
-        <p:spPr>
-          <a:xfrm xmlns:a="http://schemas.openxmlformats.org/drawingml/2006/main">
-            <a:off x="838200" y="8020050"/>
-            <a:ext cx="5334000" cy="228600"/>
-          </a:xfrm>
-          <a:prstGeom xmlns:a="http://schemas.openxmlformats.org/drawingml/2006/main" prst="rect">
-            <a:avLst/>
-          </a:prstGeom>
-          <a:noFill xmlns:a="http://schemas.openxmlformats.org/drawingml/2006/main"/>
-          <a:ln xmlns:a="http://schemas.openxmlformats.org/drawingml/2006/main" w="0">
-            <a:noFill/>
-            <a:prstDash val="solid"/>
-          </a:ln>
-        </p:spPr>
-        <p:txBody>
-          <a:bodyPr xmlns:a="http://schemas.openxmlformats.org/drawingml/2006/main" wrap="square" lIns="0" tIns="0" rIns="0" bIns="0">
-            <a:noAutofit/>
-          </a:bodyPr>
-          <a:lstStyle xmlns:a="http://schemas.openxmlformats.org/drawingml/2006/main"/>
-          <a:p xmlns:a="http://schemas.openxmlformats.org/drawingml/2006/main">
-            <a:pPr>
-              <a:buNone/>
-              <a:defRPr sz="1200" b="1">
-                <a:solidFill>
-                  <a:srgbClr val="6D7974"/>
-                </a:solidFill>
-                <a:latin typeface="Menlo"/>
-                <a:ea typeface="Menlo"/>
-                <a:cs typeface="Menlo"/>
-              </a:defRPr>
-            </a:pPr>
-            <a:r>
-              <a:rPr sz="1200" b="1">
-                <a:solidFill>
-                  <a:srgbClr val="6D7974"/>
-                </a:solidFill>
-                <a:latin typeface="Menlo"/>
-                <a:ea typeface="Menlo"/>
-                <a:cs typeface="Menlo"/>
-              </a:rPr>
-              <a:t>WOVEN  /  LIFEHACK 2026</a:t>
-            </a:r>
-          </a:p>
-        </p:txBody>
-      </p:sp>
-      <p:sp>
-        <p:nvSpPr>
-          <p:cNvPr id="10" name="footer-number-6">
-            <a:extLst xmlns:a="http://schemas.openxmlformats.org/drawingml/2006/main">
-              <a:ext uri="{FF2B5EF4-FFF2-40B4-BE49-F238E27FC236}">
-                <a16:creationId xmlns:a16="http://schemas.microsoft.com/office/drawing/2014/main" id="{573541B3-83F3-4ADA-A401-90AC23E83D47}"/>
-              </a:ext>
-            </a:extLst>
-          </p:cNvPr>
-          <p:cNvSpPr>
-            <a:spLocks xmlns:a="http://schemas.openxmlformats.org/drawingml/2006/main" noGrp="1"/>
-          </p:cNvSpPr>
-          <p:nvPr/>
-        </p:nvSpPr>
-        <p:spPr>
-          <a:xfrm xmlns:a="http://schemas.openxmlformats.org/drawingml/2006/main">
-            <a:off x="13620750" y="8001000"/>
-            <a:ext cx="762000" cy="247650"/>
-          </a:xfrm>
-          <a:prstGeom xmlns:a="http://schemas.openxmlformats.org/drawingml/2006/main" prst="rect">
-            <a:avLst/>
-          </a:prstGeom>
-          <a:noFill xmlns:a="http://schemas.openxmlformats.org/drawingml/2006/main"/>
-          <a:ln xmlns:a="http://schemas.openxmlformats.org/drawingml/2006/main" w="0">
-            <a:noFill/>
-            <a:prstDash val="solid"/>
-          </a:ln>
-        </p:spPr>
-        <p:txBody>
-          <a:bodyPr xmlns:a="http://schemas.openxmlformats.org/drawingml/2006/main" wrap="square" lIns="0" tIns="0" rIns="0" bIns="0">
-            <a:noAutofit/>
-          </a:bodyPr>
-          <a:lstStyle xmlns:a="http://schemas.openxmlformats.org/drawingml/2006/main"/>
-          <a:p xmlns:a="http://schemas.openxmlformats.org/drawingml/2006/main">
-            <a:pPr algn="r">
-              <a:buNone/>
-              <a:defRPr sz="1350" b="1">
-                <a:solidFill>
-                  <a:srgbClr val="6D7974"/>
-                </a:solidFill>
-                <a:latin typeface="Menlo"/>
-                <a:ea typeface="Menlo"/>
-                <a:cs typeface="Menlo"/>
-              </a:defRPr>
-            </a:pPr>
-            <a:r>
-              <a:rPr sz="1350" b="1">
-                <a:solidFill>
-                  <a:srgbClr val="6D7974"/>
-                </a:solidFill>
-                <a:latin typeface="Menlo"/>
-                <a:ea typeface="Menlo"/>
-                <a:cs typeface="Menlo"/>
-              </a:rPr>
-              <a:t>11</a:t>
-            </a:r>
-          </a:p>
-        </p:txBody>
-      </p:sp>
     </p:spTree>
     <p:extLst>
       <p:ext uri="{BB962C8B-B14F-4D97-AF65-F5344CB8AC3E}">
-        <p14:creationId xmlns:p14="http://schemas.microsoft.com/office/powerpoint/2010/main" val="2091917452"/>
+        <p14:creationId xmlns:p14="http://schemas.microsoft.com/office/powerpoint/2010/main" val="614777387"/>
       </p:ext>
     </p:extLst>
   </p:cSld>
@@ -3853,7 +3469,7 @@
           <p:nvPr/>
         </p:nvPicPr>
         <p:blipFill>
-          <a:blip xmlns:r="http://schemas.openxmlformats.org/officeDocument/2006/relationships" xmlns:a="http://schemas.openxmlformats.org/drawingml/2006/main" r:embed="R9bffdb01cf344feb"/>
+          <a:blip xmlns:r="http://schemas.openxmlformats.org/officeDocument/2006/relationships" xmlns:a="http://schemas.openxmlformats.org/drawingml/2006/main" r:embed="Rfeb6ad0d739f4466"/>
           <a:srcRect xmlns:a="http://schemas.openxmlformats.org/drawingml/2006/main" l="0" t="0" r="0" b="0"/>
           <a:stretch xmlns:a="http://schemas.openxmlformats.org/drawingml/2006/main">
             <a:fillRect l="0" t="0" r="0" b="0"/>
@@ -3882,6 +3498,13 @@
 <file path=ppt/slides/slide13.xml><?xml version="1.0" encoding="utf-8"?>
 <p:sld xmlns:p="http://schemas.openxmlformats.org/presentationml/2006/main">
   <p:cSld>
+    <p:bg>
+      <p:bgPr>
+        <a:solidFill xmlns:a="http://schemas.openxmlformats.org/drawingml/2006/main">
+          <a:srgbClr val="F4EEE4"/>
+        </a:solidFill>
+      </p:bgPr>
+    </p:bg>
     <p:spTree>
       <p:nvGrpSpPr>
         <p:cNvPr id="1" name=""/>
@@ -3891,35 +3514,554 @@
       <p:grpSpPr>
         <a:xfrm xmlns:a="http://schemas.openxmlformats.org/drawingml/2006/main"/>
       </p:grpSpPr>
+      <p:sp>
+        <p:nvSpPr>
+          <p:cNvPr id="11" name="eyebrow-The live demo">
+            <a:extLst xmlns:a="http://schemas.openxmlformats.org/drawingml/2006/main">
+              <a:ext uri="{FF2B5EF4-FFF2-40B4-BE49-F238E27FC236}">
+                <a16:creationId xmlns:a16="http://schemas.microsoft.com/office/drawing/2014/main" id="{46635EF8-3618-4994-81BA-2542F409376A}"/>
+              </a:ext>
+            </a:extLst>
+          </p:cNvPr>
+          <p:cNvSpPr>
+            <a:spLocks xmlns:a="http://schemas.openxmlformats.org/drawingml/2006/main" noGrp="1"/>
+          </p:cNvSpPr>
+          <p:nvPr/>
+        </p:nvSpPr>
+        <p:spPr>
+          <a:xfrm xmlns:a="http://schemas.openxmlformats.org/drawingml/2006/main">
+            <a:off x="838200" y="590550"/>
+            <a:ext cx="8572500" cy="247650"/>
+          </a:xfrm>
+          <a:prstGeom xmlns:a="http://schemas.openxmlformats.org/drawingml/2006/main" prst="rect">
+            <a:avLst/>
+          </a:prstGeom>
+          <a:noFill xmlns:a="http://schemas.openxmlformats.org/drawingml/2006/main"/>
+          <a:ln xmlns:a="http://schemas.openxmlformats.org/drawingml/2006/main" w="0">
+            <a:noFill/>
+            <a:prstDash val="solid"/>
+          </a:ln>
+        </p:spPr>
+        <p:txBody>
+          <a:bodyPr xmlns:a="http://schemas.openxmlformats.org/drawingml/2006/main" wrap="square" lIns="0" tIns="0" rIns="0" bIns="0">
+            <a:noAutofit/>
+          </a:bodyPr>
+          <a:lstStyle xmlns:a="http://schemas.openxmlformats.org/drawingml/2006/main"/>
+          <a:p xmlns:a="http://schemas.openxmlformats.org/drawingml/2006/main">
+            <a:pPr>
+              <a:buNone/>
+              <a:defRPr sz="1350" b="1">
+                <a:solidFill>
+                  <a:srgbClr val="6D7974"/>
+                </a:solidFill>
+                <a:latin typeface="Menlo"/>
+                <a:ea typeface="Menlo"/>
+                <a:cs typeface="Menlo"/>
+              </a:defRPr>
+            </a:pPr>
+            <a:r>
+              <a:rPr sz="1350" b="1">
+                <a:solidFill>
+                  <a:srgbClr val="6D7974"/>
+                </a:solidFill>
+                <a:latin typeface="Menlo"/>
+                <a:ea typeface="Menlo"/>
+                <a:cs typeface="Menlo"/>
+              </a:rPr>
+              <a:t>BACKUP · TRUST CONTROLS</a:t>
+            </a:r>
+          </a:p>
+        </p:txBody>
+      </p:sp>
+      <p:sp>
+        <p:nvSpPr>
+          <p:cNvPr id="2" name="title-The AI recommends. The user confirms the exact terms.">
+            <a:extLst xmlns:a="http://schemas.openxmlformats.org/drawingml/2006/main">
+              <a:ext uri="{FF2B5EF4-FFF2-40B4-BE49-F238E27FC236}">
+                <a16:creationId xmlns:a16="http://schemas.microsoft.com/office/drawing/2014/main" id="{E6C7E214-CE49-432D-A6ED-84FB60003964}"/>
+              </a:ext>
+            </a:extLst>
+          </p:cNvPr>
+          <p:cNvSpPr>
+            <a:spLocks xmlns:a="http://schemas.openxmlformats.org/drawingml/2006/main" noGrp="1"/>
+          </p:cNvSpPr>
+          <p:nvPr/>
+        </p:nvSpPr>
+        <p:spPr>
+          <a:xfrm xmlns:a="http://schemas.openxmlformats.org/drawingml/2006/main">
+            <a:off x="838200" y="990600"/>
+            <a:ext cx="13525500" cy="1028700"/>
+          </a:xfrm>
+          <a:prstGeom xmlns:a="http://schemas.openxmlformats.org/drawingml/2006/main" prst="rect">
+            <a:avLst/>
+          </a:prstGeom>
+          <a:noFill xmlns:a="http://schemas.openxmlformats.org/drawingml/2006/main"/>
+          <a:ln xmlns:a="http://schemas.openxmlformats.org/drawingml/2006/main" w="0">
+            <a:noFill/>
+            <a:prstDash val="solid"/>
+          </a:ln>
+        </p:spPr>
+        <p:txBody>
+          <a:bodyPr xmlns:a="http://schemas.openxmlformats.org/drawingml/2006/main" wrap="square" lIns="0" tIns="0" rIns="0" bIns="0">
+            <a:noAutofit/>
+          </a:bodyPr>
+          <a:lstStyle xmlns:a="http://schemas.openxmlformats.org/drawingml/2006/main"/>
+          <a:p xmlns:a="http://schemas.openxmlformats.org/drawingml/2006/main">
+            <a:pPr>
+              <a:lnSpc>
+                <a:spcPct val="95000"/>
+              </a:lnSpc>
+              <a:buNone/>
+              <a:defRPr sz="4650" b="1">
+                <a:solidFill>
+                  <a:srgbClr val="0E4B3B"/>
+                </a:solidFill>
+                <a:latin typeface="Georgia"/>
+                <a:ea typeface="Georgia"/>
+                <a:cs typeface="Georgia"/>
+              </a:defRPr>
+            </a:pPr>
+            <a:r>
+              <a:rPr sz="4650" b="1">
+                <a:solidFill>
+                  <a:srgbClr val="0E4B3B"/>
+                </a:solidFill>
+                <a:latin typeface="Georgia"/>
+                <a:ea typeface="Georgia"/>
+                <a:cs typeface="Georgia"/>
+              </a:rPr>
+              <a:t>Trust is enforced at the purchase boundary.</a:t>
+            </a:r>
+          </a:p>
+        </p:txBody>
+      </p:sp>
+      <p:sp>
+        <p:nvSpPr>
+          <p:cNvPr id="3" name="boundary-statement">
+            <a:extLst xmlns:a="http://schemas.openxmlformats.org/drawingml/2006/main">
+              <a:ext uri="{FF2B5EF4-FFF2-40B4-BE49-F238E27FC236}">
+                <a16:creationId xmlns:a16="http://schemas.microsoft.com/office/drawing/2014/main" id="{64039A6F-00FA-4C7A-8407-F1FA78BFDFA5}"/>
+              </a:ext>
+            </a:extLst>
+          </p:cNvPr>
+          <p:cNvSpPr>
+            <a:spLocks xmlns:a="http://schemas.openxmlformats.org/drawingml/2006/main" noGrp="1"/>
+          </p:cNvSpPr>
+          <p:nvPr/>
+        </p:nvSpPr>
+        <p:spPr>
+          <a:xfrm xmlns:a="http://schemas.openxmlformats.org/drawingml/2006/main">
+            <a:off x="838200" y="2895600"/>
+            <a:ext cx="4191000" cy="1371600"/>
+          </a:xfrm>
+          <a:prstGeom xmlns:a="http://schemas.openxmlformats.org/drawingml/2006/main" prst="rect">
+            <a:avLst/>
+          </a:prstGeom>
+          <a:noFill xmlns:a="http://schemas.openxmlformats.org/drawingml/2006/main"/>
+          <a:ln xmlns:a="http://schemas.openxmlformats.org/drawingml/2006/main" w="0">
+            <a:noFill/>
+            <a:prstDash val="solid"/>
+          </a:ln>
+        </p:spPr>
+        <p:txBody>
+          <a:bodyPr xmlns:a="http://schemas.openxmlformats.org/drawingml/2006/main" wrap="square" lIns="0" tIns="0" rIns="0" bIns="0">
+            <a:noAutofit/>
+          </a:bodyPr>
+          <a:lstStyle xmlns:a="http://schemas.openxmlformats.org/drawingml/2006/main"/>
+          <a:p xmlns:a="http://schemas.openxmlformats.org/drawingml/2006/main">
+            <a:pPr>
+              <a:lnSpc>
+                <a:spcPct val="95000"/>
+              </a:lnSpc>
+              <a:buNone/>
+              <a:defRPr sz="3150" b="1">
+                <a:solidFill>
+                  <a:srgbClr val="0E4B3B"/>
+                </a:solidFill>
+                <a:latin typeface="Georgia"/>
+                <a:ea typeface="Georgia"/>
+                <a:cs typeface="Georgia"/>
+              </a:defRPr>
+            </a:pPr>
+            <a:r>
+              <a:rPr sz="3150" b="1">
+                <a:solidFill>
+                  <a:srgbClr val="0E4B3B"/>
+                </a:solidFill>
+                <a:latin typeface="Georgia"/>
+                <a:ea typeface="Georgia"/>
+                <a:cs typeface="Georgia"/>
+              </a:rPr>
+              <a:t>Exact terms are bound.</a:t>
+            </a:r>
+          </a:p>
+          <a:p xmlns:a="http://schemas.openxmlformats.org/drawingml/2006/main">
+            <a:pPr>
+              <a:lnSpc>
+                <a:spcPct val="95000"/>
+              </a:lnSpc>
+              <a:buNone/>
+              <a:defRPr sz="3150" b="1">
+                <a:solidFill>
+                  <a:srgbClr val="0E4B3B"/>
+                </a:solidFill>
+                <a:latin typeface="Georgia"/>
+                <a:ea typeface="Georgia"/>
+                <a:cs typeface="Georgia"/>
+              </a:defRPr>
+            </a:pPr>
+            <a:r>
+              <a:rPr sz="3150" b="1">
+                <a:solidFill>
+                  <a:srgbClr val="0E4B3B"/>
+                </a:solidFill>
+                <a:latin typeface="Georgia"/>
+                <a:ea typeface="Georgia"/>
+                <a:cs typeface="Georgia"/>
+              </a:rPr>
+              <a:t>Only the user confirms.</a:t>
+            </a:r>
+          </a:p>
+        </p:txBody>
+      </p:sp>
+      <p:sp>
+        <p:nvSpPr>
+          <p:cNvPr id="4" name="simulated-label">
+            <a:extLst xmlns:a="http://schemas.openxmlformats.org/drawingml/2006/main">
+              <a:ext uri="{FF2B5EF4-FFF2-40B4-BE49-F238E27FC236}">
+                <a16:creationId xmlns:a16="http://schemas.microsoft.com/office/drawing/2014/main" id="{906B7775-6C73-4936-919D-C949C0ED9DEE}"/>
+              </a:ext>
+            </a:extLst>
+          </p:cNvPr>
+          <p:cNvSpPr>
+            <a:spLocks xmlns:a="http://schemas.openxmlformats.org/drawingml/2006/main" noGrp="1"/>
+          </p:cNvSpPr>
+          <p:nvPr/>
+        </p:nvSpPr>
+        <p:spPr>
+          <a:xfrm xmlns:a="http://schemas.openxmlformats.org/drawingml/2006/main">
+            <a:off x="838200" y="4724400"/>
+            <a:ext cx="3143250" cy="514350"/>
+          </a:xfrm>
+          <a:prstGeom xmlns:a="http://schemas.openxmlformats.org/drawingml/2006/main" prst="roundRect">
+            <a:avLst>
+              <a:gd name="adj" fmla="val 50000"/>
+            </a:avLst>
+          </a:prstGeom>
+          <a:solidFill xmlns:a="http://schemas.openxmlformats.org/drawingml/2006/main">
+            <a:srgbClr val="1545E8"/>
+          </a:solidFill>
+          <a:ln xmlns:a="http://schemas.openxmlformats.org/drawingml/2006/main" w="0">
+            <a:noFill/>
+            <a:prstDash val="solid"/>
+          </a:ln>
+        </p:spPr>
+      </p:sp>
+      <p:sp>
+        <p:nvSpPr>
+          <p:cNvPr id="5" name="simulated-label-text">
+            <a:extLst xmlns:a="http://schemas.openxmlformats.org/drawingml/2006/main">
+              <a:ext uri="{FF2B5EF4-FFF2-40B4-BE49-F238E27FC236}">
+                <a16:creationId xmlns:a16="http://schemas.microsoft.com/office/drawing/2014/main" id="{0DCF3A62-833F-4EDD-B0B4-4EEFB00BFC41}"/>
+              </a:ext>
+            </a:extLst>
+          </p:cNvPr>
+          <p:cNvSpPr>
+            <a:spLocks xmlns:a="http://schemas.openxmlformats.org/drawingml/2006/main" noGrp="1"/>
+          </p:cNvSpPr>
+          <p:nvPr/>
+        </p:nvSpPr>
+        <p:spPr>
+          <a:xfrm xmlns:a="http://schemas.openxmlformats.org/drawingml/2006/main">
+            <a:off x="1028700" y="4876800"/>
+            <a:ext cx="2762250" cy="228600"/>
+          </a:xfrm>
+          <a:prstGeom xmlns:a="http://schemas.openxmlformats.org/drawingml/2006/main" prst="rect">
+            <a:avLst/>
+          </a:prstGeom>
+          <a:noFill xmlns:a="http://schemas.openxmlformats.org/drawingml/2006/main"/>
+          <a:ln xmlns:a="http://schemas.openxmlformats.org/drawingml/2006/main" w="0">
+            <a:noFill/>
+            <a:prstDash val="solid"/>
+          </a:ln>
+        </p:spPr>
+        <p:txBody>
+          <a:bodyPr xmlns:a="http://schemas.openxmlformats.org/drawingml/2006/main" wrap="square" lIns="0" tIns="0" rIns="0" bIns="0">
+            <a:noAutofit/>
+          </a:bodyPr>
+          <a:lstStyle xmlns:a="http://schemas.openxmlformats.org/drawingml/2006/main"/>
+          <a:p xmlns:a="http://schemas.openxmlformats.org/drawingml/2006/main">
+            <a:pPr algn="ctr">
+              <a:buNone/>
+              <a:defRPr sz="1275" b="1">
+                <a:solidFill>
+                  <a:srgbClr val="FFFFFF"/>
+                </a:solidFill>
+                <a:latin typeface="Menlo"/>
+                <a:ea typeface="Menlo"/>
+                <a:cs typeface="Menlo"/>
+              </a:defRPr>
+            </a:pPr>
+            <a:r>
+              <a:rPr sz="1275" b="1">
+                <a:solidFill>
+                  <a:srgbClr val="FFFFFF"/>
+                </a:solidFill>
+                <a:latin typeface="Menlo"/>
+                <a:ea typeface="Menlo"/>
+                <a:cs typeface="Menlo"/>
+              </a:rPr>
+              <a:t>IDENTITY · SIMULATED / ENFORCED</a:t>
+            </a:r>
+          </a:p>
+        </p:txBody>
+      </p:sp>
+      <p:sp>
+        <p:nvSpPr>
+          <p:cNvPr id="6" name="exact-terms">
+            <a:extLst xmlns:a="http://schemas.openxmlformats.org/drawingml/2006/main">
+              <a:ext uri="{FF2B5EF4-FFF2-40B4-BE49-F238E27FC236}">
+                <a16:creationId xmlns:a16="http://schemas.microsoft.com/office/drawing/2014/main" id="{24D4E798-F7E3-4205-9A3C-908586EEA799}"/>
+              </a:ext>
+            </a:extLst>
+          </p:cNvPr>
+          <p:cNvSpPr>
+            <a:spLocks xmlns:a="http://schemas.openxmlformats.org/drawingml/2006/main" noGrp="1"/>
+          </p:cNvSpPr>
+          <p:nvPr/>
+        </p:nvSpPr>
+        <p:spPr>
+          <a:xfrm xmlns:a="http://schemas.openxmlformats.org/drawingml/2006/main">
+            <a:off x="838200" y="5638800"/>
+            <a:ext cx="3810000" cy="1104900"/>
+          </a:xfrm>
+          <a:prstGeom xmlns:a="http://schemas.openxmlformats.org/drawingml/2006/main" prst="rect">
+            <a:avLst/>
+          </a:prstGeom>
+          <a:noFill xmlns:a="http://schemas.openxmlformats.org/drawingml/2006/main"/>
+          <a:ln xmlns:a="http://schemas.openxmlformats.org/drawingml/2006/main" w="0">
+            <a:noFill/>
+            <a:prstDash val="solid"/>
+          </a:ln>
+        </p:spPr>
+        <p:txBody>
+          <a:bodyPr xmlns:a="http://schemas.openxmlformats.org/drawingml/2006/main" wrap="square" lIns="0" tIns="0" rIns="0" bIns="0">
+            <a:noAutofit/>
+          </a:bodyPr>
+          <a:lstStyle xmlns:a="http://schemas.openxmlformats.org/drawingml/2006/main"/>
+          <a:p xmlns:a="http://schemas.openxmlformats.org/drawingml/2006/main">
+            <a:pPr>
+              <a:lnSpc>
+                <a:spcPct val="118000"/>
+              </a:lnSpc>
+              <a:buNone/>
+              <a:defRPr sz="1800">
+                <a:solidFill>
+                  <a:srgbClr val="6D7974"/>
+                </a:solidFill>
+                <a:latin typeface="Avenir Next"/>
+                <a:ea typeface="Avenir Next"/>
+                <a:cs typeface="Avenir Next"/>
+              </a:defRPr>
+            </a:pPr>
+            <a:r>
+              <a:rPr sz="1800">
+                <a:solidFill>
+                  <a:srgbClr val="6D7974"/>
+                </a:solidFill>
+                <a:latin typeface="Avenir Next"/>
+                <a:ea typeface="Avenir Next"/>
+                <a:cs typeface="Avenir Next"/>
+              </a:rPr>
+              <a:t>Price + stock rechecked · mandate expires · private nonce
+Idempotent order · simulated reversal</a:t>
+            </a:r>
+          </a:p>
+        </p:txBody>
+      </p:sp>
+      <p:sp>
+        <p:nvSpPr>
+          <p:cNvPr id="7" name="Woven checkout mandate showing exact terms and explicit confirmation-backplate">
+            <a:extLst xmlns:a="http://schemas.openxmlformats.org/drawingml/2006/main">
+              <a:ext uri="{FF2B5EF4-FFF2-40B4-BE49-F238E27FC236}">
+                <a16:creationId xmlns:a16="http://schemas.microsoft.com/office/drawing/2014/main" id="{8ADD3CA5-C1ED-4601-B88F-C6932A9AEDCB}"/>
+              </a:ext>
+            </a:extLst>
+          </p:cNvPr>
+          <p:cNvSpPr>
+            <a:spLocks xmlns:a="http://schemas.openxmlformats.org/drawingml/2006/main" noGrp="1"/>
+          </p:cNvSpPr>
+          <p:nvPr/>
+        </p:nvSpPr>
+        <p:spPr>
+          <a:xfrm xmlns:a="http://schemas.openxmlformats.org/drawingml/2006/main">
+            <a:off x="5095875" y="2362200"/>
+            <a:ext cx="9191625" cy="5257800"/>
+          </a:xfrm>
+          <a:prstGeom xmlns:a="http://schemas.openxmlformats.org/drawingml/2006/main" prst="roundRect">
+            <a:avLst>
+              <a:gd name="adj" fmla="val 4348"/>
+            </a:avLst>
+          </a:prstGeom>
+          <a:solidFill xmlns:a="http://schemas.openxmlformats.org/drawingml/2006/main">
+            <a:srgbClr val="FFFFFF"/>
+          </a:solidFill>
+          <a:ln xmlns:a="http://schemas.openxmlformats.org/drawingml/2006/main" w="0">
+            <a:noFill/>
+            <a:prstDash val="solid"/>
+          </a:ln>
+        </p:spPr>
+        <p:style>
+          <a:lnRef xmlns:a="http://schemas.openxmlformats.org/drawingml/2006/main" idx="0"/>
+          <a:fillRef xmlns:a="http://schemas.openxmlformats.org/drawingml/2006/main" idx="0"/>
+          <a:effectRef xmlns:a="http://schemas.openxmlformats.org/drawingml/2006/main" idx="7"/>
+          <a:fontRef xmlns:a="http://schemas.openxmlformats.org/drawingml/2006/main" idx="major"/>
+        </p:style>
+      </p:sp>
       <p:pic>
         <p:nvPicPr>
-          <p:cNvPr id="2" name=""/>
+          <p:cNvPr id="20" name=""/>
           <p:cNvPicPr>
             <a:picLocks xmlns:a="http://schemas.openxmlformats.org/drawingml/2006/main" noChangeAspect="1"/>
           </p:cNvPicPr>
           <p:nvPr/>
         </p:nvPicPr>
         <p:blipFill>
-          <a:blip xmlns:r="http://schemas.openxmlformats.org/officeDocument/2006/relationships" xmlns:a="http://schemas.openxmlformats.org/drawingml/2006/main" r:embed="R9bffdb01cf344feb"/>
-          <a:srcRect xmlns:a="http://schemas.openxmlformats.org/drawingml/2006/main" l="0" t="0" r="0" b="0"/>
-          <a:stretch xmlns:a="http://schemas.openxmlformats.org/drawingml/2006/main">
-            <a:fillRect l="0" t="0" r="0" b="0"/>
-          </a:stretch>
+          <a:blip xmlns:r="http://schemas.openxmlformats.org/officeDocument/2006/relationships" xmlns:a="http://schemas.openxmlformats.org/drawingml/2006/main" r:embed="R074f1bc9237c42c5"/>
+          <a:stretch xmlns:a="http://schemas.openxmlformats.org/drawingml/2006/main"/>
         </p:blipFill>
         <p:spPr>
           <a:xfrm xmlns:a="http://schemas.openxmlformats.org/drawingml/2006/main" flipH="0" flipV="0">
-            <a:off x="0" y="0"/>
-            <a:ext cx="15240000" cy="8572500"/>
-          </a:xfrm>
-          <a:prstGeom xmlns:a="http://schemas.openxmlformats.org/drawingml/2006/main" prst="rect">
+            <a:off x="5191125" y="2459534"/>
+            <a:ext cx="9001125" cy="5063133"/>
+          </a:xfrm>
+          <a:prstGeom xmlns:a="http://schemas.openxmlformats.org/drawingml/2006/main" prst="roundRect">
             <a:avLst/>
           </a:prstGeom>
         </p:spPr>
       </p:pic>
+      <p:sp>
+        <p:nvSpPr>
+          <p:cNvPr id="9" name="footer-label-6">
+            <a:extLst xmlns:a="http://schemas.openxmlformats.org/drawingml/2006/main">
+              <a:ext uri="{FF2B5EF4-FFF2-40B4-BE49-F238E27FC236}">
+                <a16:creationId xmlns:a16="http://schemas.microsoft.com/office/drawing/2014/main" id="{180E82C5-4959-4CB6-9B7C-CA48FE5A4C58}"/>
+              </a:ext>
+            </a:extLst>
+          </p:cNvPr>
+          <p:cNvSpPr>
+            <a:spLocks xmlns:a="http://schemas.openxmlformats.org/drawingml/2006/main" noGrp="1"/>
+          </p:cNvSpPr>
+          <p:nvPr/>
+        </p:nvSpPr>
+        <p:spPr>
+          <a:xfrm xmlns:a="http://schemas.openxmlformats.org/drawingml/2006/main">
+            <a:off x="838200" y="8020050"/>
+            <a:ext cx="5334000" cy="228600"/>
+          </a:xfrm>
+          <a:prstGeom xmlns:a="http://schemas.openxmlformats.org/drawingml/2006/main" prst="rect">
+            <a:avLst/>
+          </a:prstGeom>
+          <a:noFill xmlns:a="http://schemas.openxmlformats.org/drawingml/2006/main"/>
+          <a:ln xmlns:a="http://schemas.openxmlformats.org/drawingml/2006/main" w="0">
+            <a:noFill/>
+            <a:prstDash val="solid"/>
+          </a:ln>
+        </p:spPr>
+        <p:txBody>
+          <a:bodyPr xmlns:a="http://schemas.openxmlformats.org/drawingml/2006/main" wrap="square" lIns="0" tIns="0" rIns="0" bIns="0">
+            <a:noAutofit/>
+          </a:bodyPr>
+          <a:lstStyle xmlns:a="http://schemas.openxmlformats.org/drawingml/2006/main"/>
+          <a:p xmlns:a="http://schemas.openxmlformats.org/drawingml/2006/main">
+            <a:pPr>
+              <a:buNone/>
+              <a:defRPr sz="1200" b="1">
+                <a:solidFill>
+                  <a:srgbClr val="6D7974"/>
+                </a:solidFill>
+                <a:latin typeface="Menlo"/>
+                <a:ea typeface="Menlo"/>
+                <a:cs typeface="Menlo"/>
+              </a:defRPr>
+            </a:pPr>
+            <a:r>
+              <a:rPr sz="1200" b="1">
+                <a:solidFill>
+                  <a:srgbClr val="6D7974"/>
+                </a:solidFill>
+                <a:latin typeface="Menlo"/>
+                <a:ea typeface="Menlo"/>
+                <a:cs typeface="Menlo"/>
+              </a:rPr>
+              <a:t>WOVEN  /  LIFEHACK 2026</a:t>
+            </a:r>
+          </a:p>
+        </p:txBody>
+      </p:sp>
+      <p:sp>
+        <p:nvSpPr>
+          <p:cNvPr id="10" name="footer-number-6">
+            <a:extLst xmlns:a="http://schemas.openxmlformats.org/drawingml/2006/main">
+              <a:ext uri="{FF2B5EF4-FFF2-40B4-BE49-F238E27FC236}">
+                <a16:creationId xmlns:a16="http://schemas.microsoft.com/office/drawing/2014/main" id="{573541B3-83F3-4ADA-A401-90AC23E83D47}"/>
+              </a:ext>
+            </a:extLst>
+          </p:cNvPr>
+          <p:cNvSpPr>
+            <a:spLocks xmlns:a="http://schemas.openxmlformats.org/drawingml/2006/main" noGrp="1"/>
+          </p:cNvSpPr>
+          <p:nvPr/>
+        </p:nvSpPr>
+        <p:spPr>
+          <a:xfrm xmlns:a="http://schemas.openxmlformats.org/drawingml/2006/main">
+            <a:off x="13620750" y="8001000"/>
+            <a:ext cx="762000" cy="247650"/>
+          </a:xfrm>
+          <a:prstGeom xmlns:a="http://schemas.openxmlformats.org/drawingml/2006/main" prst="rect">
+            <a:avLst/>
+          </a:prstGeom>
+          <a:noFill xmlns:a="http://schemas.openxmlformats.org/drawingml/2006/main"/>
+          <a:ln xmlns:a="http://schemas.openxmlformats.org/drawingml/2006/main" w="0">
+            <a:noFill/>
+            <a:prstDash val="solid"/>
+          </a:ln>
+        </p:spPr>
+        <p:txBody>
+          <a:bodyPr xmlns:a="http://schemas.openxmlformats.org/drawingml/2006/main" wrap="square" lIns="0" tIns="0" rIns="0" bIns="0">
+            <a:noAutofit/>
+          </a:bodyPr>
+          <a:lstStyle xmlns:a="http://schemas.openxmlformats.org/drawingml/2006/main"/>
+          <a:p xmlns:a="http://schemas.openxmlformats.org/drawingml/2006/main">
+            <a:pPr algn="r">
+              <a:buNone/>
+              <a:defRPr sz="1350" b="1">
+                <a:solidFill>
+                  <a:srgbClr val="6D7974"/>
+                </a:solidFill>
+                <a:latin typeface="Menlo"/>
+                <a:ea typeface="Menlo"/>
+                <a:cs typeface="Menlo"/>
+              </a:defRPr>
+            </a:pPr>
+            <a:r>
+              <a:rPr sz="1350" b="1">
+                <a:solidFill>
+                  <a:srgbClr val="6D7974"/>
+                </a:solidFill>
+                <a:latin typeface="Menlo"/>
+                <a:ea typeface="Menlo"/>
+                <a:cs typeface="Menlo"/>
+              </a:rPr>
+              <a:t>11</a:t>
+            </a:r>
+          </a:p>
+        </p:txBody>
+      </p:sp>
     </p:spTree>
     <p:extLst>
       <p:ext uri="{BB962C8B-B14F-4D97-AF65-F5344CB8AC3E}">
-        <p14:creationId xmlns:p14="http://schemas.microsoft.com/office/powerpoint/2010/main" val="614777387"/>
+        <p14:creationId xmlns:p14="http://schemas.microsoft.com/office/powerpoint/2010/main" val="2091917452"/>
       </p:ext>
     </p:extLst>
   </p:cSld>
@@ -5432,7 +5574,7 @@
           <p:nvPr/>
         </p:nvPicPr>
         <p:blipFill>
-          <a:blip xmlns:r="http://schemas.openxmlformats.org/officeDocument/2006/relationships" xmlns:a="http://schemas.openxmlformats.org/drawingml/2006/main" r:embed="R815bc04db61343b4"/>
+          <a:blip xmlns:r="http://schemas.openxmlformats.org/officeDocument/2006/relationships" xmlns:a="http://schemas.openxmlformats.org/drawingml/2006/main" r:embed="Rb2673b238a614f90"/>
           <a:stretch xmlns:a="http://schemas.openxmlformats.org/drawingml/2006/main"/>
         </p:blipFill>
         <p:spPr>
@@ -6684,8 +6826,8 @@
                 <a:ea typeface="Georgia"/>
                 <a:cs typeface="Georgia"/>
               </a:rPr>
-              <a:t>Identity is the
-next integration.</a:t>
+              <a:t>Two separate
+trust gates.</a:t>
             </a:r>
           </a:p>
         </p:txBody>
@@ -6834,7 +6976,7 @@
                 <a:ea typeface="Avenir Next"/>
                 <a:cs typeface="Avenir Next"/>
               </a:rPr>
-              <a:t>Verify identity</a:t>
+              <a:t>Verify demo identity</a:t>
             </a:r>
           </a:p>
         </p:txBody>
@@ -6896,7 +7038,7 @@
                 <a:ea typeface="Avenir Next"/>
                 <a:cs typeface="Avenir Next"/>
               </a:rPr>
-              <a:t>PLANNED — server-enforced before checkout; not in the live demo.</a:t>
+              <a:t>WORKING · SIMULATED — server-enforced before checkout.</a:t>
             </a:r>
           </a:p>
         </p:txBody>
@@ -8111,7 +8253,7 @@
           <p:nvPr/>
         </p:nvPicPr>
         <p:blipFill>
-          <a:blip xmlns:r="http://schemas.openxmlformats.org/officeDocument/2006/relationships" xmlns:a="http://schemas.openxmlformats.org/drawingml/2006/main" r:embed="Rf6c24c0f2c7d4d70"/>
+          <a:blip xmlns:r="http://schemas.openxmlformats.org/officeDocument/2006/relationships" xmlns:a="http://schemas.openxmlformats.org/drawingml/2006/main" r:embed="R0813db945132474f"/>
           <a:stretch xmlns:a="http://schemas.openxmlformats.org/drawingml/2006/main"/>
         </p:blipFill>
         <p:spPr>
@@ -8761,7 +8903,7 @@
           <p:nvPr/>
         </p:nvPicPr>
         <p:blipFill>
-          <a:blip xmlns:r="http://schemas.openxmlformats.org/officeDocument/2006/relationships" xmlns:a="http://schemas.openxmlformats.org/drawingml/2006/main" r:embed="R442128613b45476b"/>
+          <a:blip xmlns:r="http://schemas.openxmlformats.org/officeDocument/2006/relationships" xmlns:a="http://schemas.openxmlformats.org/drawingml/2006/main" r:embed="Rc12bc406cbad4e09"/>
           <a:stretch xmlns:a="http://schemas.openxmlformats.org/drawingml/2006/main"/>
         </p:blipFill>
         <p:spPr>
@@ -8828,7 +8970,7 @@
                 <a:ea typeface="Menlo"/>
                 <a:cs typeface="Menlo"/>
               </a:rPr>
-              <a:t>IDENTITY PLANNED · VISA AUTHORIZATION SIMULATED</a:t>
+              <a:t>DEMO IDENTITY · VISA AUTHORIZATION · SIMULATED</a:t>
             </a:r>
           </a:p>
         </p:txBody>
@@ -9525,7 +9667,7 @@
                 <a:ea typeface="Avenir Next"/>
                 <a:cs typeface="Avenir Next"/>
               </a:rPr>
-              <a:t>Expiring exact terms.
+              <a:t>Demo identity + expiring exact terms.
 Direct confirmation · idempotency.</a:t>
             </a:r>
           </a:p>
@@ -10101,7 +10243,8 @@
                 <a:ea typeface="Georgia"/>
                 <a:cs typeface="Georgia"/>
               </a:rPr>
-              <a:t>The prototype never claims live identity, inventory or payments.</a:t>
+              <a:t>No live Visa identity,
+inventory, or payments.</a:t>
             </a:r>
           </a:p>
         </p:txBody>
@@ -10468,7 +10611,7 @@
                 <a:ea typeface="Georgia"/>
                 <a:cs typeface="Georgia"/>
               </a:rPr>
-              <a:t>Identity direction</a:t>
+              <a:t>Demo identity</a:t>
             </a:r>
           </a:p>
         </p:txBody>
@@ -10530,8 +10673,8 @@
                 <a:ea typeface="Avenir Next"/>
                 <a:cs typeface="Avenir Next"/>
               </a:rPr>
-              <a:t>Connector-style check is planned
-and not in the live demo.</a:t>
+              <a:t>Server-enforced before checkout.
+Clearly simulated; no credentials.</a:t>
             </a:r>
           </a:p>
         </p:txBody>

--- a/docs/Woven-Hackathon-Pitch.pptx
+++ b/docs/Woven-Hackathon-Pitch.pptx
@@ -2,25 +2,23 @@
 <file path=ppt/presentation.xml><?xml version="1.0" encoding="utf-8"?>
 <p:presentation xmlns:p="http://schemas.openxmlformats.org/presentationml/2006/main">
   <p:sldMasterIdLst>
-    <p:sldMasterId xmlns:r="http://schemas.openxmlformats.org/officeDocument/2006/relationships" id="2147483648" r:id="Rbd7b917bceef459a"/>
+    <p:sldMasterId xmlns:r="http://schemas.openxmlformats.org/officeDocument/2006/relationships" id="2147483648" r:id="R2fc6e8e20c084646"/>
   </p:sldMasterIdLst>
   <p:notesMasterIdLst>
-    <p:notesMasterId xmlns:r="http://schemas.openxmlformats.org/officeDocument/2006/relationships" r:id="Reb6cee3a506b43cf"/>
+    <p:notesMasterId xmlns:r="http://schemas.openxmlformats.org/officeDocument/2006/relationships" r:id="R91b2626ac2ad4dc0"/>
   </p:notesMasterIdLst>
   <p:sldIdLst>
-    <p:sldId xmlns:r="http://schemas.openxmlformats.org/officeDocument/2006/relationships" id="256" r:id="R5326ca9495684228"/>
-    <p:sldId xmlns:r="http://schemas.openxmlformats.org/officeDocument/2006/relationships" id="257" r:id="R7129933df5f84180"/>
-    <p:sldId xmlns:r="http://schemas.openxmlformats.org/officeDocument/2006/relationships" id="258" r:id="Ree048974157b4473"/>
-    <p:sldId xmlns:r="http://schemas.openxmlformats.org/officeDocument/2006/relationships" id="259" r:id="Rfbc0c85f698f4fa6"/>
-    <p:sldId xmlns:r="http://schemas.openxmlformats.org/officeDocument/2006/relationships" id="260" r:id="R4aba994753af4d4e"/>
-    <p:sldId xmlns:r="http://schemas.openxmlformats.org/officeDocument/2006/relationships" id="261" r:id="R1293d76b0bb24c15"/>
-    <p:sldId xmlns:r="http://schemas.openxmlformats.org/officeDocument/2006/relationships" id="262" r:id="R7b5ce42f81a54f6f"/>
-    <p:sldId xmlns:r="http://schemas.openxmlformats.org/officeDocument/2006/relationships" id="263" r:id="R42e87175a6a34fd9"/>
-    <p:sldId xmlns:r="http://schemas.openxmlformats.org/officeDocument/2006/relationships" id="264" r:id="R37dfb12e7e61470d"/>
-    <p:sldId xmlns:r="http://schemas.openxmlformats.org/officeDocument/2006/relationships" id="267" r:id="Rab12cd34ef567801"/>
-    <p:sldId xmlns:r="http://schemas.openxmlformats.org/officeDocument/2006/relationships" id="268" r:id="Rab12cd34ef567802"/>
-    <p:sldId xmlns:r="http://schemas.openxmlformats.org/officeDocument/2006/relationships" id="265" r:id="R43bbd7ed52b947d6"/>
-    <p:sldId xmlns:r="http://schemas.openxmlformats.org/officeDocument/2006/relationships" id="266" r:id="R6026b644a94e4a72"/>
+    <p:sldId xmlns:r="http://schemas.openxmlformats.org/officeDocument/2006/relationships" id="256" r:id="Rb4039db9e0344b88"/>
+    <p:sldId xmlns:r="http://schemas.openxmlformats.org/officeDocument/2006/relationships" id="257" r:id="R95ec7d74113a47dd"/>
+    <p:sldId xmlns:r="http://schemas.openxmlformats.org/officeDocument/2006/relationships" id="258" r:id="R727ef281f7534dd1"/>
+    <p:sldId xmlns:r="http://schemas.openxmlformats.org/officeDocument/2006/relationships" id="259" r:id="Rc2184f7aa1004714"/>
+    <p:sldId xmlns:r="http://schemas.openxmlformats.org/officeDocument/2006/relationships" id="260" r:id="Rf88b69f22c664df3"/>
+    <p:sldId xmlns:r="http://schemas.openxmlformats.org/officeDocument/2006/relationships" id="261" r:id="Rc86b445fd6774c61"/>
+    <p:sldId xmlns:r="http://schemas.openxmlformats.org/officeDocument/2006/relationships" id="262" r:id="R58dfaf1ab8e04ed8"/>
+    <p:sldId xmlns:r="http://schemas.openxmlformats.org/officeDocument/2006/relationships" id="263" r:id="Rd6ca70c8c5dd45fa"/>
+    <p:sldId xmlns:r="http://schemas.openxmlformats.org/officeDocument/2006/relationships" id="264" r:id="Ra37853021f864bc4"/>
+    <p:sldId xmlns:r="http://schemas.openxmlformats.org/officeDocument/2006/relationships" id="265" r:id="R015fd678ca324916"/>
+    <p:sldId xmlns:r="http://schemas.openxmlformats.org/officeDocument/2006/relationships" id="266" r:id="R4006603162ad4636"/>
   </p:sldIdLst>
   <p:sldSz cx="15240000" cy="8572500"/>
   <p:notesSz cx="6858000" cy="9144000"/>
@@ -1009,7 +1007,7 @@
           </a:p>
           <a:p xmlns:a="http://schemas.openxmlformats.org/drawingml/2006/main">
             <a:r>
-              <a:t>“Woven understands the complete request, eliminates incompatible combinations, and creates ready-to-buy carts. Every cart comes from one merchant and one location, with an explanation of why every component works.”</a:t>
+              <a:t>“Woven understands the complete request, eliminates incompatible combinations, and creates five ready-to-buy choices in one comparison workspace. Every cart comes from one merchant and one location, with an explanation of why every component works.”</a:t>
             </a:r>
           </a:p>
           <a:p xmlns:a="http://schemas.openxmlformats.org/drawingml/2006/main">
@@ -1024,7 +1022,7 @@
           </a:p>
           <a:p xmlns:a="http://schemas.openxmlformats.org/drawingml/2006/main">
             <a:r>
-              <a:t>One merchant and pickup point. Four compatible components. S$133 total. Pickup today.</a:t>
+              <a:t>Compare priorities and pickup areas. One merchant and pickup point. Four compatible components. S$133 total. Pickup today.</a:t>
             </a:r>
           </a:p>
           <a:p xmlns:a="http://schemas.openxmlformats.org/drawingml/2006/main">
@@ -1174,17 +1172,17 @@
           </a:p>
           <a:p xmlns:a="http://schemas.openxmlformats.org/drawingml/2006/main">
             <a:r>
-              <a:t>1. Show the three ranked, one-merchant carts.</a:t>
-            </a:r>
-          </a:p>
-          <a:p xmlns:a="http://schemas.openxmlformats.org/drawingml/2006/main">
-            <a:r>
-              <a:t>2. Select ByteRoute.</a:t>
-            </a:r>
-          </a:p>
-          <a:p xmlns:a="http://schemas.openxmlformats.org/drawingml/2006/main">
-            <a:r>
-              <a:t>3. Point to charger wattage and voltage, both required cables, the Japan adapter, one pickup location, seeded demo stock, and the S$133 total.</a:t>
+              <a:t>1. Open the five-choice Choice Center.</a:t>
+            </a:r>
+          </a:p>
+          <a:p xmlns:a="http://schemas.openxmlformats.org/drawingml/2006/main">
+            <a:r>
+              <a:t>2. Compare carts, rerank by pickup or value, and return to Best match.</a:t>
+            </a:r>
+          </a:p>
+          <a:p xmlns:a="http://schemas.openxmlformats.org/drawingml/2006/main">
+            <a:r>
+              <a:t>3. Select ByteRoute, point to “Why this works,” make the approved cable swap, and show the pickup planner.</a:t>
             </a:r>
           </a:p>
           <a:p xmlns:a="http://schemas.openxmlformats.org/drawingml/2006/main">
@@ -1199,7 +1197,7 @@
           </a:p>
           <a:p xmlns:a="http://schemas.openxmlformats.org/drawingml/2006/main">
             <a:r>
-              <a:t>“Woven returned three complete options—not loose product links. This S$133 cart includes the charger, both required cables, and the Japan adapter. Everything is compatible, under budget, available in our demo inventory, and ready at one pickup location.”</a:t>
+              <a:t>“Woven returned five complete choices—not loose product links. I can compare exact carts, change priorities, and make only merchant-approved compatible swaps without rebuilding the request.”</a:t>
             </a:r>
           </a:p>
           <a:p xmlns:a="http://schemas.openxmlformats.org/drawingml/2006/main">
@@ -1214,7 +1212,7 @@
           </a:p>
           <a:p xmlns:a="http://schemas.openxmlformats.org/drawingml/2006/main">
             <a:r>
-              <a:t>Do not explain the ranking algorithm unless asked. If the MCP host fails, move immediately to /demo; it uses the same backend.</a:t>
+              <a:t>If the MCP host fails, move immediately to /demo; it uses the same backend.</a:t>
             </a:r>
           </a:p>
           <a:p xmlns:a="http://schemas.openxmlformats.org/drawingml/2006/main">
@@ -1349,7 +1347,7 @@
           </a:p>
           <a:p xmlns:a="http://schemas.openxmlformats.org/drawingml/2006/main">
             <a:r>
-              <a:t>4. Confirm and show the simulated Visa authorization result and pickup receipt.</a:t>
+              <a:t>4. Confirm and show the simulated Visa result and exact signed receipt.</a:t>
             </a:r>
           </a:p>
           <a:p xmlns:a="http://schemas.openxmlformats.org/drawingml/2006/main">
@@ -1364,7 +1362,7 @@
           </a:p>
           <a:p xmlns:a="http://schemas.openxmlformats.org/drawingml/2006/main">
             <a:r>
-              <a:t>“Woven rechecks the price and stock, then creates an exact ten-minute checkout preview. The AI recommended this cart, but it cannot approve it. The user sees the merchant, every item, the pickup location, and the S$133 total before one direct confirmation.”</a:t>
+              <a:t>“Woven rechecks price and stock, then creates an exact ten-minute checkout preview. The AI recommended this cart, but it cannot approve it. Only one direct click can confirm the displayed terms.”</a:t>
             </a:r>
           </a:p>
           <a:p xmlns:a="http://schemas.openxmlformats.org/drawingml/2006/main">
@@ -1374,7 +1372,7 @@
           </a:p>
           <a:p xmlns:a="http://schemas.openxmlformats.org/drawingml/2006/main">
             <a:r>
-              <a:t>“Only after that click does Woven produce a simulated Visa authorization and pickup receipt. No card details enter Woven, and no live charge occurs.”</a:t>
+              <a:t>“Only after that click does Woven return a simulated Visa result and a server-verifiable receipt. No card details enter Woven, and no live charge occurs.”</a:t>
             </a:r>
           </a:p>
           <a:p xmlns:a="http://schemas.openxmlformats.org/drawingml/2006/main">
@@ -1389,7 +1387,7 @@
           </a:p>
           <a:p xmlns:a="http://schemas.openxmlformats.org/drawingml/2006/main">
             <a:r>
-              <a:t>Identity verification is planned and not in the live build. Do not show a static identity mock as verification. After server enforcement exists, insert the connector-style demo identity check before exact-term review and keep it separate from final confirmation.</a:t>
+              <a:t>Identity verification is planned and not in the live build. Do not show a static identity mock as verification.</a:t>
             </a:r>
           </a:p>
           <a:p xmlns:a="http://schemas.openxmlformats.org/drawingml/2006/main">
@@ -1424,7 +1422,7 @@
           </a:p>
           <a:p xmlns:a="http://schemas.openxmlformats.org/drawingml/2006/main">
             <a:r>
-              <a:t>- docs/architecture.md — Confirmation boundary and mandate binding</a:t>
+              <a:t>- docs/architecture.md — Confirmation boundary, mandate binding, and receipt signing</a:t>
             </a:r>
           </a:p>
           <a:p xmlns:a="http://schemas.openxmlformats.org/drawingml/2006/main">
@@ -1509,7 +1507,7 @@
           </a:p>
           <a:p xmlns:a="http://schemas.openxmlformats.org/drawingml/2006/main">
             <a:r>
-              <a:t>Prove that merchants control inventory, scenarios, orders, and auditability.</a:t>
+              <a:t>Prove that merchants control what the AI may offer and can test recovery live.</a:t>
             </a:r>
           </a:p>
           <a:p xmlns:a="http://schemas.openxmlformats.org/drawingml/2006/main">
@@ -1524,7 +1522,7 @@
           </a:p>
           <a:p xmlns:a="http://schemas.openxmlformats.org/drawingml/2006/main">
             <a:r>
-              <a:t>Open the Merchant Desk. Show inventory and price controls, confirmed orders, the audit trail, and the stockout, price-change, decline, and reversal scenarios.</a:t>
+              <a:t>Open the Merchant Desk. Show approved alternatives, inventory and price controls, confirmed orders, the audit trail, and the stockout, price-change, decline, and reversal scenarios.</a:t>
             </a:r>
           </a:p>
           <a:p xmlns:a="http://schemas.openxmlformats.org/drawingml/2006/main">
@@ -1539,7 +1537,7 @@
           </a:p>
           <a:p xmlns:a="http://schemas.openxmlformats.org/drawingml/2006/main">
             <a:r>
-              <a:t>“On the merchant side, Woven already supports inventory import, price and stock controls, orders, and an audit trail. Merchants can simulate a price change, stockout, authorization decline, or reversal without changing code.”</a:t>
+              <a:t>“Merchants publish compatible alternatives, control price and stock, and see exact confirmed orders. Withdrawing a swap invalidates dependent unconfirmed carts, so Woven rebuilds fresh choices instead of silently substituting.”</a:t>
             </a:r>
           </a:p>
           <a:p xmlns:a="http://schemas.openxmlformats.org/drawingml/2006/main">
@@ -1554,7 +1552,7 @@
           </a:p>
           <a:p xmlns:a="http://schemas.openxmlformats.org/drawingml/2006/main">
             <a:r>
-              <a:t>Call the current values seeded demo data. Do not call the CSV workflow a production merchant integration or imply a live payment rail.</a:t>
+              <a:t>Call the current values seeded demo data. Do not imply a production merchant integration or live payment rail.</a:t>
             </a:r>
           </a:p>
           <a:p xmlns:a="http://schemas.openxmlformats.org/drawingml/2006/main">
@@ -1594,7 +1592,7 @@
           </a:p>
           <a:p xmlns:a="http://schemas.openxmlformats.org/drawingml/2006/main">
             <a:r>
-              <a:t>- docs/architecture.md — Merchant state and failure paths</a:t>
+              <a:t>- docs/architecture.md — Merchant state and recovery paths</a:t>
             </a:r>
           </a:p>
         </p:txBody>
@@ -1689,7 +1687,7 @@
           </a:p>
           <a:p xmlns:a="http://schemas.openxmlformats.org/drawingml/2006/main">
             <a:r>
-              <a:t>“Why ChatGPT? Because that is where the user’s request already exists. Why a plugin? Because Woven can turn that conversation into merchant actions and a reviewable checkout without asking the user to start again.”</a:t>
+              <a:t>“Why ChatGPT? Because that is where the user’s request already exists. Woven turns that conversation into comparable merchant actions, an exact checkout, and a signed receipt without asking the user to start again.”</a:t>
             </a:r>
           </a:p>
           <a:p xmlns:a="http://schemas.openxmlformats.org/drawingml/2006/main">
@@ -1839,7 +1837,7 @@
           </a:p>
           <a:p xmlns:a="http://schemas.openxmlformats.org/drawingml/2006/main">
             <a:r>
-              <a:t>The working prototype includes the MCP App and browser fallback, complete one-merchant carts, compatibility and budget proof, exact expiring checkout terms, direct confirmation, idempotency, merchant operations, failure scenarios, and an audit trail.</a:t>
+              <a:t>The working prototype includes the MCP App and browser fallback, five ranked complete carts, comparison and preference controls, compatible merchant-approved swaps, pickup planning, stale-cart recovery, exact expiring checkout terms, direct confirmation, idempotency, signed receipts, merchant controls, failure scenarios, and an audit trail.</a:t>
             </a:r>
           </a:p>
           <a:p xmlns:a="http://schemas.openxmlformats.org/drawingml/2006/main">
@@ -2062,7 +2060,7 @@
   </p:cSld>
   <p:clrMap bg1="lt1" tx1="dk1" bg2="lt2" tx2="dk2" accent1="accent1" accent2="accent2" accent3="accent3" accent4="accent4" accent5="accent5" accent6="accent6" hlink="hlink" folHlink="folHlink"/>
   <p:sldLayoutIdLst>
-    <p:sldLayoutId xmlns:r="http://schemas.openxmlformats.org/officeDocument/2006/relationships" id="2147483649" r:id="R02831dc36adb413d"/>
+    <p:sldLayoutId xmlns:r="http://schemas.openxmlformats.org/officeDocument/2006/relationships" id="2147483649" r:id="R41e51d75fcdc47d2"/>
   </p:sldLayoutIdLst>
   <p:txStyles>
     <p:titleStyle>
@@ -3179,14 +3177,14 @@
       </p:sp>
       <p:pic>
         <p:nvPicPr>
-          <p:cNvPr id="21" name=""/>
+          <p:cNvPr id="20" name=""/>
           <p:cNvPicPr>
             <a:picLocks xmlns:a="http://schemas.openxmlformats.org/drawingml/2006/main" noChangeAspect="1"/>
           </p:cNvPicPr>
           <p:nvPr/>
         </p:nvPicPr>
         <p:blipFill>
-          <a:blip xmlns:r="http://schemas.openxmlformats.org/officeDocument/2006/relationships" xmlns:a="http://schemas.openxmlformats.org/drawingml/2006/main" r:embed="R64deff9c5da942be"/>
+          <a:blip xmlns:r="http://schemas.openxmlformats.org/officeDocument/2006/relationships" xmlns:a="http://schemas.openxmlformats.org/drawingml/2006/main" r:embed="R14f3d1fe560b423d"/>
           <a:srcRect xmlns:a="http://schemas.openxmlformats.org/drawingml/2006/main" l="12000" t="0" r="2000" b="0"/>
           <a:stretch xmlns:a="http://schemas.openxmlformats.org/drawingml/2006/main">
             <a:fillRect l="0" t="0" r="0" b="0"/>
@@ -3233,7 +3231,7 @@
           <p:nvPr/>
         </p:nvPicPr>
         <p:blipFill>
-          <a:blip xmlns:r="http://schemas.openxmlformats.org/officeDocument/2006/relationships" xmlns:a="http://schemas.openxmlformats.org/drawingml/2006/main" r:embed="R9bffdb01cf344feb"/>
+          <a:blip xmlns:r="http://schemas.openxmlformats.org/officeDocument/2006/relationships" xmlns:a="http://schemas.openxmlformats.org/drawingml/2006/main" r:embed="Ra4bfcb8d8a184bbe"/>
           <a:srcRect xmlns:a="http://schemas.openxmlformats.org/drawingml/2006/main" l="0" t="0" r="0" b="0"/>
           <a:stretch xmlns:a="http://schemas.openxmlformats.org/drawingml/2006/main">
             <a:fillRect l="0" t="0" r="0" b="0"/>
@@ -3691,7 +3689,7 @@
           <p:nvPr/>
         </p:nvPicPr>
         <p:blipFill>
-          <a:blip xmlns:r="http://schemas.openxmlformats.org/officeDocument/2006/relationships" xmlns:a="http://schemas.openxmlformats.org/drawingml/2006/main" r:embed="R3785bd862f514d5a"/>
+          <a:blip xmlns:r="http://schemas.openxmlformats.org/officeDocument/2006/relationships" xmlns:a="http://schemas.openxmlformats.org/drawingml/2006/main" r:embed="R4b901183a5ee44a0"/>
           <a:stretch xmlns:a="http://schemas.openxmlformats.org/drawingml/2006/main"/>
         </p:blipFill>
         <p:spPr>
@@ -3826,100 +3824,6 @@
     <p:extLst>
       <p:ext uri="{BB962C8B-B14F-4D97-AF65-F5344CB8AC3E}">
         <p14:creationId xmlns:p14="http://schemas.microsoft.com/office/powerpoint/2010/main" val="2091917452"/>
-      </p:ext>
-    </p:extLst>
-  </p:cSld>
-</p:sld>
-</file>
-
-<file path=ppt/slides/slide12.xml><?xml version="1.0" encoding="utf-8"?>
-<p:sld xmlns:p="http://schemas.openxmlformats.org/presentationml/2006/main">
-  <p:cSld>
-    <p:spTree>
-      <p:nvGrpSpPr>
-        <p:cNvPr id="1" name=""/>
-        <p:cNvGrpSpPr/>
-        <p:nvPr/>
-      </p:nvGrpSpPr>
-      <p:grpSpPr>
-        <a:xfrm xmlns:a="http://schemas.openxmlformats.org/drawingml/2006/main"/>
-      </p:grpSpPr>
-      <p:pic>
-        <p:nvPicPr>
-          <p:cNvPr id="2" name=""/>
-          <p:cNvPicPr>
-            <a:picLocks xmlns:a="http://schemas.openxmlformats.org/drawingml/2006/main" noChangeAspect="1"/>
-          </p:cNvPicPr>
-          <p:nvPr/>
-        </p:nvPicPr>
-        <p:blipFill>
-          <a:blip xmlns:r="http://schemas.openxmlformats.org/officeDocument/2006/relationships" xmlns:a="http://schemas.openxmlformats.org/drawingml/2006/main" r:embed="R9bffdb01cf344feb"/>
-          <a:srcRect xmlns:a="http://schemas.openxmlformats.org/drawingml/2006/main" l="0" t="0" r="0" b="0"/>
-          <a:stretch xmlns:a="http://schemas.openxmlformats.org/drawingml/2006/main">
-            <a:fillRect l="0" t="0" r="0" b="0"/>
-          </a:stretch>
-        </p:blipFill>
-        <p:spPr>
-          <a:xfrm xmlns:a="http://schemas.openxmlformats.org/drawingml/2006/main" flipH="0" flipV="0">
-            <a:off x="0" y="0"/>
-            <a:ext cx="15240000" cy="8572500"/>
-          </a:xfrm>
-          <a:prstGeom xmlns:a="http://schemas.openxmlformats.org/drawingml/2006/main" prst="rect">
-            <a:avLst/>
-          </a:prstGeom>
-        </p:spPr>
-      </p:pic>
-    </p:spTree>
-    <p:extLst>
-      <p:ext uri="{BB962C8B-B14F-4D97-AF65-F5344CB8AC3E}">
-        <p14:creationId xmlns:p14="http://schemas.microsoft.com/office/powerpoint/2010/main" val="614777387"/>
-      </p:ext>
-    </p:extLst>
-  </p:cSld>
-</p:sld>
-</file>
-
-<file path=ppt/slides/slide13.xml><?xml version="1.0" encoding="utf-8"?>
-<p:sld xmlns:p="http://schemas.openxmlformats.org/presentationml/2006/main">
-  <p:cSld>
-    <p:spTree>
-      <p:nvGrpSpPr>
-        <p:cNvPr id="1" name=""/>
-        <p:cNvGrpSpPr/>
-        <p:nvPr/>
-      </p:nvGrpSpPr>
-      <p:grpSpPr>
-        <a:xfrm xmlns:a="http://schemas.openxmlformats.org/drawingml/2006/main"/>
-      </p:grpSpPr>
-      <p:pic>
-        <p:nvPicPr>
-          <p:cNvPr id="2" name=""/>
-          <p:cNvPicPr>
-            <a:picLocks xmlns:a="http://schemas.openxmlformats.org/drawingml/2006/main" noChangeAspect="1"/>
-          </p:cNvPicPr>
-          <p:nvPr/>
-        </p:nvPicPr>
-        <p:blipFill>
-          <a:blip xmlns:r="http://schemas.openxmlformats.org/officeDocument/2006/relationships" xmlns:a="http://schemas.openxmlformats.org/drawingml/2006/main" r:embed="R9bffdb01cf344feb"/>
-          <a:srcRect xmlns:a="http://schemas.openxmlformats.org/drawingml/2006/main" l="0" t="0" r="0" b="0"/>
-          <a:stretch xmlns:a="http://schemas.openxmlformats.org/drawingml/2006/main">
-            <a:fillRect l="0" t="0" r="0" b="0"/>
-          </a:stretch>
-        </p:blipFill>
-        <p:spPr>
-          <a:xfrm xmlns:a="http://schemas.openxmlformats.org/drawingml/2006/main" flipH="0" flipV="0">
-            <a:off x="0" y="0"/>
-            <a:ext cx="15240000" cy="8572500"/>
-          </a:xfrm>
-          <a:prstGeom xmlns:a="http://schemas.openxmlformats.org/drawingml/2006/main" prst="rect">
-            <a:avLst/>
-          </a:prstGeom>
-        </p:spPr>
-      </p:pic>
-    </p:spTree>
-    <p:extLst>
-      <p:ext uri="{BB962C8B-B14F-4D97-AF65-F5344CB8AC3E}">
-        <p14:creationId xmlns:p14="http://schemas.microsoft.com/office/powerpoint/2010/main" val="614777387"/>
       </p:ext>
     </p:extLst>
   </p:cSld>
@@ -5432,7 +5336,7 @@
           <p:nvPr/>
         </p:nvPicPr>
         <p:blipFill>
-          <a:blip xmlns:r="http://schemas.openxmlformats.org/officeDocument/2006/relationships" xmlns:a="http://schemas.openxmlformats.org/drawingml/2006/main" r:embed="R815bc04db61343b4"/>
+          <a:blip xmlns:r="http://schemas.openxmlformats.org/officeDocument/2006/relationships" xmlns:a="http://schemas.openxmlformats.org/drawingml/2006/main" r:embed="Rdcf38bad2e744351"/>
           <a:stretch xmlns:a="http://schemas.openxmlformats.org/drawingml/2006/main"/>
         </p:blipFill>
         <p:spPr>
@@ -6354,7 +6258,7 @@
                 <a:ea typeface="Menlo"/>
                 <a:cs typeface="Menlo"/>
               </a:rPr>
-              <a:t>3 complete carts. 1 natural sentence.</a:t>
+              <a:t>5 complete choices. 1 natural sentence.</a:t>
             </a:r>
           </a:p>
         </p:txBody>
@@ -7645,7 +7549,7 @@
                 <a:ea typeface="Menlo"/>
                 <a:cs typeface="Menlo"/>
               </a:rPr>
-              <a:t>CATALOGUE</a:t>
+              <a:t>ALTERNATIVES</a:t>
             </a:r>
           </a:p>
         </p:txBody>
@@ -7704,7 +7608,7 @@
                 <a:ea typeface="Avenir Next"/>
                 <a:cs typeface="Avenir Next"/>
               </a:rPr>
-              <a:t>Import validated inventory</a:t>
+              <a:t>Publish compatible swaps</a:t>
             </a:r>
           </a:p>
         </p:txBody>
@@ -7822,7 +7726,7 @@
                 <a:ea typeface="Avenir Next"/>
                 <a:cs typeface="Avenir Next"/>
               </a:rPr>
-              <a:t>Update availability in seconds</a:t>
+              <a:t>Invalidate stale buyer carts</a:t>
             </a:r>
           </a:p>
         </p:txBody>
@@ -8111,7 +8015,7 @@
           <p:nvPr/>
         </p:nvPicPr>
         <p:blipFill>
-          <a:blip xmlns:r="http://schemas.openxmlformats.org/officeDocument/2006/relationships" xmlns:a="http://schemas.openxmlformats.org/drawingml/2006/main" r:embed="Rf6c24c0f2c7d4d70"/>
+          <a:blip xmlns:r="http://schemas.openxmlformats.org/officeDocument/2006/relationships" xmlns:a="http://schemas.openxmlformats.org/drawingml/2006/main" r:embed="Re5c79d57683c468c"/>
           <a:stretch xmlns:a="http://schemas.openxmlformats.org/drawingml/2006/main"/>
         </p:blipFill>
         <p:spPr>
@@ -8761,8 +8665,11 @@
           <p:nvPr/>
         </p:nvPicPr>
         <p:blipFill>
-          <a:blip xmlns:r="http://schemas.openxmlformats.org/officeDocument/2006/relationships" xmlns:a="http://schemas.openxmlformats.org/drawingml/2006/main" r:embed="R442128613b45476b"/>
-          <a:stretch xmlns:a="http://schemas.openxmlformats.org/drawingml/2006/main"/>
+          <a:blip xmlns:r="http://schemas.openxmlformats.org/officeDocument/2006/relationships" xmlns:a="http://schemas.openxmlformats.org/drawingml/2006/main" r:embed="Rce2a89a156cd4888"/>
+          <a:srcRect xmlns:a="http://schemas.openxmlformats.org/drawingml/2006/main" l="0" t="0" r="0" b="0"/>
+          <a:stretch xmlns:a="http://schemas.openxmlformats.org/drawingml/2006/main">
+            <a:fillRect l="0" t="0" r="0" b="0"/>
+          </a:stretch>
         </p:blipFill>
         <p:spPr>
           <a:xfrm xmlns:a="http://schemas.openxmlformats.org/drawingml/2006/main" flipH="0" flipV="0">
@@ -8828,7 +8735,7 @@
                 <a:ea typeface="Menlo"/>
                 <a:cs typeface="Menlo"/>
               </a:rPr>
-              <a:t>IDENTITY PLANNED · VISA AUTHORIZATION SIMULATED</a:t>
+              <a:t>IDENTITY PLANNED · VISA SIMULATED · RECEIPT VERIFIED</a:t>
             </a:r>
           </a:p>
         </p:txBody>
@@ -9310,8 +9217,8 @@
                 <a:ea typeface="Avenir Next"/>
                 <a:cs typeface="Avenir Next"/>
               </a:rPr>
-              <a:t>Complete one-merchant carts.
-Compatibility · budget · pickup.</a:t>
+              <a:t>Five ranked complete carts.
+Compare · preferences · safe swaps.</a:t>
             </a:r>
           </a:p>
         </p:txBody>
@@ -9526,7 +9433,7 @@
                 <a:cs typeface="Avenir Next"/>
               </a:rPr>
               <a:t>Expiring exact terms.
-Direct confirmation · idempotency.</a:t>
+Direct confirmation · signed receipt.</a:t>
             </a:r>
           </a:p>
         </p:txBody>
@@ -9740,8 +9647,8 @@
                 <a:ea typeface="Avenir Next"/>
                 <a:cs typeface="Avenir Next"/>
               </a:rPr>
-              <a:t>Inventory · scenarios · orders.
-Audit trail.</a:t>
+              <a:t>Alternatives · inventory · scenarios.
+Orders · audit trail.</a:t>
             </a:r>
           </a:p>
         </p:txBody>

--- a/docs/Woven-Hackathon-Pitch.pptx
+++ b/docs/Woven-Hackathon-Pitch.pptx
@@ -2,23 +2,23 @@
 <file path=ppt/presentation.xml><?xml version="1.0" encoding="utf-8"?>
 <p:presentation xmlns:p="http://schemas.openxmlformats.org/presentationml/2006/main">
   <p:sldMasterIdLst>
-    <p:sldMasterId xmlns:r="http://schemas.openxmlformats.org/officeDocument/2006/relationships" id="2147483648" r:id="Rbd7b917bceef459a"/>
+    <p:sldMasterId xmlns:r="http://schemas.openxmlformats.org/officeDocument/2006/relationships" id="2147483648" r:id="R2fc6e8e20c084646"/>
   </p:sldMasterIdLst>
   <p:notesMasterIdLst>
-    <p:notesMasterId xmlns:r="http://schemas.openxmlformats.org/officeDocument/2006/relationships" r:id="Reb6cee3a506b43cf"/>
+    <p:notesMasterId xmlns:r="http://schemas.openxmlformats.org/officeDocument/2006/relationships" r:id="R91b2626ac2ad4dc0"/>
   </p:notesMasterIdLst>
   <p:sldIdLst>
-    <p:sldId xmlns:r="http://schemas.openxmlformats.org/officeDocument/2006/relationships" id="256" r:id="R5326ca9495684228"/>
-    <p:sldId xmlns:r="http://schemas.openxmlformats.org/officeDocument/2006/relationships" id="257" r:id="R7129933df5f84180"/>
-    <p:sldId xmlns:r="http://schemas.openxmlformats.org/officeDocument/2006/relationships" id="258" r:id="Ree048974157b4473"/>
-    <p:sldId xmlns:r="http://schemas.openxmlformats.org/officeDocument/2006/relationships" id="259" r:id="Rfbc0c85f698f4fa6"/>
-    <p:sldId xmlns:r="http://schemas.openxmlformats.org/officeDocument/2006/relationships" id="260" r:id="R4aba994753af4d4e"/>
-    <p:sldId xmlns:r="http://schemas.openxmlformats.org/officeDocument/2006/relationships" id="261" r:id="R1293d76b0bb24c15"/>
-    <p:sldId xmlns:r="http://schemas.openxmlformats.org/officeDocument/2006/relationships" id="262" r:id="R7b5ce42f81a54f6f"/>
-    <p:sldId xmlns:r="http://schemas.openxmlformats.org/officeDocument/2006/relationships" id="263" r:id="R42e87175a6a34fd9"/>
-    <p:sldId xmlns:r="http://schemas.openxmlformats.org/officeDocument/2006/relationships" id="264" r:id="R37dfb12e7e61470d"/>
-    <p:sldId xmlns:r="http://schemas.openxmlformats.org/officeDocument/2006/relationships" id="265" r:id="R43bbd7ed52b947d6"/>
-    <p:sldId xmlns:r="http://schemas.openxmlformats.org/officeDocument/2006/relationships" id="266" r:id="R6026b644a94e4a72"/>
+    <p:sldId xmlns:r="http://schemas.openxmlformats.org/officeDocument/2006/relationships" id="256" r:id="Rb4039db9e0344b88"/>
+    <p:sldId xmlns:r="http://schemas.openxmlformats.org/officeDocument/2006/relationships" id="257" r:id="R95ec7d74113a47dd"/>
+    <p:sldId xmlns:r="http://schemas.openxmlformats.org/officeDocument/2006/relationships" id="258" r:id="R727ef281f7534dd1"/>
+    <p:sldId xmlns:r="http://schemas.openxmlformats.org/officeDocument/2006/relationships" id="259" r:id="Rc2184f7aa1004714"/>
+    <p:sldId xmlns:r="http://schemas.openxmlformats.org/officeDocument/2006/relationships" id="260" r:id="Rf88b69f22c664df3"/>
+    <p:sldId xmlns:r="http://schemas.openxmlformats.org/officeDocument/2006/relationships" id="261" r:id="Rc86b445fd6774c61"/>
+    <p:sldId xmlns:r="http://schemas.openxmlformats.org/officeDocument/2006/relationships" id="262" r:id="R58dfaf1ab8e04ed8"/>
+    <p:sldId xmlns:r="http://schemas.openxmlformats.org/officeDocument/2006/relationships" id="263" r:id="Rd6ca70c8c5dd45fa"/>
+    <p:sldId xmlns:r="http://schemas.openxmlformats.org/officeDocument/2006/relationships" id="264" r:id="Ra37853021f864bc4"/>
+    <p:sldId xmlns:r="http://schemas.openxmlformats.org/officeDocument/2006/relationships" id="265" r:id="R015fd678ca324916"/>
+    <p:sldId xmlns:r="http://schemas.openxmlformats.org/officeDocument/2006/relationships" id="266" r:id="R4006603162ad4636"/>
   </p:sldIdLst>
   <p:sldSz cx="15240000" cy="8572500"/>
   <p:notesSz cx="6858000" cy="9144000"/>
@@ -1007,7 +1007,7 @@
           </a:p>
           <a:p xmlns:a="http://schemas.openxmlformats.org/drawingml/2006/main">
             <a:r>
-              <a:t>“Woven understands the complete request, eliminates incompatible combinations, and creates ready-to-buy carts. Every cart comes from one merchant and one location, with an explanation of why every component works.”</a:t>
+              <a:t>“Woven understands the complete request, eliminates incompatible combinations, and creates five ready-to-buy choices in one comparison workspace. Every cart comes from one merchant and one location, with an explanation of why every component works.”</a:t>
             </a:r>
           </a:p>
           <a:p xmlns:a="http://schemas.openxmlformats.org/drawingml/2006/main">
@@ -1022,7 +1022,7 @@
           </a:p>
           <a:p xmlns:a="http://schemas.openxmlformats.org/drawingml/2006/main">
             <a:r>
-              <a:t>One merchant and pickup point. Four compatible components. S$133 total. Pickup today.</a:t>
+              <a:t>Compare priorities and pickup areas. One merchant and pickup point. Four compatible components. S$133 total. Pickup today.</a:t>
             </a:r>
           </a:p>
           <a:p xmlns:a="http://schemas.openxmlformats.org/drawingml/2006/main">
@@ -1172,17 +1172,17 @@
           </a:p>
           <a:p xmlns:a="http://schemas.openxmlformats.org/drawingml/2006/main">
             <a:r>
-              <a:t>1. Show the three ranked, one-merchant carts.</a:t>
-            </a:r>
-          </a:p>
-          <a:p xmlns:a="http://schemas.openxmlformats.org/drawingml/2006/main">
-            <a:r>
-              <a:t>2. Select ByteRoute.</a:t>
-            </a:r>
-          </a:p>
-          <a:p xmlns:a="http://schemas.openxmlformats.org/drawingml/2006/main">
-            <a:r>
-              <a:t>3. Point to charger wattage and voltage, both required cables, the Japan adapter, one pickup location, seeded demo stock, and the S$133 total.</a:t>
+              <a:t>1. Open the five-choice Choice Center.</a:t>
+            </a:r>
+          </a:p>
+          <a:p xmlns:a="http://schemas.openxmlformats.org/drawingml/2006/main">
+            <a:r>
+              <a:t>2. Compare carts, rerank by pickup or value, and return to Best match.</a:t>
+            </a:r>
+          </a:p>
+          <a:p xmlns:a="http://schemas.openxmlformats.org/drawingml/2006/main">
+            <a:r>
+              <a:t>3. Select ByteRoute, point to “Why this works,” make the approved cable swap, and show the pickup planner.</a:t>
             </a:r>
           </a:p>
           <a:p xmlns:a="http://schemas.openxmlformats.org/drawingml/2006/main">
@@ -1197,7 +1197,7 @@
           </a:p>
           <a:p xmlns:a="http://schemas.openxmlformats.org/drawingml/2006/main">
             <a:r>
-              <a:t>“Woven returned three complete options—not loose product links. This S$133 cart includes the charger, both required cables, and the Japan adapter. Everything is compatible, under budget, available in our demo inventory, and ready at one pickup location.”</a:t>
+              <a:t>“Woven returned five complete choices—not loose product links. I can compare exact carts, change priorities, and make only merchant-approved compatible swaps without rebuilding the request.”</a:t>
             </a:r>
           </a:p>
           <a:p xmlns:a="http://schemas.openxmlformats.org/drawingml/2006/main">
@@ -1212,7 +1212,7 @@
           </a:p>
           <a:p xmlns:a="http://schemas.openxmlformats.org/drawingml/2006/main">
             <a:r>
-              <a:t>Do not explain the ranking algorithm unless asked. If the MCP host fails, move immediately to /demo; it uses the same backend.</a:t>
+              <a:t>If the MCP host fails, move immediately to /demo; it uses the same backend.</a:t>
             </a:r>
           </a:p>
           <a:p xmlns:a="http://schemas.openxmlformats.org/drawingml/2006/main">
@@ -1347,7 +1347,7 @@
           </a:p>
           <a:p xmlns:a="http://schemas.openxmlformats.org/drawingml/2006/main">
             <a:r>
-              <a:t>4. Confirm and show the simulated Visa authorization result and pickup receipt.</a:t>
+              <a:t>4. Confirm and show the simulated Visa result and exact signed receipt.</a:t>
             </a:r>
           </a:p>
           <a:p xmlns:a="http://schemas.openxmlformats.org/drawingml/2006/main">
@@ -1362,7 +1362,7 @@
           </a:p>
           <a:p xmlns:a="http://schemas.openxmlformats.org/drawingml/2006/main">
             <a:r>
-              <a:t>“Woven rechecks the price and stock, then creates an exact ten-minute checkout preview. The AI recommended this cart, but it cannot approve it. The user sees the merchant, every item, the pickup location, and the S$133 total before one direct confirmation.”</a:t>
+              <a:t>“Woven rechecks price and stock, then creates an exact ten-minute checkout preview. The AI recommended this cart, but it cannot approve it. Only one direct click can confirm the displayed terms.”</a:t>
             </a:r>
           </a:p>
           <a:p xmlns:a="http://schemas.openxmlformats.org/drawingml/2006/main">
@@ -1372,7 +1372,7 @@
           </a:p>
           <a:p xmlns:a="http://schemas.openxmlformats.org/drawingml/2006/main">
             <a:r>
-              <a:t>“Only after that click does Woven produce a simulated Visa authorization and pickup receipt. No card details enter Woven, and no live charge occurs.”</a:t>
+              <a:t>“Only after that click does Woven return a simulated Visa result and a server-verifiable receipt. No card details enter Woven, and no live charge occurs.”</a:t>
             </a:r>
           </a:p>
           <a:p xmlns:a="http://schemas.openxmlformats.org/drawingml/2006/main">
@@ -1387,7 +1387,7 @@
           </a:p>
           <a:p xmlns:a="http://schemas.openxmlformats.org/drawingml/2006/main">
             <a:r>
-              <a:t>Identity verification is planned and not in the live build. Do not show a static identity mock as verification. After server enforcement exists, insert the connector-style demo identity check before exact-term review and keep it separate from final confirmation.</a:t>
+              <a:t>Identity verification is planned and not in the live build. Do not show a static identity mock as verification.</a:t>
             </a:r>
           </a:p>
           <a:p xmlns:a="http://schemas.openxmlformats.org/drawingml/2006/main">
@@ -1422,7 +1422,7 @@
           </a:p>
           <a:p xmlns:a="http://schemas.openxmlformats.org/drawingml/2006/main">
             <a:r>
-              <a:t>- docs/architecture.md — Confirmation boundary and mandate binding</a:t>
+              <a:t>- docs/architecture.md — Confirmation boundary, mandate binding, and receipt signing</a:t>
             </a:r>
           </a:p>
           <a:p xmlns:a="http://schemas.openxmlformats.org/drawingml/2006/main">
@@ -1507,7 +1507,7 @@
           </a:p>
           <a:p xmlns:a="http://schemas.openxmlformats.org/drawingml/2006/main">
             <a:r>
-              <a:t>Prove that merchants control inventory, scenarios, orders, and auditability.</a:t>
+              <a:t>Prove that merchants control what the AI may offer and can test recovery live.</a:t>
             </a:r>
           </a:p>
           <a:p xmlns:a="http://schemas.openxmlformats.org/drawingml/2006/main">
@@ -1522,7 +1522,7 @@
           </a:p>
           <a:p xmlns:a="http://schemas.openxmlformats.org/drawingml/2006/main">
             <a:r>
-              <a:t>Open the Merchant Desk. Show inventory and price controls, confirmed orders, the audit trail, and the stockout, price-change, decline, and reversal scenarios.</a:t>
+              <a:t>Open the Merchant Desk. Show approved alternatives, inventory and price controls, confirmed orders, the audit trail, and the stockout, price-change, decline, and reversal scenarios.</a:t>
             </a:r>
           </a:p>
           <a:p xmlns:a="http://schemas.openxmlformats.org/drawingml/2006/main">
@@ -1537,7 +1537,7 @@
           </a:p>
           <a:p xmlns:a="http://schemas.openxmlformats.org/drawingml/2006/main">
             <a:r>
-              <a:t>“On the merchant side, Woven already supports inventory import, price and stock controls, orders, and an audit trail. Merchants can simulate a price change, stockout, authorization decline, or reversal without changing code.”</a:t>
+              <a:t>“Merchants publish compatible alternatives, control price and stock, and see exact confirmed orders. Withdrawing a swap invalidates dependent unconfirmed carts, so Woven rebuilds fresh choices instead of silently substituting.”</a:t>
             </a:r>
           </a:p>
           <a:p xmlns:a="http://schemas.openxmlformats.org/drawingml/2006/main">
@@ -1552,7 +1552,7 @@
           </a:p>
           <a:p xmlns:a="http://schemas.openxmlformats.org/drawingml/2006/main">
             <a:r>
-              <a:t>Call the current values seeded demo data. Do not call the CSV workflow a production merchant integration or imply a live payment rail.</a:t>
+              <a:t>Call the current values seeded demo data. Do not imply a production merchant integration or live payment rail.</a:t>
             </a:r>
           </a:p>
           <a:p xmlns:a="http://schemas.openxmlformats.org/drawingml/2006/main">
@@ -1592,7 +1592,7 @@
           </a:p>
           <a:p xmlns:a="http://schemas.openxmlformats.org/drawingml/2006/main">
             <a:r>
-              <a:t>- docs/architecture.md — Merchant state and failure paths</a:t>
+              <a:t>- docs/architecture.md — Merchant state and recovery paths</a:t>
             </a:r>
           </a:p>
         </p:txBody>
@@ -1687,7 +1687,7 @@
           </a:p>
           <a:p xmlns:a="http://schemas.openxmlformats.org/drawingml/2006/main">
             <a:r>
-              <a:t>“Why ChatGPT? Because that is where the user’s request already exists. Why a plugin? Because Woven can turn that conversation into merchant actions and a reviewable checkout without asking the user to start again.”</a:t>
+              <a:t>“Why ChatGPT? Because that is where the user’s request already exists. Woven turns that conversation into comparable merchant actions, an exact checkout, and a signed receipt without asking the user to start again.”</a:t>
             </a:r>
           </a:p>
           <a:p xmlns:a="http://schemas.openxmlformats.org/drawingml/2006/main">
@@ -1837,7 +1837,7 @@
           </a:p>
           <a:p xmlns:a="http://schemas.openxmlformats.org/drawingml/2006/main">
             <a:r>
-              <a:t>The working prototype includes the MCP App and browser fallback, complete one-merchant carts, compatibility and budget proof, exact expiring checkout terms, direct confirmation, idempotency, merchant operations, failure scenarios, and an audit trail.</a:t>
+              <a:t>The working prototype includes the MCP App and browser fallback, five ranked complete carts, comparison and preference controls, compatible merchant-approved swaps, pickup planning, stale-cart recovery, exact expiring checkout terms, direct confirmation, idempotency, signed receipts, merchant controls, failure scenarios, and an audit trail.</a:t>
             </a:r>
           </a:p>
           <a:p xmlns:a="http://schemas.openxmlformats.org/drawingml/2006/main">
@@ -2060,7 +2060,7 @@
   </p:cSld>
   <p:clrMap bg1="lt1" tx1="dk1" bg2="lt2" tx2="dk2" accent1="accent1" accent2="accent2" accent3="accent3" accent4="accent4" accent5="accent5" accent6="accent6" hlink="hlink" folHlink="folHlink"/>
   <p:sldLayoutIdLst>
-    <p:sldLayoutId xmlns:r="http://schemas.openxmlformats.org/officeDocument/2006/relationships" id="2147483649" r:id="R02831dc36adb413d"/>
+    <p:sldLayoutId xmlns:r="http://schemas.openxmlformats.org/officeDocument/2006/relationships" id="2147483649" r:id="R41e51d75fcdc47d2"/>
   </p:sldLayoutIdLst>
   <p:txStyles>
     <p:titleStyle>
@@ -3177,14 +3177,14 @@
       </p:sp>
       <p:pic>
         <p:nvPicPr>
-          <p:cNvPr id="21" name=""/>
+          <p:cNvPr id="20" name=""/>
           <p:cNvPicPr>
             <a:picLocks xmlns:a="http://schemas.openxmlformats.org/drawingml/2006/main" noChangeAspect="1"/>
           </p:cNvPicPr>
           <p:nvPr/>
         </p:nvPicPr>
         <p:blipFill>
-          <a:blip xmlns:r="http://schemas.openxmlformats.org/officeDocument/2006/relationships" xmlns:a="http://schemas.openxmlformats.org/drawingml/2006/main" r:embed="R64deff9c5da942be"/>
+          <a:blip xmlns:r="http://schemas.openxmlformats.org/officeDocument/2006/relationships" xmlns:a="http://schemas.openxmlformats.org/drawingml/2006/main" r:embed="R14f3d1fe560b423d"/>
           <a:srcRect xmlns:a="http://schemas.openxmlformats.org/drawingml/2006/main" l="12000" t="0" r="2000" b="0"/>
           <a:stretch xmlns:a="http://schemas.openxmlformats.org/drawingml/2006/main">
             <a:fillRect l="0" t="0" r="0" b="0"/>
@@ -3231,7 +3231,7 @@
           <p:nvPr/>
         </p:nvPicPr>
         <p:blipFill>
-          <a:blip xmlns:r="http://schemas.openxmlformats.org/officeDocument/2006/relationships" xmlns:a="http://schemas.openxmlformats.org/drawingml/2006/main" r:embed="R9bffdb01cf344feb"/>
+          <a:blip xmlns:r="http://schemas.openxmlformats.org/officeDocument/2006/relationships" xmlns:a="http://schemas.openxmlformats.org/drawingml/2006/main" r:embed="Ra4bfcb8d8a184bbe"/>
           <a:srcRect xmlns:a="http://schemas.openxmlformats.org/drawingml/2006/main" l="0" t="0" r="0" b="0"/>
           <a:stretch xmlns:a="http://schemas.openxmlformats.org/drawingml/2006/main">
             <a:fillRect l="0" t="0" r="0" b="0"/>
@@ -3689,7 +3689,7 @@
           <p:nvPr/>
         </p:nvPicPr>
         <p:blipFill>
-          <a:blip xmlns:r="http://schemas.openxmlformats.org/officeDocument/2006/relationships" xmlns:a="http://schemas.openxmlformats.org/drawingml/2006/main" r:embed="R3785bd862f514d5a"/>
+          <a:blip xmlns:r="http://schemas.openxmlformats.org/officeDocument/2006/relationships" xmlns:a="http://schemas.openxmlformats.org/drawingml/2006/main" r:embed="R4b901183a5ee44a0"/>
           <a:stretch xmlns:a="http://schemas.openxmlformats.org/drawingml/2006/main"/>
         </p:blipFill>
         <p:spPr>
@@ -5336,7 +5336,7 @@
           <p:nvPr/>
         </p:nvPicPr>
         <p:blipFill>
-          <a:blip xmlns:r="http://schemas.openxmlformats.org/officeDocument/2006/relationships" xmlns:a="http://schemas.openxmlformats.org/drawingml/2006/main" r:embed="R815bc04db61343b4"/>
+          <a:blip xmlns:r="http://schemas.openxmlformats.org/officeDocument/2006/relationships" xmlns:a="http://schemas.openxmlformats.org/drawingml/2006/main" r:embed="Rdcf38bad2e744351"/>
           <a:stretch xmlns:a="http://schemas.openxmlformats.org/drawingml/2006/main"/>
         </p:blipFill>
         <p:spPr>
@@ -6258,7 +6258,7 @@
                 <a:ea typeface="Menlo"/>
                 <a:cs typeface="Menlo"/>
               </a:rPr>
-              <a:t>3 complete carts. 1 natural sentence.</a:t>
+              <a:t>5 complete choices. 1 natural sentence.</a:t>
             </a:r>
           </a:p>
         </p:txBody>
@@ -7549,7 +7549,7 @@
                 <a:ea typeface="Menlo"/>
                 <a:cs typeface="Menlo"/>
               </a:rPr>
-              <a:t>CATALOGUE</a:t>
+              <a:t>ALTERNATIVES</a:t>
             </a:r>
           </a:p>
         </p:txBody>
@@ -7608,7 +7608,7 @@
                 <a:ea typeface="Avenir Next"/>
                 <a:cs typeface="Avenir Next"/>
               </a:rPr>
-              <a:t>Import validated inventory</a:t>
+              <a:t>Publish compatible swaps</a:t>
             </a:r>
           </a:p>
         </p:txBody>
@@ -7726,7 +7726,7 @@
                 <a:ea typeface="Avenir Next"/>
                 <a:cs typeface="Avenir Next"/>
               </a:rPr>
-              <a:t>Update availability in seconds</a:t>
+              <a:t>Invalidate stale buyer carts</a:t>
             </a:r>
           </a:p>
         </p:txBody>
@@ -8015,7 +8015,7 @@
           <p:nvPr/>
         </p:nvPicPr>
         <p:blipFill>
-          <a:blip xmlns:r="http://schemas.openxmlformats.org/officeDocument/2006/relationships" xmlns:a="http://schemas.openxmlformats.org/drawingml/2006/main" r:embed="Rf6c24c0f2c7d4d70"/>
+          <a:blip xmlns:r="http://schemas.openxmlformats.org/officeDocument/2006/relationships" xmlns:a="http://schemas.openxmlformats.org/drawingml/2006/main" r:embed="Re5c79d57683c468c"/>
           <a:stretch xmlns:a="http://schemas.openxmlformats.org/drawingml/2006/main"/>
         </p:blipFill>
         <p:spPr>
@@ -8665,8 +8665,11 @@
           <p:nvPr/>
         </p:nvPicPr>
         <p:blipFill>
-          <a:blip xmlns:r="http://schemas.openxmlformats.org/officeDocument/2006/relationships" xmlns:a="http://schemas.openxmlformats.org/drawingml/2006/main" r:embed="R442128613b45476b"/>
-          <a:stretch xmlns:a="http://schemas.openxmlformats.org/drawingml/2006/main"/>
+          <a:blip xmlns:r="http://schemas.openxmlformats.org/officeDocument/2006/relationships" xmlns:a="http://schemas.openxmlformats.org/drawingml/2006/main" r:embed="Rce2a89a156cd4888"/>
+          <a:srcRect xmlns:a="http://schemas.openxmlformats.org/drawingml/2006/main" l="0" t="0" r="0" b="0"/>
+          <a:stretch xmlns:a="http://schemas.openxmlformats.org/drawingml/2006/main">
+            <a:fillRect l="0" t="0" r="0" b="0"/>
+          </a:stretch>
         </p:blipFill>
         <p:spPr>
           <a:xfrm xmlns:a="http://schemas.openxmlformats.org/drawingml/2006/main" flipH="0" flipV="0">
@@ -8732,7 +8735,7 @@
                 <a:ea typeface="Menlo"/>
                 <a:cs typeface="Menlo"/>
               </a:rPr>
-              <a:t>IDENTITY PLANNED · VISA AUTHORIZATION SIMULATED</a:t>
+              <a:t>IDENTITY PLANNED · VISA SIMULATED · RECEIPT VERIFIED</a:t>
             </a:r>
           </a:p>
         </p:txBody>
@@ -9214,8 +9217,8 @@
                 <a:ea typeface="Avenir Next"/>
                 <a:cs typeface="Avenir Next"/>
               </a:rPr>
-              <a:t>Complete one-merchant carts.
-Compatibility · budget · pickup.</a:t>
+              <a:t>Five ranked complete carts.
+Compare · preferences · safe swaps.</a:t>
             </a:r>
           </a:p>
         </p:txBody>
@@ -9430,7 +9433,7 @@
                 <a:cs typeface="Avenir Next"/>
               </a:rPr>
               <a:t>Expiring exact terms.
-Direct confirmation · idempotency.</a:t>
+Direct confirmation · signed receipt.</a:t>
             </a:r>
           </a:p>
         </p:txBody>
@@ -9644,8 +9647,8 @@
                 <a:ea typeface="Avenir Next"/>
                 <a:cs typeface="Avenir Next"/>
               </a:rPr>
-              <a:t>Inventory · scenarios · orders.
-Audit trail.</a:t>
+              <a:t>Alternatives · inventory · scenarios.
+Orders · audit trail.</a:t>
             </a:r>
           </a:p>
         </p:txBody>
